--- a/docs/business/vamo_dependency_and_scaling_map.pptx
+++ b/docs/business/vamo_dependency_and_scaling_map.pptx
@@ -2,24 +2,27 @@
 <file path=ppt/presentation.xml><?xml version="1.0" encoding="utf-8"?>
 <p:presentation xmlns:p="http://schemas.openxmlformats.org/presentationml/2006/main">
   <p:sldMasterIdLst>
-    <p:sldMasterId xmlns:r="http://schemas.openxmlformats.org/officeDocument/2006/relationships" id="2147483648" r:id="Re5705aaf6ceb4823"/>
+    <p:sldMasterId xmlns:r="http://schemas.openxmlformats.org/officeDocument/2006/relationships" id="2147483648" r:id="R5c51a672034f4cc4"/>
   </p:sldMasterIdLst>
   <p:notesMasterIdLst>
-    <p:notesMasterId xmlns:r="http://schemas.openxmlformats.org/officeDocument/2006/relationships" r:id="Rf28791f873b24471"/>
+    <p:notesMasterId xmlns:r="http://schemas.openxmlformats.org/officeDocument/2006/relationships" r:id="R00e111b3c0b94f48"/>
   </p:notesMasterIdLst>
   <p:sldIdLst>
-    <p:sldId xmlns:r="http://schemas.openxmlformats.org/officeDocument/2006/relationships" id="256" r:id="R21c90e02cce6415b"/>
-    <p:sldId xmlns:r="http://schemas.openxmlformats.org/officeDocument/2006/relationships" id="257" r:id="R48a4f176ebb4471b"/>
-    <p:sldId xmlns:r="http://schemas.openxmlformats.org/officeDocument/2006/relationships" id="258" r:id="R38146963ba48462e"/>
-    <p:sldId xmlns:r="http://schemas.openxmlformats.org/officeDocument/2006/relationships" id="259" r:id="Re724d1f30a114f20"/>
-    <p:sldId xmlns:r="http://schemas.openxmlformats.org/officeDocument/2006/relationships" id="260" r:id="R79a484f3fe59460f"/>
-    <p:sldId xmlns:r="http://schemas.openxmlformats.org/officeDocument/2006/relationships" id="261" r:id="R56ca84c05d9b41a3"/>
-    <p:sldId xmlns:r="http://schemas.openxmlformats.org/officeDocument/2006/relationships" id="262" r:id="Rd67442678dc94bf8"/>
-    <p:sldId xmlns:r="http://schemas.openxmlformats.org/officeDocument/2006/relationships" id="263" r:id="R4287c5fc58af46ef"/>
-    <p:sldId xmlns:r="http://schemas.openxmlformats.org/officeDocument/2006/relationships" id="264" r:id="Ra326090dc11749b2"/>
-    <p:sldId xmlns:r="http://schemas.openxmlformats.org/officeDocument/2006/relationships" id="265" r:id="R58dc669a4e74402d"/>
-    <p:sldId xmlns:r="http://schemas.openxmlformats.org/officeDocument/2006/relationships" id="266" r:id="Rfb9d32b4bb304eed"/>
-    <p:sldId xmlns:r="http://schemas.openxmlformats.org/officeDocument/2006/relationships" id="267" r:id="R2005a47100fc4d5a"/>
+    <p:sldId xmlns:r="http://schemas.openxmlformats.org/officeDocument/2006/relationships" id="256" r:id="Rd0df8fd4873a443c"/>
+    <p:sldId xmlns:r="http://schemas.openxmlformats.org/officeDocument/2006/relationships" id="257" r:id="R2a41e91a4cdd4755"/>
+    <p:sldId xmlns:r="http://schemas.openxmlformats.org/officeDocument/2006/relationships" id="258" r:id="Re8be3b4f3740435f"/>
+    <p:sldId xmlns:r="http://schemas.openxmlformats.org/officeDocument/2006/relationships" id="259" r:id="Rd4c03b059f334f97"/>
+    <p:sldId xmlns:r="http://schemas.openxmlformats.org/officeDocument/2006/relationships" id="260" r:id="R67e18222bc394eef"/>
+    <p:sldId xmlns:r="http://schemas.openxmlformats.org/officeDocument/2006/relationships" id="261" r:id="R88adff4b21134dd4"/>
+    <p:sldId xmlns:r="http://schemas.openxmlformats.org/officeDocument/2006/relationships" id="262" r:id="R35cd849b969940eb"/>
+    <p:sldId xmlns:r="http://schemas.openxmlformats.org/officeDocument/2006/relationships" id="263" r:id="R9b404ea0aa96434d"/>
+    <p:sldId xmlns:r="http://schemas.openxmlformats.org/officeDocument/2006/relationships" id="264" r:id="R1721212fbec34f15"/>
+    <p:sldId xmlns:r="http://schemas.openxmlformats.org/officeDocument/2006/relationships" id="265" r:id="R248a775374784724"/>
+    <p:sldId xmlns:r="http://schemas.openxmlformats.org/officeDocument/2006/relationships" id="266" r:id="Rd057999ce4ed48d8"/>
+    <p:sldId xmlns:r="http://schemas.openxmlformats.org/officeDocument/2006/relationships" id="267" r:id="R1cc57566f5e7453c"/>
+    <p:sldId xmlns:r="http://schemas.openxmlformats.org/officeDocument/2006/relationships" id="268" r:id="R7b31c0ba0f0f43f0"/>
+    <p:sldId xmlns:r="http://schemas.openxmlformats.org/officeDocument/2006/relationships" id="269" r:id="R08313c9347d24425"/>
+    <p:sldId xmlns:r="http://schemas.openxmlformats.org/officeDocument/2006/relationships" id="270" r:id="R8d2852337e0d4a7c"/>
   </p:sldIdLst>
   <p:sldSz cx="12192000" cy="6858000"/>
   <p:notesSz cx="6858000" cy="9144000"/>
@@ -772,6 +775,204 @@
 </p:notes>
 </file>
 
+<file path=ppt/notesSlides/notesSlide13.xml><?xml version="1.0" encoding="utf-8"?>
+<p:notes xmlns:p="http://schemas.openxmlformats.org/presentationml/2006/main">
+  <p:cSld>
+    <p:spTree>
+      <p:nvGrpSpPr>
+        <p:cNvPr id="1" name=""/>
+        <p:cNvGrpSpPr/>
+        <p:nvPr/>
+      </p:nvGrpSpPr>
+      <p:grpSpPr>
+        <a:xfrm xmlns:a="http://schemas.openxmlformats.org/drawingml/2006/main"/>
+      </p:grpSpPr>
+      <p:sp>
+        <p:nvSpPr>
+          <p:cNvPr id="2" name="Slide Image Placeholder 1"/>
+          <p:cNvSpPr>
+            <a:spLocks xmlns:a="http://schemas.openxmlformats.org/drawingml/2006/main" noGrp="1"/>
+          </p:cNvSpPr>
+          <p:nvPr>
+            <p:ph type="sldImg" idx="0"/>
+          </p:nvPr>
+        </p:nvSpPr>
+        <p:spPr/>
+      </p:sp>
+      <p:sp>
+        <p:nvSpPr>
+          <p:cNvPr id="3" name="Notes Placeholder 2"/>
+          <p:cNvSpPr>
+            <a:spLocks xmlns:a="http://schemas.openxmlformats.org/drawingml/2006/main" noGrp="1"/>
+          </p:cNvSpPr>
+          <p:nvPr>
+            <p:ph type="body" idx="1"/>
+          </p:nvPr>
+        </p:nvSpPr>
+        <p:spPr/>
+        <p:txBody>
+          <a:bodyPr xmlns:a="http://schemas.openxmlformats.org/drawingml/2006/main"/>
+          <a:lstStyle xmlns:a="http://schemas.openxmlformats.org/drawingml/2006/main"/>
+          <a:p xmlns:a="http://schemas.openxmlformats.org/drawingml/2006/main"/>
+        </p:txBody>
+      </p:sp>
+      <p:sp>
+        <p:nvSpPr>
+          <p:cNvPr id="4" name="Slide Number Placeholder 3"/>
+          <p:cNvSpPr>
+            <a:spLocks xmlns:a="http://schemas.openxmlformats.org/drawingml/2006/main" noGrp="1"/>
+          </p:cNvSpPr>
+          <p:nvPr>
+            <p:ph type="sldNum" idx="5"/>
+          </p:nvPr>
+        </p:nvSpPr>
+        <p:spPr/>
+        <p:txBody>
+          <a:bodyPr xmlns:a="http://schemas.openxmlformats.org/drawingml/2006/main"/>
+          <a:lstStyle xmlns:a="http://schemas.openxmlformats.org/drawingml/2006/main"/>
+          <a:p xmlns:a="http://schemas.openxmlformats.org/drawingml/2006/main"/>
+        </p:txBody>
+      </p:sp>
+    </p:spTree>
+  </p:cSld>
+  <p:clrMapOvr>
+    <a:masterClrMapping xmlns:a="http://schemas.openxmlformats.org/drawingml/2006/main"/>
+  </p:clrMapOvr>
+</p:notes>
+</file>
+
+<file path=ppt/notesSlides/notesSlide14.xml><?xml version="1.0" encoding="utf-8"?>
+<p:notes xmlns:p="http://schemas.openxmlformats.org/presentationml/2006/main">
+  <p:cSld>
+    <p:spTree>
+      <p:nvGrpSpPr>
+        <p:cNvPr id="1" name=""/>
+        <p:cNvGrpSpPr/>
+        <p:nvPr/>
+      </p:nvGrpSpPr>
+      <p:grpSpPr>
+        <a:xfrm xmlns:a="http://schemas.openxmlformats.org/drawingml/2006/main"/>
+      </p:grpSpPr>
+      <p:sp>
+        <p:nvSpPr>
+          <p:cNvPr id="2" name="Slide Image Placeholder 1"/>
+          <p:cNvSpPr>
+            <a:spLocks xmlns:a="http://schemas.openxmlformats.org/drawingml/2006/main" noGrp="1"/>
+          </p:cNvSpPr>
+          <p:nvPr>
+            <p:ph type="sldImg" idx="0"/>
+          </p:nvPr>
+        </p:nvSpPr>
+        <p:spPr/>
+      </p:sp>
+      <p:sp>
+        <p:nvSpPr>
+          <p:cNvPr id="3" name="Notes Placeholder 2"/>
+          <p:cNvSpPr>
+            <a:spLocks xmlns:a="http://schemas.openxmlformats.org/drawingml/2006/main" noGrp="1"/>
+          </p:cNvSpPr>
+          <p:nvPr>
+            <p:ph type="body" idx="1"/>
+          </p:nvPr>
+        </p:nvSpPr>
+        <p:spPr/>
+        <p:txBody>
+          <a:bodyPr xmlns:a="http://schemas.openxmlformats.org/drawingml/2006/main"/>
+          <a:lstStyle xmlns:a="http://schemas.openxmlformats.org/drawingml/2006/main"/>
+          <a:p xmlns:a="http://schemas.openxmlformats.org/drawingml/2006/main"/>
+        </p:txBody>
+      </p:sp>
+      <p:sp>
+        <p:nvSpPr>
+          <p:cNvPr id="4" name="Slide Number Placeholder 3"/>
+          <p:cNvSpPr>
+            <a:spLocks xmlns:a="http://schemas.openxmlformats.org/drawingml/2006/main" noGrp="1"/>
+          </p:cNvSpPr>
+          <p:nvPr>
+            <p:ph type="sldNum" idx="5"/>
+          </p:nvPr>
+        </p:nvSpPr>
+        <p:spPr/>
+        <p:txBody>
+          <a:bodyPr xmlns:a="http://schemas.openxmlformats.org/drawingml/2006/main"/>
+          <a:lstStyle xmlns:a="http://schemas.openxmlformats.org/drawingml/2006/main"/>
+          <a:p xmlns:a="http://schemas.openxmlformats.org/drawingml/2006/main"/>
+        </p:txBody>
+      </p:sp>
+    </p:spTree>
+  </p:cSld>
+  <p:clrMapOvr>
+    <a:masterClrMapping xmlns:a="http://schemas.openxmlformats.org/drawingml/2006/main"/>
+  </p:clrMapOvr>
+</p:notes>
+</file>
+
+<file path=ppt/notesSlides/notesSlide15.xml><?xml version="1.0" encoding="utf-8"?>
+<p:notes xmlns:p="http://schemas.openxmlformats.org/presentationml/2006/main">
+  <p:cSld>
+    <p:spTree>
+      <p:nvGrpSpPr>
+        <p:cNvPr id="1" name=""/>
+        <p:cNvGrpSpPr/>
+        <p:nvPr/>
+      </p:nvGrpSpPr>
+      <p:grpSpPr>
+        <a:xfrm xmlns:a="http://schemas.openxmlformats.org/drawingml/2006/main"/>
+      </p:grpSpPr>
+      <p:sp>
+        <p:nvSpPr>
+          <p:cNvPr id="2" name="Slide Image Placeholder 1"/>
+          <p:cNvSpPr>
+            <a:spLocks xmlns:a="http://schemas.openxmlformats.org/drawingml/2006/main" noGrp="1"/>
+          </p:cNvSpPr>
+          <p:nvPr>
+            <p:ph type="sldImg" idx="0"/>
+          </p:nvPr>
+        </p:nvSpPr>
+        <p:spPr/>
+      </p:sp>
+      <p:sp>
+        <p:nvSpPr>
+          <p:cNvPr id="3" name="Notes Placeholder 2"/>
+          <p:cNvSpPr>
+            <a:spLocks xmlns:a="http://schemas.openxmlformats.org/drawingml/2006/main" noGrp="1"/>
+          </p:cNvSpPr>
+          <p:nvPr>
+            <p:ph type="body" idx="1"/>
+          </p:nvPr>
+        </p:nvSpPr>
+        <p:spPr/>
+        <p:txBody>
+          <a:bodyPr xmlns:a="http://schemas.openxmlformats.org/drawingml/2006/main"/>
+          <a:lstStyle xmlns:a="http://schemas.openxmlformats.org/drawingml/2006/main"/>
+          <a:p xmlns:a="http://schemas.openxmlformats.org/drawingml/2006/main"/>
+        </p:txBody>
+      </p:sp>
+      <p:sp>
+        <p:nvSpPr>
+          <p:cNvPr id="4" name="Slide Number Placeholder 3"/>
+          <p:cNvSpPr>
+            <a:spLocks xmlns:a="http://schemas.openxmlformats.org/drawingml/2006/main" noGrp="1"/>
+          </p:cNvSpPr>
+          <p:nvPr>
+            <p:ph type="sldNum" idx="5"/>
+          </p:nvPr>
+        </p:nvSpPr>
+        <p:spPr/>
+        <p:txBody>
+          <a:bodyPr xmlns:a="http://schemas.openxmlformats.org/drawingml/2006/main"/>
+          <a:lstStyle xmlns:a="http://schemas.openxmlformats.org/drawingml/2006/main"/>
+          <a:p xmlns:a="http://schemas.openxmlformats.org/drawingml/2006/main"/>
+        </p:txBody>
+      </p:sp>
+    </p:spTree>
+  </p:cSld>
+  <p:clrMapOvr>
+    <a:masterClrMapping xmlns:a="http://schemas.openxmlformats.org/drawingml/2006/main"/>
+  </p:clrMapOvr>
+</p:notes>
+</file>
+
 <file path=ppt/notesSlides/notesSlide2.xml><?xml version="1.0" encoding="utf-8"?>
 <p:notes xmlns:p="http://schemas.openxmlformats.org/presentationml/2006/main">
   <p:cSld>
@@ -1338,7 +1539,7 @@
   </p:cSld>
   <p:clrMap bg1="lt1" tx1="dk1" bg2="lt2" tx2="dk2" accent1="accent1" accent2="accent2" accent3="accent3" accent4="accent4" accent5="accent5" accent6="accent6" hlink="hlink" folHlink="folHlink"/>
   <p:sldLayoutIdLst>
-    <p:sldLayoutId xmlns:r="http://schemas.openxmlformats.org/officeDocument/2006/relationships" id="2147483649" r:id="Rb58716b861634fdf"/>
+    <p:sldLayoutId xmlns:r="http://schemas.openxmlformats.org/officeDocument/2006/relationships" id="2147483649" r:id="Re5c9032e074b43b3"/>
   </p:sldLayoutIdLst>
   <p:txStyles>
     <p:titleStyle>
@@ -1889,7 +2090,7 @@
           <p:cNvPr id="1" name="">
             <a:extLst xmlns:a="http://schemas.openxmlformats.org/drawingml/2006/main">
               <a:ext uri="{FF2B5EF4-FFF2-40B4-BE49-F238E27FC236}">
-                <a16:creationId xmlns:a16="http://schemas.microsoft.com/office/drawing/2014/main" id="{5FFA5B36-A466-40EE-A653-53DC2E0CE9D7}"/>
+                <a16:creationId xmlns:a16="http://schemas.microsoft.com/office/drawing/2014/main" id="{6955FAC2-25B9-4596-AB3D-D318D472F1C8}"/>
               </a:ext>
             </a:extLst>
           </p:cNvPr>
@@ -1922,7 +2123,7 @@
           <p:cNvPr id="2" name="">
             <a:extLst xmlns:a="http://schemas.openxmlformats.org/drawingml/2006/main">
               <a:ext uri="{FF2B5EF4-FFF2-40B4-BE49-F238E27FC236}">
-                <a16:creationId xmlns:a16="http://schemas.microsoft.com/office/drawing/2014/main" id="{6BED8EDE-DE99-40C0-9771-2C29CC23BA2A}"/>
+                <a16:creationId xmlns:a16="http://schemas.microsoft.com/office/drawing/2014/main" id="{E2406F4A-1EDF-4C20-BAF9-AA6290C5E928}"/>
               </a:ext>
             </a:extLst>
           </p:cNvPr>
@@ -1978,7 +2179,7 @@
           <p:cNvPr id="3" name="">
             <a:extLst xmlns:a="http://schemas.openxmlformats.org/drawingml/2006/main">
               <a:ext uri="{FF2B5EF4-FFF2-40B4-BE49-F238E27FC236}">
-                <a16:creationId xmlns:a16="http://schemas.microsoft.com/office/drawing/2014/main" id="{4E9F8E2F-CC51-4143-BD2E-80213DE372F5}"/>
+                <a16:creationId xmlns:a16="http://schemas.microsoft.com/office/drawing/2014/main" id="{AC867BE8-0110-4F6F-94D8-47EADD23F14D}"/>
               </a:ext>
             </a:extLst>
           </p:cNvPr>
@@ -2034,7 +2235,7 @@
           <p:cNvPr id="4" name="">
             <a:extLst xmlns:a="http://schemas.openxmlformats.org/drawingml/2006/main">
               <a:ext uri="{FF2B5EF4-FFF2-40B4-BE49-F238E27FC236}">
-                <a16:creationId xmlns:a16="http://schemas.microsoft.com/office/drawing/2014/main" id="{211B705A-D794-4E92-8508-157F4DF00295}"/>
+                <a16:creationId xmlns:a16="http://schemas.microsoft.com/office/drawing/2014/main" id="{18752667-049C-4205-9F3F-46E7D9FE9AD2}"/>
               </a:ext>
             </a:extLst>
           </p:cNvPr>
@@ -2090,7 +2291,7 @@
           <p:cNvPr id="5" name="base-case-106k-mau-4-4k-payers-by-m36">
             <a:extLst xmlns:a="http://schemas.openxmlformats.org/drawingml/2006/main">
               <a:ext uri="{FF2B5EF4-FFF2-40B4-BE49-F238E27FC236}">
-                <a16:creationId xmlns:a16="http://schemas.microsoft.com/office/drawing/2014/main" id="{A3D8B2CD-C791-42D2-9836-8AF59DA3A963}"/>
+                <a16:creationId xmlns:a16="http://schemas.microsoft.com/office/drawing/2014/main" id="{05FB7B51-AE47-46F4-9887-8327CD7ECBAC}"/>
               </a:ext>
             </a:extLst>
           </p:cNvPr>
@@ -2181,7 +2382,7 @@
           <p:cNvPr id="6" name="upside-900k-mau-52k-payers-by-m36">
             <a:extLst xmlns:a="http://schemas.openxmlformats.org/drawingml/2006/main">
               <a:ext uri="{FF2B5EF4-FFF2-40B4-BE49-F238E27FC236}">
-                <a16:creationId xmlns:a16="http://schemas.microsoft.com/office/drawing/2014/main" id="{DE7BBEAA-A7F9-47FB-AF7F-D7B7E91FCD38}"/>
+                <a16:creationId xmlns:a16="http://schemas.microsoft.com/office/drawing/2014/main" id="{A607447C-D463-4686-8F85-3D7F87DC78E0}"/>
               </a:ext>
             </a:extLst>
           </p:cNvPr>
@@ -2272,7 +2473,7 @@
           <p:cNvPr id="7" name="current-posture-managed-stack-eu-first-offline-first">
             <a:extLst xmlns:a="http://schemas.openxmlformats.org/drawingml/2006/main">
               <a:ext uri="{FF2B5EF4-FFF2-40B4-BE49-F238E27FC236}">
-                <a16:creationId xmlns:a16="http://schemas.microsoft.com/office/drawing/2014/main" id="{1A801CCC-DA47-4551-85F2-C1D2EB1B591D}"/>
+                <a16:creationId xmlns:a16="http://schemas.microsoft.com/office/drawing/2014/main" id="{58435D4B-E031-4874-9D09-F3DF2E50E04D}"/>
               </a:ext>
             </a:extLst>
           </p:cNvPr>
@@ -2363,7 +2564,7 @@
           <p:cNvPr id="8" name="">
             <a:extLst xmlns:a="http://schemas.openxmlformats.org/drawingml/2006/main">
               <a:ext uri="{FF2B5EF4-FFF2-40B4-BE49-F238E27FC236}">
-                <a16:creationId xmlns:a16="http://schemas.microsoft.com/office/drawing/2014/main" id="{501085E4-D6DB-48C7-8454-5E25383CEA0C}"/>
+                <a16:creationId xmlns:a16="http://schemas.microsoft.com/office/drawing/2014/main" id="{AE0A0BF3-FAAC-49D0-B8AA-AFA679FA38D9}"/>
               </a:ext>
             </a:extLst>
           </p:cNvPr>
@@ -2417,7 +2618,7 @@
     </p:spTree>
     <p:extLst>
       <p:ext uri="{BB962C8B-B14F-4D97-AF65-F5344CB8AC3E}">
-        <p14:creationId xmlns:p14="http://schemas.microsoft.com/office/powerpoint/2010/main" val="1232525656"/>
+        <p14:creationId xmlns:p14="http://schemas.microsoft.com/office/powerpoint/2010/main" val="121294806"/>
       </p:ext>
     </p:extLst>
   </p:cSld>
@@ -2448,7 +2649,7 @@
           <p:cNvPr id="1" name="brand-rail">
             <a:extLst xmlns:a="http://schemas.openxmlformats.org/drawingml/2006/main">
               <a:ext uri="{FF2B5EF4-FFF2-40B4-BE49-F238E27FC236}">
-                <a16:creationId xmlns:a16="http://schemas.microsoft.com/office/drawing/2014/main" id="{1B8620B8-DB86-4D81-8318-94D098775DE2}"/>
+                <a16:creationId xmlns:a16="http://schemas.microsoft.com/office/drawing/2014/main" id="{C608DE33-0B14-4C97-B47D-4570BBBDC391}"/>
               </a:ext>
             </a:extLst>
           </p:cNvPr>
@@ -2481,7 +2682,7 @@
           <p:cNvPr id="2" name="">
             <a:extLst xmlns:a="http://schemas.openxmlformats.org/drawingml/2006/main">
               <a:ext uri="{FF2B5EF4-FFF2-40B4-BE49-F238E27FC236}">
-                <a16:creationId xmlns:a16="http://schemas.microsoft.com/office/drawing/2014/main" id="{CCCD783E-F743-45FC-881E-6E30206D9EA5}"/>
+                <a16:creationId xmlns:a16="http://schemas.microsoft.com/office/drawing/2014/main" id="{BB773255-EAE3-4D84-91F2-8BBCE677BD90}"/>
               </a:ext>
             </a:extLst>
           </p:cNvPr>
@@ -2537,7 +2738,7 @@
           <p:cNvPr id="3" name="">
             <a:extLst xmlns:a="http://schemas.openxmlformats.org/drawingml/2006/main">
               <a:ext uri="{FF2B5EF4-FFF2-40B4-BE49-F238E27FC236}">
-                <a16:creationId xmlns:a16="http://schemas.microsoft.com/office/drawing/2014/main" id="{333890A4-0F8A-474E-9C80-E071EB991E6F}"/>
+                <a16:creationId xmlns:a16="http://schemas.microsoft.com/office/drawing/2014/main" id="{6E6F7A22-541B-40ED-A0CA-2A06449D0677}"/>
               </a:ext>
             </a:extLst>
           </p:cNvPr>
@@ -2583,7 +2784,7 @@
                 <a:ea typeface="Aptos"/>
                 <a:cs typeface="Aptos"/>
               </a:rPr>
-              <a:t>Directional monthly platform spend, excluding founder time and major paid acquisition.</a:t>
+              <a:t>Platform-pressure bands only; the Excel model remains the financial source of truth.</a:t>
             </a:r>
           </a:p>
         </p:txBody>
@@ -2593,7 +2794,7 @@
           <p:cNvPr id="4" name="">
             <a:extLst xmlns:a="http://schemas.openxmlformats.org/drawingml/2006/main">
               <a:ext uri="{FF2B5EF4-FFF2-40B4-BE49-F238E27FC236}">
-                <a16:creationId xmlns:a16="http://schemas.microsoft.com/office/drawing/2014/main" id="{8D9FEA3C-BA94-4561-AEDC-12A1EB1F3CDB}"/>
+                <a16:creationId xmlns:a16="http://schemas.microsoft.com/office/drawing/2014/main" id="{91A54920-1248-424D-85FE-A4C5DD212E78}"/>
               </a:ext>
             </a:extLst>
           </p:cNvPr>
@@ -2649,7 +2850,7 @@
           <p:cNvPr id="5" name="stage">
             <a:extLst xmlns:a="http://schemas.openxmlformats.org/drawingml/2006/main">
               <a:ext uri="{FF2B5EF4-FFF2-40B4-BE49-F238E27FC236}">
-                <a16:creationId xmlns:a16="http://schemas.microsoft.com/office/drawing/2014/main" id="{F29F1E9F-CD31-4707-9B22-FC61130026CA}"/>
+                <a16:creationId xmlns:a16="http://schemas.microsoft.com/office/drawing/2014/main" id="{0CB423D2-3AA9-40ED-9372-D9AE2D56BC49}"/>
               </a:ext>
             </a:extLst>
           </p:cNvPr>
@@ -2711,7 +2912,7 @@
           <p:cNvPr id="6" name="monthly-spend">
             <a:extLst xmlns:a="http://schemas.openxmlformats.org/drawingml/2006/main">
               <a:ext uri="{FF2B5EF4-FFF2-40B4-BE49-F238E27FC236}">
-                <a16:creationId xmlns:a16="http://schemas.microsoft.com/office/drawing/2014/main" id="{18B315AE-6A08-44B4-87C4-999B2F96CB63}"/>
+                <a16:creationId xmlns:a16="http://schemas.microsoft.com/office/drawing/2014/main" id="{A5AB911F-9446-4BF4-99F8-2382DA1A77A3}"/>
               </a:ext>
             </a:extLst>
           </p:cNvPr>
@@ -2773,7 +2974,7 @@
           <p:cNvPr id="7" name="what-drives-it">
             <a:extLst xmlns:a="http://schemas.openxmlformats.org/drawingml/2006/main">
               <a:ext uri="{FF2B5EF4-FFF2-40B4-BE49-F238E27FC236}">
-                <a16:creationId xmlns:a16="http://schemas.microsoft.com/office/drawing/2014/main" id="{BE59EF99-7635-4180-80BA-6870C3D44ABF}"/>
+                <a16:creationId xmlns:a16="http://schemas.microsoft.com/office/drawing/2014/main" id="{AE3AD110-1E31-4443-9762-369AC70A1593}"/>
               </a:ext>
             </a:extLst>
           </p:cNvPr>
@@ -2835,7 +3036,7 @@
           <p:cNvPr id="8" name="closed-beta">
             <a:extLst xmlns:a="http://schemas.openxmlformats.org/drawingml/2006/main">
               <a:ext uri="{FF2B5EF4-FFF2-40B4-BE49-F238E27FC236}">
-                <a16:creationId xmlns:a16="http://schemas.microsoft.com/office/drawing/2014/main" id="{6D38F362-E1C8-49C9-B1E1-98DD1FCC1B64}"/>
+                <a16:creationId xmlns:a16="http://schemas.microsoft.com/office/drawing/2014/main" id="{88A09D5F-9ADB-4DA5-B947-B796349BFF1B}"/>
               </a:ext>
             </a:extLst>
           </p:cNvPr>
@@ -2897,7 +3098,7 @@
           <p:cNvPr id="9" name="-45-150">
             <a:extLst xmlns:a="http://schemas.openxmlformats.org/drawingml/2006/main">
               <a:ext uri="{FF2B5EF4-FFF2-40B4-BE49-F238E27FC236}">
-                <a16:creationId xmlns:a16="http://schemas.microsoft.com/office/drawing/2014/main" id="{B88E22A8-4FF4-4350-BFE1-FE5D9B175738}"/>
+                <a16:creationId xmlns:a16="http://schemas.microsoft.com/office/drawing/2014/main" id="{97A784B4-AB8B-49CD-897C-6D309C6FA5F5}"/>
               </a:ext>
             </a:extLst>
           </p:cNvPr>
@@ -2959,7 +3160,7 @@
           <p:cNvPr id="10" name="supabase-pro-vercel-pro-mostly-free-firebase-posthog-email-fx-">
             <a:extLst xmlns:a="http://schemas.openxmlformats.org/drawingml/2006/main">
               <a:ext uri="{FF2B5EF4-FFF2-40B4-BE49-F238E27FC236}">
-                <a16:creationId xmlns:a16="http://schemas.microsoft.com/office/drawing/2014/main" id="{5C66F142-17F2-446B-9B98-3682E57D2F09}"/>
+                <a16:creationId xmlns:a16="http://schemas.microsoft.com/office/drawing/2014/main" id="{A664AC2C-57F4-4CEC-8A98-093EACC2297C}"/>
               </a:ext>
             </a:extLst>
           </p:cNvPr>
@@ -3021,7 +3222,7 @@
           <p:cNvPr id="11" name="public-v1">
             <a:extLst xmlns:a="http://schemas.openxmlformats.org/drawingml/2006/main">
               <a:ext uri="{FF2B5EF4-FFF2-40B4-BE49-F238E27FC236}">
-                <a16:creationId xmlns:a16="http://schemas.microsoft.com/office/drawing/2014/main" id="{8F00A2A2-2E24-4ECB-AFE1-ABF103B33B2A}"/>
+                <a16:creationId xmlns:a16="http://schemas.microsoft.com/office/drawing/2014/main" id="{23A245BF-ADC6-42CE-89F2-D841E68E2529}"/>
               </a:ext>
             </a:extLst>
           </p:cNvPr>
@@ -3083,7 +3284,7 @@
           <p:cNvPr id="12" name="-150-500">
             <a:extLst xmlns:a="http://schemas.openxmlformats.org/drawingml/2006/main">
               <a:ext uri="{FF2B5EF4-FFF2-40B4-BE49-F238E27FC236}">
-                <a16:creationId xmlns:a16="http://schemas.microsoft.com/office/drawing/2014/main" id="{D411F1F6-12EC-4433-95C1-125694EF133B}"/>
+                <a16:creationId xmlns:a16="http://schemas.microsoft.com/office/drawing/2014/main" id="{DB3557FD-C675-493C-BE74-4A1CBEE6CD09}"/>
               </a:ext>
             </a:extLst>
           </p:cNvPr>
@@ -3145,7 +3346,7 @@
           <p:cNvPr id="13" name="pitr-small-medium-compute-paid-email-if-otp-volume-grows-backup-storage-">
             <a:extLst xmlns:a="http://schemas.openxmlformats.org/drawingml/2006/main">
               <a:ext uri="{FF2B5EF4-FFF2-40B4-BE49-F238E27FC236}">
-                <a16:creationId xmlns:a16="http://schemas.microsoft.com/office/drawing/2014/main" id="{7EDE18D3-4DF1-45B8-8B15-8212C25FE191}"/>
+                <a16:creationId xmlns:a16="http://schemas.microsoft.com/office/drawing/2014/main" id="{FD5ACB80-036B-467F-BA18-4C89538BB4A0}"/>
               </a:ext>
             </a:extLst>
           </p:cNvPr>
@@ -3207,7 +3408,7 @@
           <p:cNvPr id="14" name="base-case-y3">
             <a:extLst xmlns:a="http://schemas.openxmlformats.org/drawingml/2006/main">
               <a:ext uri="{FF2B5EF4-FFF2-40B4-BE49-F238E27FC236}">
-                <a16:creationId xmlns:a16="http://schemas.microsoft.com/office/drawing/2014/main" id="{F0D0805D-712B-412D-8A09-B4CA69218C63}"/>
+                <a16:creationId xmlns:a16="http://schemas.microsoft.com/office/drawing/2014/main" id="{102B1DE9-8028-4709-92C0-29BC15857F21}"/>
               </a:ext>
             </a:extLst>
           </p:cNvPr>
@@ -3269,7 +3470,7 @@
           <p:cNvPr id="15" name="-500-2k">
             <a:extLst xmlns:a="http://schemas.openxmlformats.org/drawingml/2006/main">
               <a:ext uri="{FF2B5EF4-FFF2-40B4-BE49-F238E27FC236}">
-                <a16:creationId xmlns:a16="http://schemas.microsoft.com/office/drawing/2014/main" id="{F62281CA-4AA9-4B87-8D92-2AF1588DBA5F}"/>
+                <a16:creationId xmlns:a16="http://schemas.microsoft.com/office/drawing/2014/main" id="{374B613C-9849-481D-BAC1-C3B4C8188697}"/>
               </a:ext>
             </a:extLst>
           </p:cNvPr>
@@ -3331,7 +3532,7 @@
           <p:cNvPr id="16" name="around-100k-mau-compute-storage-egress-posthog-email-begin-to-matter-still-manageable-">
             <a:extLst xmlns:a="http://schemas.openxmlformats.org/drawingml/2006/main">
               <a:ext uri="{FF2B5EF4-FFF2-40B4-BE49-F238E27FC236}">
-                <a16:creationId xmlns:a16="http://schemas.microsoft.com/office/drawing/2014/main" id="{F77AC166-26A1-4A43-8277-34AA133104B6}"/>
+                <a16:creationId xmlns:a16="http://schemas.microsoft.com/office/drawing/2014/main" id="{7E45A935-2697-4683-85C9-4DE6122D64E5}"/>
               </a:ext>
             </a:extLst>
           </p:cNvPr>
@@ -3393,7 +3594,7 @@
           <p:cNvPr id="17" name="upside-y3">
             <a:extLst xmlns:a="http://schemas.openxmlformats.org/drawingml/2006/main">
               <a:ext uri="{FF2B5EF4-FFF2-40B4-BE49-F238E27FC236}">
-                <a16:creationId xmlns:a16="http://schemas.microsoft.com/office/drawing/2014/main" id="{392CC541-C1A9-40FD-9472-5C818F624F5C}"/>
+                <a16:creationId xmlns:a16="http://schemas.microsoft.com/office/drawing/2014/main" id="{75804F2C-27B0-4966-BDA2-54A1FBBB6BAF}"/>
               </a:ext>
             </a:extLst>
           </p:cNvPr>
@@ -3455,7 +3656,7 @@
           <p:cNvPr id="18" name="-5k-25k-">
             <a:extLst xmlns:a="http://schemas.openxmlformats.org/drawingml/2006/main">
               <a:ext uri="{FF2B5EF4-FFF2-40B4-BE49-F238E27FC236}">
-                <a16:creationId xmlns:a16="http://schemas.microsoft.com/office/drawing/2014/main" id="{F6FC6BC1-40EA-4EC4-AD91-1F1BBE588805}"/>
+                <a16:creationId xmlns:a16="http://schemas.microsoft.com/office/drawing/2014/main" id="{384BCD27-3AE6-4CC3-86E7-4A543A5AB671}"/>
               </a:ext>
             </a:extLst>
           </p:cNvPr>
@@ -3517,7 +3718,7 @@
           <p:cNvPr id="19" name="around-900k-mau-dedicated-compute-replicas-media-pipeline-analytics-export-costs-">
             <a:extLst xmlns:a="http://schemas.openxmlformats.org/drawingml/2006/main">
               <a:ext uri="{FF2B5EF4-FFF2-40B4-BE49-F238E27FC236}">
-                <a16:creationId xmlns:a16="http://schemas.microsoft.com/office/drawing/2014/main" id="{790FD5A1-0856-4DB8-9465-EF716CC2B2DE}"/>
+                <a16:creationId xmlns:a16="http://schemas.microsoft.com/office/drawing/2014/main" id="{039622DA-8E53-4A1F-AAAA-ED56B03FA7CB}"/>
               </a:ext>
             </a:extLst>
           </p:cNvPr>
@@ -3579,7 +3780,7 @@
           <p:cNvPr id="20" name="enterprise-global">
             <a:extLst xmlns:a="http://schemas.openxmlformats.org/drawingml/2006/main">
               <a:ext uri="{FF2B5EF4-FFF2-40B4-BE49-F238E27FC236}">
-                <a16:creationId xmlns:a16="http://schemas.microsoft.com/office/drawing/2014/main" id="{09B0C13B-FAA5-4437-B43C-9C4965F30271}"/>
+                <a16:creationId xmlns:a16="http://schemas.microsoft.com/office/drawing/2014/main" id="{C36B1748-EEB4-4F48-9E5C-53E14FFA5B31}"/>
               </a:ext>
             </a:extLst>
           </p:cNvPr>
@@ -3641,7 +3842,7 @@
           <p:cNvPr id="21" name="custom">
             <a:extLst xmlns:a="http://schemas.openxmlformats.org/drawingml/2006/main">
               <a:ext uri="{FF2B5EF4-FFF2-40B4-BE49-F238E27FC236}">
-                <a16:creationId xmlns:a16="http://schemas.microsoft.com/office/drawing/2014/main" id="{1396A302-15CA-4018-A7C6-BA00665D5768}"/>
+                <a16:creationId xmlns:a16="http://schemas.microsoft.com/office/drawing/2014/main" id="{026F6F7C-C883-477C-8DA1-4DA7A7C58F32}"/>
               </a:ext>
             </a:extLst>
           </p:cNvPr>
@@ -3703,7 +3904,7 @@
           <p:cNvPr id="22" name="contracted-support-slos-regional-strategy-compliance-support-console-data-warehouse-">
             <a:extLst xmlns:a="http://schemas.openxmlformats.org/drawingml/2006/main">
               <a:ext uri="{FF2B5EF4-FFF2-40B4-BE49-F238E27FC236}">
-                <a16:creationId xmlns:a16="http://schemas.microsoft.com/office/drawing/2014/main" id="{0C822563-AFE5-4A8F-ABA0-98BBD8345B6C}"/>
+                <a16:creationId xmlns:a16="http://schemas.microsoft.com/office/drawing/2014/main" id="{AB0F2694-EAD7-47B4-9A38-215F813B3AF0}"/>
               </a:ext>
             </a:extLst>
           </p:cNvPr>
@@ -3765,7 +3966,7 @@
           <p:cNvPr id="23" name="">
             <a:extLst xmlns:a="http://schemas.openxmlformats.org/drawingml/2006/main">
               <a:ext uri="{FF2B5EF4-FFF2-40B4-BE49-F238E27FC236}">
-                <a16:creationId xmlns:a16="http://schemas.microsoft.com/office/drawing/2014/main" id="{8539033A-1C75-46BE-AFCA-54754DEB1307}"/>
+                <a16:creationId xmlns:a16="http://schemas.microsoft.com/office/drawing/2014/main" id="{8EB23360-F45A-43AE-9E5A-C93E045C1A99}"/>
               </a:ext>
             </a:extLst>
           </p:cNvPr>
@@ -3819,7 +4020,7 @@
     </p:spTree>
     <p:extLst>
       <p:ext uri="{BB962C8B-B14F-4D97-AF65-F5344CB8AC3E}">
-        <p14:creationId xmlns:p14="http://schemas.microsoft.com/office/powerpoint/2010/main" val="1481549678"/>
+        <p14:creationId xmlns:p14="http://schemas.microsoft.com/office/powerpoint/2010/main" val="1938563051"/>
       </p:ext>
     </p:extLst>
   </p:cSld>
@@ -3850,7 +4051,7 @@
           <p:cNvPr id="1" name="brand-rail">
             <a:extLst xmlns:a="http://schemas.openxmlformats.org/drawingml/2006/main">
               <a:ext uri="{FF2B5EF4-FFF2-40B4-BE49-F238E27FC236}">
-                <a16:creationId xmlns:a16="http://schemas.microsoft.com/office/drawing/2014/main" id="{12F0BA9F-6977-4A03-B1AE-F5A71BFA9932}"/>
+                <a16:creationId xmlns:a16="http://schemas.microsoft.com/office/drawing/2014/main" id="{3130F2B0-070D-4D2A-9108-09272628584B}"/>
               </a:ext>
             </a:extLst>
           </p:cNvPr>
@@ -3883,7 +4084,7 @@
           <p:cNvPr id="2" name="">
             <a:extLst xmlns:a="http://schemas.openxmlformats.org/drawingml/2006/main">
               <a:ext uri="{FF2B5EF4-FFF2-40B4-BE49-F238E27FC236}">
-                <a16:creationId xmlns:a16="http://schemas.microsoft.com/office/drawing/2014/main" id="{150843A2-46A2-449B-ADD7-ED3FEA2D6E4C}"/>
+                <a16:creationId xmlns:a16="http://schemas.microsoft.com/office/drawing/2014/main" id="{8BE23947-9404-4590-A45E-7741A8E65812}"/>
               </a:ext>
             </a:extLst>
           </p:cNvPr>
@@ -3929,7 +4130,7 @@
                 <a:ea typeface="Aptos Display"/>
                 <a:cs typeface="Aptos Display"/>
               </a:rPr>
-              <a:t>Recommendations before widening beta</a:t>
+              <a:t>Storage envelope by content type</a:t>
             </a:r>
           </a:p>
         </p:txBody>
@@ -3939,7 +4140,7 @@
           <p:cNvPr id="3" name="">
             <a:extLst xmlns:a="http://schemas.openxmlformats.org/drawingml/2006/main">
               <a:ext uri="{FF2B5EF4-FFF2-40B4-BE49-F238E27FC236}">
-                <a16:creationId xmlns:a16="http://schemas.microsoft.com/office/drawing/2014/main" id="{0C22A24F-C41D-4701-B680-A38D2C7E5326}"/>
+                <a16:creationId xmlns:a16="http://schemas.microsoft.com/office/drawing/2014/main" id="{A364C47F-A881-42BF-8E89-BDAF79CE61F2}"/>
               </a:ext>
             </a:extLst>
           </p:cNvPr>
@@ -3985,7 +4186,7 @@
                 <a:ea typeface="Aptos"/>
                 <a:cs typeface="Aptos"/>
               </a:rPr>
-              <a:t>Keep the stack managed, but put guardrails where success gets expensive.</a:t>
+              <a:t>The first real cost multiplier is media, not notes or trip rows.</a:t>
             </a:r>
           </a:p>
         </p:txBody>
@@ -3995,7 +4196,7 @@
           <p:cNvPr id="4" name="">
             <a:extLst xmlns:a="http://schemas.openxmlformats.org/drawingml/2006/main">
               <a:ext uri="{FF2B5EF4-FFF2-40B4-BE49-F238E27FC236}">
-                <a16:creationId xmlns:a16="http://schemas.microsoft.com/office/drawing/2014/main" id="{7456F539-7025-4F5B-974C-2FFD2EB7C3D2}"/>
+                <a16:creationId xmlns:a16="http://schemas.microsoft.com/office/drawing/2014/main" id="{3C9663E3-6597-4FCE-8B60-F1AC0B492D44}"/>
               </a:ext>
             </a:extLst>
           </p:cNvPr>
@@ -4048,55 +4249,1874 @@
       </p:sp>
       <p:sp>
         <p:nvSpPr>
-          <p:cNvPr id="5" name="bullet-dot">
-            <a:extLst xmlns:a="http://schemas.openxmlformats.org/drawingml/2006/main">
-              <a:ext uri="{FF2B5EF4-FFF2-40B4-BE49-F238E27FC236}">
-                <a16:creationId xmlns:a16="http://schemas.microsoft.com/office/drawing/2014/main" id="{BB1D0069-8C6F-4B51-AC96-2AD341C8CC9B}"/>
-              </a:ext>
-            </a:extLst>
-          </p:cNvPr>
-          <p:cNvSpPr>
-            <a:spLocks xmlns:a="http://schemas.openxmlformats.org/drawingml/2006/main" noGrp="1"/>
-          </p:cNvSpPr>
-          <p:nvPr/>
-        </p:nvSpPr>
-        <p:spPr>
-          <a:xfrm xmlns:a="http://schemas.openxmlformats.org/drawingml/2006/main">
-            <a:off x="876300" y="1524000"/>
-            <a:ext cx="85725" cy="85725"/>
-          </a:xfrm>
-          <a:prstGeom xmlns:a="http://schemas.openxmlformats.org/drawingml/2006/main" prst="ellipse">
-            <a:avLst/>
+          <p:cNvPr id="5" name="100-gb-supabase-pro-storage-included">
+            <a:extLst xmlns:a="http://schemas.openxmlformats.org/drawingml/2006/main">
+              <a:ext uri="{FF2B5EF4-FFF2-40B4-BE49-F238E27FC236}">
+                <a16:creationId xmlns:a16="http://schemas.microsoft.com/office/drawing/2014/main" id="{6D57D093-3016-47EB-85F4-DFA875C58B86}"/>
+              </a:ext>
+            </a:extLst>
+          </p:cNvPr>
+          <p:cNvSpPr>
+            <a:spLocks xmlns:a="http://schemas.openxmlformats.org/drawingml/2006/main" noGrp="1"/>
+          </p:cNvSpPr>
+          <p:nvPr/>
+        </p:nvSpPr>
+        <p:spPr>
+          <a:xfrm xmlns:a="http://schemas.openxmlformats.org/drawingml/2006/main">
+            <a:off x="666750" y="1390650"/>
+            <a:ext cx="2190750" cy="1009650"/>
+          </a:xfrm>
+          <a:prstGeom xmlns:a="http://schemas.openxmlformats.org/drawingml/2006/main" prst="roundRect">
+            <a:avLst>
+              <a:gd name="adj" fmla="val 11321"/>
+            </a:avLst>
           </a:prstGeom>
           <a:solidFill xmlns:a="http://schemas.openxmlformats.org/drawingml/2006/main">
-            <a:srgbClr val="FF5B4D"/>
-          </a:solidFill>
-          <a:ln xmlns:a="http://schemas.openxmlformats.org/drawingml/2006/main" w="0">
+            <a:srgbClr val="E5F6F3"/>
+          </a:solidFill>
+          <a:ln xmlns:a="http://schemas.openxmlformats.org/drawingml/2006/main" w="9525">
             <a:solidFill>
-              <a:srgbClr val="FF5B4D"/>
+              <a:srgbClr val="C7D2DA"/>
             </a:solidFill>
             <a:prstDash val="solid"/>
           </a:ln>
         </p:spPr>
-      </p:sp>
-      <p:sp>
-        <p:nvSpPr>
-          <p:cNvPr id="6" name="">
-            <a:extLst xmlns:a="http://schemas.openxmlformats.org/drawingml/2006/main">
-              <a:ext uri="{FF2B5EF4-FFF2-40B4-BE49-F238E27FC236}">
-                <a16:creationId xmlns:a16="http://schemas.microsoft.com/office/drawing/2014/main" id="{5A22F4DD-0CC3-45CC-9BAB-BA2BF17AFD6D}"/>
-              </a:ext>
-            </a:extLst>
-          </p:cNvPr>
-          <p:cNvSpPr>
-            <a:spLocks xmlns:a="http://schemas.openxmlformats.org/drawingml/2006/main" noGrp="1"/>
-          </p:cNvSpPr>
-          <p:nvPr/>
-        </p:nvSpPr>
-        <p:spPr>
-          <a:xfrm xmlns:a="http://schemas.openxmlformats.org/drawingml/2006/main">
-            <a:off x="1047750" y="1447800"/>
-            <a:ext cx="9829800" cy="552450"/>
+        <p:style>
+          <a:lnRef xmlns:a="http://schemas.openxmlformats.org/drawingml/2006/main" idx="0"/>
+          <a:fillRef xmlns:a="http://schemas.openxmlformats.org/drawingml/2006/main" idx="0"/>
+          <a:effectRef xmlns:a="http://schemas.openxmlformats.org/drawingml/2006/main" idx="4"/>
+          <a:fontRef xmlns:a="http://schemas.openxmlformats.org/drawingml/2006/main" idx="major"/>
+        </p:style>
+        <p:txBody>
+          <a:bodyPr xmlns:a="http://schemas.openxmlformats.org/drawingml/2006/main"/>
+          <a:lstStyle xmlns:a="http://schemas.openxmlformats.org/drawingml/2006/main"/>
+          <a:p xmlns:a="http://schemas.openxmlformats.org/drawingml/2006/main">
+            <a:pPr algn="ctr">
+              <a:defRPr sz="1200" b="1">
+                <a:solidFill>
+                  <a:srgbClr val="17202A"/>
+                </a:solidFill>
+                <a:latin typeface="Aptos"/>
+                <a:ea typeface="Aptos"/>
+                <a:cs typeface="Aptos"/>
+              </a:defRPr>
+            </a:pPr>
+            <a:r>
+              <a:rPr sz="1200" b="1">
+                <a:solidFill>
+                  <a:srgbClr val="17202A"/>
+                </a:solidFill>
+                <a:latin typeface="Aptos"/>
+                <a:ea typeface="Aptos"/>
+                <a:cs typeface="Aptos"/>
+              </a:rPr>
+              <a:t>100 GB</a:t>
+            </a:r>
+          </a:p>
+          <a:p xmlns:a="http://schemas.openxmlformats.org/drawingml/2006/main">
+            <a:pPr algn="ctr">
+              <a:defRPr sz="1200" b="1">
+                <a:solidFill>
+                  <a:srgbClr val="17202A"/>
+                </a:solidFill>
+                <a:latin typeface="Aptos"/>
+                <a:ea typeface="Aptos"/>
+                <a:cs typeface="Aptos"/>
+              </a:defRPr>
+            </a:pPr>
+            <a:r>
+              <a:rPr sz="1200" b="1">
+                <a:solidFill>
+                  <a:srgbClr val="17202A"/>
+                </a:solidFill>
+                <a:latin typeface="Aptos"/>
+                <a:ea typeface="Aptos"/>
+                <a:cs typeface="Aptos"/>
+              </a:rPr>
+              <a:t>Supabase Pro storage included</a:t>
+            </a:r>
+          </a:p>
+        </p:txBody>
+      </p:sp>
+      <p:sp>
+        <p:nvSpPr>
+          <p:cNvPr id="6" name="-21-tb-mo-storage-overage-at-current-pro-rate">
+            <a:extLst xmlns:a="http://schemas.openxmlformats.org/drawingml/2006/main">
+              <a:ext uri="{FF2B5EF4-FFF2-40B4-BE49-F238E27FC236}">
+                <a16:creationId xmlns:a16="http://schemas.microsoft.com/office/drawing/2014/main" id="{8CF44180-E5E7-472C-81D9-48B6681D944F}"/>
+              </a:ext>
+            </a:extLst>
+          </p:cNvPr>
+          <p:cNvSpPr>
+            <a:spLocks xmlns:a="http://schemas.openxmlformats.org/drawingml/2006/main" noGrp="1"/>
+          </p:cNvSpPr>
+          <p:nvPr/>
+        </p:nvSpPr>
+        <p:spPr>
+          <a:xfrm xmlns:a="http://schemas.openxmlformats.org/drawingml/2006/main">
+            <a:off x="3105150" y="1390650"/>
+            <a:ext cx="2400300" cy="1009650"/>
+          </a:xfrm>
+          <a:prstGeom xmlns:a="http://schemas.openxmlformats.org/drawingml/2006/main" prst="roundRect">
+            <a:avLst>
+              <a:gd name="adj" fmla="val 11321"/>
+            </a:avLst>
+          </a:prstGeom>
+          <a:solidFill xmlns:a="http://schemas.openxmlformats.org/drawingml/2006/main">
+            <a:srgbClr val="F2FFD1"/>
+          </a:solidFill>
+          <a:ln xmlns:a="http://schemas.openxmlformats.org/drawingml/2006/main" w="9525">
+            <a:solidFill>
+              <a:srgbClr val="C7D2DA"/>
+            </a:solidFill>
+            <a:prstDash val="solid"/>
+          </a:ln>
+        </p:spPr>
+        <p:style>
+          <a:lnRef xmlns:a="http://schemas.openxmlformats.org/drawingml/2006/main" idx="0"/>
+          <a:fillRef xmlns:a="http://schemas.openxmlformats.org/drawingml/2006/main" idx="0"/>
+          <a:effectRef xmlns:a="http://schemas.openxmlformats.org/drawingml/2006/main" idx="4"/>
+          <a:fontRef xmlns:a="http://schemas.openxmlformats.org/drawingml/2006/main" idx="major"/>
+        </p:style>
+        <p:txBody>
+          <a:bodyPr xmlns:a="http://schemas.openxmlformats.org/drawingml/2006/main"/>
+          <a:lstStyle xmlns:a="http://schemas.openxmlformats.org/drawingml/2006/main"/>
+          <a:p xmlns:a="http://schemas.openxmlformats.org/drawingml/2006/main">
+            <a:pPr algn="ctr">
+              <a:defRPr sz="1200" b="1">
+                <a:solidFill>
+                  <a:srgbClr val="17202A"/>
+                </a:solidFill>
+                <a:latin typeface="Aptos"/>
+                <a:ea typeface="Aptos"/>
+                <a:cs typeface="Aptos"/>
+              </a:defRPr>
+            </a:pPr>
+            <a:r>
+              <a:rPr sz="1200" b="1">
+                <a:solidFill>
+                  <a:srgbClr val="17202A"/>
+                </a:solidFill>
+                <a:latin typeface="Aptos"/>
+                <a:ea typeface="Aptos"/>
+                <a:cs typeface="Aptos"/>
+              </a:rPr>
+              <a:t>~$21/TB/mo</a:t>
+            </a:r>
+          </a:p>
+          <a:p xmlns:a="http://schemas.openxmlformats.org/drawingml/2006/main">
+            <a:pPr algn="ctr">
+              <a:defRPr sz="1200" b="1">
+                <a:solidFill>
+                  <a:srgbClr val="17202A"/>
+                </a:solidFill>
+                <a:latin typeface="Aptos"/>
+                <a:ea typeface="Aptos"/>
+                <a:cs typeface="Aptos"/>
+              </a:defRPr>
+            </a:pPr>
+            <a:r>
+              <a:rPr sz="1200" b="1">
+                <a:solidFill>
+                  <a:srgbClr val="17202A"/>
+                </a:solidFill>
+                <a:latin typeface="Aptos"/>
+                <a:ea typeface="Aptos"/>
+                <a:cs typeface="Aptos"/>
+              </a:rPr>
+              <a:t>storage overage at current Pro rate</a:t>
+            </a:r>
+          </a:p>
+        </p:txBody>
+      </p:sp>
+      <p:sp>
+        <p:nvSpPr>
+          <p:cNvPr id="7" name="250-gb-egress-included-before-overage">
+            <a:extLst xmlns:a="http://schemas.openxmlformats.org/drawingml/2006/main">
+              <a:ext uri="{FF2B5EF4-FFF2-40B4-BE49-F238E27FC236}">
+                <a16:creationId xmlns:a16="http://schemas.microsoft.com/office/drawing/2014/main" id="{4DC7BC9F-7E5C-4CD8-93AA-207C5A040D53}"/>
+              </a:ext>
+            </a:extLst>
+          </p:cNvPr>
+          <p:cNvSpPr>
+            <a:spLocks xmlns:a="http://schemas.openxmlformats.org/drawingml/2006/main" noGrp="1"/>
+          </p:cNvSpPr>
+          <p:nvPr/>
+        </p:nvSpPr>
+        <p:spPr>
+          <a:xfrm xmlns:a="http://schemas.openxmlformats.org/drawingml/2006/main">
+            <a:off x="5753100" y="1390650"/>
+            <a:ext cx="2133600" cy="1009650"/>
+          </a:xfrm>
+          <a:prstGeom xmlns:a="http://schemas.openxmlformats.org/drawingml/2006/main" prst="roundRect">
+            <a:avLst>
+              <a:gd name="adj" fmla="val 11321"/>
+            </a:avLst>
+          </a:prstGeom>
+          <a:solidFill xmlns:a="http://schemas.openxmlformats.org/drawingml/2006/main">
+            <a:srgbClr val="EAF2FF"/>
+          </a:solidFill>
+          <a:ln xmlns:a="http://schemas.openxmlformats.org/drawingml/2006/main" w="9525">
+            <a:solidFill>
+              <a:srgbClr val="C7D2DA"/>
+            </a:solidFill>
+            <a:prstDash val="solid"/>
+          </a:ln>
+        </p:spPr>
+        <p:style>
+          <a:lnRef xmlns:a="http://schemas.openxmlformats.org/drawingml/2006/main" idx="0"/>
+          <a:fillRef xmlns:a="http://schemas.openxmlformats.org/drawingml/2006/main" idx="0"/>
+          <a:effectRef xmlns:a="http://schemas.openxmlformats.org/drawingml/2006/main" idx="4"/>
+          <a:fontRef xmlns:a="http://schemas.openxmlformats.org/drawingml/2006/main" idx="major"/>
+        </p:style>
+        <p:txBody>
+          <a:bodyPr xmlns:a="http://schemas.openxmlformats.org/drawingml/2006/main"/>
+          <a:lstStyle xmlns:a="http://schemas.openxmlformats.org/drawingml/2006/main"/>
+          <a:p xmlns:a="http://schemas.openxmlformats.org/drawingml/2006/main">
+            <a:pPr algn="ctr">
+              <a:defRPr sz="1200" b="1">
+                <a:solidFill>
+                  <a:srgbClr val="17202A"/>
+                </a:solidFill>
+                <a:latin typeface="Aptos"/>
+                <a:ea typeface="Aptos"/>
+                <a:cs typeface="Aptos"/>
+              </a:defRPr>
+            </a:pPr>
+            <a:r>
+              <a:rPr sz="1200" b="1">
+                <a:solidFill>
+                  <a:srgbClr val="17202A"/>
+                </a:solidFill>
+                <a:latin typeface="Aptos"/>
+                <a:ea typeface="Aptos"/>
+                <a:cs typeface="Aptos"/>
+              </a:rPr>
+              <a:t>250 GB</a:t>
+            </a:r>
+          </a:p>
+          <a:p xmlns:a="http://schemas.openxmlformats.org/drawingml/2006/main">
+            <a:pPr algn="ctr">
+              <a:defRPr sz="1200" b="1">
+                <a:solidFill>
+                  <a:srgbClr val="17202A"/>
+                </a:solidFill>
+                <a:latin typeface="Aptos"/>
+                <a:ea typeface="Aptos"/>
+                <a:cs typeface="Aptos"/>
+              </a:defRPr>
+            </a:pPr>
+            <a:r>
+              <a:rPr sz="1200" b="1">
+                <a:solidFill>
+                  <a:srgbClr val="17202A"/>
+                </a:solidFill>
+                <a:latin typeface="Aptos"/>
+                <a:ea typeface="Aptos"/>
+                <a:cs typeface="Aptos"/>
+              </a:rPr>
+              <a:t>egress included before overage</a:t>
+            </a:r>
+          </a:p>
+        </p:txBody>
+      </p:sp>
+      <p:sp>
+        <p:nvSpPr>
+          <p:cNvPr id="8" name="100-mb-current-per-video-app-cap">
+            <a:extLst xmlns:a="http://schemas.openxmlformats.org/drawingml/2006/main">
+              <a:ext uri="{FF2B5EF4-FFF2-40B4-BE49-F238E27FC236}">
+                <a16:creationId xmlns:a16="http://schemas.microsoft.com/office/drawing/2014/main" id="{92B9E944-DDD2-418B-8272-4F33CBE2F9C6}"/>
+              </a:ext>
+            </a:extLst>
+          </p:cNvPr>
+          <p:cNvSpPr>
+            <a:spLocks xmlns:a="http://schemas.openxmlformats.org/drawingml/2006/main" noGrp="1"/>
+          </p:cNvSpPr>
+          <p:nvPr/>
+        </p:nvSpPr>
+        <p:spPr>
+          <a:xfrm xmlns:a="http://schemas.openxmlformats.org/drawingml/2006/main">
+            <a:off x="8134350" y="1390650"/>
+            <a:ext cx="2152650" cy="1009650"/>
+          </a:xfrm>
+          <a:prstGeom xmlns:a="http://schemas.openxmlformats.org/drawingml/2006/main" prst="roundRect">
+            <a:avLst>
+              <a:gd name="adj" fmla="val 11321"/>
+            </a:avLst>
+          </a:prstGeom>
+          <a:solidFill xmlns:a="http://schemas.openxmlformats.org/drawingml/2006/main">
+            <a:srgbClr val="FFE9E6"/>
+          </a:solidFill>
+          <a:ln xmlns:a="http://schemas.openxmlformats.org/drawingml/2006/main" w="9525">
+            <a:solidFill>
+              <a:srgbClr val="C7D2DA"/>
+            </a:solidFill>
+            <a:prstDash val="solid"/>
+          </a:ln>
+        </p:spPr>
+        <p:style>
+          <a:lnRef xmlns:a="http://schemas.openxmlformats.org/drawingml/2006/main" idx="0"/>
+          <a:fillRef xmlns:a="http://schemas.openxmlformats.org/drawingml/2006/main" idx="0"/>
+          <a:effectRef xmlns:a="http://schemas.openxmlformats.org/drawingml/2006/main" idx="4"/>
+          <a:fontRef xmlns:a="http://schemas.openxmlformats.org/drawingml/2006/main" idx="major"/>
+        </p:style>
+        <p:txBody>
+          <a:bodyPr xmlns:a="http://schemas.openxmlformats.org/drawingml/2006/main"/>
+          <a:lstStyle xmlns:a="http://schemas.openxmlformats.org/drawingml/2006/main"/>
+          <a:p xmlns:a="http://schemas.openxmlformats.org/drawingml/2006/main">
+            <a:pPr algn="ctr">
+              <a:defRPr sz="1200" b="1">
+                <a:solidFill>
+                  <a:srgbClr val="17202A"/>
+                </a:solidFill>
+                <a:latin typeface="Aptos"/>
+                <a:ea typeface="Aptos"/>
+                <a:cs typeface="Aptos"/>
+              </a:defRPr>
+            </a:pPr>
+            <a:r>
+              <a:rPr sz="1200" b="1">
+                <a:solidFill>
+                  <a:srgbClr val="17202A"/>
+                </a:solidFill>
+                <a:latin typeface="Aptos"/>
+                <a:ea typeface="Aptos"/>
+                <a:cs typeface="Aptos"/>
+              </a:rPr>
+              <a:t>100 MB</a:t>
+            </a:r>
+          </a:p>
+          <a:p xmlns:a="http://schemas.openxmlformats.org/drawingml/2006/main">
+            <a:pPr algn="ctr">
+              <a:defRPr sz="1200" b="1">
+                <a:solidFill>
+                  <a:srgbClr val="17202A"/>
+                </a:solidFill>
+                <a:latin typeface="Aptos"/>
+                <a:ea typeface="Aptos"/>
+                <a:cs typeface="Aptos"/>
+              </a:defRPr>
+            </a:pPr>
+            <a:r>
+              <a:rPr sz="1200" b="1">
+                <a:solidFill>
+                  <a:srgbClr val="17202A"/>
+                </a:solidFill>
+                <a:latin typeface="Aptos"/>
+                <a:ea typeface="Aptos"/>
+                <a:cs typeface="Aptos"/>
+              </a:rPr>
+              <a:t>current per-video app cap</a:t>
+            </a:r>
+          </a:p>
+        </p:txBody>
+      </p:sp>
+      <p:sp>
+        <p:nvSpPr>
+          <p:cNvPr id="9" name="content">
+            <a:extLst xmlns:a="http://schemas.openxmlformats.org/drawingml/2006/main">
+              <a:ext uri="{FF2B5EF4-FFF2-40B4-BE49-F238E27FC236}">
+                <a16:creationId xmlns:a16="http://schemas.microsoft.com/office/drawing/2014/main" id="{2FF193FF-22B7-442C-B956-F28F47423D61}"/>
+              </a:ext>
+            </a:extLst>
+          </p:cNvPr>
+          <p:cNvSpPr>
+            <a:spLocks xmlns:a="http://schemas.openxmlformats.org/drawingml/2006/main" noGrp="1"/>
+          </p:cNvSpPr>
+          <p:nvPr/>
+        </p:nvSpPr>
+        <p:spPr>
+          <a:xfrm xmlns:a="http://schemas.openxmlformats.org/drawingml/2006/main">
+            <a:off x="666750" y="2914650"/>
+            <a:ext cx="1524000" cy="400050"/>
+          </a:xfrm>
+          <a:prstGeom xmlns:a="http://schemas.openxmlformats.org/drawingml/2006/main" prst="roundRect">
+            <a:avLst>
+              <a:gd name="adj" fmla="val 14286"/>
+            </a:avLst>
+          </a:prstGeom>
+          <a:solidFill xmlns:a="http://schemas.openxmlformats.org/drawingml/2006/main">
+            <a:srgbClr val="102F36"/>
+          </a:solidFill>
+          <a:ln xmlns:a="http://schemas.openxmlformats.org/drawingml/2006/main" w="9525">
+            <a:solidFill>
+              <a:srgbClr val="102F36"/>
+            </a:solidFill>
+            <a:prstDash val="solid"/>
+          </a:ln>
+        </p:spPr>
+        <p:txBody>
+          <a:bodyPr xmlns:a="http://schemas.openxmlformats.org/drawingml/2006/main"/>
+          <a:lstStyle xmlns:a="http://schemas.openxmlformats.org/drawingml/2006/main"/>
+          <a:p xmlns:a="http://schemas.openxmlformats.org/drawingml/2006/main">
+            <a:pPr algn="l">
+              <a:defRPr sz="1125" b="1">
+                <a:solidFill>
+                  <a:srgbClr val="FFFFFF"/>
+                </a:solidFill>
+                <a:latin typeface="Aptos"/>
+                <a:ea typeface="Aptos"/>
+                <a:cs typeface="Aptos"/>
+              </a:defRPr>
+            </a:pPr>
+            <a:r>
+              <a:rPr sz="1125" b="1">
+                <a:solidFill>
+                  <a:srgbClr val="FFFFFF"/>
+                </a:solidFill>
+                <a:latin typeface="Aptos"/>
+                <a:ea typeface="Aptos"/>
+                <a:cs typeface="Aptos"/>
+              </a:rPr>
+              <a:t>Content</a:t>
+            </a:r>
+          </a:p>
+        </p:txBody>
+      </p:sp>
+      <p:sp>
+        <p:nvSpPr>
+          <p:cNvPr id="10" name="current-handling">
+            <a:extLst xmlns:a="http://schemas.openxmlformats.org/drawingml/2006/main">
+              <a:ext uri="{FF2B5EF4-FFF2-40B4-BE49-F238E27FC236}">
+                <a16:creationId xmlns:a16="http://schemas.microsoft.com/office/drawing/2014/main" id="{A449DA94-083E-4BB5-AD49-555ADDE8B72B}"/>
+              </a:ext>
+            </a:extLst>
+          </p:cNvPr>
+          <p:cNvSpPr>
+            <a:spLocks xmlns:a="http://schemas.openxmlformats.org/drawingml/2006/main" noGrp="1"/>
+          </p:cNvSpPr>
+          <p:nvPr/>
+        </p:nvSpPr>
+        <p:spPr>
+          <a:xfrm xmlns:a="http://schemas.openxmlformats.org/drawingml/2006/main">
+            <a:off x="2400300" y="2914650"/>
+            <a:ext cx="2266950" cy="400050"/>
+          </a:xfrm>
+          <a:prstGeom xmlns:a="http://schemas.openxmlformats.org/drawingml/2006/main" prst="roundRect">
+            <a:avLst>
+              <a:gd name="adj" fmla="val 14286"/>
+            </a:avLst>
+          </a:prstGeom>
+          <a:solidFill xmlns:a="http://schemas.openxmlformats.org/drawingml/2006/main">
+            <a:srgbClr val="102F36"/>
+          </a:solidFill>
+          <a:ln xmlns:a="http://schemas.openxmlformats.org/drawingml/2006/main" w="9525">
+            <a:solidFill>
+              <a:srgbClr val="102F36"/>
+            </a:solidFill>
+            <a:prstDash val="solid"/>
+          </a:ln>
+        </p:spPr>
+        <p:txBody>
+          <a:bodyPr xmlns:a="http://schemas.openxmlformats.org/drawingml/2006/main"/>
+          <a:lstStyle xmlns:a="http://schemas.openxmlformats.org/drawingml/2006/main"/>
+          <a:p xmlns:a="http://schemas.openxmlformats.org/drawingml/2006/main">
+            <a:pPr algn="l">
+              <a:defRPr sz="1125" b="1">
+                <a:solidFill>
+                  <a:srgbClr val="FFFFFF"/>
+                </a:solidFill>
+                <a:latin typeface="Aptos"/>
+                <a:ea typeface="Aptos"/>
+                <a:cs typeface="Aptos"/>
+              </a:defRPr>
+            </a:pPr>
+            <a:r>
+              <a:rPr sz="1125" b="1">
+                <a:solidFill>
+                  <a:srgbClr val="FFFFFF"/>
+                </a:solidFill>
+                <a:latin typeface="Aptos"/>
+                <a:ea typeface="Aptos"/>
+                <a:cs typeface="Aptos"/>
+              </a:rPr>
+              <a:t>Current handling</a:t>
+            </a:r>
+          </a:p>
+        </p:txBody>
+      </p:sp>
+      <p:sp>
+        <p:nvSpPr>
+          <p:cNvPr id="11" name="planning-size">
+            <a:extLst xmlns:a="http://schemas.openxmlformats.org/drawingml/2006/main">
+              <a:ext uri="{FF2B5EF4-FFF2-40B4-BE49-F238E27FC236}">
+                <a16:creationId xmlns:a16="http://schemas.microsoft.com/office/drawing/2014/main" id="{B09AE6C4-7B71-47AD-9F1C-B84D631CD801}"/>
+              </a:ext>
+            </a:extLst>
+          </p:cNvPr>
+          <p:cNvSpPr>
+            <a:spLocks xmlns:a="http://schemas.openxmlformats.org/drawingml/2006/main" noGrp="1"/>
+          </p:cNvSpPr>
+          <p:nvPr/>
+        </p:nvSpPr>
+        <p:spPr>
+          <a:xfrm xmlns:a="http://schemas.openxmlformats.org/drawingml/2006/main">
+            <a:off x="4914900" y="2914650"/>
+            <a:ext cx="1809750" cy="400050"/>
+          </a:xfrm>
+          <a:prstGeom xmlns:a="http://schemas.openxmlformats.org/drawingml/2006/main" prst="roundRect">
+            <a:avLst>
+              <a:gd name="adj" fmla="val 14286"/>
+            </a:avLst>
+          </a:prstGeom>
+          <a:solidFill xmlns:a="http://schemas.openxmlformats.org/drawingml/2006/main">
+            <a:srgbClr val="102F36"/>
+          </a:solidFill>
+          <a:ln xmlns:a="http://schemas.openxmlformats.org/drawingml/2006/main" w="9525">
+            <a:solidFill>
+              <a:srgbClr val="102F36"/>
+            </a:solidFill>
+            <a:prstDash val="solid"/>
+          </a:ln>
+        </p:spPr>
+        <p:txBody>
+          <a:bodyPr xmlns:a="http://schemas.openxmlformats.org/drawingml/2006/main"/>
+          <a:lstStyle xmlns:a="http://schemas.openxmlformats.org/drawingml/2006/main"/>
+          <a:p xmlns:a="http://schemas.openxmlformats.org/drawingml/2006/main">
+            <a:pPr algn="l">
+              <a:defRPr sz="1125" b="1">
+                <a:solidFill>
+                  <a:srgbClr val="FFFFFF"/>
+                </a:solidFill>
+                <a:latin typeface="Aptos"/>
+                <a:ea typeface="Aptos"/>
+                <a:cs typeface="Aptos"/>
+              </a:defRPr>
+            </a:pPr>
+            <a:r>
+              <a:rPr sz="1125" b="1">
+                <a:solidFill>
+                  <a:srgbClr val="FFFFFF"/>
+                </a:solidFill>
+                <a:latin typeface="Aptos"/>
+                <a:ea typeface="Aptos"/>
+                <a:cs typeface="Aptos"/>
+              </a:rPr>
+              <a:t>Planning size</a:t>
+            </a:r>
+          </a:p>
+        </p:txBody>
+      </p:sp>
+      <p:sp>
+        <p:nvSpPr>
+          <p:cNvPr id="12" name="100-gb-supports-roughly">
+            <a:extLst xmlns:a="http://schemas.openxmlformats.org/drawingml/2006/main">
+              <a:ext uri="{FF2B5EF4-FFF2-40B4-BE49-F238E27FC236}">
+                <a16:creationId xmlns:a16="http://schemas.microsoft.com/office/drawing/2014/main" id="{05B223F1-9B8C-4131-839C-BD79A581D8CB}"/>
+              </a:ext>
+            </a:extLst>
+          </p:cNvPr>
+          <p:cNvSpPr>
+            <a:spLocks xmlns:a="http://schemas.openxmlformats.org/drawingml/2006/main" noGrp="1"/>
+          </p:cNvSpPr>
+          <p:nvPr/>
+        </p:nvSpPr>
+        <p:spPr>
+          <a:xfrm xmlns:a="http://schemas.openxmlformats.org/drawingml/2006/main">
+            <a:off x="6972300" y="2914650"/>
+            <a:ext cx="3143250" cy="400050"/>
+          </a:xfrm>
+          <a:prstGeom xmlns:a="http://schemas.openxmlformats.org/drawingml/2006/main" prst="roundRect">
+            <a:avLst>
+              <a:gd name="adj" fmla="val 14286"/>
+            </a:avLst>
+          </a:prstGeom>
+          <a:solidFill xmlns:a="http://schemas.openxmlformats.org/drawingml/2006/main">
+            <a:srgbClr val="102F36"/>
+          </a:solidFill>
+          <a:ln xmlns:a="http://schemas.openxmlformats.org/drawingml/2006/main" w="9525">
+            <a:solidFill>
+              <a:srgbClr val="102F36"/>
+            </a:solidFill>
+            <a:prstDash val="solid"/>
+          </a:ln>
+        </p:spPr>
+        <p:txBody>
+          <a:bodyPr xmlns:a="http://schemas.openxmlformats.org/drawingml/2006/main"/>
+          <a:lstStyle xmlns:a="http://schemas.openxmlformats.org/drawingml/2006/main"/>
+          <a:p xmlns:a="http://schemas.openxmlformats.org/drawingml/2006/main">
+            <a:pPr algn="l">
+              <a:defRPr sz="1125" b="1">
+                <a:solidFill>
+                  <a:srgbClr val="FFFFFF"/>
+                </a:solidFill>
+                <a:latin typeface="Aptos"/>
+                <a:ea typeface="Aptos"/>
+                <a:cs typeface="Aptos"/>
+              </a:defRPr>
+            </a:pPr>
+            <a:r>
+              <a:rPr sz="1125" b="1">
+                <a:solidFill>
+                  <a:srgbClr val="FFFFFF"/>
+                </a:solidFill>
+                <a:latin typeface="Aptos"/>
+                <a:ea typeface="Aptos"/>
+                <a:cs typeface="Aptos"/>
+              </a:rPr>
+              <a:t>100 GB supports roughly</a:t>
+            </a:r>
+          </a:p>
+        </p:txBody>
+      </p:sp>
+      <p:sp>
+        <p:nvSpPr>
+          <p:cNvPr id="13" name="notes-plan-text">
+            <a:extLst xmlns:a="http://schemas.openxmlformats.org/drawingml/2006/main">
+              <a:ext uri="{FF2B5EF4-FFF2-40B4-BE49-F238E27FC236}">
+                <a16:creationId xmlns:a16="http://schemas.microsoft.com/office/drawing/2014/main" id="{A073AE13-BB77-4824-9FA9-9F1D436C8A3B}"/>
+              </a:ext>
+            </a:extLst>
+          </p:cNvPr>
+          <p:cNvSpPr>
+            <a:spLocks xmlns:a="http://schemas.openxmlformats.org/drawingml/2006/main" noGrp="1"/>
+          </p:cNvSpPr>
+          <p:nvPr/>
+        </p:nvSpPr>
+        <p:spPr>
+          <a:xfrm xmlns:a="http://schemas.openxmlformats.org/drawingml/2006/main">
+            <a:off x="666750" y="3390900"/>
+            <a:ext cx="1524000" cy="419100"/>
+          </a:xfrm>
+          <a:prstGeom xmlns:a="http://schemas.openxmlformats.org/drawingml/2006/main" prst="roundRect">
+            <a:avLst>
+              <a:gd name="adj" fmla="val 4545"/>
+            </a:avLst>
+          </a:prstGeom>
+          <a:solidFill xmlns:a="http://schemas.openxmlformats.org/drawingml/2006/main">
+            <a:srgbClr val="F1F6F5"/>
+          </a:solidFill>
+          <a:ln xmlns:a="http://schemas.openxmlformats.org/drawingml/2006/main" w="9525">
+            <a:solidFill>
+              <a:srgbClr val="D8E1E2"/>
+            </a:solidFill>
+            <a:prstDash val="solid"/>
+          </a:ln>
+        </p:spPr>
+        <p:txBody>
+          <a:bodyPr xmlns:a="http://schemas.openxmlformats.org/drawingml/2006/main"/>
+          <a:lstStyle xmlns:a="http://schemas.openxmlformats.org/drawingml/2006/main"/>
+          <a:p xmlns:a="http://schemas.openxmlformats.org/drawingml/2006/main">
+            <a:pPr algn="l">
+              <a:defRPr sz="1125" b="1">
+                <a:solidFill>
+                  <a:srgbClr val="17202A"/>
+                </a:solidFill>
+                <a:latin typeface="Aptos"/>
+                <a:ea typeface="Aptos"/>
+                <a:cs typeface="Aptos"/>
+              </a:defRPr>
+            </a:pPr>
+            <a:r>
+              <a:rPr sz="1125" b="1">
+                <a:solidFill>
+                  <a:srgbClr val="17202A"/>
+                </a:solidFill>
+                <a:latin typeface="Aptos"/>
+                <a:ea typeface="Aptos"/>
+                <a:cs typeface="Aptos"/>
+              </a:rPr>
+              <a:t>Notes / plan text</a:t>
+            </a:r>
+          </a:p>
+        </p:txBody>
+      </p:sp>
+      <p:sp>
+        <p:nvSpPr>
+          <p:cNvPr id="14" name="postgres-rows">
+            <a:extLst xmlns:a="http://schemas.openxmlformats.org/drawingml/2006/main">
+              <a:ext uri="{FF2B5EF4-FFF2-40B4-BE49-F238E27FC236}">
+                <a16:creationId xmlns:a16="http://schemas.microsoft.com/office/drawing/2014/main" id="{CCE99EE0-8278-4589-A1FF-D7195327B95B}"/>
+              </a:ext>
+            </a:extLst>
+          </p:cNvPr>
+          <p:cNvSpPr>
+            <a:spLocks xmlns:a="http://schemas.openxmlformats.org/drawingml/2006/main" noGrp="1"/>
+          </p:cNvSpPr>
+          <p:nvPr/>
+        </p:nvSpPr>
+        <p:spPr>
+          <a:xfrm xmlns:a="http://schemas.openxmlformats.org/drawingml/2006/main">
+            <a:off x="2400300" y="3390900"/>
+            <a:ext cx="2266950" cy="419100"/>
+          </a:xfrm>
+          <a:prstGeom xmlns:a="http://schemas.openxmlformats.org/drawingml/2006/main" prst="roundRect">
+            <a:avLst>
+              <a:gd name="adj" fmla="val 4545"/>
+            </a:avLst>
+          </a:prstGeom>
+          <a:solidFill xmlns:a="http://schemas.openxmlformats.org/drawingml/2006/main">
+            <a:srgbClr val="F1F6F5"/>
+          </a:solidFill>
+          <a:ln xmlns:a="http://schemas.openxmlformats.org/drawingml/2006/main" w="9525">
+            <a:solidFill>
+              <a:srgbClr val="D8E1E2"/>
+            </a:solidFill>
+            <a:prstDash val="solid"/>
+          </a:ln>
+        </p:spPr>
+        <p:txBody>
+          <a:bodyPr xmlns:a="http://schemas.openxmlformats.org/drawingml/2006/main"/>
+          <a:lstStyle xmlns:a="http://schemas.openxmlformats.org/drawingml/2006/main"/>
+          <a:p xmlns:a="http://schemas.openxmlformats.org/drawingml/2006/main">
+            <a:pPr algn="l">
+              <a:defRPr sz="1050" b="0">
+                <a:solidFill>
+                  <a:srgbClr val="17202A"/>
+                </a:solidFill>
+                <a:latin typeface="Aptos"/>
+                <a:ea typeface="Aptos"/>
+                <a:cs typeface="Aptos"/>
+              </a:defRPr>
+            </a:pPr>
+            <a:r>
+              <a:rPr sz="1050" b="0">
+                <a:solidFill>
+                  <a:srgbClr val="17202A"/>
+                </a:solidFill>
+                <a:latin typeface="Aptos"/>
+                <a:ea typeface="Aptos"/>
+                <a:cs typeface="Aptos"/>
+              </a:rPr>
+              <a:t>Postgres rows</a:t>
+            </a:r>
+          </a:p>
+        </p:txBody>
+      </p:sp>
+      <p:sp>
+        <p:nvSpPr>
+          <p:cNvPr id="15" name="1-5-kb-each">
+            <a:extLst xmlns:a="http://schemas.openxmlformats.org/drawingml/2006/main">
+              <a:ext uri="{FF2B5EF4-FFF2-40B4-BE49-F238E27FC236}">
+                <a16:creationId xmlns:a16="http://schemas.microsoft.com/office/drawing/2014/main" id="{CB84A418-04DF-4018-B569-669FE191CF9C}"/>
+              </a:ext>
+            </a:extLst>
+          </p:cNvPr>
+          <p:cNvSpPr>
+            <a:spLocks xmlns:a="http://schemas.openxmlformats.org/drawingml/2006/main" noGrp="1"/>
+          </p:cNvSpPr>
+          <p:nvPr/>
+        </p:nvSpPr>
+        <p:spPr>
+          <a:xfrm xmlns:a="http://schemas.openxmlformats.org/drawingml/2006/main">
+            <a:off x="4914900" y="3390900"/>
+            <a:ext cx="1809750" cy="419100"/>
+          </a:xfrm>
+          <a:prstGeom xmlns:a="http://schemas.openxmlformats.org/drawingml/2006/main" prst="roundRect">
+            <a:avLst>
+              <a:gd name="adj" fmla="val 4545"/>
+            </a:avLst>
+          </a:prstGeom>
+          <a:solidFill xmlns:a="http://schemas.openxmlformats.org/drawingml/2006/main">
+            <a:srgbClr val="F1F6F5"/>
+          </a:solidFill>
+          <a:ln xmlns:a="http://schemas.openxmlformats.org/drawingml/2006/main" w="9525">
+            <a:solidFill>
+              <a:srgbClr val="D8E1E2"/>
+            </a:solidFill>
+            <a:prstDash val="solid"/>
+          </a:ln>
+        </p:spPr>
+        <p:txBody>
+          <a:bodyPr xmlns:a="http://schemas.openxmlformats.org/drawingml/2006/main"/>
+          <a:lstStyle xmlns:a="http://schemas.openxmlformats.org/drawingml/2006/main"/>
+          <a:p xmlns:a="http://schemas.openxmlformats.org/drawingml/2006/main">
+            <a:pPr algn="l">
+              <a:defRPr sz="1050" b="0">
+                <a:solidFill>
+                  <a:srgbClr val="17202A"/>
+                </a:solidFill>
+                <a:latin typeface="Aptos"/>
+                <a:ea typeface="Aptos"/>
+                <a:cs typeface="Aptos"/>
+              </a:defRPr>
+            </a:pPr>
+            <a:r>
+              <a:rPr sz="1050" b="0">
+                <a:solidFill>
+                  <a:srgbClr val="17202A"/>
+                </a:solidFill>
+                <a:latin typeface="Aptos"/>
+                <a:ea typeface="Aptos"/>
+                <a:cs typeface="Aptos"/>
+              </a:rPr>
+              <a:t>1-5 KB each</a:t>
+            </a:r>
+          </a:p>
+        </p:txBody>
+      </p:sp>
+      <p:sp>
+        <p:nvSpPr>
+          <p:cNvPr id="16" name="millions-not-the-constraint">
+            <a:extLst xmlns:a="http://schemas.openxmlformats.org/drawingml/2006/main">
+              <a:ext uri="{FF2B5EF4-FFF2-40B4-BE49-F238E27FC236}">
+                <a16:creationId xmlns:a16="http://schemas.microsoft.com/office/drawing/2014/main" id="{5D3CE9F5-5D56-4278-9118-9F6CB89A7C3F}"/>
+              </a:ext>
+            </a:extLst>
+          </p:cNvPr>
+          <p:cNvSpPr>
+            <a:spLocks xmlns:a="http://schemas.openxmlformats.org/drawingml/2006/main" noGrp="1"/>
+          </p:cNvSpPr>
+          <p:nvPr/>
+        </p:nvSpPr>
+        <p:spPr>
+          <a:xfrm xmlns:a="http://schemas.openxmlformats.org/drawingml/2006/main">
+            <a:off x="6972300" y="3390900"/>
+            <a:ext cx="3143250" cy="419100"/>
+          </a:xfrm>
+          <a:prstGeom xmlns:a="http://schemas.openxmlformats.org/drawingml/2006/main" prst="roundRect">
+            <a:avLst>
+              <a:gd name="adj" fmla="val 4545"/>
+            </a:avLst>
+          </a:prstGeom>
+          <a:solidFill xmlns:a="http://schemas.openxmlformats.org/drawingml/2006/main">
+            <a:srgbClr val="F1F6F5"/>
+          </a:solidFill>
+          <a:ln xmlns:a="http://schemas.openxmlformats.org/drawingml/2006/main" w="9525">
+            <a:solidFill>
+              <a:srgbClr val="D8E1E2"/>
+            </a:solidFill>
+            <a:prstDash val="solid"/>
+          </a:ln>
+        </p:spPr>
+        <p:txBody>
+          <a:bodyPr xmlns:a="http://schemas.openxmlformats.org/drawingml/2006/main"/>
+          <a:lstStyle xmlns:a="http://schemas.openxmlformats.org/drawingml/2006/main"/>
+          <a:p xmlns:a="http://schemas.openxmlformats.org/drawingml/2006/main">
+            <a:pPr algn="l">
+              <a:defRPr sz="1050" b="0">
+                <a:solidFill>
+                  <a:srgbClr val="17202A"/>
+                </a:solidFill>
+                <a:latin typeface="Aptos"/>
+                <a:ea typeface="Aptos"/>
+                <a:cs typeface="Aptos"/>
+              </a:defRPr>
+            </a:pPr>
+            <a:r>
+              <a:rPr sz="1050" b="0">
+                <a:solidFill>
+                  <a:srgbClr val="17202A"/>
+                </a:solidFill>
+                <a:latin typeface="Aptos"/>
+                <a:ea typeface="Aptos"/>
+                <a:cs typeface="Aptos"/>
+              </a:rPr>
+              <a:t>Millions; not the constraint</a:t>
+            </a:r>
+          </a:p>
+        </p:txBody>
+      </p:sp>
+      <p:sp>
+        <p:nvSpPr>
+          <p:cNvPr id="17" name="receipts">
+            <a:extLst xmlns:a="http://schemas.openxmlformats.org/drawingml/2006/main">
+              <a:ext uri="{FF2B5EF4-FFF2-40B4-BE49-F238E27FC236}">
+                <a16:creationId xmlns:a16="http://schemas.microsoft.com/office/drawing/2014/main" id="{50CAE399-381D-4F98-AA61-C2A4864A40DB}"/>
+              </a:ext>
+            </a:extLst>
+          </p:cNvPr>
+          <p:cNvSpPr>
+            <a:spLocks xmlns:a="http://schemas.openxmlformats.org/drawingml/2006/main" noGrp="1"/>
+          </p:cNvSpPr>
+          <p:nvPr/>
+        </p:nvSpPr>
+        <p:spPr>
+          <a:xfrm xmlns:a="http://schemas.openxmlformats.org/drawingml/2006/main">
+            <a:off x="666750" y="3886200"/>
+            <a:ext cx="1524000" cy="419100"/>
+          </a:xfrm>
+          <a:prstGeom xmlns:a="http://schemas.openxmlformats.org/drawingml/2006/main" prst="roundRect">
+            <a:avLst>
+              <a:gd name="adj" fmla="val 4545"/>
+            </a:avLst>
+          </a:prstGeom>
+          <a:solidFill xmlns:a="http://schemas.openxmlformats.org/drawingml/2006/main">
+            <a:srgbClr val="FFFFFF"/>
+          </a:solidFill>
+          <a:ln xmlns:a="http://schemas.openxmlformats.org/drawingml/2006/main" w="9525">
+            <a:solidFill>
+              <a:srgbClr val="D8E1E2"/>
+            </a:solidFill>
+            <a:prstDash val="solid"/>
+          </a:ln>
+        </p:spPr>
+        <p:txBody>
+          <a:bodyPr xmlns:a="http://schemas.openxmlformats.org/drawingml/2006/main"/>
+          <a:lstStyle xmlns:a="http://schemas.openxmlformats.org/drawingml/2006/main"/>
+          <a:p xmlns:a="http://schemas.openxmlformats.org/drawingml/2006/main">
+            <a:pPr algn="l">
+              <a:defRPr sz="1125" b="1">
+                <a:solidFill>
+                  <a:srgbClr val="17202A"/>
+                </a:solidFill>
+                <a:latin typeface="Aptos"/>
+                <a:ea typeface="Aptos"/>
+                <a:cs typeface="Aptos"/>
+              </a:defRPr>
+            </a:pPr>
+            <a:r>
+              <a:rPr sz="1125" b="1">
+                <a:solidFill>
+                  <a:srgbClr val="17202A"/>
+                </a:solidFill>
+                <a:latin typeface="Aptos"/>
+                <a:ea typeface="Aptos"/>
+                <a:cs typeface="Aptos"/>
+              </a:rPr>
+              <a:t>Receipts</a:t>
+            </a:r>
+          </a:p>
+        </p:txBody>
+      </p:sp>
+      <p:sp>
+        <p:nvSpPr>
+          <p:cNvPr id="18" name="stored-as-original-image-bytes">
+            <a:extLst xmlns:a="http://schemas.openxmlformats.org/drawingml/2006/main">
+              <a:ext uri="{FF2B5EF4-FFF2-40B4-BE49-F238E27FC236}">
+                <a16:creationId xmlns:a16="http://schemas.microsoft.com/office/drawing/2014/main" id="{0FF7CEE9-5858-4D5D-8633-DFF114909AD9}"/>
+              </a:ext>
+            </a:extLst>
+          </p:cNvPr>
+          <p:cNvSpPr>
+            <a:spLocks xmlns:a="http://schemas.openxmlformats.org/drawingml/2006/main" noGrp="1"/>
+          </p:cNvSpPr>
+          <p:nvPr/>
+        </p:nvSpPr>
+        <p:spPr>
+          <a:xfrm xmlns:a="http://schemas.openxmlformats.org/drawingml/2006/main">
+            <a:off x="2400300" y="3886200"/>
+            <a:ext cx="2266950" cy="419100"/>
+          </a:xfrm>
+          <a:prstGeom xmlns:a="http://schemas.openxmlformats.org/drawingml/2006/main" prst="roundRect">
+            <a:avLst>
+              <a:gd name="adj" fmla="val 4545"/>
+            </a:avLst>
+          </a:prstGeom>
+          <a:solidFill xmlns:a="http://schemas.openxmlformats.org/drawingml/2006/main">
+            <a:srgbClr val="FFFFFF"/>
+          </a:solidFill>
+          <a:ln xmlns:a="http://schemas.openxmlformats.org/drawingml/2006/main" w="9525">
+            <a:solidFill>
+              <a:srgbClr val="D8E1E2"/>
+            </a:solidFill>
+            <a:prstDash val="solid"/>
+          </a:ln>
+        </p:spPr>
+        <p:txBody>
+          <a:bodyPr xmlns:a="http://schemas.openxmlformats.org/drawingml/2006/main"/>
+          <a:lstStyle xmlns:a="http://schemas.openxmlformats.org/drawingml/2006/main"/>
+          <a:p xmlns:a="http://schemas.openxmlformats.org/drawingml/2006/main">
+            <a:pPr algn="l">
+              <a:defRPr sz="1050" b="0">
+                <a:solidFill>
+                  <a:srgbClr val="17202A"/>
+                </a:solidFill>
+                <a:latin typeface="Aptos"/>
+                <a:ea typeface="Aptos"/>
+                <a:cs typeface="Aptos"/>
+              </a:defRPr>
+            </a:pPr>
+            <a:r>
+              <a:rPr sz="1050" b="0">
+                <a:solidFill>
+                  <a:srgbClr val="17202A"/>
+                </a:solidFill>
+                <a:latin typeface="Aptos"/>
+                <a:ea typeface="Aptos"/>
+                <a:cs typeface="Aptos"/>
+              </a:rPr>
+              <a:t>Stored as original image bytes</a:t>
+            </a:r>
+          </a:p>
+        </p:txBody>
+      </p:sp>
+      <p:sp>
+        <p:nvSpPr>
+          <p:cNvPr id="19" name="0-5-1-mb-each">
+            <a:extLst xmlns:a="http://schemas.openxmlformats.org/drawingml/2006/main">
+              <a:ext uri="{FF2B5EF4-FFF2-40B4-BE49-F238E27FC236}">
+                <a16:creationId xmlns:a16="http://schemas.microsoft.com/office/drawing/2014/main" id="{0439D434-96A5-45A6-93A0-BC4E0A1C2D06}"/>
+              </a:ext>
+            </a:extLst>
+          </p:cNvPr>
+          <p:cNvSpPr>
+            <a:spLocks xmlns:a="http://schemas.openxmlformats.org/drawingml/2006/main" noGrp="1"/>
+          </p:cNvSpPr>
+          <p:nvPr/>
+        </p:nvSpPr>
+        <p:spPr>
+          <a:xfrm xmlns:a="http://schemas.openxmlformats.org/drawingml/2006/main">
+            <a:off x="4914900" y="3886200"/>
+            <a:ext cx="1809750" cy="419100"/>
+          </a:xfrm>
+          <a:prstGeom xmlns:a="http://schemas.openxmlformats.org/drawingml/2006/main" prst="roundRect">
+            <a:avLst>
+              <a:gd name="adj" fmla="val 4545"/>
+            </a:avLst>
+          </a:prstGeom>
+          <a:solidFill xmlns:a="http://schemas.openxmlformats.org/drawingml/2006/main">
+            <a:srgbClr val="FFFFFF"/>
+          </a:solidFill>
+          <a:ln xmlns:a="http://schemas.openxmlformats.org/drawingml/2006/main" w="9525">
+            <a:solidFill>
+              <a:srgbClr val="D8E1E2"/>
+            </a:solidFill>
+            <a:prstDash val="solid"/>
+          </a:ln>
+        </p:spPr>
+        <p:txBody>
+          <a:bodyPr xmlns:a="http://schemas.openxmlformats.org/drawingml/2006/main"/>
+          <a:lstStyle xmlns:a="http://schemas.openxmlformats.org/drawingml/2006/main"/>
+          <a:p xmlns:a="http://schemas.openxmlformats.org/drawingml/2006/main">
+            <a:pPr algn="l">
+              <a:defRPr sz="1050" b="0">
+                <a:solidFill>
+                  <a:srgbClr val="17202A"/>
+                </a:solidFill>
+                <a:latin typeface="Aptos"/>
+                <a:ea typeface="Aptos"/>
+                <a:cs typeface="Aptos"/>
+              </a:defRPr>
+            </a:pPr>
+            <a:r>
+              <a:rPr sz="1050" b="0">
+                <a:solidFill>
+                  <a:srgbClr val="17202A"/>
+                </a:solidFill>
+                <a:latin typeface="Aptos"/>
+                <a:ea typeface="Aptos"/>
+                <a:cs typeface="Aptos"/>
+              </a:rPr>
+              <a:t>0.5-1 MB each</a:t>
+            </a:r>
+          </a:p>
+        </p:txBody>
+      </p:sp>
+      <p:sp>
+        <p:nvSpPr>
+          <p:cNvPr id="20" name="100k-receipts-at-1-mb">
+            <a:extLst xmlns:a="http://schemas.openxmlformats.org/drawingml/2006/main">
+              <a:ext uri="{FF2B5EF4-FFF2-40B4-BE49-F238E27FC236}">
+                <a16:creationId xmlns:a16="http://schemas.microsoft.com/office/drawing/2014/main" id="{84C7B505-A775-4E39-A7FC-A32DA1B36DC7}"/>
+              </a:ext>
+            </a:extLst>
+          </p:cNvPr>
+          <p:cNvSpPr>
+            <a:spLocks xmlns:a="http://schemas.openxmlformats.org/drawingml/2006/main" noGrp="1"/>
+          </p:cNvSpPr>
+          <p:nvPr/>
+        </p:nvSpPr>
+        <p:spPr>
+          <a:xfrm xmlns:a="http://schemas.openxmlformats.org/drawingml/2006/main">
+            <a:off x="6972300" y="3886200"/>
+            <a:ext cx="3143250" cy="419100"/>
+          </a:xfrm>
+          <a:prstGeom xmlns:a="http://schemas.openxmlformats.org/drawingml/2006/main" prst="roundRect">
+            <a:avLst>
+              <a:gd name="adj" fmla="val 4545"/>
+            </a:avLst>
+          </a:prstGeom>
+          <a:solidFill xmlns:a="http://schemas.openxmlformats.org/drawingml/2006/main">
+            <a:srgbClr val="FFFFFF"/>
+          </a:solidFill>
+          <a:ln xmlns:a="http://schemas.openxmlformats.org/drawingml/2006/main" w="9525">
+            <a:solidFill>
+              <a:srgbClr val="D8E1E2"/>
+            </a:solidFill>
+            <a:prstDash val="solid"/>
+          </a:ln>
+        </p:spPr>
+        <p:txBody>
+          <a:bodyPr xmlns:a="http://schemas.openxmlformats.org/drawingml/2006/main"/>
+          <a:lstStyle xmlns:a="http://schemas.openxmlformats.org/drawingml/2006/main"/>
+          <a:p xmlns:a="http://schemas.openxmlformats.org/drawingml/2006/main">
+            <a:pPr algn="l">
+              <a:defRPr sz="1050" b="0">
+                <a:solidFill>
+                  <a:srgbClr val="17202A"/>
+                </a:solidFill>
+                <a:latin typeface="Aptos"/>
+                <a:ea typeface="Aptos"/>
+                <a:cs typeface="Aptos"/>
+              </a:defRPr>
+            </a:pPr>
+            <a:r>
+              <a:rPr sz="1050" b="0">
+                <a:solidFill>
+                  <a:srgbClr val="17202A"/>
+                </a:solidFill>
+                <a:latin typeface="Aptos"/>
+                <a:ea typeface="Aptos"/>
+                <a:cs typeface="Aptos"/>
+              </a:rPr>
+              <a:t>100k receipts at 1 MB</a:t>
+            </a:r>
+          </a:p>
+        </p:txBody>
+      </p:sp>
+      <p:sp>
+        <p:nvSpPr>
+          <p:cNvPr id="21" name="photos">
+            <a:extLst xmlns:a="http://schemas.openxmlformats.org/drawingml/2006/main">
+              <a:ext uri="{FF2B5EF4-FFF2-40B4-BE49-F238E27FC236}">
+                <a16:creationId xmlns:a16="http://schemas.microsoft.com/office/drawing/2014/main" id="{F339BAED-B90E-403A-9344-A37336DF0808}"/>
+              </a:ext>
+            </a:extLst>
+          </p:cNvPr>
+          <p:cNvSpPr>
+            <a:spLocks xmlns:a="http://schemas.openxmlformats.org/drawingml/2006/main" noGrp="1"/>
+          </p:cNvSpPr>
+          <p:nvPr/>
+        </p:nvSpPr>
+        <p:spPr>
+          <a:xfrm xmlns:a="http://schemas.openxmlformats.org/drawingml/2006/main">
+            <a:off x="666750" y="4381500"/>
+            <a:ext cx="1524000" cy="419100"/>
+          </a:xfrm>
+          <a:prstGeom xmlns:a="http://schemas.openxmlformats.org/drawingml/2006/main" prst="roundRect">
+            <a:avLst>
+              <a:gd name="adj" fmla="val 4545"/>
+            </a:avLst>
+          </a:prstGeom>
+          <a:solidFill xmlns:a="http://schemas.openxmlformats.org/drawingml/2006/main">
+            <a:srgbClr val="F1F6F5"/>
+          </a:solidFill>
+          <a:ln xmlns:a="http://schemas.openxmlformats.org/drawingml/2006/main" w="9525">
+            <a:solidFill>
+              <a:srgbClr val="D8E1E2"/>
+            </a:solidFill>
+            <a:prstDash val="solid"/>
+          </a:ln>
+        </p:spPr>
+        <p:txBody>
+          <a:bodyPr xmlns:a="http://schemas.openxmlformats.org/drawingml/2006/main"/>
+          <a:lstStyle xmlns:a="http://schemas.openxmlformats.org/drawingml/2006/main"/>
+          <a:p xmlns:a="http://schemas.openxmlformats.org/drawingml/2006/main">
+            <a:pPr algn="l">
+              <a:defRPr sz="1125" b="1">
+                <a:solidFill>
+                  <a:srgbClr val="17202A"/>
+                </a:solidFill>
+                <a:latin typeface="Aptos"/>
+                <a:ea typeface="Aptos"/>
+                <a:cs typeface="Aptos"/>
+              </a:defRPr>
+            </a:pPr>
+            <a:r>
+              <a:rPr sz="1125" b="1">
+                <a:solidFill>
+                  <a:srgbClr val="17202A"/>
+                </a:solidFill>
+                <a:latin typeface="Aptos"/>
+                <a:ea typeface="Aptos"/>
+                <a:cs typeface="Aptos"/>
+              </a:rPr>
+              <a:t>Photos</a:t>
+            </a:r>
+          </a:p>
+        </p:txBody>
+      </p:sp>
+      <p:sp>
+        <p:nvSpPr>
+          <p:cNvPr id="22" name="stored-as-device-original-bytes">
+            <a:extLst xmlns:a="http://schemas.openxmlformats.org/drawingml/2006/main">
+              <a:ext uri="{FF2B5EF4-FFF2-40B4-BE49-F238E27FC236}">
+                <a16:creationId xmlns:a16="http://schemas.microsoft.com/office/drawing/2014/main" id="{9A6E3165-9988-44F0-9226-E8E6DD971967}"/>
+              </a:ext>
+            </a:extLst>
+          </p:cNvPr>
+          <p:cNvSpPr>
+            <a:spLocks xmlns:a="http://schemas.openxmlformats.org/drawingml/2006/main" noGrp="1"/>
+          </p:cNvSpPr>
+          <p:nvPr/>
+        </p:nvSpPr>
+        <p:spPr>
+          <a:xfrm xmlns:a="http://schemas.openxmlformats.org/drawingml/2006/main">
+            <a:off x="2400300" y="4381500"/>
+            <a:ext cx="2266950" cy="419100"/>
+          </a:xfrm>
+          <a:prstGeom xmlns:a="http://schemas.openxmlformats.org/drawingml/2006/main" prst="roundRect">
+            <a:avLst>
+              <a:gd name="adj" fmla="val 4545"/>
+            </a:avLst>
+          </a:prstGeom>
+          <a:solidFill xmlns:a="http://schemas.openxmlformats.org/drawingml/2006/main">
+            <a:srgbClr val="F1F6F5"/>
+          </a:solidFill>
+          <a:ln xmlns:a="http://schemas.openxmlformats.org/drawingml/2006/main" w="9525">
+            <a:solidFill>
+              <a:srgbClr val="D8E1E2"/>
+            </a:solidFill>
+            <a:prstDash val="solid"/>
+          </a:ln>
+        </p:spPr>
+        <p:txBody>
+          <a:bodyPr xmlns:a="http://schemas.openxmlformats.org/drawingml/2006/main"/>
+          <a:lstStyle xmlns:a="http://schemas.openxmlformats.org/drawingml/2006/main"/>
+          <a:p xmlns:a="http://schemas.openxmlformats.org/drawingml/2006/main">
+            <a:pPr algn="l">
+              <a:defRPr sz="1050" b="0">
+                <a:solidFill>
+                  <a:srgbClr val="17202A"/>
+                </a:solidFill>
+                <a:latin typeface="Aptos"/>
+                <a:ea typeface="Aptos"/>
+                <a:cs typeface="Aptos"/>
+              </a:defRPr>
+            </a:pPr>
+            <a:r>
+              <a:rPr sz="1050" b="0">
+                <a:solidFill>
+                  <a:srgbClr val="17202A"/>
+                </a:solidFill>
+                <a:latin typeface="Aptos"/>
+                <a:ea typeface="Aptos"/>
+                <a:cs typeface="Aptos"/>
+              </a:rPr>
+              <a:t>Stored as device/original bytes</a:t>
+            </a:r>
+          </a:p>
+        </p:txBody>
+      </p:sp>
+      <p:sp>
+        <p:nvSpPr>
+          <p:cNvPr id="23" name="2-5-mb-each">
+            <a:extLst xmlns:a="http://schemas.openxmlformats.org/drawingml/2006/main">
+              <a:ext uri="{FF2B5EF4-FFF2-40B4-BE49-F238E27FC236}">
+                <a16:creationId xmlns:a16="http://schemas.microsoft.com/office/drawing/2014/main" id="{DABDD842-ADF3-4190-818B-456AD6FFDF6D}"/>
+              </a:ext>
+            </a:extLst>
+          </p:cNvPr>
+          <p:cNvSpPr>
+            <a:spLocks xmlns:a="http://schemas.openxmlformats.org/drawingml/2006/main" noGrp="1"/>
+          </p:cNvSpPr>
+          <p:nvPr/>
+        </p:nvSpPr>
+        <p:spPr>
+          <a:xfrm xmlns:a="http://schemas.openxmlformats.org/drawingml/2006/main">
+            <a:off x="4914900" y="4381500"/>
+            <a:ext cx="1809750" cy="419100"/>
+          </a:xfrm>
+          <a:prstGeom xmlns:a="http://schemas.openxmlformats.org/drawingml/2006/main" prst="roundRect">
+            <a:avLst>
+              <a:gd name="adj" fmla="val 4545"/>
+            </a:avLst>
+          </a:prstGeom>
+          <a:solidFill xmlns:a="http://schemas.openxmlformats.org/drawingml/2006/main">
+            <a:srgbClr val="F1F6F5"/>
+          </a:solidFill>
+          <a:ln xmlns:a="http://schemas.openxmlformats.org/drawingml/2006/main" w="9525">
+            <a:solidFill>
+              <a:srgbClr val="D8E1E2"/>
+            </a:solidFill>
+            <a:prstDash val="solid"/>
+          </a:ln>
+        </p:spPr>
+        <p:txBody>
+          <a:bodyPr xmlns:a="http://schemas.openxmlformats.org/drawingml/2006/main"/>
+          <a:lstStyle xmlns:a="http://schemas.openxmlformats.org/drawingml/2006/main"/>
+          <a:p xmlns:a="http://schemas.openxmlformats.org/drawingml/2006/main">
+            <a:pPr algn="l">
+              <a:defRPr sz="1050" b="0">
+                <a:solidFill>
+                  <a:srgbClr val="17202A"/>
+                </a:solidFill>
+                <a:latin typeface="Aptos"/>
+                <a:ea typeface="Aptos"/>
+                <a:cs typeface="Aptos"/>
+              </a:defRPr>
+            </a:pPr>
+            <a:r>
+              <a:rPr sz="1050" b="0">
+                <a:solidFill>
+                  <a:srgbClr val="17202A"/>
+                </a:solidFill>
+                <a:latin typeface="Aptos"/>
+                <a:ea typeface="Aptos"/>
+                <a:cs typeface="Aptos"/>
+              </a:rPr>
+              <a:t>2-5 MB each</a:t>
+            </a:r>
+          </a:p>
+        </p:txBody>
+      </p:sp>
+      <p:sp>
+        <p:nvSpPr>
+          <p:cNvPr id="24" name="33k-photos-at-3-mb">
+            <a:extLst xmlns:a="http://schemas.openxmlformats.org/drawingml/2006/main">
+              <a:ext uri="{FF2B5EF4-FFF2-40B4-BE49-F238E27FC236}">
+                <a16:creationId xmlns:a16="http://schemas.microsoft.com/office/drawing/2014/main" id="{5B573395-7704-44F8-AA2E-6FFC3F8F2879}"/>
+              </a:ext>
+            </a:extLst>
+          </p:cNvPr>
+          <p:cNvSpPr>
+            <a:spLocks xmlns:a="http://schemas.openxmlformats.org/drawingml/2006/main" noGrp="1"/>
+          </p:cNvSpPr>
+          <p:nvPr/>
+        </p:nvSpPr>
+        <p:spPr>
+          <a:xfrm xmlns:a="http://schemas.openxmlformats.org/drawingml/2006/main">
+            <a:off x="6972300" y="4381500"/>
+            <a:ext cx="3143250" cy="419100"/>
+          </a:xfrm>
+          <a:prstGeom xmlns:a="http://schemas.openxmlformats.org/drawingml/2006/main" prst="roundRect">
+            <a:avLst>
+              <a:gd name="adj" fmla="val 4545"/>
+            </a:avLst>
+          </a:prstGeom>
+          <a:solidFill xmlns:a="http://schemas.openxmlformats.org/drawingml/2006/main">
+            <a:srgbClr val="F1F6F5"/>
+          </a:solidFill>
+          <a:ln xmlns:a="http://schemas.openxmlformats.org/drawingml/2006/main" w="9525">
+            <a:solidFill>
+              <a:srgbClr val="D8E1E2"/>
+            </a:solidFill>
+            <a:prstDash val="solid"/>
+          </a:ln>
+        </p:spPr>
+        <p:txBody>
+          <a:bodyPr xmlns:a="http://schemas.openxmlformats.org/drawingml/2006/main"/>
+          <a:lstStyle xmlns:a="http://schemas.openxmlformats.org/drawingml/2006/main"/>
+          <a:p xmlns:a="http://schemas.openxmlformats.org/drawingml/2006/main">
+            <a:pPr algn="l">
+              <a:defRPr sz="1050" b="0">
+                <a:solidFill>
+                  <a:srgbClr val="17202A"/>
+                </a:solidFill>
+                <a:latin typeface="Aptos"/>
+                <a:ea typeface="Aptos"/>
+                <a:cs typeface="Aptos"/>
+              </a:defRPr>
+            </a:pPr>
+            <a:r>
+              <a:rPr sz="1050" b="0">
+                <a:solidFill>
+                  <a:srgbClr val="17202A"/>
+                </a:solidFill>
+                <a:latin typeface="Aptos"/>
+                <a:ea typeface="Aptos"/>
+                <a:cs typeface="Aptos"/>
+              </a:rPr>
+              <a:t>33k photos at 3 MB</a:t>
+            </a:r>
+          </a:p>
+        </p:txBody>
+      </p:sp>
+      <p:sp>
+        <p:nvSpPr>
+          <p:cNvPr id="25" name="trip-backgrounds-avatars">
+            <a:extLst xmlns:a="http://schemas.openxmlformats.org/drawingml/2006/main">
+              <a:ext uri="{FF2B5EF4-FFF2-40B4-BE49-F238E27FC236}">
+                <a16:creationId xmlns:a16="http://schemas.microsoft.com/office/drawing/2014/main" id="{B3B3B8F8-189D-4FAA-8576-92DD95EADA67}"/>
+              </a:ext>
+            </a:extLst>
+          </p:cNvPr>
+          <p:cNvSpPr>
+            <a:spLocks xmlns:a="http://schemas.openxmlformats.org/drawingml/2006/main" noGrp="1"/>
+          </p:cNvSpPr>
+          <p:nvPr/>
+        </p:nvSpPr>
+        <p:spPr>
+          <a:xfrm xmlns:a="http://schemas.openxmlformats.org/drawingml/2006/main">
+            <a:off x="666750" y="4876800"/>
+            <a:ext cx="1524000" cy="419100"/>
+          </a:xfrm>
+          <a:prstGeom xmlns:a="http://schemas.openxmlformats.org/drawingml/2006/main" prst="roundRect">
+            <a:avLst>
+              <a:gd name="adj" fmla="val 4545"/>
+            </a:avLst>
+          </a:prstGeom>
+          <a:solidFill xmlns:a="http://schemas.openxmlformats.org/drawingml/2006/main">
+            <a:srgbClr val="FFFFFF"/>
+          </a:solidFill>
+          <a:ln xmlns:a="http://schemas.openxmlformats.org/drawingml/2006/main" w="9525">
+            <a:solidFill>
+              <a:srgbClr val="D8E1E2"/>
+            </a:solidFill>
+            <a:prstDash val="solid"/>
+          </a:ln>
+        </p:spPr>
+        <p:txBody>
+          <a:bodyPr xmlns:a="http://schemas.openxmlformats.org/drawingml/2006/main"/>
+          <a:lstStyle xmlns:a="http://schemas.openxmlformats.org/drawingml/2006/main"/>
+          <a:p xmlns:a="http://schemas.openxmlformats.org/drawingml/2006/main">
+            <a:pPr algn="l">
+              <a:defRPr sz="1125" b="1">
+                <a:solidFill>
+                  <a:srgbClr val="17202A"/>
+                </a:solidFill>
+                <a:latin typeface="Aptos"/>
+                <a:ea typeface="Aptos"/>
+                <a:cs typeface="Aptos"/>
+              </a:defRPr>
+            </a:pPr>
+            <a:r>
+              <a:rPr sz="1125" b="1">
+                <a:solidFill>
+                  <a:srgbClr val="17202A"/>
+                </a:solidFill>
+                <a:latin typeface="Aptos"/>
+                <a:ea typeface="Aptos"/>
+                <a:cs typeface="Aptos"/>
+              </a:rPr>
+              <a:t>Trip backgrounds / avatars</a:t>
+            </a:r>
+          </a:p>
+        </p:txBody>
+      </p:sp>
+      <p:sp>
+        <p:nvSpPr>
+          <p:cNvPr id="26" name="stored-as-original-image-bytes">
+            <a:extLst xmlns:a="http://schemas.openxmlformats.org/drawingml/2006/main">
+              <a:ext uri="{FF2B5EF4-FFF2-40B4-BE49-F238E27FC236}">
+                <a16:creationId xmlns:a16="http://schemas.microsoft.com/office/drawing/2014/main" id="{4E02DEC4-F80E-4AE3-A777-D660E7705C2B}"/>
+              </a:ext>
+            </a:extLst>
+          </p:cNvPr>
+          <p:cNvSpPr>
+            <a:spLocks xmlns:a="http://schemas.openxmlformats.org/drawingml/2006/main" noGrp="1"/>
+          </p:cNvSpPr>
+          <p:nvPr/>
+        </p:nvSpPr>
+        <p:spPr>
+          <a:xfrm xmlns:a="http://schemas.openxmlformats.org/drawingml/2006/main">
+            <a:off x="2400300" y="4876800"/>
+            <a:ext cx="2266950" cy="419100"/>
+          </a:xfrm>
+          <a:prstGeom xmlns:a="http://schemas.openxmlformats.org/drawingml/2006/main" prst="roundRect">
+            <a:avLst>
+              <a:gd name="adj" fmla="val 4545"/>
+            </a:avLst>
+          </a:prstGeom>
+          <a:solidFill xmlns:a="http://schemas.openxmlformats.org/drawingml/2006/main">
+            <a:srgbClr val="FFFFFF"/>
+          </a:solidFill>
+          <a:ln xmlns:a="http://schemas.openxmlformats.org/drawingml/2006/main" w="9525">
+            <a:solidFill>
+              <a:srgbClr val="D8E1E2"/>
+            </a:solidFill>
+            <a:prstDash val="solid"/>
+          </a:ln>
+        </p:spPr>
+        <p:txBody>
+          <a:bodyPr xmlns:a="http://schemas.openxmlformats.org/drawingml/2006/main"/>
+          <a:lstStyle xmlns:a="http://schemas.openxmlformats.org/drawingml/2006/main"/>
+          <a:p xmlns:a="http://schemas.openxmlformats.org/drawingml/2006/main">
+            <a:pPr algn="l">
+              <a:defRPr sz="1050" b="0">
+                <a:solidFill>
+                  <a:srgbClr val="17202A"/>
+                </a:solidFill>
+                <a:latin typeface="Aptos"/>
+                <a:ea typeface="Aptos"/>
+                <a:cs typeface="Aptos"/>
+              </a:defRPr>
+            </a:pPr>
+            <a:r>
+              <a:rPr sz="1050" b="0">
+                <a:solidFill>
+                  <a:srgbClr val="17202A"/>
+                </a:solidFill>
+                <a:latin typeface="Aptos"/>
+                <a:ea typeface="Aptos"/>
+                <a:cs typeface="Aptos"/>
+              </a:rPr>
+              <a:t>Stored as original image bytes</a:t>
+            </a:r>
+          </a:p>
+        </p:txBody>
+      </p:sp>
+      <p:sp>
+        <p:nvSpPr>
+          <p:cNvPr id="27" name="0-5-5-mb-each">
+            <a:extLst xmlns:a="http://schemas.openxmlformats.org/drawingml/2006/main">
+              <a:ext uri="{FF2B5EF4-FFF2-40B4-BE49-F238E27FC236}">
+                <a16:creationId xmlns:a16="http://schemas.microsoft.com/office/drawing/2014/main" id="{EA20B839-0092-4A2A-A687-D67DE0568179}"/>
+              </a:ext>
+            </a:extLst>
+          </p:cNvPr>
+          <p:cNvSpPr>
+            <a:spLocks xmlns:a="http://schemas.openxmlformats.org/drawingml/2006/main" noGrp="1"/>
+          </p:cNvSpPr>
+          <p:nvPr/>
+        </p:nvSpPr>
+        <p:spPr>
+          <a:xfrm xmlns:a="http://schemas.openxmlformats.org/drawingml/2006/main">
+            <a:off x="4914900" y="4876800"/>
+            <a:ext cx="1809750" cy="419100"/>
+          </a:xfrm>
+          <a:prstGeom xmlns:a="http://schemas.openxmlformats.org/drawingml/2006/main" prst="roundRect">
+            <a:avLst>
+              <a:gd name="adj" fmla="val 4545"/>
+            </a:avLst>
+          </a:prstGeom>
+          <a:solidFill xmlns:a="http://schemas.openxmlformats.org/drawingml/2006/main">
+            <a:srgbClr val="FFFFFF"/>
+          </a:solidFill>
+          <a:ln xmlns:a="http://schemas.openxmlformats.org/drawingml/2006/main" w="9525">
+            <a:solidFill>
+              <a:srgbClr val="D8E1E2"/>
+            </a:solidFill>
+            <a:prstDash val="solid"/>
+          </a:ln>
+        </p:spPr>
+        <p:txBody>
+          <a:bodyPr xmlns:a="http://schemas.openxmlformats.org/drawingml/2006/main"/>
+          <a:lstStyle xmlns:a="http://schemas.openxmlformats.org/drawingml/2006/main"/>
+          <a:p xmlns:a="http://schemas.openxmlformats.org/drawingml/2006/main">
+            <a:pPr algn="l">
+              <a:defRPr sz="1050" b="0">
+                <a:solidFill>
+                  <a:srgbClr val="17202A"/>
+                </a:solidFill>
+                <a:latin typeface="Aptos"/>
+                <a:ea typeface="Aptos"/>
+                <a:cs typeface="Aptos"/>
+              </a:defRPr>
+            </a:pPr>
+            <a:r>
+              <a:rPr sz="1050" b="0">
+                <a:solidFill>
+                  <a:srgbClr val="17202A"/>
+                </a:solidFill>
+                <a:latin typeface="Aptos"/>
+                <a:ea typeface="Aptos"/>
+                <a:cs typeface="Aptos"/>
+              </a:rPr>
+              <a:t>0.5-5 MB each</a:t>
+            </a:r>
+          </a:p>
+        </p:txBody>
+      </p:sp>
+      <p:sp>
+        <p:nvSpPr>
+          <p:cNvPr id="28" name="fine-at-beta-compress-later">
+            <a:extLst xmlns:a="http://schemas.openxmlformats.org/drawingml/2006/main">
+              <a:ext uri="{FF2B5EF4-FFF2-40B4-BE49-F238E27FC236}">
+                <a16:creationId xmlns:a16="http://schemas.microsoft.com/office/drawing/2014/main" id="{8DA7054B-4DF3-4932-9F55-18FF8DE31729}"/>
+              </a:ext>
+            </a:extLst>
+          </p:cNvPr>
+          <p:cNvSpPr>
+            <a:spLocks xmlns:a="http://schemas.openxmlformats.org/drawingml/2006/main" noGrp="1"/>
+          </p:cNvSpPr>
+          <p:nvPr/>
+        </p:nvSpPr>
+        <p:spPr>
+          <a:xfrm xmlns:a="http://schemas.openxmlformats.org/drawingml/2006/main">
+            <a:off x="6972300" y="4876800"/>
+            <a:ext cx="3143250" cy="419100"/>
+          </a:xfrm>
+          <a:prstGeom xmlns:a="http://schemas.openxmlformats.org/drawingml/2006/main" prst="roundRect">
+            <a:avLst>
+              <a:gd name="adj" fmla="val 4545"/>
+            </a:avLst>
+          </a:prstGeom>
+          <a:solidFill xmlns:a="http://schemas.openxmlformats.org/drawingml/2006/main">
+            <a:srgbClr val="FFFFFF"/>
+          </a:solidFill>
+          <a:ln xmlns:a="http://schemas.openxmlformats.org/drawingml/2006/main" w="9525">
+            <a:solidFill>
+              <a:srgbClr val="D8E1E2"/>
+            </a:solidFill>
+            <a:prstDash val="solid"/>
+          </a:ln>
+        </p:spPr>
+        <p:txBody>
+          <a:bodyPr xmlns:a="http://schemas.openxmlformats.org/drawingml/2006/main"/>
+          <a:lstStyle xmlns:a="http://schemas.openxmlformats.org/drawingml/2006/main"/>
+          <a:p xmlns:a="http://schemas.openxmlformats.org/drawingml/2006/main">
+            <a:pPr algn="l">
+              <a:defRPr sz="1050" b="0">
+                <a:solidFill>
+                  <a:srgbClr val="17202A"/>
+                </a:solidFill>
+                <a:latin typeface="Aptos"/>
+                <a:ea typeface="Aptos"/>
+                <a:cs typeface="Aptos"/>
+              </a:defRPr>
+            </a:pPr>
+            <a:r>
+              <a:rPr sz="1050" b="0">
+                <a:solidFill>
+                  <a:srgbClr val="17202A"/>
+                </a:solidFill>
+                <a:latin typeface="Aptos"/>
+                <a:ea typeface="Aptos"/>
+                <a:cs typeface="Aptos"/>
+              </a:rPr>
+              <a:t>Fine at beta; compress later</a:t>
+            </a:r>
+          </a:p>
+        </p:txBody>
+      </p:sp>
+      <p:sp>
+        <p:nvSpPr>
+          <p:cNvPr id="29" name="videos">
+            <a:extLst xmlns:a="http://schemas.openxmlformats.org/drawingml/2006/main">
+              <a:ext uri="{FF2B5EF4-FFF2-40B4-BE49-F238E27FC236}">
+                <a16:creationId xmlns:a16="http://schemas.microsoft.com/office/drawing/2014/main" id="{2F393910-066A-4F87-89DF-2E3862D7E8CE}"/>
+              </a:ext>
+            </a:extLst>
+          </p:cNvPr>
+          <p:cNvSpPr>
+            <a:spLocks xmlns:a="http://schemas.openxmlformats.org/drawingml/2006/main" noGrp="1"/>
+          </p:cNvSpPr>
+          <p:nvPr/>
+        </p:nvSpPr>
+        <p:spPr>
+          <a:xfrm xmlns:a="http://schemas.openxmlformats.org/drawingml/2006/main">
+            <a:off x="666750" y="5372100"/>
+            <a:ext cx="1524000" cy="419100"/>
+          </a:xfrm>
+          <a:prstGeom xmlns:a="http://schemas.openxmlformats.org/drawingml/2006/main" prst="roundRect">
+            <a:avLst>
+              <a:gd name="adj" fmla="val 4545"/>
+            </a:avLst>
+          </a:prstGeom>
+          <a:solidFill xmlns:a="http://schemas.openxmlformats.org/drawingml/2006/main">
+            <a:srgbClr val="F1F6F5"/>
+          </a:solidFill>
+          <a:ln xmlns:a="http://schemas.openxmlformats.org/drawingml/2006/main" w="9525">
+            <a:solidFill>
+              <a:srgbClr val="D8E1E2"/>
+            </a:solidFill>
+            <a:prstDash val="solid"/>
+          </a:ln>
+        </p:spPr>
+        <p:txBody>
+          <a:bodyPr xmlns:a="http://schemas.openxmlformats.org/drawingml/2006/main"/>
+          <a:lstStyle xmlns:a="http://schemas.openxmlformats.org/drawingml/2006/main"/>
+          <a:p xmlns:a="http://schemas.openxmlformats.org/drawingml/2006/main">
+            <a:pPr algn="l">
+              <a:defRPr sz="1125" b="1">
+                <a:solidFill>
+                  <a:srgbClr val="17202A"/>
+                </a:solidFill>
+                <a:latin typeface="Aptos"/>
+                <a:ea typeface="Aptos"/>
+                <a:cs typeface="Aptos"/>
+              </a:defRPr>
+            </a:pPr>
+            <a:r>
+              <a:rPr sz="1125" b="1">
+                <a:solidFill>
+                  <a:srgbClr val="17202A"/>
+                </a:solidFill>
+                <a:latin typeface="Aptos"/>
+                <a:ea typeface="Aptos"/>
+                <a:cs typeface="Aptos"/>
+              </a:rPr>
+              <a:t>Videos</a:t>
+            </a:r>
+          </a:p>
+        </p:txBody>
+      </p:sp>
+      <p:sp>
+        <p:nvSpPr>
+          <p:cNvPr id="30" name="stored-as-original-bytes-app-caps-upload-cache">
+            <a:extLst xmlns:a="http://schemas.openxmlformats.org/drawingml/2006/main">
+              <a:ext uri="{FF2B5EF4-FFF2-40B4-BE49-F238E27FC236}">
+                <a16:creationId xmlns:a16="http://schemas.microsoft.com/office/drawing/2014/main" id="{69F55128-6371-43F3-B852-E535A45B7D1A}"/>
+              </a:ext>
+            </a:extLst>
+          </p:cNvPr>
+          <p:cNvSpPr>
+            <a:spLocks xmlns:a="http://schemas.openxmlformats.org/drawingml/2006/main" noGrp="1"/>
+          </p:cNvSpPr>
+          <p:nvPr/>
+        </p:nvSpPr>
+        <p:spPr>
+          <a:xfrm xmlns:a="http://schemas.openxmlformats.org/drawingml/2006/main">
+            <a:off x="2400300" y="5372100"/>
+            <a:ext cx="2266950" cy="419100"/>
+          </a:xfrm>
+          <a:prstGeom xmlns:a="http://schemas.openxmlformats.org/drawingml/2006/main" prst="roundRect">
+            <a:avLst>
+              <a:gd name="adj" fmla="val 4545"/>
+            </a:avLst>
+          </a:prstGeom>
+          <a:solidFill xmlns:a="http://schemas.openxmlformats.org/drawingml/2006/main">
+            <a:srgbClr val="F1F6F5"/>
+          </a:solidFill>
+          <a:ln xmlns:a="http://schemas.openxmlformats.org/drawingml/2006/main" w="9525">
+            <a:solidFill>
+              <a:srgbClr val="D8E1E2"/>
+            </a:solidFill>
+            <a:prstDash val="solid"/>
+          </a:ln>
+        </p:spPr>
+        <p:txBody>
+          <a:bodyPr xmlns:a="http://schemas.openxmlformats.org/drawingml/2006/main"/>
+          <a:lstStyle xmlns:a="http://schemas.openxmlformats.org/drawingml/2006/main"/>
+          <a:p xmlns:a="http://schemas.openxmlformats.org/drawingml/2006/main">
+            <a:pPr algn="l">
+              <a:defRPr sz="1050" b="0">
+                <a:solidFill>
+                  <a:srgbClr val="17202A"/>
+                </a:solidFill>
+                <a:latin typeface="Aptos"/>
+                <a:ea typeface="Aptos"/>
+                <a:cs typeface="Aptos"/>
+              </a:defRPr>
+            </a:pPr>
+            <a:r>
+              <a:rPr sz="1050" b="0">
+                <a:solidFill>
+                  <a:srgbClr val="17202A"/>
+                </a:solidFill>
+                <a:latin typeface="Aptos"/>
+                <a:ea typeface="Aptos"/>
+                <a:cs typeface="Aptos"/>
+              </a:rPr>
+              <a:t>Stored as original bytes; app caps upload/cache</a:t>
+            </a:r>
+          </a:p>
+        </p:txBody>
+      </p:sp>
+      <p:sp>
+        <p:nvSpPr>
+          <p:cNvPr id="31" name="up-to-100-mb-each">
+            <a:extLst xmlns:a="http://schemas.openxmlformats.org/drawingml/2006/main">
+              <a:ext uri="{FF2B5EF4-FFF2-40B4-BE49-F238E27FC236}">
+                <a16:creationId xmlns:a16="http://schemas.microsoft.com/office/drawing/2014/main" id="{4AA9A78F-4D23-44DA-ACFE-C13260E3ED09}"/>
+              </a:ext>
+            </a:extLst>
+          </p:cNvPr>
+          <p:cNvSpPr>
+            <a:spLocks xmlns:a="http://schemas.openxmlformats.org/drawingml/2006/main" noGrp="1"/>
+          </p:cNvSpPr>
+          <p:nvPr/>
+        </p:nvSpPr>
+        <p:spPr>
+          <a:xfrm xmlns:a="http://schemas.openxmlformats.org/drawingml/2006/main">
+            <a:off x="4914900" y="5372100"/>
+            <a:ext cx="1809750" cy="419100"/>
+          </a:xfrm>
+          <a:prstGeom xmlns:a="http://schemas.openxmlformats.org/drawingml/2006/main" prst="roundRect">
+            <a:avLst>
+              <a:gd name="adj" fmla="val 4545"/>
+            </a:avLst>
+          </a:prstGeom>
+          <a:solidFill xmlns:a="http://schemas.openxmlformats.org/drawingml/2006/main">
+            <a:srgbClr val="F1F6F5"/>
+          </a:solidFill>
+          <a:ln xmlns:a="http://schemas.openxmlformats.org/drawingml/2006/main" w="9525">
+            <a:solidFill>
+              <a:srgbClr val="D8E1E2"/>
+            </a:solidFill>
+            <a:prstDash val="solid"/>
+          </a:ln>
+        </p:spPr>
+        <p:txBody>
+          <a:bodyPr xmlns:a="http://schemas.openxmlformats.org/drawingml/2006/main"/>
+          <a:lstStyle xmlns:a="http://schemas.openxmlformats.org/drawingml/2006/main"/>
+          <a:p xmlns:a="http://schemas.openxmlformats.org/drawingml/2006/main">
+            <a:pPr algn="l">
+              <a:defRPr sz="1050" b="0">
+                <a:solidFill>
+                  <a:srgbClr val="17202A"/>
+                </a:solidFill>
+                <a:latin typeface="Aptos"/>
+                <a:ea typeface="Aptos"/>
+                <a:cs typeface="Aptos"/>
+              </a:defRPr>
+            </a:pPr>
+            <a:r>
+              <a:rPr sz="1050" b="0">
+                <a:solidFill>
+                  <a:srgbClr val="17202A"/>
+                </a:solidFill>
+                <a:latin typeface="Aptos"/>
+                <a:ea typeface="Aptos"/>
+                <a:cs typeface="Aptos"/>
+              </a:rPr>
+              <a:t>up to 100 MB each</a:t>
+            </a:r>
+          </a:p>
+        </p:txBody>
+      </p:sp>
+      <p:sp>
+        <p:nvSpPr>
+          <p:cNvPr id="32" name="1k-max-size-videos">
+            <a:extLst xmlns:a="http://schemas.openxmlformats.org/drawingml/2006/main">
+              <a:ext uri="{FF2B5EF4-FFF2-40B4-BE49-F238E27FC236}">
+                <a16:creationId xmlns:a16="http://schemas.microsoft.com/office/drawing/2014/main" id="{B56FF600-E4A9-4691-8B9F-84D7A829AC94}"/>
+              </a:ext>
+            </a:extLst>
+          </p:cNvPr>
+          <p:cNvSpPr>
+            <a:spLocks xmlns:a="http://schemas.openxmlformats.org/drawingml/2006/main" noGrp="1"/>
+          </p:cNvSpPr>
+          <p:nvPr/>
+        </p:nvSpPr>
+        <p:spPr>
+          <a:xfrm xmlns:a="http://schemas.openxmlformats.org/drawingml/2006/main">
+            <a:off x="6972300" y="5372100"/>
+            <a:ext cx="3143250" cy="419100"/>
+          </a:xfrm>
+          <a:prstGeom xmlns:a="http://schemas.openxmlformats.org/drawingml/2006/main" prst="roundRect">
+            <a:avLst>
+              <a:gd name="adj" fmla="val 4545"/>
+            </a:avLst>
+          </a:prstGeom>
+          <a:solidFill xmlns:a="http://schemas.openxmlformats.org/drawingml/2006/main">
+            <a:srgbClr val="F1F6F5"/>
+          </a:solidFill>
+          <a:ln xmlns:a="http://schemas.openxmlformats.org/drawingml/2006/main" w="9525">
+            <a:solidFill>
+              <a:srgbClr val="D8E1E2"/>
+            </a:solidFill>
+            <a:prstDash val="solid"/>
+          </a:ln>
+        </p:spPr>
+        <p:txBody>
+          <a:bodyPr xmlns:a="http://schemas.openxmlformats.org/drawingml/2006/main"/>
+          <a:lstStyle xmlns:a="http://schemas.openxmlformats.org/drawingml/2006/main"/>
+          <a:p xmlns:a="http://schemas.openxmlformats.org/drawingml/2006/main">
+            <a:pPr algn="l">
+              <a:defRPr sz="1050" b="0">
+                <a:solidFill>
+                  <a:srgbClr val="17202A"/>
+                </a:solidFill>
+                <a:latin typeface="Aptos"/>
+                <a:ea typeface="Aptos"/>
+                <a:cs typeface="Aptos"/>
+              </a:defRPr>
+            </a:pPr>
+            <a:r>
+              <a:rPr sz="1050" b="0">
+                <a:solidFill>
+                  <a:srgbClr val="17202A"/>
+                </a:solidFill>
+                <a:latin typeface="Aptos"/>
+                <a:ea typeface="Aptos"/>
+                <a:cs typeface="Aptos"/>
+              </a:rPr>
+              <a:t>1k max-size videos</a:t>
+            </a:r>
+          </a:p>
+        </p:txBody>
+      </p:sp>
+      <p:sp>
+        <p:nvSpPr>
+          <p:cNvPr id="33" name="">
+            <a:extLst xmlns:a="http://schemas.openxmlformats.org/drawingml/2006/main">
+              <a:ext uri="{FF2B5EF4-FFF2-40B4-BE49-F238E27FC236}">
+                <a16:creationId xmlns:a16="http://schemas.microsoft.com/office/drawing/2014/main" id="{0B56F16D-D8E3-47E7-8A35-063BC1C230AA}"/>
+              </a:ext>
+            </a:extLst>
+          </p:cNvPr>
+          <p:cNvSpPr>
+            <a:spLocks xmlns:a="http://schemas.openxmlformats.org/drawingml/2006/main" noGrp="1"/>
+          </p:cNvSpPr>
+          <p:nvPr/>
+        </p:nvSpPr>
+        <p:spPr>
+          <a:xfrm xmlns:a="http://schemas.openxmlformats.org/drawingml/2006/main">
+            <a:off x="742950" y="6057900"/>
+            <a:ext cx="9906000" cy="400050"/>
           </a:xfrm>
           <a:prstGeom xmlns:a="http://schemas.openxmlformats.org/drawingml/2006/main" prst="rect">
             <a:avLst/>
@@ -4112,470 +6132,25 @@
           <a:lstStyle xmlns:a="http://schemas.openxmlformats.org/drawingml/2006/main"/>
           <a:p xmlns:a="http://schemas.openxmlformats.org/drawingml/2006/main">
             <a:pPr algn="l">
-              <a:defRPr sz="1500" b="0">
-                <a:solidFill>
-                  <a:srgbClr val="17202A"/>
-                </a:solidFill>
-                <a:latin typeface="Aptos"/>
-                <a:ea typeface="Aptos"/>
-                <a:cs typeface="Aptos"/>
-              </a:defRPr>
-            </a:pPr>
-            <a:r>
-              <a:rPr sz="1500" b="0">
-                <a:solidFill>
-                  <a:srgbClr val="17202A"/>
-                </a:solidFill>
-                <a:latin typeface="Aptos"/>
-                <a:ea typeface="Aptos"/>
-                <a:cs typeface="Aptos"/>
-              </a:rPr>
-              <a:t>Close the remaining launch gates: DR/PITR proof, Crashlytics device proof, App Links device proof, and prod Brevo secret cleanup.</a:t>
-            </a:r>
-          </a:p>
-        </p:txBody>
-      </p:sp>
-      <p:sp>
-        <p:nvSpPr>
-          <p:cNvPr id="7" name="bullet-dot">
-            <a:extLst xmlns:a="http://schemas.openxmlformats.org/drawingml/2006/main">
-              <a:ext uri="{FF2B5EF4-FFF2-40B4-BE49-F238E27FC236}">
-                <a16:creationId xmlns:a16="http://schemas.microsoft.com/office/drawing/2014/main" id="{DA88AC8A-3BD0-4AF8-806D-673406CB4B6B}"/>
-              </a:ext>
-            </a:extLst>
-          </p:cNvPr>
-          <p:cNvSpPr>
-            <a:spLocks xmlns:a="http://schemas.openxmlformats.org/drawingml/2006/main" noGrp="1"/>
-          </p:cNvSpPr>
-          <p:nvPr/>
-        </p:nvSpPr>
-        <p:spPr>
-          <a:xfrm xmlns:a="http://schemas.openxmlformats.org/drawingml/2006/main">
-            <a:off x="876300" y="2047875"/>
-            <a:ext cx="85725" cy="85725"/>
-          </a:xfrm>
-          <a:prstGeom xmlns:a="http://schemas.openxmlformats.org/drawingml/2006/main" prst="ellipse">
-            <a:avLst/>
-          </a:prstGeom>
-          <a:solidFill xmlns:a="http://schemas.openxmlformats.org/drawingml/2006/main">
-            <a:srgbClr val="FF5B4D"/>
-          </a:solidFill>
-          <a:ln xmlns:a="http://schemas.openxmlformats.org/drawingml/2006/main" w="0">
-            <a:solidFill>
-              <a:srgbClr val="FF5B4D"/>
-            </a:solidFill>
-            <a:prstDash val="solid"/>
-          </a:ln>
-        </p:spPr>
-      </p:sp>
-      <p:sp>
-        <p:nvSpPr>
-          <p:cNvPr id="8" name="">
-            <a:extLst xmlns:a="http://schemas.openxmlformats.org/drawingml/2006/main">
-              <a:ext uri="{FF2B5EF4-FFF2-40B4-BE49-F238E27FC236}">
-                <a16:creationId xmlns:a16="http://schemas.microsoft.com/office/drawing/2014/main" id="{382B4748-876E-4A00-AA36-169B7DB720FA}"/>
-              </a:ext>
-            </a:extLst>
-          </p:cNvPr>
-          <p:cNvSpPr>
-            <a:spLocks xmlns:a="http://schemas.openxmlformats.org/drawingml/2006/main" noGrp="1"/>
-          </p:cNvSpPr>
-          <p:nvPr/>
-        </p:nvSpPr>
-        <p:spPr>
-          <a:xfrm xmlns:a="http://schemas.openxmlformats.org/drawingml/2006/main">
-            <a:off x="1047750" y="1971675"/>
-            <a:ext cx="9829800" cy="552450"/>
-          </a:xfrm>
-          <a:prstGeom xmlns:a="http://schemas.openxmlformats.org/drawingml/2006/main" prst="rect">
-            <a:avLst/>
-          </a:prstGeom>
-          <a:noFill xmlns:a="http://schemas.openxmlformats.org/drawingml/2006/main"/>
-          <a:ln xmlns:a="http://schemas.openxmlformats.org/drawingml/2006/main" w="0">
-            <a:noFill/>
-            <a:prstDash val="solid"/>
-          </a:ln>
-        </p:spPr>
-        <p:txBody>
-          <a:bodyPr xmlns:a="http://schemas.openxmlformats.org/drawingml/2006/main"/>
-          <a:lstStyle xmlns:a="http://schemas.openxmlformats.org/drawingml/2006/main"/>
-          <a:p xmlns:a="http://schemas.openxmlformats.org/drawingml/2006/main">
-            <a:pPr algn="l">
-              <a:defRPr sz="1500" b="0">
-                <a:solidFill>
-                  <a:srgbClr val="17202A"/>
-                </a:solidFill>
-                <a:latin typeface="Aptos"/>
-                <a:ea typeface="Aptos"/>
-                <a:cs typeface="Aptos"/>
-              </a:defRPr>
-            </a:pPr>
-            <a:r>
-              <a:rPr sz="1500" b="0">
-                <a:solidFill>
-                  <a:srgbClr val="17202A"/>
-                </a:solidFill>
-                <a:latin typeface="Aptos"/>
-                <a:ea typeface="Aptos"/>
-                <a:cs typeface="Aptos"/>
-              </a:rPr>
-              <a:t>Add a weekly provider dashboard: Supabase MAU/storage/egress/CPU, OTP sends, fallback sends, PostHog events, crash-free users.</a:t>
-            </a:r>
-          </a:p>
-        </p:txBody>
-      </p:sp>
-      <p:sp>
-        <p:nvSpPr>
-          <p:cNvPr id="9" name="bullet-dot">
-            <a:extLst xmlns:a="http://schemas.openxmlformats.org/drawingml/2006/main">
-              <a:ext uri="{FF2B5EF4-FFF2-40B4-BE49-F238E27FC236}">
-                <a16:creationId xmlns:a16="http://schemas.microsoft.com/office/drawing/2014/main" id="{4B1709EC-9875-4BE4-8A29-97EBADF6B524}"/>
-              </a:ext>
-            </a:extLst>
-          </p:cNvPr>
-          <p:cNvSpPr>
-            <a:spLocks xmlns:a="http://schemas.openxmlformats.org/drawingml/2006/main" noGrp="1"/>
-          </p:cNvSpPr>
-          <p:nvPr/>
-        </p:nvSpPr>
-        <p:spPr>
-          <a:xfrm xmlns:a="http://schemas.openxmlformats.org/drawingml/2006/main">
-            <a:off x="876300" y="2571750"/>
-            <a:ext cx="85725" cy="85725"/>
-          </a:xfrm>
-          <a:prstGeom xmlns:a="http://schemas.openxmlformats.org/drawingml/2006/main" prst="ellipse">
-            <a:avLst/>
-          </a:prstGeom>
-          <a:solidFill xmlns:a="http://schemas.openxmlformats.org/drawingml/2006/main">
-            <a:srgbClr val="FF5B4D"/>
-          </a:solidFill>
-          <a:ln xmlns:a="http://schemas.openxmlformats.org/drawingml/2006/main" w="0">
-            <a:solidFill>
-              <a:srgbClr val="FF5B4D"/>
-            </a:solidFill>
-            <a:prstDash val="solid"/>
-          </a:ln>
-        </p:spPr>
-      </p:sp>
-      <p:sp>
-        <p:nvSpPr>
-          <p:cNvPr id="10" name="">
-            <a:extLst xmlns:a="http://schemas.openxmlformats.org/drawingml/2006/main">
-              <a:ext uri="{FF2B5EF4-FFF2-40B4-BE49-F238E27FC236}">
-                <a16:creationId xmlns:a16="http://schemas.microsoft.com/office/drawing/2014/main" id="{9CC21BE2-4706-47B1-AA80-5E0768BE9C3A}"/>
-              </a:ext>
-            </a:extLst>
-          </p:cNvPr>
-          <p:cNvSpPr>
-            <a:spLocks xmlns:a="http://schemas.openxmlformats.org/drawingml/2006/main" noGrp="1"/>
-          </p:cNvSpPr>
-          <p:nvPr/>
-        </p:nvSpPr>
-        <p:spPr>
-          <a:xfrm xmlns:a="http://schemas.openxmlformats.org/drawingml/2006/main">
-            <a:off x="1047750" y="2495550"/>
-            <a:ext cx="9829800" cy="552450"/>
-          </a:xfrm>
-          <a:prstGeom xmlns:a="http://schemas.openxmlformats.org/drawingml/2006/main" prst="rect">
-            <a:avLst/>
-          </a:prstGeom>
-          <a:noFill xmlns:a="http://schemas.openxmlformats.org/drawingml/2006/main"/>
-          <a:ln xmlns:a="http://schemas.openxmlformats.org/drawingml/2006/main" w="0">
-            <a:noFill/>
-            <a:prstDash val="solid"/>
-          </a:ln>
-        </p:spPr>
-        <p:txBody>
-          <a:bodyPr xmlns:a="http://schemas.openxmlformats.org/drawingml/2006/main"/>
-          <a:lstStyle xmlns:a="http://schemas.openxmlformats.org/drawingml/2006/main"/>
-          <a:p xmlns:a="http://schemas.openxmlformats.org/drawingml/2006/main">
-            <a:pPr algn="l">
-              <a:defRPr sz="1500" b="0">
-                <a:solidFill>
-                  <a:srgbClr val="17202A"/>
-                </a:solidFill>
-                <a:latin typeface="Aptos"/>
-                <a:ea typeface="Aptos"/>
-                <a:cs typeface="Aptos"/>
-              </a:defRPr>
-            </a:pPr>
-            <a:r>
-              <a:rPr sz="1500" b="0">
-                <a:solidFill>
-                  <a:srgbClr val="17202A"/>
-                </a:solidFill>
-                <a:latin typeface="Aptos"/>
-                <a:ea typeface="Aptos"/>
-                <a:cs typeface="Aptos"/>
-              </a:rPr>
-              <a:t>Define cost per active trip and cost per paying user before TripReel/action-cam; do not ship unlimited media without fair-use controls.</a:t>
-            </a:r>
-          </a:p>
-        </p:txBody>
-      </p:sp>
-      <p:sp>
-        <p:nvSpPr>
-          <p:cNvPr id="11" name="bullet-dot">
-            <a:extLst xmlns:a="http://schemas.openxmlformats.org/drawingml/2006/main">
-              <a:ext uri="{FF2B5EF4-FFF2-40B4-BE49-F238E27FC236}">
-                <a16:creationId xmlns:a16="http://schemas.microsoft.com/office/drawing/2014/main" id="{9264560D-693A-4AF4-BC91-3CB0405267C7}"/>
-              </a:ext>
-            </a:extLst>
-          </p:cNvPr>
-          <p:cNvSpPr>
-            <a:spLocks xmlns:a="http://schemas.openxmlformats.org/drawingml/2006/main" noGrp="1"/>
-          </p:cNvSpPr>
-          <p:nvPr/>
-        </p:nvSpPr>
-        <p:spPr>
-          <a:xfrm xmlns:a="http://schemas.openxmlformats.org/drawingml/2006/main">
-            <a:off x="876300" y="3095625"/>
-            <a:ext cx="85725" cy="85725"/>
-          </a:xfrm>
-          <a:prstGeom xmlns:a="http://schemas.openxmlformats.org/drawingml/2006/main" prst="ellipse">
-            <a:avLst/>
-          </a:prstGeom>
-          <a:solidFill xmlns:a="http://schemas.openxmlformats.org/drawingml/2006/main">
-            <a:srgbClr val="FF5B4D"/>
-          </a:solidFill>
-          <a:ln xmlns:a="http://schemas.openxmlformats.org/drawingml/2006/main" w="0">
-            <a:solidFill>
-              <a:srgbClr val="FF5B4D"/>
-            </a:solidFill>
-            <a:prstDash val="solid"/>
-          </a:ln>
-        </p:spPr>
-      </p:sp>
-      <p:sp>
-        <p:nvSpPr>
-          <p:cNvPr id="12" name="">
-            <a:extLst xmlns:a="http://schemas.openxmlformats.org/drawingml/2006/main">
-              <a:ext uri="{FF2B5EF4-FFF2-40B4-BE49-F238E27FC236}">
-                <a16:creationId xmlns:a16="http://schemas.microsoft.com/office/drawing/2014/main" id="{9B3CA820-4DF3-46D3-B6BE-A1836695A4A8}"/>
-              </a:ext>
-            </a:extLst>
-          </p:cNvPr>
-          <p:cNvSpPr>
-            <a:spLocks xmlns:a="http://schemas.openxmlformats.org/drawingml/2006/main" noGrp="1"/>
-          </p:cNvSpPr>
-          <p:nvPr/>
-        </p:nvSpPr>
-        <p:spPr>
-          <a:xfrm xmlns:a="http://schemas.openxmlformats.org/drawingml/2006/main">
-            <a:off x="1047750" y="3019425"/>
-            <a:ext cx="9829800" cy="552450"/>
-          </a:xfrm>
-          <a:prstGeom xmlns:a="http://schemas.openxmlformats.org/drawingml/2006/main" prst="rect">
-            <a:avLst/>
-          </a:prstGeom>
-          <a:noFill xmlns:a="http://schemas.openxmlformats.org/drawingml/2006/main"/>
-          <a:ln xmlns:a="http://schemas.openxmlformats.org/drawingml/2006/main" w="0">
-            <a:noFill/>
-            <a:prstDash val="solid"/>
-          </a:ln>
-        </p:spPr>
-        <p:txBody>
-          <a:bodyPr xmlns:a="http://schemas.openxmlformats.org/drawingml/2006/main"/>
-          <a:lstStyle xmlns:a="http://schemas.openxmlformats.org/drawingml/2006/main"/>
-          <a:p xmlns:a="http://schemas.openxmlformats.org/drawingml/2006/main">
-            <a:pPr algn="l">
-              <a:defRPr sz="1500" b="0">
-                <a:solidFill>
-                  <a:srgbClr val="17202A"/>
-                </a:solidFill>
-                <a:latin typeface="Aptos"/>
-                <a:ea typeface="Aptos"/>
-                <a:cs typeface="Aptos"/>
-              </a:defRPr>
-            </a:pPr>
-            <a:r>
-              <a:rPr sz="1500" b="0">
-                <a:solidFill>
-                  <a:srgbClr val="17202A"/>
-                </a:solidFill>
-                <a:latin typeface="Aptos"/>
-                <a:ea typeface="Aptos"/>
-                <a:cs typeface="Aptos"/>
-              </a:rPr>
-              <a:t>Add Storage object-byte backup/replication; Supabase database backups do not cover object bytes.</a:t>
-            </a:r>
-          </a:p>
-        </p:txBody>
-      </p:sp>
-      <p:sp>
-        <p:nvSpPr>
-          <p:cNvPr id="13" name="bullet-dot">
-            <a:extLst xmlns:a="http://schemas.openxmlformats.org/drawingml/2006/main">
-              <a:ext uri="{FF2B5EF4-FFF2-40B4-BE49-F238E27FC236}">
-                <a16:creationId xmlns:a16="http://schemas.microsoft.com/office/drawing/2014/main" id="{E71910C3-FB8C-4CE2-8D3B-94BDED36867B}"/>
-              </a:ext>
-            </a:extLst>
-          </p:cNvPr>
-          <p:cNvSpPr>
-            <a:spLocks xmlns:a="http://schemas.openxmlformats.org/drawingml/2006/main" noGrp="1"/>
-          </p:cNvSpPr>
-          <p:nvPr/>
-        </p:nvSpPr>
-        <p:spPr>
-          <a:xfrm xmlns:a="http://schemas.openxmlformats.org/drawingml/2006/main">
-            <a:off x="876300" y="3619500"/>
-            <a:ext cx="85725" cy="85725"/>
-          </a:xfrm>
-          <a:prstGeom xmlns:a="http://schemas.openxmlformats.org/drawingml/2006/main" prst="ellipse">
-            <a:avLst/>
-          </a:prstGeom>
-          <a:solidFill xmlns:a="http://schemas.openxmlformats.org/drawingml/2006/main">
-            <a:srgbClr val="FF5B4D"/>
-          </a:solidFill>
-          <a:ln xmlns:a="http://schemas.openxmlformats.org/drawingml/2006/main" w="0">
-            <a:solidFill>
-              <a:srgbClr val="FF5B4D"/>
-            </a:solidFill>
-            <a:prstDash val="solid"/>
-          </a:ln>
-        </p:spPr>
-      </p:sp>
-      <p:sp>
-        <p:nvSpPr>
-          <p:cNvPr id="14" name="">
-            <a:extLst xmlns:a="http://schemas.openxmlformats.org/drawingml/2006/main">
-              <a:ext uri="{FF2B5EF4-FFF2-40B4-BE49-F238E27FC236}">
-                <a16:creationId xmlns:a16="http://schemas.microsoft.com/office/drawing/2014/main" id="{EF9D1906-6995-4E98-A172-344349091A43}"/>
-              </a:ext>
-            </a:extLst>
-          </p:cNvPr>
-          <p:cNvSpPr>
-            <a:spLocks xmlns:a="http://schemas.openxmlformats.org/drawingml/2006/main" noGrp="1"/>
-          </p:cNvSpPr>
-          <p:nvPr/>
-        </p:nvSpPr>
-        <p:spPr>
-          <a:xfrm xmlns:a="http://schemas.openxmlformats.org/drawingml/2006/main">
-            <a:off x="1047750" y="3543300"/>
-            <a:ext cx="9829800" cy="552450"/>
-          </a:xfrm>
-          <a:prstGeom xmlns:a="http://schemas.openxmlformats.org/drawingml/2006/main" prst="rect">
-            <a:avLst/>
-          </a:prstGeom>
-          <a:noFill xmlns:a="http://schemas.openxmlformats.org/drawingml/2006/main"/>
-          <a:ln xmlns:a="http://schemas.openxmlformats.org/drawingml/2006/main" w="0">
-            <a:noFill/>
-            <a:prstDash val="solid"/>
-          </a:ln>
-        </p:spPr>
-        <p:txBody>
-          <a:bodyPr xmlns:a="http://schemas.openxmlformats.org/drawingml/2006/main"/>
-          <a:lstStyle xmlns:a="http://schemas.openxmlformats.org/drawingml/2006/main"/>
-          <a:p xmlns:a="http://schemas.openxmlformats.org/drawingml/2006/main">
-            <a:pPr algn="l">
-              <a:defRPr sz="1500" b="0">
-                <a:solidFill>
-                  <a:srgbClr val="17202A"/>
-                </a:solidFill>
-                <a:latin typeface="Aptos"/>
-                <a:ea typeface="Aptos"/>
-                <a:cs typeface="Aptos"/>
-              </a:defRPr>
-            </a:pPr>
-            <a:r>
-              <a:rPr sz="1500" b="0">
-                <a:solidFill>
-                  <a:srgbClr val="17202A"/>
-                </a:solidFill>
-                <a:latin typeface="Aptos"/>
-                <a:ea typeface="Aptos"/>
-                <a:cs typeface="Aptos"/>
-              </a:rPr>
-              <a:t>At 50k-100k MAU, review Supabase compute and read-replica need; at 250k+ MAU, negotiate support/SLO path.</a:t>
-            </a:r>
-          </a:p>
-        </p:txBody>
-      </p:sp>
-      <p:sp>
-        <p:nvSpPr>
-          <p:cNvPr id="15" name="bullet-dot">
-            <a:extLst xmlns:a="http://schemas.openxmlformats.org/drawingml/2006/main">
-              <a:ext uri="{FF2B5EF4-FFF2-40B4-BE49-F238E27FC236}">
-                <a16:creationId xmlns:a16="http://schemas.microsoft.com/office/drawing/2014/main" id="{F67413C4-0E54-4A11-B404-242836D62E7E}"/>
-              </a:ext>
-            </a:extLst>
-          </p:cNvPr>
-          <p:cNvSpPr>
-            <a:spLocks xmlns:a="http://schemas.openxmlformats.org/drawingml/2006/main" noGrp="1"/>
-          </p:cNvSpPr>
-          <p:nvPr/>
-        </p:nvSpPr>
-        <p:spPr>
-          <a:xfrm xmlns:a="http://schemas.openxmlformats.org/drawingml/2006/main">
-            <a:off x="876300" y="4143375"/>
-            <a:ext cx="85725" cy="85725"/>
-          </a:xfrm>
-          <a:prstGeom xmlns:a="http://schemas.openxmlformats.org/drawingml/2006/main" prst="ellipse">
-            <a:avLst/>
-          </a:prstGeom>
-          <a:solidFill xmlns:a="http://schemas.openxmlformats.org/drawingml/2006/main">
-            <a:srgbClr val="FF5B4D"/>
-          </a:solidFill>
-          <a:ln xmlns:a="http://schemas.openxmlformats.org/drawingml/2006/main" w="0">
-            <a:solidFill>
-              <a:srgbClr val="FF5B4D"/>
-            </a:solidFill>
-            <a:prstDash val="solid"/>
-          </a:ln>
-        </p:spPr>
-      </p:sp>
-      <p:sp>
-        <p:nvSpPr>
-          <p:cNvPr id="16" name="">
-            <a:extLst xmlns:a="http://schemas.openxmlformats.org/drawingml/2006/main">
-              <a:ext uri="{FF2B5EF4-FFF2-40B4-BE49-F238E27FC236}">
-                <a16:creationId xmlns:a16="http://schemas.microsoft.com/office/drawing/2014/main" id="{9129A2D7-12F2-4AD2-B961-F56B01150460}"/>
-              </a:ext>
-            </a:extLst>
-          </p:cNvPr>
-          <p:cNvSpPr>
-            <a:spLocks xmlns:a="http://schemas.openxmlformats.org/drawingml/2006/main" noGrp="1"/>
-          </p:cNvSpPr>
-          <p:nvPr/>
-        </p:nvSpPr>
-        <p:spPr>
-          <a:xfrm xmlns:a="http://schemas.openxmlformats.org/drawingml/2006/main">
-            <a:off x="1047750" y="4067175"/>
-            <a:ext cx="9829800" cy="552450"/>
-          </a:xfrm>
-          <a:prstGeom xmlns:a="http://schemas.openxmlformats.org/drawingml/2006/main" prst="rect">
-            <a:avLst/>
-          </a:prstGeom>
-          <a:noFill xmlns:a="http://schemas.openxmlformats.org/drawingml/2006/main"/>
-          <a:ln xmlns:a="http://schemas.openxmlformats.org/drawingml/2006/main" w="0">
-            <a:noFill/>
-            <a:prstDash val="solid"/>
-          </a:ln>
-        </p:spPr>
-        <p:txBody>
-          <a:bodyPr xmlns:a="http://schemas.openxmlformats.org/drawingml/2006/main"/>
-          <a:lstStyle xmlns:a="http://schemas.openxmlformats.org/drawingml/2006/main"/>
-          <a:p xmlns:a="http://schemas.openxmlformats.org/drawingml/2006/main">
-            <a:pPr algn="l">
-              <a:defRPr sz="1500" b="0">
-                <a:solidFill>
-                  <a:srgbClr val="17202A"/>
-                </a:solidFill>
-                <a:latin typeface="Aptos"/>
-                <a:ea typeface="Aptos"/>
-                <a:cs typeface="Aptos"/>
-              </a:defRPr>
-            </a:pPr>
-            <a:r>
-              <a:rPr sz="1500" b="0">
-                <a:solidFill>
-                  <a:srgbClr val="17202A"/>
-                </a:solidFill>
-                <a:latin typeface="Aptos"/>
-                <a:ea typeface="Aptos"/>
-                <a:cs typeface="Aptos"/>
-              </a:rPr>
-              <a:t>Keep provider adapters thin: email, FX, analytics, push, media processing. Supabase remains the deliberate deep dependency.</a:t>
+              <a:defRPr sz="1275" b="1">
+                <a:solidFill>
+                  <a:srgbClr val="0D7377"/>
+                </a:solidFill>
+                <a:latin typeface="Aptos"/>
+                <a:ea typeface="Aptos"/>
+                <a:cs typeface="Aptos"/>
+              </a:defRPr>
+            </a:pPr>
+            <a:r>
+              <a:rPr sz="1275" b="1">
+                <a:solidFill>
+                  <a:srgbClr val="0D7377"/>
+                </a:solidFill>
+                <a:latin typeface="Aptos"/>
+                <a:ea typeface="Aptos"/>
+                <a:cs typeface="Aptos"/>
+              </a:rPr>
+              <a:t>Key nuance: storage GB is cheap; egress, previews, retries, backups, and user expectation of "always available media" are what turn media into an operating cost.</a:t>
             </a:r>
           </a:p>
         </p:txBody>
@@ -4583,7 +6158,7 @@
     </p:spTree>
     <p:extLst>
       <p:ext uri="{BB962C8B-B14F-4D97-AF65-F5344CB8AC3E}">
-        <p14:creationId xmlns:p14="http://schemas.microsoft.com/office/powerpoint/2010/main" val="1446564164"/>
+        <p14:creationId xmlns:p14="http://schemas.microsoft.com/office/powerpoint/2010/main" val="131165977"/>
       </p:ext>
     </p:extLst>
   </p:cSld>
@@ -4614,7 +6189,7 @@
           <p:cNvPr id="1" name="brand-rail">
             <a:extLst xmlns:a="http://schemas.openxmlformats.org/drawingml/2006/main">
               <a:ext uri="{FF2B5EF4-FFF2-40B4-BE49-F238E27FC236}">
-                <a16:creationId xmlns:a16="http://schemas.microsoft.com/office/drawing/2014/main" id="{643CDD78-C842-4AB5-9172-CBE4736FFCBE}"/>
+                <a16:creationId xmlns:a16="http://schemas.microsoft.com/office/drawing/2014/main" id="{E9F4CBAC-A8FE-42F5-95EA-196C9F3FF0B3}"/>
               </a:ext>
             </a:extLst>
           </p:cNvPr>
@@ -4647,7 +6222,7 @@
           <p:cNvPr id="2" name="">
             <a:extLst xmlns:a="http://schemas.openxmlformats.org/drawingml/2006/main">
               <a:ext uri="{FF2B5EF4-FFF2-40B4-BE49-F238E27FC236}">
-                <a16:creationId xmlns:a16="http://schemas.microsoft.com/office/drawing/2014/main" id="{5523BBC7-EC67-4F40-BECD-DAE3FC185D1C}"/>
+                <a16:creationId xmlns:a16="http://schemas.microsoft.com/office/drawing/2014/main" id="{6EBC5C43-A1C2-470B-9B12-91CBED1C997D}"/>
               </a:ext>
             </a:extLst>
           </p:cNvPr>
@@ -4693,7 +6268,7 @@
                 <a:ea typeface="Aptos Display"/>
                 <a:cs typeface="Aptos Display"/>
               </a:rPr>
-              <a:t>Sources and assumptions</a:t>
+              <a:t>Tier policy: keep media generous, not unlimited</a:t>
             </a:r>
           </a:p>
         </p:txBody>
@@ -4703,7 +6278,7 @@
           <p:cNvPr id="3" name="">
             <a:extLst xmlns:a="http://schemas.openxmlformats.org/drawingml/2006/main">
               <a:ext uri="{FF2B5EF4-FFF2-40B4-BE49-F238E27FC236}">
-                <a16:creationId xmlns:a16="http://schemas.microsoft.com/office/drawing/2014/main" id="{762532DC-2368-48A3-A5A8-1225EE3070EC}"/>
+                <a16:creationId xmlns:a16="http://schemas.microsoft.com/office/drawing/2014/main" id="{6C16223F-4FE4-48A6-9693-D1CB95D7246D}"/>
               </a:ext>
             </a:extLst>
           </p:cNvPr>
@@ -4749,7 +6324,7 @@
                 <a:ea typeface="Aptos"/>
                 <a:cs typeface="Aptos"/>
               </a:rPr>
-              <a:t>Numbers are directional and should be refreshed before investor or budget decisions.</a:t>
+              <a:t>These are product guardrails to validate against the Excel opex assumptions.</a:t>
             </a:r>
           </a:p>
         </p:txBody>
@@ -4759,7 +6334,7 @@
           <p:cNvPr id="4" name="">
             <a:extLst xmlns:a="http://schemas.openxmlformats.org/drawingml/2006/main">
               <a:ext uri="{FF2B5EF4-FFF2-40B4-BE49-F238E27FC236}">
-                <a16:creationId xmlns:a16="http://schemas.microsoft.com/office/drawing/2014/main" id="{1A5676E7-FA66-4519-8A71-9E3B3F9EC9E7}"/>
+                <a16:creationId xmlns:a16="http://schemas.microsoft.com/office/drawing/2014/main" id="{D07EF77E-02AF-4F2B-9979-D3344BA7DFB9}"/>
               </a:ext>
             </a:extLst>
           </p:cNvPr>
@@ -4812,24 +6387,1649 @@
       </p:sp>
       <p:sp>
         <p:nvSpPr>
-          <p:cNvPr id="5" name="bullet-dot">
-            <a:extLst xmlns:a="http://schemas.openxmlformats.org/drawingml/2006/main">
-              <a:ext uri="{FF2B5EF4-FFF2-40B4-BE49-F238E27FC236}">
-                <a16:creationId xmlns:a16="http://schemas.microsoft.com/office/drawing/2014/main" id="{17DF8E3D-7D22-49F8-97D7-628342D13EDC}"/>
-              </a:ext>
-            </a:extLst>
-          </p:cNvPr>
-          <p:cNvSpPr>
-            <a:spLocks xmlns:a="http://schemas.openxmlformats.org/drawingml/2006/main" noGrp="1"/>
-          </p:cNvSpPr>
-          <p:nvPr/>
-        </p:nvSpPr>
-        <p:spPr>
-          <a:xfrm xmlns:a="http://schemas.openxmlformats.org/drawingml/2006/main">
-            <a:off x="781050" y="1504950"/>
+          <p:cNvPr id="5" name="tier">
+            <a:extLst xmlns:a="http://schemas.openxmlformats.org/drawingml/2006/main">
+              <a:ext uri="{FF2B5EF4-FFF2-40B4-BE49-F238E27FC236}">
+                <a16:creationId xmlns:a16="http://schemas.microsoft.com/office/drawing/2014/main" id="{38F37044-1FA8-435B-A389-B7BD51E6D0CC}"/>
+              </a:ext>
+            </a:extLst>
+          </p:cNvPr>
+          <p:cNvSpPr>
+            <a:spLocks xmlns:a="http://schemas.openxmlformats.org/drawingml/2006/main" noGrp="1"/>
+          </p:cNvSpPr>
+          <p:nvPr/>
+        </p:nvSpPr>
+        <p:spPr>
+          <a:xfrm xmlns:a="http://schemas.openxmlformats.org/drawingml/2006/main">
+            <a:off x="666750" y="1504950"/>
+            <a:ext cx="1181100" cy="400050"/>
+          </a:xfrm>
+          <a:prstGeom xmlns:a="http://schemas.openxmlformats.org/drawingml/2006/main" prst="roundRect">
+            <a:avLst>
+              <a:gd name="adj" fmla="val 14286"/>
+            </a:avLst>
+          </a:prstGeom>
+          <a:solidFill xmlns:a="http://schemas.openxmlformats.org/drawingml/2006/main">
+            <a:srgbClr val="102F36"/>
+          </a:solidFill>
+          <a:ln xmlns:a="http://schemas.openxmlformats.org/drawingml/2006/main" w="9525">
+            <a:solidFill>
+              <a:srgbClr val="102F36"/>
+            </a:solidFill>
+            <a:prstDash val="solid"/>
+          </a:ln>
+        </p:spPr>
+        <p:txBody>
+          <a:bodyPr xmlns:a="http://schemas.openxmlformats.org/drawingml/2006/main"/>
+          <a:lstStyle xmlns:a="http://schemas.openxmlformats.org/drawingml/2006/main"/>
+          <a:p xmlns:a="http://schemas.openxmlformats.org/drawingml/2006/main">
+            <a:pPr algn="l">
+              <a:defRPr sz="1125" b="1">
+                <a:solidFill>
+                  <a:srgbClr val="FFFFFF"/>
+                </a:solidFill>
+                <a:latin typeface="Aptos"/>
+                <a:ea typeface="Aptos"/>
+                <a:cs typeface="Aptos"/>
+              </a:defRPr>
+            </a:pPr>
+            <a:r>
+              <a:rPr sz="1125" b="1">
+                <a:solidFill>
+                  <a:srgbClr val="FFFFFF"/>
+                </a:solidFill>
+                <a:latin typeface="Aptos"/>
+                <a:ea typeface="Aptos"/>
+                <a:cs typeface="Aptos"/>
+              </a:rPr>
+              <a:t>Tier</a:t>
+            </a:r>
+          </a:p>
+        </p:txBody>
+      </p:sp>
+      <p:sp>
+        <p:nvSpPr>
+          <p:cNvPr id="6" name="good-default-promise">
+            <a:extLst xmlns:a="http://schemas.openxmlformats.org/drawingml/2006/main">
+              <a:ext uri="{FF2B5EF4-FFF2-40B4-BE49-F238E27FC236}">
+                <a16:creationId xmlns:a16="http://schemas.microsoft.com/office/drawing/2014/main" id="{B139FA37-F7D0-4C53-A4A4-DD326A692A54}"/>
+              </a:ext>
+            </a:extLst>
+          </p:cNvPr>
+          <p:cNvSpPr>
+            <a:spLocks xmlns:a="http://schemas.openxmlformats.org/drawingml/2006/main" noGrp="1"/>
+          </p:cNvSpPr>
+          <p:nvPr/>
+        </p:nvSpPr>
+        <p:spPr>
+          <a:xfrm xmlns:a="http://schemas.openxmlformats.org/drawingml/2006/main">
+            <a:off x="2076450" y="1504950"/>
+            <a:ext cx="2609850" cy="400050"/>
+          </a:xfrm>
+          <a:prstGeom xmlns:a="http://schemas.openxmlformats.org/drawingml/2006/main" prst="roundRect">
+            <a:avLst>
+              <a:gd name="adj" fmla="val 14286"/>
+            </a:avLst>
+          </a:prstGeom>
+          <a:solidFill xmlns:a="http://schemas.openxmlformats.org/drawingml/2006/main">
+            <a:srgbClr val="102F36"/>
+          </a:solidFill>
+          <a:ln xmlns:a="http://schemas.openxmlformats.org/drawingml/2006/main" w="9525">
+            <a:solidFill>
+              <a:srgbClr val="102F36"/>
+            </a:solidFill>
+            <a:prstDash val="solid"/>
+          </a:ln>
+        </p:spPr>
+        <p:txBody>
+          <a:bodyPr xmlns:a="http://schemas.openxmlformats.org/drawingml/2006/main"/>
+          <a:lstStyle xmlns:a="http://schemas.openxmlformats.org/drawingml/2006/main"/>
+          <a:p xmlns:a="http://schemas.openxmlformats.org/drawingml/2006/main">
+            <a:pPr algn="l">
+              <a:defRPr sz="1125" b="1">
+                <a:solidFill>
+                  <a:srgbClr val="FFFFFF"/>
+                </a:solidFill>
+                <a:latin typeface="Aptos"/>
+                <a:ea typeface="Aptos"/>
+                <a:cs typeface="Aptos"/>
+              </a:defRPr>
+            </a:pPr>
+            <a:r>
+              <a:rPr sz="1125" b="1">
+                <a:solidFill>
+                  <a:srgbClr val="FFFFFF"/>
+                </a:solidFill>
+                <a:latin typeface="Aptos"/>
+                <a:ea typeface="Aptos"/>
+                <a:cs typeface="Aptos"/>
+              </a:rPr>
+              <a:t>Good default promise</a:t>
+            </a:r>
+          </a:p>
+        </p:txBody>
+      </p:sp>
+      <p:sp>
+        <p:nvSpPr>
+          <p:cNvPr id="7" name="media-guardrail">
+            <a:extLst xmlns:a="http://schemas.openxmlformats.org/drawingml/2006/main">
+              <a:ext uri="{FF2B5EF4-FFF2-40B4-BE49-F238E27FC236}">
+                <a16:creationId xmlns:a16="http://schemas.microsoft.com/office/drawing/2014/main" id="{90267BB4-A96A-4302-B242-2398055FDB13}"/>
+              </a:ext>
+            </a:extLst>
+          </p:cNvPr>
+          <p:cNvSpPr>
+            <a:spLocks xmlns:a="http://schemas.openxmlformats.org/drawingml/2006/main" noGrp="1"/>
+          </p:cNvSpPr>
+          <p:nvPr/>
+        </p:nvSpPr>
+        <p:spPr>
+          <a:xfrm xmlns:a="http://schemas.openxmlformats.org/drawingml/2006/main">
+            <a:off x="4953000" y="1504950"/>
+            <a:ext cx="2476500" cy="400050"/>
+          </a:xfrm>
+          <a:prstGeom xmlns:a="http://schemas.openxmlformats.org/drawingml/2006/main" prst="roundRect">
+            <a:avLst>
+              <a:gd name="adj" fmla="val 14286"/>
+            </a:avLst>
+          </a:prstGeom>
+          <a:solidFill xmlns:a="http://schemas.openxmlformats.org/drawingml/2006/main">
+            <a:srgbClr val="102F36"/>
+          </a:solidFill>
+          <a:ln xmlns:a="http://schemas.openxmlformats.org/drawingml/2006/main" w="9525">
+            <a:solidFill>
+              <a:srgbClr val="102F36"/>
+            </a:solidFill>
+            <a:prstDash val="solid"/>
+          </a:ln>
+        </p:spPr>
+        <p:txBody>
+          <a:bodyPr xmlns:a="http://schemas.openxmlformats.org/drawingml/2006/main"/>
+          <a:lstStyle xmlns:a="http://schemas.openxmlformats.org/drawingml/2006/main"/>
+          <a:p xmlns:a="http://schemas.openxmlformats.org/drawingml/2006/main">
+            <a:pPr algn="l">
+              <a:defRPr sz="1125" b="1">
+                <a:solidFill>
+                  <a:srgbClr val="FFFFFF"/>
+                </a:solidFill>
+                <a:latin typeface="Aptos"/>
+                <a:ea typeface="Aptos"/>
+                <a:cs typeface="Aptos"/>
+              </a:defRPr>
+            </a:pPr>
+            <a:r>
+              <a:rPr sz="1125" b="1">
+                <a:solidFill>
+                  <a:srgbClr val="FFFFFF"/>
+                </a:solidFill>
+                <a:latin typeface="Aptos"/>
+                <a:ea typeface="Aptos"/>
+                <a:cs typeface="Aptos"/>
+              </a:rPr>
+              <a:t>Media guardrail</a:t>
+            </a:r>
+          </a:p>
+        </p:txBody>
+      </p:sp>
+      <p:sp>
+        <p:nvSpPr>
+          <p:cNvPr id="8" name="scaling-action">
+            <a:extLst xmlns:a="http://schemas.openxmlformats.org/drawingml/2006/main">
+              <a:ext uri="{FF2B5EF4-FFF2-40B4-BE49-F238E27FC236}">
+                <a16:creationId xmlns:a16="http://schemas.microsoft.com/office/drawing/2014/main" id="{9FF6BA06-2C5D-43D2-999A-4ACE568C53A6}"/>
+              </a:ext>
+            </a:extLst>
+          </p:cNvPr>
+          <p:cNvSpPr>
+            <a:spLocks xmlns:a="http://schemas.openxmlformats.org/drawingml/2006/main" noGrp="1"/>
+          </p:cNvSpPr>
+          <p:nvPr/>
+        </p:nvSpPr>
+        <p:spPr>
+          <a:xfrm xmlns:a="http://schemas.openxmlformats.org/drawingml/2006/main">
+            <a:off x="7696200" y="1504950"/>
+            <a:ext cx="2914650" cy="400050"/>
+          </a:xfrm>
+          <a:prstGeom xmlns:a="http://schemas.openxmlformats.org/drawingml/2006/main" prst="roundRect">
+            <a:avLst>
+              <a:gd name="adj" fmla="val 14286"/>
+            </a:avLst>
+          </a:prstGeom>
+          <a:solidFill xmlns:a="http://schemas.openxmlformats.org/drawingml/2006/main">
+            <a:srgbClr val="102F36"/>
+          </a:solidFill>
+          <a:ln xmlns:a="http://schemas.openxmlformats.org/drawingml/2006/main" w="9525">
+            <a:solidFill>
+              <a:srgbClr val="102F36"/>
+            </a:solidFill>
+            <a:prstDash val="solid"/>
+          </a:ln>
+        </p:spPr>
+        <p:txBody>
+          <a:bodyPr xmlns:a="http://schemas.openxmlformats.org/drawingml/2006/main"/>
+          <a:lstStyle xmlns:a="http://schemas.openxmlformats.org/drawingml/2006/main"/>
+          <a:p xmlns:a="http://schemas.openxmlformats.org/drawingml/2006/main">
+            <a:pPr algn="l">
+              <a:defRPr sz="1125" b="1">
+                <a:solidFill>
+                  <a:srgbClr val="FFFFFF"/>
+                </a:solidFill>
+                <a:latin typeface="Aptos"/>
+                <a:ea typeface="Aptos"/>
+                <a:cs typeface="Aptos"/>
+              </a:defRPr>
+            </a:pPr>
+            <a:r>
+              <a:rPr sz="1125" b="1">
+                <a:solidFill>
+                  <a:srgbClr val="FFFFFF"/>
+                </a:solidFill>
+                <a:latin typeface="Aptos"/>
+                <a:ea typeface="Aptos"/>
+                <a:cs typeface="Aptos"/>
+              </a:rPr>
+              <a:t>Scaling action</a:t>
+            </a:r>
+          </a:p>
+        </p:txBody>
+      </p:sp>
+      <p:sp>
+        <p:nvSpPr>
+          <p:cNvPr id="9" name="free-vamigo">
+            <a:extLst xmlns:a="http://schemas.openxmlformats.org/drawingml/2006/main">
+              <a:ext uri="{FF2B5EF4-FFF2-40B4-BE49-F238E27FC236}">
+                <a16:creationId xmlns:a16="http://schemas.microsoft.com/office/drawing/2014/main" id="{8EB95599-021F-43B0-B2DE-AAB89814E040}"/>
+              </a:ext>
+            </a:extLst>
+          </p:cNvPr>
+          <p:cNvSpPr>
+            <a:spLocks xmlns:a="http://schemas.openxmlformats.org/drawingml/2006/main" noGrp="1"/>
+          </p:cNvSpPr>
+          <p:nvPr/>
+        </p:nvSpPr>
+        <p:spPr>
+          <a:xfrm xmlns:a="http://schemas.openxmlformats.org/drawingml/2006/main">
+            <a:off x="666750" y="1981200"/>
+            <a:ext cx="1181100" cy="704850"/>
+          </a:xfrm>
+          <a:prstGeom xmlns:a="http://schemas.openxmlformats.org/drawingml/2006/main" prst="roundRect">
+            <a:avLst>
+              <a:gd name="adj" fmla="val 2703"/>
+            </a:avLst>
+          </a:prstGeom>
+          <a:solidFill xmlns:a="http://schemas.openxmlformats.org/drawingml/2006/main">
+            <a:srgbClr val="F1F6F5"/>
+          </a:solidFill>
+          <a:ln xmlns:a="http://schemas.openxmlformats.org/drawingml/2006/main" w="9525">
+            <a:solidFill>
+              <a:srgbClr val="D8E1E2"/>
+            </a:solidFill>
+            <a:prstDash val="solid"/>
+          </a:ln>
+        </p:spPr>
+        <p:txBody>
+          <a:bodyPr xmlns:a="http://schemas.openxmlformats.org/drawingml/2006/main"/>
+          <a:lstStyle xmlns:a="http://schemas.openxmlformats.org/drawingml/2006/main"/>
+          <a:p xmlns:a="http://schemas.openxmlformats.org/drawingml/2006/main">
+            <a:pPr algn="l">
+              <a:defRPr sz="1125" b="1">
+                <a:solidFill>
+                  <a:srgbClr val="17202A"/>
+                </a:solidFill>
+                <a:latin typeface="Aptos"/>
+                <a:ea typeface="Aptos"/>
+                <a:cs typeface="Aptos"/>
+              </a:defRPr>
+            </a:pPr>
+            <a:r>
+              <a:rPr sz="1125" b="1">
+                <a:solidFill>
+                  <a:srgbClr val="17202A"/>
+                </a:solidFill>
+                <a:latin typeface="Aptos"/>
+                <a:ea typeface="Aptos"/>
+                <a:cs typeface="Aptos"/>
+              </a:rPr>
+              <a:t>Free / Vamigo</a:t>
+            </a:r>
+          </a:p>
+        </p:txBody>
+      </p:sp>
+      <p:sp>
+        <p:nvSpPr>
+          <p:cNvPr id="10" name="trips-notes-receipts-small-memory-sharing">
+            <a:extLst xmlns:a="http://schemas.openxmlformats.org/drawingml/2006/main">
+              <a:ext uri="{FF2B5EF4-FFF2-40B4-BE49-F238E27FC236}">
+                <a16:creationId xmlns:a16="http://schemas.microsoft.com/office/drawing/2014/main" id="{066D5580-2FD7-4C18-910B-19EFA93B7125}"/>
+              </a:ext>
+            </a:extLst>
+          </p:cNvPr>
+          <p:cNvSpPr>
+            <a:spLocks xmlns:a="http://schemas.openxmlformats.org/drawingml/2006/main" noGrp="1"/>
+          </p:cNvSpPr>
+          <p:nvPr/>
+        </p:nvSpPr>
+        <p:spPr>
+          <a:xfrm xmlns:a="http://schemas.openxmlformats.org/drawingml/2006/main">
+            <a:off x="2076450" y="1981200"/>
+            <a:ext cx="2609850" cy="704850"/>
+          </a:xfrm>
+          <a:prstGeom xmlns:a="http://schemas.openxmlformats.org/drawingml/2006/main" prst="roundRect">
+            <a:avLst>
+              <a:gd name="adj" fmla="val 2703"/>
+            </a:avLst>
+          </a:prstGeom>
+          <a:solidFill xmlns:a="http://schemas.openxmlformats.org/drawingml/2006/main">
+            <a:srgbClr val="F1F6F5"/>
+          </a:solidFill>
+          <a:ln xmlns:a="http://schemas.openxmlformats.org/drawingml/2006/main" w="9525">
+            <a:solidFill>
+              <a:srgbClr val="D8E1E2"/>
+            </a:solidFill>
+            <a:prstDash val="solid"/>
+          </a:ln>
+        </p:spPr>
+        <p:txBody>
+          <a:bodyPr xmlns:a="http://schemas.openxmlformats.org/drawingml/2006/main"/>
+          <a:lstStyle xmlns:a="http://schemas.openxmlformats.org/drawingml/2006/main"/>
+          <a:p xmlns:a="http://schemas.openxmlformats.org/drawingml/2006/main">
+            <a:pPr algn="l">
+              <a:defRPr sz="1050" b="0">
+                <a:solidFill>
+                  <a:srgbClr val="17202A"/>
+                </a:solidFill>
+                <a:latin typeface="Aptos"/>
+                <a:ea typeface="Aptos"/>
+                <a:cs typeface="Aptos"/>
+              </a:defRPr>
+            </a:pPr>
+            <a:r>
+              <a:rPr sz="1050" b="0">
+                <a:solidFill>
+                  <a:srgbClr val="17202A"/>
+                </a:solidFill>
+                <a:latin typeface="Aptos"/>
+                <a:ea typeface="Aptos"/>
+                <a:cs typeface="Aptos"/>
+              </a:rPr>
+              <a:t>Trips, notes, receipts, small memory sharing</a:t>
+            </a:r>
+          </a:p>
+        </p:txBody>
+      </p:sp>
+      <p:sp>
+        <p:nvSpPr>
+          <p:cNvPr id="11" name="small-photo-video-quota-no-unlimited-video">
+            <a:extLst xmlns:a="http://schemas.openxmlformats.org/drawingml/2006/main">
+              <a:ext uri="{FF2B5EF4-FFF2-40B4-BE49-F238E27FC236}">
+                <a16:creationId xmlns:a16="http://schemas.microsoft.com/office/drawing/2014/main" id="{59FC965E-E56D-4B88-A089-56E60B9A87DB}"/>
+              </a:ext>
+            </a:extLst>
+          </p:cNvPr>
+          <p:cNvSpPr>
+            <a:spLocks xmlns:a="http://schemas.openxmlformats.org/drawingml/2006/main" noGrp="1"/>
+          </p:cNvSpPr>
+          <p:nvPr/>
+        </p:nvSpPr>
+        <p:spPr>
+          <a:xfrm xmlns:a="http://schemas.openxmlformats.org/drawingml/2006/main">
+            <a:off x="4953000" y="1981200"/>
+            <a:ext cx="2476500" cy="704850"/>
+          </a:xfrm>
+          <a:prstGeom xmlns:a="http://schemas.openxmlformats.org/drawingml/2006/main" prst="roundRect">
+            <a:avLst>
+              <a:gd name="adj" fmla="val 2703"/>
+            </a:avLst>
+          </a:prstGeom>
+          <a:solidFill xmlns:a="http://schemas.openxmlformats.org/drawingml/2006/main">
+            <a:srgbClr val="F1F6F5"/>
+          </a:solidFill>
+          <a:ln xmlns:a="http://schemas.openxmlformats.org/drawingml/2006/main" w="9525">
+            <a:solidFill>
+              <a:srgbClr val="D8E1E2"/>
+            </a:solidFill>
+            <a:prstDash val="solid"/>
+          </a:ln>
+        </p:spPr>
+        <p:txBody>
+          <a:bodyPr xmlns:a="http://schemas.openxmlformats.org/drawingml/2006/main"/>
+          <a:lstStyle xmlns:a="http://schemas.openxmlformats.org/drawingml/2006/main"/>
+          <a:p xmlns:a="http://schemas.openxmlformats.org/drawingml/2006/main">
+            <a:pPr algn="l">
+              <a:defRPr sz="1050" b="0">
+                <a:solidFill>
+                  <a:srgbClr val="17202A"/>
+                </a:solidFill>
+                <a:latin typeface="Aptos"/>
+                <a:ea typeface="Aptos"/>
+                <a:cs typeface="Aptos"/>
+              </a:defRPr>
+            </a:pPr>
+            <a:r>
+              <a:rPr sz="1050" b="0">
+                <a:solidFill>
+                  <a:srgbClr val="17202A"/>
+                </a:solidFill>
+                <a:latin typeface="Aptos"/>
+                <a:ea typeface="Aptos"/>
+                <a:cs typeface="Aptos"/>
+              </a:rPr>
+              <a:t>Small photo/video quota; no unlimited video</a:t>
+            </a:r>
+          </a:p>
+        </p:txBody>
+      </p:sp>
+      <p:sp>
+        <p:nvSpPr>
+          <p:cNvPr id="12" name="use-local-cache-cloud-metadata-nudge-upgrade-before-heavy-media">
+            <a:extLst xmlns:a="http://schemas.openxmlformats.org/drawingml/2006/main">
+              <a:ext uri="{FF2B5EF4-FFF2-40B4-BE49-F238E27FC236}">
+                <a16:creationId xmlns:a16="http://schemas.microsoft.com/office/drawing/2014/main" id="{CC70CC72-8FE2-4E15-9A48-BD99C0A5DEF1}"/>
+              </a:ext>
+            </a:extLst>
+          </p:cNvPr>
+          <p:cNvSpPr>
+            <a:spLocks xmlns:a="http://schemas.openxmlformats.org/drawingml/2006/main" noGrp="1"/>
+          </p:cNvSpPr>
+          <p:nvPr/>
+        </p:nvSpPr>
+        <p:spPr>
+          <a:xfrm xmlns:a="http://schemas.openxmlformats.org/drawingml/2006/main">
+            <a:off x="7696200" y="1981200"/>
+            <a:ext cx="2914650" cy="704850"/>
+          </a:xfrm>
+          <a:prstGeom xmlns:a="http://schemas.openxmlformats.org/drawingml/2006/main" prst="roundRect">
+            <a:avLst>
+              <a:gd name="adj" fmla="val 2703"/>
+            </a:avLst>
+          </a:prstGeom>
+          <a:solidFill xmlns:a="http://schemas.openxmlformats.org/drawingml/2006/main">
+            <a:srgbClr val="F1F6F5"/>
+          </a:solidFill>
+          <a:ln xmlns:a="http://schemas.openxmlformats.org/drawingml/2006/main" w="9525">
+            <a:solidFill>
+              <a:srgbClr val="D8E1E2"/>
+            </a:solidFill>
+            <a:prstDash val="solid"/>
+          </a:ln>
+        </p:spPr>
+        <p:txBody>
+          <a:bodyPr xmlns:a="http://schemas.openxmlformats.org/drawingml/2006/main"/>
+          <a:lstStyle xmlns:a="http://schemas.openxmlformats.org/drawingml/2006/main"/>
+          <a:p xmlns:a="http://schemas.openxmlformats.org/drawingml/2006/main">
+            <a:pPr algn="l">
+              <a:defRPr sz="1050" b="0">
+                <a:solidFill>
+                  <a:srgbClr val="17202A"/>
+                </a:solidFill>
+                <a:latin typeface="Aptos"/>
+                <a:ea typeface="Aptos"/>
+                <a:cs typeface="Aptos"/>
+              </a:defRPr>
+            </a:pPr>
+            <a:r>
+              <a:rPr sz="1050" b="0">
+                <a:solidFill>
+                  <a:srgbClr val="17202A"/>
+                </a:solidFill>
+                <a:latin typeface="Aptos"/>
+                <a:ea typeface="Aptos"/>
+                <a:cs typeface="Aptos"/>
+              </a:rPr>
+              <a:t>Use local cache + cloud metadata; nudge upgrade before heavy media</a:t>
+            </a:r>
+          </a:p>
+        </p:txBody>
+      </p:sp>
+      <p:sp>
+        <p:nvSpPr>
+          <p:cNvPr id="13" name="voyager">
+            <a:extLst xmlns:a="http://schemas.openxmlformats.org/drawingml/2006/main">
+              <a:ext uri="{FF2B5EF4-FFF2-40B4-BE49-F238E27FC236}">
+                <a16:creationId xmlns:a16="http://schemas.microsoft.com/office/drawing/2014/main" id="{BDA06C18-757C-4CC7-96FC-6C472B7DFD08}"/>
+              </a:ext>
+            </a:extLst>
+          </p:cNvPr>
+          <p:cNvSpPr>
+            <a:spLocks xmlns:a="http://schemas.openxmlformats.org/drawingml/2006/main" noGrp="1"/>
+          </p:cNvSpPr>
+          <p:nvPr/>
+        </p:nvSpPr>
+        <p:spPr>
+          <a:xfrm xmlns:a="http://schemas.openxmlformats.org/drawingml/2006/main">
+            <a:off x="666750" y="2762250"/>
+            <a:ext cx="1181100" cy="704850"/>
+          </a:xfrm>
+          <a:prstGeom xmlns:a="http://schemas.openxmlformats.org/drawingml/2006/main" prst="roundRect">
+            <a:avLst>
+              <a:gd name="adj" fmla="val 2703"/>
+            </a:avLst>
+          </a:prstGeom>
+          <a:solidFill xmlns:a="http://schemas.openxmlformats.org/drawingml/2006/main">
+            <a:srgbClr val="FFFFFF"/>
+          </a:solidFill>
+          <a:ln xmlns:a="http://schemas.openxmlformats.org/drawingml/2006/main" w="9525">
+            <a:solidFill>
+              <a:srgbClr val="D8E1E2"/>
+            </a:solidFill>
+            <a:prstDash val="solid"/>
+          </a:ln>
+        </p:spPr>
+        <p:txBody>
+          <a:bodyPr xmlns:a="http://schemas.openxmlformats.org/drawingml/2006/main"/>
+          <a:lstStyle xmlns:a="http://schemas.openxmlformats.org/drawingml/2006/main"/>
+          <a:p xmlns:a="http://schemas.openxmlformats.org/drawingml/2006/main">
+            <a:pPr algn="l">
+              <a:defRPr sz="1125" b="1">
+                <a:solidFill>
+                  <a:srgbClr val="17202A"/>
+                </a:solidFill>
+                <a:latin typeface="Aptos"/>
+                <a:ea typeface="Aptos"/>
+                <a:cs typeface="Aptos"/>
+              </a:defRPr>
+            </a:pPr>
+            <a:r>
+              <a:rPr sz="1125" b="1">
+                <a:solidFill>
+                  <a:srgbClr val="17202A"/>
+                </a:solidFill>
+                <a:latin typeface="Aptos"/>
+                <a:ea typeface="Aptos"/>
+                <a:cs typeface="Aptos"/>
+              </a:rPr>
+              <a:t>Voyager</a:t>
+            </a:r>
+          </a:p>
+        </p:txBody>
+      </p:sp>
+      <p:sp>
+        <p:nvSpPr>
+          <p:cNvPr id="14" name="full-memories-for-normal-trip-use">
+            <a:extLst xmlns:a="http://schemas.openxmlformats.org/drawingml/2006/main">
+              <a:ext uri="{FF2B5EF4-FFF2-40B4-BE49-F238E27FC236}">
+                <a16:creationId xmlns:a16="http://schemas.microsoft.com/office/drawing/2014/main" id="{663E4192-2CC9-4C69-8F55-DD4913EA51CB}"/>
+              </a:ext>
+            </a:extLst>
+          </p:cNvPr>
+          <p:cNvSpPr>
+            <a:spLocks xmlns:a="http://schemas.openxmlformats.org/drawingml/2006/main" noGrp="1"/>
+          </p:cNvSpPr>
+          <p:nvPr/>
+        </p:nvSpPr>
+        <p:spPr>
+          <a:xfrm xmlns:a="http://schemas.openxmlformats.org/drawingml/2006/main">
+            <a:off x="2076450" y="2762250"/>
+            <a:ext cx="2609850" cy="704850"/>
+          </a:xfrm>
+          <a:prstGeom xmlns:a="http://schemas.openxmlformats.org/drawingml/2006/main" prst="roundRect">
+            <a:avLst>
+              <a:gd name="adj" fmla="val 2703"/>
+            </a:avLst>
+          </a:prstGeom>
+          <a:solidFill xmlns:a="http://schemas.openxmlformats.org/drawingml/2006/main">
+            <a:srgbClr val="FFFFFF"/>
+          </a:solidFill>
+          <a:ln xmlns:a="http://schemas.openxmlformats.org/drawingml/2006/main" w="9525">
+            <a:solidFill>
+              <a:srgbClr val="D8E1E2"/>
+            </a:solidFill>
+            <a:prstDash val="solid"/>
+          </a:ln>
+        </p:spPr>
+        <p:txBody>
+          <a:bodyPr xmlns:a="http://schemas.openxmlformats.org/drawingml/2006/main"/>
+          <a:lstStyle xmlns:a="http://schemas.openxmlformats.org/drawingml/2006/main"/>
+          <a:p xmlns:a="http://schemas.openxmlformats.org/drawingml/2006/main">
+            <a:pPr algn="l">
+              <a:defRPr sz="1050" b="0">
+                <a:solidFill>
+                  <a:srgbClr val="17202A"/>
+                </a:solidFill>
+                <a:latin typeface="Aptos"/>
+                <a:ea typeface="Aptos"/>
+                <a:cs typeface="Aptos"/>
+              </a:defRPr>
+            </a:pPr>
+            <a:r>
+              <a:rPr sz="1050" b="0">
+                <a:solidFill>
+                  <a:srgbClr val="17202A"/>
+                </a:solidFill>
+                <a:latin typeface="Aptos"/>
+                <a:ea typeface="Aptos"/>
+                <a:cs typeface="Aptos"/>
+              </a:rPr>
+              <a:t>Full memories for normal trip use</a:t>
+            </a:r>
+          </a:p>
+        </p:txBody>
+      </p:sp>
+      <p:sp>
+        <p:nvSpPr>
+          <p:cNvPr id="15" name="per-trip-account-quota-and-retention-clarity">
+            <a:extLst xmlns:a="http://schemas.openxmlformats.org/drawingml/2006/main">
+              <a:ext uri="{FF2B5EF4-FFF2-40B4-BE49-F238E27FC236}">
+                <a16:creationId xmlns:a16="http://schemas.microsoft.com/office/drawing/2014/main" id="{B1C860C0-48AD-4177-83B3-FB6BF447F7D9}"/>
+              </a:ext>
+            </a:extLst>
+          </p:cNvPr>
+          <p:cNvSpPr>
+            <a:spLocks xmlns:a="http://schemas.openxmlformats.org/drawingml/2006/main" noGrp="1"/>
+          </p:cNvSpPr>
+          <p:nvPr/>
+        </p:nvSpPr>
+        <p:spPr>
+          <a:xfrm xmlns:a="http://schemas.openxmlformats.org/drawingml/2006/main">
+            <a:off x="4953000" y="2762250"/>
+            <a:ext cx="2476500" cy="704850"/>
+          </a:xfrm>
+          <a:prstGeom xmlns:a="http://schemas.openxmlformats.org/drawingml/2006/main" prst="roundRect">
+            <a:avLst>
+              <a:gd name="adj" fmla="val 2703"/>
+            </a:avLst>
+          </a:prstGeom>
+          <a:solidFill xmlns:a="http://schemas.openxmlformats.org/drawingml/2006/main">
+            <a:srgbClr val="FFFFFF"/>
+          </a:solidFill>
+          <a:ln xmlns:a="http://schemas.openxmlformats.org/drawingml/2006/main" w="9525">
+            <a:solidFill>
+              <a:srgbClr val="D8E1E2"/>
+            </a:solidFill>
+            <a:prstDash val="solid"/>
+          </a:ln>
+        </p:spPr>
+        <p:txBody>
+          <a:bodyPr xmlns:a="http://schemas.openxmlformats.org/drawingml/2006/main"/>
+          <a:lstStyle xmlns:a="http://schemas.openxmlformats.org/drawingml/2006/main"/>
+          <a:p xmlns:a="http://schemas.openxmlformats.org/drawingml/2006/main">
+            <a:pPr algn="l">
+              <a:defRPr sz="1050" b="0">
+                <a:solidFill>
+                  <a:srgbClr val="17202A"/>
+                </a:solidFill>
+                <a:latin typeface="Aptos"/>
+                <a:ea typeface="Aptos"/>
+                <a:cs typeface="Aptos"/>
+              </a:defRPr>
+            </a:pPr>
+            <a:r>
+              <a:rPr sz="1050" b="0">
+                <a:solidFill>
+                  <a:srgbClr val="17202A"/>
+                </a:solidFill>
+                <a:latin typeface="Aptos"/>
+                <a:ea typeface="Aptos"/>
+                <a:cs typeface="Aptos"/>
+              </a:rPr>
+              <a:t>Per-trip/account quota and retention clarity</a:t>
+            </a:r>
+          </a:p>
+        </p:txBody>
+      </p:sp>
+      <p:sp>
+        <p:nvSpPr>
+          <p:cNvPr id="16" name="compress-images-generate-thumbnails-monitor-gb-per-payer">
+            <a:extLst xmlns:a="http://schemas.openxmlformats.org/drawingml/2006/main">
+              <a:ext uri="{FF2B5EF4-FFF2-40B4-BE49-F238E27FC236}">
+                <a16:creationId xmlns:a16="http://schemas.microsoft.com/office/drawing/2014/main" id="{FEE61738-CEBF-4AE1-B1CB-AB77FE559CF2}"/>
+              </a:ext>
+            </a:extLst>
+          </p:cNvPr>
+          <p:cNvSpPr>
+            <a:spLocks xmlns:a="http://schemas.openxmlformats.org/drawingml/2006/main" noGrp="1"/>
+          </p:cNvSpPr>
+          <p:nvPr/>
+        </p:nvSpPr>
+        <p:spPr>
+          <a:xfrm xmlns:a="http://schemas.openxmlformats.org/drawingml/2006/main">
+            <a:off x="7696200" y="2762250"/>
+            <a:ext cx="2914650" cy="704850"/>
+          </a:xfrm>
+          <a:prstGeom xmlns:a="http://schemas.openxmlformats.org/drawingml/2006/main" prst="roundRect">
+            <a:avLst>
+              <a:gd name="adj" fmla="val 2703"/>
+            </a:avLst>
+          </a:prstGeom>
+          <a:solidFill xmlns:a="http://schemas.openxmlformats.org/drawingml/2006/main">
+            <a:srgbClr val="FFFFFF"/>
+          </a:solidFill>
+          <a:ln xmlns:a="http://schemas.openxmlformats.org/drawingml/2006/main" w="9525">
+            <a:solidFill>
+              <a:srgbClr val="D8E1E2"/>
+            </a:solidFill>
+            <a:prstDash val="solid"/>
+          </a:ln>
+        </p:spPr>
+        <p:txBody>
+          <a:bodyPr xmlns:a="http://schemas.openxmlformats.org/drawingml/2006/main"/>
+          <a:lstStyle xmlns:a="http://schemas.openxmlformats.org/drawingml/2006/main"/>
+          <a:p xmlns:a="http://schemas.openxmlformats.org/drawingml/2006/main">
+            <a:pPr algn="l">
+              <a:defRPr sz="1050" b="0">
+                <a:solidFill>
+                  <a:srgbClr val="17202A"/>
+                </a:solidFill>
+                <a:latin typeface="Aptos"/>
+                <a:ea typeface="Aptos"/>
+                <a:cs typeface="Aptos"/>
+              </a:defRPr>
+            </a:pPr>
+            <a:r>
+              <a:rPr sz="1050" b="0">
+                <a:solidFill>
+                  <a:srgbClr val="17202A"/>
+                </a:solidFill>
+                <a:latin typeface="Aptos"/>
+                <a:ea typeface="Aptos"/>
+                <a:cs typeface="Aptos"/>
+              </a:rPr>
+              <a:t>Compress images, generate thumbnails, monitor GB per payer</a:t>
+            </a:r>
+          </a:p>
+        </p:txBody>
+      </p:sp>
+      <p:sp>
+        <p:nvSpPr>
+          <p:cNvPr id="17" name="pioneer">
+            <a:extLst xmlns:a="http://schemas.openxmlformats.org/drawingml/2006/main">
+              <a:ext uri="{FF2B5EF4-FFF2-40B4-BE49-F238E27FC236}">
+                <a16:creationId xmlns:a16="http://schemas.microsoft.com/office/drawing/2014/main" id="{068D4742-347B-404A-A650-82EC6D36A875}"/>
+              </a:ext>
+            </a:extLst>
+          </p:cNvPr>
+          <p:cNvSpPr>
+            <a:spLocks xmlns:a="http://schemas.openxmlformats.org/drawingml/2006/main" noGrp="1"/>
+          </p:cNvSpPr>
+          <p:nvPr/>
+        </p:nvSpPr>
+        <p:spPr>
+          <a:xfrm xmlns:a="http://schemas.openxmlformats.org/drawingml/2006/main">
+            <a:off x="666750" y="3543300"/>
+            <a:ext cx="1181100" cy="704850"/>
+          </a:xfrm>
+          <a:prstGeom xmlns:a="http://schemas.openxmlformats.org/drawingml/2006/main" prst="roundRect">
+            <a:avLst>
+              <a:gd name="adj" fmla="val 2703"/>
+            </a:avLst>
+          </a:prstGeom>
+          <a:solidFill xmlns:a="http://schemas.openxmlformats.org/drawingml/2006/main">
+            <a:srgbClr val="F1F6F5"/>
+          </a:solidFill>
+          <a:ln xmlns:a="http://schemas.openxmlformats.org/drawingml/2006/main" w="9525">
+            <a:solidFill>
+              <a:srgbClr val="D8E1E2"/>
+            </a:solidFill>
+            <a:prstDash val="solid"/>
+          </a:ln>
+        </p:spPr>
+        <p:txBody>
+          <a:bodyPr xmlns:a="http://schemas.openxmlformats.org/drawingml/2006/main"/>
+          <a:lstStyle xmlns:a="http://schemas.openxmlformats.org/drawingml/2006/main"/>
+          <a:p xmlns:a="http://schemas.openxmlformats.org/drawingml/2006/main">
+            <a:pPr algn="l">
+              <a:defRPr sz="1125" b="1">
+                <a:solidFill>
+                  <a:srgbClr val="17202A"/>
+                </a:solidFill>
+                <a:latin typeface="Aptos"/>
+                <a:ea typeface="Aptos"/>
+                <a:cs typeface="Aptos"/>
+              </a:defRPr>
+            </a:pPr>
+            <a:r>
+              <a:rPr sz="1125" b="1">
+                <a:solidFill>
+                  <a:srgbClr val="17202A"/>
+                </a:solidFill>
+                <a:latin typeface="Aptos"/>
+                <a:ea typeface="Aptos"/>
+                <a:cs typeface="Aptos"/>
+              </a:rPr>
+              <a:t>Pioneer</a:t>
+            </a:r>
+          </a:p>
+        </p:txBody>
+      </p:sp>
+      <p:sp>
+        <p:nvSpPr>
+          <p:cNvPr id="18" name="action-cam-high-media-traveler-profile">
+            <a:extLst xmlns:a="http://schemas.openxmlformats.org/drawingml/2006/main">
+              <a:ext uri="{FF2B5EF4-FFF2-40B4-BE49-F238E27FC236}">
+                <a16:creationId xmlns:a16="http://schemas.microsoft.com/office/drawing/2014/main" id="{9F93CEC1-CBA5-4C70-B99B-AB10D1383BF3}"/>
+              </a:ext>
+            </a:extLst>
+          </p:cNvPr>
+          <p:cNvSpPr>
+            <a:spLocks xmlns:a="http://schemas.openxmlformats.org/drawingml/2006/main" noGrp="1"/>
+          </p:cNvSpPr>
+          <p:nvPr/>
+        </p:nvSpPr>
+        <p:spPr>
+          <a:xfrm xmlns:a="http://schemas.openxmlformats.org/drawingml/2006/main">
+            <a:off x="2076450" y="3543300"/>
+            <a:ext cx="2609850" cy="704850"/>
+          </a:xfrm>
+          <a:prstGeom xmlns:a="http://schemas.openxmlformats.org/drawingml/2006/main" prst="roundRect">
+            <a:avLst>
+              <a:gd name="adj" fmla="val 2703"/>
+            </a:avLst>
+          </a:prstGeom>
+          <a:solidFill xmlns:a="http://schemas.openxmlformats.org/drawingml/2006/main">
+            <a:srgbClr val="F1F6F5"/>
+          </a:solidFill>
+          <a:ln xmlns:a="http://schemas.openxmlformats.org/drawingml/2006/main" w="9525">
+            <a:solidFill>
+              <a:srgbClr val="D8E1E2"/>
+            </a:solidFill>
+            <a:prstDash val="solid"/>
+          </a:ln>
+        </p:spPr>
+        <p:txBody>
+          <a:bodyPr xmlns:a="http://schemas.openxmlformats.org/drawingml/2006/main"/>
+          <a:lstStyle xmlns:a="http://schemas.openxmlformats.org/drawingml/2006/main"/>
+          <a:p xmlns:a="http://schemas.openxmlformats.org/drawingml/2006/main">
+            <a:pPr algn="l">
+              <a:defRPr sz="1050" b="0">
+                <a:solidFill>
+                  <a:srgbClr val="17202A"/>
+                </a:solidFill>
+                <a:latin typeface="Aptos"/>
+                <a:ea typeface="Aptos"/>
+                <a:cs typeface="Aptos"/>
+              </a:defRPr>
+            </a:pPr>
+            <a:r>
+              <a:rPr sz="1050" b="0">
+                <a:solidFill>
+                  <a:srgbClr val="17202A"/>
+                </a:solidFill>
+                <a:latin typeface="Aptos"/>
+                <a:ea typeface="Aptos"/>
+                <a:cs typeface="Aptos"/>
+              </a:rPr>
+              <a:t>Action-cam / high-media traveler profile</a:t>
+            </a:r>
+          </a:p>
+        </p:txBody>
+      </p:sp>
+      <p:sp>
+        <p:nvSpPr>
+          <p:cNvPr id="19" name="fair-use-cap-or-explicit-archive-offload-policy">
+            <a:extLst xmlns:a="http://schemas.openxmlformats.org/drawingml/2006/main">
+              <a:ext uri="{FF2B5EF4-FFF2-40B4-BE49-F238E27FC236}">
+                <a16:creationId xmlns:a16="http://schemas.microsoft.com/office/drawing/2014/main" id="{99EA2872-8D3A-4465-959A-C835EEB9FEB4}"/>
+              </a:ext>
+            </a:extLst>
+          </p:cNvPr>
+          <p:cNvSpPr>
+            <a:spLocks xmlns:a="http://schemas.openxmlformats.org/drawingml/2006/main" noGrp="1"/>
+          </p:cNvSpPr>
+          <p:nvPr/>
+        </p:nvSpPr>
+        <p:spPr>
+          <a:xfrm xmlns:a="http://schemas.openxmlformats.org/drawingml/2006/main">
+            <a:off x="4953000" y="3543300"/>
+            <a:ext cx="2476500" cy="704850"/>
+          </a:xfrm>
+          <a:prstGeom xmlns:a="http://schemas.openxmlformats.org/drawingml/2006/main" prst="roundRect">
+            <a:avLst>
+              <a:gd name="adj" fmla="val 2703"/>
+            </a:avLst>
+          </a:prstGeom>
+          <a:solidFill xmlns:a="http://schemas.openxmlformats.org/drawingml/2006/main">
+            <a:srgbClr val="F1F6F5"/>
+          </a:solidFill>
+          <a:ln xmlns:a="http://schemas.openxmlformats.org/drawingml/2006/main" w="9525">
+            <a:solidFill>
+              <a:srgbClr val="D8E1E2"/>
+            </a:solidFill>
+            <a:prstDash val="solid"/>
+          </a:ln>
+        </p:spPr>
+        <p:txBody>
+          <a:bodyPr xmlns:a="http://schemas.openxmlformats.org/drawingml/2006/main"/>
+          <a:lstStyle xmlns:a="http://schemas.openxmlformats.org/drawingml/2006/main"/>
+          <a:p xmlns:a="http://schemas.openxmlformats.org/drawingml/2006/main">
+            <a:pPr algn="l">
+              <a:defRPr sz="1050" b="0">
+                <a:solidFill>
+                  <a:srgbClr val="17202A"/>
+                </a:solidFill>
+                <a:latin typeface="Aptos"/>
+                <a:ea typeface="Aptos"/>
+                <a:cs typeface="Aptos"/>
+              </a:defRPr>
+            </a:pPr>
+            <a:r>
+              <a:rPr sz="1050" b="0">
+                <a:solidFill>
+                  <a:srgbClr val="17202A"/>
+                </a:solidFill>
+                <a:latin typeface="Aptos"/>
+                <a:ea typeface="Aptos"/>
+                <a:cs typeface="Aptos"/>
+              </a:rPr>
+              <a:t>Fair-use cap or explicit archive/offload policy</a:t>
+            </a:r>
+          </a:p>
+        </p:txBody>
+      </p:sp>
+      <p:sp>
+        <p:nvSpPr>
+          <p:cNvPr id="20" name="move-heavy-media-to-lifecycle-managed-object-storage-cdn-path">
+            <a:extLst xmlns:a="http://schemas.openxmlformats.org/drawingml/2006/main">
+              <a:ext uri="{FF2B5EF4-FFF2-40B4-BE49-F238E27FC236}">
+                <a16:creationId xmlns:a16="http://schemas.microsoft.com/office/drawing/2014/main" id="{EAFF57D3-8122-44B9-B1C4-23EB342A7894}"/>
+              </a:ext>
+            </a:extLst>
+          </p:cNvPr>
+          <p:cNvSpPr>
+            <a:spLocks xmlns:a="http://schemas.openxmlformats.org/drawingml/2006/main" noGrp="1"/>
+          </p:cNvSpPr>
+          <p:nvPr/>
+        </p:nvSpPr>
+        <p:spPr>
+          <a:xfrm xmlns:a="http://schemas.openxmlformats.org/drawingml/2006/main">
+            <a:off x="7696200" y="3543300"/>
+            <a:ext cx="2914650" cy="704850"/>
+          </a:xfrm>
+          <a:prstGeom xmlns:a="http://schemas.openxmlformats.org/drawingml/2006/main" prst="roundRect">
+            <a:avLst>
+              <a:gd name="adj" fmla="val 2703"/>
+            </a:avLst>
+          </a:prstGeom>
+          <a:solidFill xmlns:a="http://schemas.openxmlformats.org/drawingml/2006/main">
+            <a:srgbClr val="F1F6F5"/>
+          </a:solidFill>
+          <a:ln xmlns:a="http://schemas.openxmlformats.org/drawingml/2006/main" w="9525">
+            <a:solidFill>
+              <a:srgbClr val="D8E1E2"/>
+            </a:solidFill>
+            <a:prstDash val="solid"/>
+          </a:ln>
+        </p:spPr>
+        <p:txBody>
+          <a:bodyPr xmlns:a="http://schemas.openxmlformats.org/drawingml/2006/main"/>
+          <a:lstStyle xmlns:a="http://schemas.openxmlformats.org/drawingml/2006/main"/>
+          <a:p xmlns:a="http://schemas.openxmlformats.org/drawingml/2006/main">
+            <a:pPr algn="l">
+              <a:defRPr sz="1050" b="0">
+                <a:solidFill>
+                  <a:srgbClr val="17202A"/>
+                </a:solidFill>
+                <a:latin typeface="Aptos"/>
+                <a:ea typeface="Aptos"/>
+                <a:cs typeface="Aptos"/>
+              </a:defRPr>
+            </a:pPr>
+            <a:r>
+              <a:rPr sz="1050" b="0">
+                <a:solidFill>
+                  <a:srgbClr val="17202A"/>
+                </a:solidFill>
+                <a:latin typeface="Aptos"/>
+                <a:ea typeface="Aptos"/>
+                <a:cs typeface="Aptos"/>
+              </a:rPr>
+              <a:t>Move heavy media to lifecycle-managed object storage/CDN path</a:t>
+            </a:r>
+          </a:p>
+        </p:txBody>
+      </p:sp>
+      <p:sp>
+        <p:nvSpPr>
+          <p:cNvPr id="21" name="operator">
+            <a:extLst xmlns:a="http://schemas.openxmlformats.org/drawingml/2006/main">
+              <a:ext uri="{FF2B5EF4-FFF2-40B4-BE49-F238E27FC236}">
+                <a16:creationId xmlns:a16="http://schemas.microsoft.com/office/drawing/2014/main" id="{5D8F30E3-B456-4B3D-A559-ACDDC57307B2}"/>
+              </a:ext>
+            </a:extLst>
+          </p:cNvPr>
+          <p:cNvSpPr>
+            <a:spLocks xmlns:a="http://schemas.openxmlformats.org/drawingml/2006/main" noGrp="1"/>
+          </p:cNvSpPr>
+          <p:nvPr/>
+        </p:nvSpPr>
+        <p:spPr>
+          <a:xfrm xmlns:a="http://schemas.openxmlformats.org/drawingml/2006/main">
+            <a:off x="666750" y="4324350"/>
+            <a:ext cx="1181100" cy="704850"/>
+          </a:xfrm>
+          <a:prstGeom xmlns:a="http://schemas.openxmlformats.org/drawingml/2006/main" prst="roundRect">
+            <a:avLst>
+              <a:gd name="adj" fmla="val 2703"/>
+            </a:avLst>
+          </a:prstGeom>
+          <a:solidFill xmlns:a="http://schemas.openxmlformats.org/drawingml/2006/main">
+            <a:srgbClr val="FFFFFF"/>
+          </a:solidFill>
+          <a:ln xmlns:a="http://schemas.openxmlformats.org/drawingml/2006/main" w="9525">
+            <a:solidFill>
+              <a:srgbClr val="D8E1E2"/>
+            </a:solidFill>
+            <a:prstDash val="solid"/>
+          </a:ln>
+        </p:spPr>
+        <p:txBody>
+          <a:bodyPr xmlns:a="http://schemas.openxmlformats.org/drawingml/2006/main"/>
+          <a:lstStyle xmlns:a="http://schemas.openxmlformats.org/drawingml/2006/main"/>
+          <a:p xmlns:a="http://schemas.openxmlformats.org/drawingml/2006/main">
+            <a:pPr algn="l">
+              <a:defRPr sz="1125" b="1">
+                <a:solidFill>
+                  <a:srgbClr val="17202A"/>
+                </a:solidFill>
+                <a:latin typeface="Aptos"/>
+                <a:ea typeface="Aptos"/>
+                <a:cs typeface="Aptos"/>
+              </a:defRPr>
+            </a:pPr>
+            <a:r>
+              <a:rPr sz="1125" b="1">
+                <a:solidFill>
+                  <a:srgbClr val="17202A"/>
+                </a:solidFill>
+                <a:latin typeface="Aptos"/>
+                <a:ea typeface="Aptos"/>
+                <a:cs typeface="Aptos"/>
+              </a:rPr>
+              <a:t>Operator</a:t>
+            </a:r>
+          </a:p>
+        </p:txBody>
+      </p:sp>
+      <p:sp>
+        <p:nvSpPr>
+          <p:cNvPr id="22" name="commercial-group-workflows">
+            <a:extLst xmlns:a="http://schemas.openxmlformats.org/drawingml/2006/main">
+              <a:ext uri="{FF2B5EF4-FFF2-40B4-BE49-F238E27FC236}">
+                <a16:creationId xmlns:a16="http://schemas.microsoft.com/office/drawing/2014/main" id="{55B1C376-7464-4D25-8293-990ACC94F842}"/>
+              </a:ext>
+            </a:extLst>
+          </p:cNvPr>
+          <p:cNvSpPr>
+            <a:spLocks xmlns:a="http://schemas.openxmlformats.org/drawingml/2006/main" noGrp="1"/>
+          </p:cNvSpPr>
+          <p:nvPr/>
+        </p:nvSpPr>
+        <p:spPr>
+          <a:xfrm xmlns:a="http://schemas.openxmlformats.org/drawingml/2006/main">
+            <a:off x="2076450" y="4324350"/>
+            <a:ext cx="2609850" cy="704850"/>
+          </a:xfrm>
+          <a:prstGeom xmlns:a="http://schemas.openxmlformats.org/drawingml/2006/main" prst="roundRect">
+            <a:avLst>
+              <a:gd name="adj" fmla="val 2703"/>
+            </a:avLst>
+          </a:prstGeom>
+          <a:solidFill xmlns:a="http://schemas.openxmlformats.org/drawingml/2006/main">
+            <a:srgbClr val="FFFFFF"/>
+          </a:solidFill>
+          <a:ln xmlns:a="http://schemas.openxmlformats.org/drawingml/2006/main" w="9525">
+            <a:solidFill>
+              <a:srgbClr val="D8E1E2"/>
+            </a:solidFill>
+            <a:prstDash val="solid"/>
+          </a:ln>
+        </p:spPr>
+        <p:txBody>
+          <a:bodyPr xmlns:a="http://schemas.openxmlformats.org/drawingml/2006/main"/>
+          <a:lstStyle xmlns:a="http://schemas.openxmlformats.org/drawingml/2006/main"/>
+          <a:p xmlns:a="http://schemas.openxmlformats.org/drawingml/2006/main">
+            <a:pPr algn="l">
+              <a:defRPr sz="1050" b="0">
+                <a:solidFill>
+                  <a:srgbClr val="17202A"/>
+                </a:solidFill>
+                <a:latin typeface="Aptos"/>
+                <a:ea typeface="Aptos"/>
+                <a:cs typeface="Aptos"/>
+              </a:defRPr>
+            </a:pPr>
+            <a:r>
+              <a:rPr sz="1050" b="0">
+                <a:solidFill>
+                  <a:srgbClr val="17202A"/>
+                </a:solidFill>
+                <a:latin typeface="Aptos"/>
+                <a:ea typeface="Aptos"/>
+                <a:cs typeface="Aptos"/>
+              </a:rPr>
+              <a:t>Commercial/group workflows</a:t>
+            </a:r>
+          </a:p>
+        </p:txBody>
+      </p:sp>
+      <p:sp>
+        <p:nvSpPr>
+          <p:cNvPr id="23" name="separate-tenant-media-budget">
+            <a:extLst xmlns:a="http://schemas.openxmlformats.org/drawingml/2006/main">
+              <a:ext uri="{FF2B5EF4-FFF2-40B4-BE49-F238E27FC236}">
+                <a16:creationId xmlns:a16="http://schemas.microsoft.com/office/drawing/2014/main" id="{5BA52D30-8F56-4B08-86D6-438D0A2BAD32}"/>
+              </a:ext>
+            </a:extLst>
+          </p:cNvPr>
+          <p:cNvSpPr>
+            <a:spLocks xmlns:a="http://schemas.openxmlformats.org/drawingml/2006/main" noGrp="1"/>
+          </p:cNvSpPr>
+          <p:nvPr/>
+        </p:nvSpPr>
+        <p:spPr>
+          <a:xfrm xmlns:a="http://schemas.openxmlformats.org/drawingml/2006/main">
+            <a:off x="4953000" y="4324350"/>
+            <a:ext cx="2476500" cy="704850"/>
+          </a:xfrm>
+          <a:prstGeom xmlns:a="http://schemas.openxmlformats.org/drawingml/2006/main" prst="roundRect">
+            <a:avLst>
+              <a:gd name="adj" fmla="val 2703"/>
+            </a:avLst>
+          </a:prstGeom>
+          <a:solidFill xmlns:a="http://schemas.openxmlformats.org/drawingml/2006/main">
+            <a:srgbClr val="FFFFFF"/>
+          </a:solidFill>
+          <a:ln xmlns:a="http://schemas.openxmlformats.org/drawingml/2006/main" w="9525">
+            <a:solidFill>
+              <a:srgbClr val="D8E1E2"/>
+            </a:solidFill>
+            <a:prstDash val="solid"/>
+          </a:ln>
+        </p:spPr>
+        <p:txBody>
+          <a:bodyPr xmlns:a="http://schemas.openxmlformats.org/drawingml/2006/main"/>
+          <a:lstStyle xmlns:a="http://schemas.openxmlformats.org/drawingml/2006/main"/>
+          <a:p xmlns:a="http://schemas.openxmlformats.org/drawingml/2006/main">
+            <a:pPr algn="l">
+              <a:defRPr sz="1050" b="0">
+                <a:solidFill>
+                  <a:srgbClr val="17202A"/>
+                </a:solidFill>
+                <a:latin typeface="Aptos"/>
+                <a:ea typeface="Aptos"/>
+                <a:cs typeface="Aptos"/>
+              </a:defRPr>
+            </a:pPr>
+            <a:r>
+              <a:rPr sz="1050" b="0">
+                <a:solidFill>
+                  <a:srgbClr val="17202A"/>
+                </a:solidFill>
+                <a:latin typeface="Aptos"/>
+                <a:ea typeface="Aptos"/>
+                <a:cs typeface="Aptos"/>
+              </a:rPr>
+              <a:t>Separate tenant/media budget</a:t>
+            </a:r>
+          </a:p>
+        </p:txBody>
+      </p:sp>
+      <p:sp>
+        <p:nvSpPr>
+          <p:cNvPr id="24" name="contractual-limits-support-sla-data-export-path">
+            <a:extLst xmlns:a="http://schemas.openxmlformats.org/drawingml/2006/main">
+              <a:ext uri="{FF2B5EF4-FFF2-40B4-BE49-F238E27FC236}">
+                <a16:creationId xmlns:a16="http://schemas.microsoft.com/office/drawing/2014/main" id="{1F7DA22E-4645-4126-866B-16C52F321C32}"/>
+              </a:ext>
+            </a:extLst>
+          </p:cNvPr>
+          <p:cNvSpPr>
+            <a:spLocks xmlns:a="http://schemas.openxmlformats.org/drawingml/2006/main" noGrp="1"/>
+          </p:cNvSpPr>
+          <p:nvPr/>
+        </p:nvSpPr>
+        <p:spPr>
+          <a:xfrm xmlns:a="http://schemas.openxmlformats.org/drawingml/2006/main">
+            <a:off x="7696200" y="4324350"/>
+            <a:ext cx="2914650" cy="704850"/>
+          </a:xfrm>
+          <a:prstGeom xmlns:a="http://schemas.openxmlformats.org/drawingml/2006/main" prst="roundRect">
+            <a:avLst>
+              <a:gd name="adj" fmla="val 2703"/>
+            </a:avLst>
+          </a:prstGeom>
+          <a:solidFill xmlns:a="http://schemas.openxmlformats.org/drawingml/2006/main">
+            <a:srgbClr val="FFFFFF"/>
+          </a:solidFill>
+          <a:ln xmlns:a="http://schemas.openxmlformats.org/drawingml/2006/main" w="9525">
+            <a:solidFill>
+              <a:srgbClr val="D8E1E2"/>
+            </a:solidFill>
+            <a:prstDash val="solid"/>
+          </a:ln>
+        </p:spPr>
+        <p:txBody>
+          <a:bodyPr xmlns:a="http://schemas.openxmlformats.org/drawingml/2006/main"/>
+          <a:lstStyle xmlns:a="http://schemas.openxmlformats.org/drawingml/2006/main"/>
+          <a:p xmlns:a="http://schemas.openxmlformats.org/drawingml/2006/main">
+            <a:pPr algn="l">
+              <a:defRPr sz="1050" b="0">
+                <a:solidFill>
+                  <a:srgbClr val="17202A"/>
+                </a:solidFill>
+                <a:latin typeface="Aptos"/>
+                <a:ea typeface="Aptos"/>
+                <a:cs typeface="Aptos"/>
+              </a:defRPr>
+            </a:pPr>
+            <a:r>
+              <a:rPr sz="1050" b="0">
+                <a:solidFill>
+                  <a:srgbClr val="17202A"/>
+                </a:solidFill>
+                <a:latin typeface="Aptos"/>
+                <a:ea typeface="Aptos"/>
+                <a:cs typeface="Aptos"/>
+              </a:rPr>
+              <a:t>Contractual limits, support SLA, data export path</a:t>
+            </a:r>
+          </a:p>
+        </p:txBody>
+      </p:sp>
+      <p:sp>
+        <p:nvSpPr>
+          <p:cNvPr id="25" name="bullet-dot">
+            <a:extLst xmlns:a="http://schemas.openxmlformats.org/drawingml/2006/main">
+              <a:ext uri="{FF2B5EF4-FFF2-40B4-BE49-F238E27FC236}">
+                <a16:creationId xmlns:a16="http://schemas.microsoft.com/office/drawing/2014/main" id="{EE7FA022-FDC5-42D5-8FCE-3F7E18866C87}"/>
+              </a:ext>
+            </a:extLst>
+          </p:cNvPr>
+          <p:cNvSpPr>
+            <a:spLocks xmlns:a="http://schemas.openxmlformats.org/drawingml/2006/main" noGrp="1"/>
+          </p:cNvSpPr>
+          <p:nvPr/>
+        </p:nvSpPr>
+        <p:spPr>
+          <a:xfrm xmlns:a="http://schemas.openxmlformats.org/drawingml/2006/main">
+            <a:off x="857250" y="5067300"/>
             <a:ext cx="85725" cy="85725"/>
           </a:xfrm>
           <a:prstGeom xmlns:a="http://schemas.openxmlformats.org/drawingml/2006/main" prst="ellipse">
+            <a:avLst/>
+          </a:prstGeom>
+          <a:solidFill xmlns:a="http://schemas.openxmlformats.org/drawingml/2006/main">
+            <a:srgbClr val="FF5B4D"/>
+          </a:solidFill>
+          <a:ln xmlns:a="http://schemas.openxmlformats.org/drawingml/2006/main" w="0">
+            <a:solidFill>
+              <a:srgbClr val="FF5B4D"/>
+            </a:solidFill>
+            <a:prstDash val="solid"/>
+          </a:ln>
+        </p:spPr>
+      </p:sp>
+      <p:sp>
+        <p:nvSpPr>
+          <p:cNvPr id="26" name="">
+            <a:extLst xmlns:a="http://schemas.openxmlformats.org/drawingml/2006/main">
+              <a:ext uri="{FF2B5EF4-FFF2-40B4-BE49-F238E27FC236}">
+                <a16:creationId xmlns:a16="http://schemas.microsoft.com/office/drawing/2014/main" id="{3E1AD641-67E9-47BB-88BD-816464A1B599}"/>
+              </a:ext>
+            </a:extLst>
+          </p:cNvPr>
+          <p:cNvSpPr>
+            <a:spLocks xmlns:a="http://schemas.openxmlformats.org/drawingml/2006/main" noGrp="1"/>
+          </p:cNvSpPr>
+          <p:nvPr/>
+        </p:nvSpPr>
+        <p:spPr>
+          <a:xfrm xmlns:a="http://schemas.openxmlformats.org/drawingml/2006/main">
+            <a:off x="1028700" y="4991100"/>
+            <a:ext cx="9639300" cy="352425"/>
+          </a:xfrm>
+          <a:prstGeom xmlns:a="http://schemas.openxmlformats.org/drawingml/2006/main" prst="rect">
+            <a:avLst/>
+          </a:prstGeom>
+          <a:noFill xmlns:a="http://schemas.openxmlformats.org/drawingml/2006/main"/>
+          <a:ln xmlns:a="http://schemas.openxmlformats.org/drawingml/2006/main" w="0">
+            <a:noFill/>
+            <a:prstDash val="solid"/>
+          </a:ln>
+        </p:spPr>
+        <p:txBody>
+          <a:bodyPr xmlns:a="http://schemas.openxmlformats.org/drawingml/2006/main"/>
+          <a:lstStyle xmlns:a="http://schemas.openxmlformats.org/drawingml/2006/main"/>
+          <a:p xmlns:a="http://schemas.openxmlformats.org/drawingml/2006/main">
+            <a:pPr algn="l">
+              <a:defRPr sz="1275" b="0">
+                <a:solidFill>
+                  <a:srgbClr val="17202A"/>
+                </a:solidFill>
+                <a:latin typeface="Aptos"/>
+                <a:ea typeface="Aptos"/>
+                <a:cs typeface="Aptos"/>
+              </a:defRPr>
+            </a:pPr>
+            <a:r>
+              <a:rPr sz="1275" b="0">
+                <a:solidFill>
+                  <a:srgbClr val="17202A"/>
+                </a:solidFill>
+                <a:latin typeface="Aptos"/>
+                <a:ea typeface="Aptos"/>
+                <a:cs typeface="Aptos"/>
+              </a:rPr>
+              <a:t>Before shipping "drop local cache" or archive/offload controls, storagePath round-trip must be proven for every media type.</a:t>
+            </a:r>
+          </a:p>
+        </p:txBody>
+      </p:sp>
+      <p:sp>
+        <p:nvSpPr>
+          <p:cNvPr id="27" name="bullet-dot">
+            <a:extLst xmlns:a="http://schemas.openxmlformats.org/drawingml/2006/main">
+              <a:ext uri="{FF2B5EF4-FFF2-40B4-BE49-F238E27FC236}">
+                <a16:creationId xmlns:a16="http://schemas.microsoft.com/office/drawing/2014/main" id="{983CB6D7-47E9-4480-AE67-0E92565B1F0B}"/>
+              </a:ext>
+            </a:extLst>
+          </p:cNvPr>
+          <p:cNvSpPr>
+            <a:spLocks xmlns:a="http://schemas.openxmlformats.org/drawingml/2006/main" noGrp="1"/>
+          </p:cNvSpPr>
+          <p:nvPr/>
+        </p:nvSpPr>
+        <p:spPr>
+          <a:xfrm xmlns:a="http://schemas.openxmlformats.org/drawingml/2006/main">
+            <a:off x="857250" y="5391150"/>
+            <a:ext cx="85725" cy="85725"/>
+          </a:xfrm>
+          <a:prstGeom xmlns:a="http://schemas.openxmlformats.org/drawingml/2006/main" prst="ellipse">
+            <a:avLst/>
+          </a:prstGeom>
+          <a:solidFill xmlns:a="http://schemas.openxmlformats.org/drawingml/2006/main">
+            <a:srgbClr val="FF5B4D"/>
+          </a:solidFill>
+          <a:ln xmlns:a="http://schemas.openxmlformats.org/drawingml/2006/main" w="0">
+            <a:solidFill>
+              <a:srgbClr val="FF5B4D"/>
+            </a:solidFill>
+            <a:prstDash val="solid"/>
+          </a:ln>
+        </p:spPr>
+      </p:sp>
+      <p:sp>
+        <p:nvSpPr>
+          <p:cNvPr id="28" name="">
+            <a:extLst xmlns:a="http://schemas.openxmlformats.org/drawingml/2006/main">
+              <a:ext uri="{FF2B5EF4-FFF2-40B4-BE49-F238E27FC236}">
+                <a16:creationId xmlns:a16="http://schemas.microsoft.com/office/drawing/2014/main" id="{4E4C36DA-D5EA-4C62-8436-776B96991A79}"/>
+              </a:ext>
+            </a:extLst>
+          </p:cNvPr>
+          <p:cNvSpPr>
+            <a:spLocks xmlns:a="http://schemas.openxmlformats.org/drawingml/2006/main" noGrp="1"/>
+          </p:cNvSpPr>
+          <p:nvPr/>
+        </p:nvSpPr>
+        <p:spPr>
+          <a:xfrm xmlns:a="http://schemas.openxmlformats.org/drawingml/2006/main">
+            <a:off x="1028700" y="5314950"/>
+            <a:ext cx="9639300" cy="352425"/>
+          </a:xfrm>
+          <a:prstGeom xmlns:a="http://schemas.openxmlformats.org/drawingml/2006/main" prst="rect">
+            <a:avLst/>
+          </a:prstGeom>
+          <a:noFill xmlns:a="http://schemas.openxmlformats.org/drawingml/2006/main"/>
+          <a:ln xmlns:a="http://schemas.openxmlformats.org/drawingml/2006/main" w="0">
+            <a:noFill/>
+            <a:prstDash val="solid"/>
+          </a:ln>
+        </p:spPr>
+        <p:txBody>
+          <a:bodyPr xmlns:a="http://schemas.openxmlformats.org/drawingml/2006/main"/>
+          <a:lstStyle xmlns:a="http://schemas.openxmlformats.org/drawingml/2006/main"/>
+          <a:p xmlns:a="http://schemas.openxmlformats.org/drawingml/2006/main">
+            <a:pPr algn="l">
+              <a:defRPr sz="1275" b="0">
+                <a:solidFill>
+                  <a:srgbClr val="17202A"/>
+                </a:solidFill>
+                <a:latin typeface="Aptos"/>
+                <a:ea typeface="Aptos"/>
+                <a:cs typeface="Aptos"/>
+              </a:defRPr>
+            </a:pPr>
+            <a:r>
+              <a:rPr sz="1275" b="0">
+                <a:solidFill>
+                  <a:srgbClr val="17202A"/>
+                </a:solidFill>
+                <a:latin typeface="Aptos"/>
+                <a:ea typeface="Aptos"/>
+                <a:cs typeface="Aptos"/>
+              </a:rPr>
+              <a:t>Add server-side image normalization/thumbnails before wide media growth; current app stores original bytes.</a:t>
+            </a:r>
+          </a:p>
+        </p:txBody>
+      </p:sp>
+      <p:sp>
+        <p:nvSpPr>
+          <p:cNvPr id="29" name="bullet-dot">
+            <a:extLst xmlns:a="http://schemas.openxmlformats.org/drawingml/2006/main">
+              <a:ext uri="{FF2B5EF4-FFF2-40B4-BE49-F238E27FC236}">
+                <a16:creationId xmlns:a16="http://schemas.microsoft.com/office/drawing/2014/main" id="{E9C7EE3E-AFB3-4E3F-BA57-B464BADD04AD}"/>
+              </a:ext>
+            </a:extLst>
+          </p:cNvPr>
+          <p:cNvSpPr>
+            <a:spLocks xmlns:a="http://schemas.openxmlformats.org/drawingml/2006/main" noGrp="1"/>
+          </p:cNvSpPr>
+          <p:nvPr/>
+        </p:nvSpPr>
+        <p:spPr>
+          <a:xfrm xmlns:a="http://schemas.openxmlformats.org/drawingml/2006/main">
+            <a:off x="857250" y="5715000"/>
+            <a:ext cx="85725" cy="85725"/>
+          </a:xfrm>
+          <a:prstGeom xmlns:a="http://schemas.openxmlformats.org/drawingml/2006/main" prst="ellipse">
+            <a:avLst/>
+          </a:prstGeom>
+          <a:solidFill xmlns:a="http://schemas.openxmlformats.org/drawingml/2006/main">
+            <a:srgbClr val="FF5B4D"/>
+          </a:solidFill>
+          <a:ln xmlns:a="http://schemas.openxmlformats.org/drawingml/2006/main" w="0">
+            <a:solidFill>
+              <a:srgbClr val="FF5B4D"/>
+            </a:solidFill>
+            <a:prstDash val="solid"/>
+          </a:ln>
+        </p:spPr>
+      </p:sp>
+      <p:sp>
+        <p:nvSpPr>
+          <p:cNvPr id="30" name="">
+            <a:extLst xmlns:a="http://schemas.openxmlformats.org/drawingml/2006/main">
+              <a:ext uri="{FF2B5EF4-FFF2-40B4-BE49-F238E27FC236}">
+                <a16:creationId xmlns:a16="http://schemas.microsoft.com/office/drawing/2014/main" id="{7ED363BD-FCA9-4529-A308-2C7DA637BDB4}"/>
+              </a:ext>
+            </a:extLst>
+          </p:cNvPr>
+          <p:cNvSpPr>
+            <a:spLocks xmlns:a="http://schemas.openxmlformats.org/drawingml/2006/main" noGrp="1"/>
+          </p:cNvSpPr>
+          <p:nvPr/>
+        </p:nvSpPr>
+        <p:spPr>
+          <a:xfrm xmlns:a="http://schemas.openxmlformats.org/drawingml/2006/main">
+            <a:off x="1028700" y="5638800"/>
+            <a:ext cx="9639300" cy="352425"/>
+          </a:xfrm>
+          <a:prstGeom xmlns:a="http://schemas.openxmlformats.org/drawingml/2006/main" prst="rect">
+            <a:avLst/>
+          </a:prstGeom>
+          <a:noFill xmlns:a="http://schemas.openxmlformats.org/drawingml/2006/main"/>
+          <a:ln xmlns:a="http://schemas.openxmlformats.org/drawingml/2006/main" w="0">
+            <a:noFill/>
+            <a:prstDash val="solid"/>
+          </a:ln>
+        </p:spPr>
+        <p:txBody>
+          <a:bodyPr xmlns:a="http://schemas.openxmlformats.org/drawingml/2006/main"/>
+          <a:lstStyle xmlns:a="http://schemas.openxmlformats.org/drawingml/2006/main"/>
+          <a:p xmlns:a="http://schemas.openxmlformats.org/drawingml/2006/main">
+            <a:pPr algn="l">
+              <a:defRPr sz="1275" b="0">
+                <a:solidFill>
+                  <a:srgbClr val="17202A"/>
+                </a:solidFill>
+                <a:latin typeface="Aptos"/>
+                <a:ea typeface="Aptos"/>
+                <a:cs typeface="Aptos"/>
+              </a:defRPr>
+            </a:pPr>
+            <a:r>
+              <a:rPr sz="1275" b="0">
+                <a:solidFill>
+                  <a:srgbClr val="17202A"/>
+                </a:solidFill>
+                <a:latin typeface="Aptos"/>
+                <a:ea typeface="Aptos"/>
+                <a:cs typeface="Aptos"/>
+              </a:rPr>
+              <a:t>Back up object bytes separately; database PITR does not restore Supabase Storage objects.</a:t>
+            </a:r>
+          </a:p>
+        </p:txBody>
+      </p:sp>
+      <p:sp>
+        <p:nvSpPr>
+          <p:cNvPr id="31" name="bullet-dot">
+            <a:extLst xmlns:a="http://schemas.openxmlformats.org/drawingml/2006/main">
+              <a:ext uri="{FF2B5EF4-FFF2-40B4-BE49-F238E27FC236}">
+                <a16:creationId xmlns:a16="http://schemas.microsoft.com/office/drawing/2014/main" id="{190F3C35-41BE-4842-B790-581C9E77A33F}"/>
+              </a:ext>
+            </a:extLst>
+          </p:cNvPr>
+          <p:cNvSpPr>
+            <a:spLocks xmlns:a="http://schemas.openxmlformats.org/drawingml/2006/main" noGrp="1"/>
+          </p:cNvSpPr>
+          <p:nvPr/>
+        </p:nvSpPr>
+        <p:spPr>
+          <a:xfrm xmlns:a="http://schemas.openxmlformats.org/drawingml/2006/main">
+            <a:off x="857250" y="6038850"/>
+            <a:ext cx="85725" cy="85725"/>
+          </a:xfrm>
+          <a:prstGeom xmlns:a="http://schemas.openxmlformats.org/drawingml/2006/main" prst="ellipse">
+            <a:avLst/>
+          </a:prstGeom>
+          <a:solidFill xmlns:a="http://schemas.openxmlformats.org/drawingml/2006/main">
+            <a:srgbClr val="FF5B4D"/>
+          </a:solidFill>
+          <a:ln xmlns:a="http://schemas.openxmlformats.org/drawingml/2006/main" w="0">
+            <a:solidFill>
+              <a:srgbClr val="FF5B4D"/>
+            </a:solidFill>
+            <a:prstDash val="solid"/>
+          </a:ln>
+        </p:spPr>
+      </p:sp>
+      <p:sp>
+        <p:nvSpPr>
+          <p:cNvPr id="32" name="">
+            <a:extLst xmlns:a="http://schemas.openxmlformats.org/drawingml/2006/main">
+              <a:ext uri="{FF2B5EF4-FFF2-40B4-BE49-F238E27FC236}">
+                <a16:creationId xmlns:a16="http://schemas.microsoft.com/office/drawing/2014/main" id="{7B92EC07-E5A8-460A-B255-56A44FB46865}"/>
+              </a:ext>
+            </a:extLst>
+          </p:cNvPr>
+          <p:cNvSpPr>
+            <a:spLocks xmlns:a="http://schemas.openxmlformats.org/drawingml/2006/main" noGrp="1"/>
+          </p:cNvSpPr>
+          <p:nvPr/>
+        </p:nvSpPr>
+        <p:spPr>
+          <a:xfrm xmlns:a="http://schemas.openxmlformats.org/drawingml/2006/main">
+            <a:off x="1028700" y="5962650"/>
+            <a:ext cx="9639300" cy="352425"/>
+          </a:xfrm>
+          <a:prstGeom xmlns:a="http://schemas.openxmlformats.org/drawingml/2006/main" prst="rect">
+            <a:avLst/>
+          </a:prstGeom>
+          <a:noFill xmlns:a="http://schemas.openxmlformats.org/drawingml/2006/main"/>
+          <a:ln xmlns:a="http://schemas.openxmlformats.org/drawingml/2006/main" w="0">
+            <a:noFill/>
+            <a:prstDash val="solid"/>
+          </a:ln>
+        </p:spPr>
+        <p:txBody>
+          <a:bodyPr xmlns:a="http://schemas.openxmlformats.org/drawingml/2006/main"/>
+          <a:lstStyle xmlns:a="http://schemas.openxmlformats.org/drawingml/2006/main"/>
+          <a:p xmlns:a="http://schemas.openxmlformats.org/drawingml/2006/main">
+            <a:pPr algn="l">
+              <a:defRPr sz="1275" b="0">
+                <a:solidFill>
+                  <a:srgbClr val="17202A"/>
+                </a:solidFill>
+                <a:latin typeface="Aptos"/>
+                <a:ea typeface="Aptos"/>
+                <a:cs typeface="Aptos"/>
+              </a:defRPr>
+            </a:pPr>
+            <a:r>
+              <a:rPr sz="1275" b="0">
+                <a:solidFill>
+                  <a:srgbClr val="17202A"/>
+                </a:solidFill>
+                <a:latin typeface="Aptos"/>
+                <a:ea typeface="Aptos"/>
+                <a:cs typeface="Aptos"/>
+              </a:rPr>
+              <a:t>Track GB stored, GB egressed, media downloads per active trip, and failed rehydrations as launch KPIs.</a:t>
+            </a:r>
+          </a:p>
+        </p:txBody>
+      </p:sp>
+    </p:spTree>
+    <p:extLst>
+      <p:ext uri="{BB962C8B-B14F-4D97-AF65-F5344CB8AC3E}">
+        <p14:creationId xmlns:p14="http://schemas.microsoft.com/office/powerpoint/2010/main" val="1069734806"/>
+      </p:ext>
+    </p:extLst>
+  </p:cSld>
+</p:sld>
+</file>
+
+<file path=ppt/slides/slide13.xml><?xml version="1.0" encoding="utf-8"?>
+<p:sld xmlns:p="http://schemas.openxmlformats.org/presentationml/2006/main">
+  <p:cSld>
+    <p:bg>
+      <p:bgPr>
+        <a:solidFill xmlns:a="http://schemas.openxmlformats.org/drawingml/2006/main">
+          <a:srgbClr val="F7FAF9"/>
+        </a:solidFill>
+      </p:bgPr>
+    </p:bg>
+    <p:spTree>
+      <p:nvGrpSpPr>
+        <p:cNvPr id="1" name=""/>
+        <p:cNvGrpSpPr/>
+        <p:nvPr/>
+      </p:nvGrpSpPr>
+      <p:grpSpPr>
+        <a:xfrm xmlns:a="http://schemas.openxmlformats.org/drawingml/2006/main"/>
+      </p:grpSpPr>
+      <p:sp>
+        <p:nvSpPr>
+          <p:cNvPr id="1" name="brand-rail">
+            <a:extLst xmlns:a="http://schemas.openxmlformats.org/drawingml/2006/main">
+              <a:ext uri="{FF2B5EF4-FFF2-40B4-BE49-F238E27FC236}">
+                <a16:creationId xmlns:a16="http://schemas.microsoft.com/office/drawing/2014/main" id="{9DD95CB1-F6C8-4BE6-9A43-53A4594509E2}"/>
+              </a:ext>
+            </a:extLst>
+          </p:cNvPr>
+          <p:cNvSpPr>
+            <a:spLocks xmlns:a="http://schemas.openxmlformats.org/drawingml/2006/main" noGrp="1"/>
+          </p:cNvSpPr>
+          <p:nvPr/>
+        </p:nvSpPr>
+        <p:spPr>
+          <a:xfrm xmlns:a="http://schemas.openxmlformats.org/drawingml/2006/main">
+            <a:off x="0" y="0"/>
+            <a:ext cx="133350" cy="6858000"/>
+          </a:xfrm>
+          <a:prstGeom xmlns:a="http://schemas.openxmlformats.org/drawingml/2006/main" prst="rect">
             <a:avLst/>
           </a:prstGeom>
           <a:solidFill xmlns:a="http://schemas.openxmlformats.org/drawingml/2006/main">
@@ -4845,22 +8045,22 @@
       </p:sp>
       <p:sp>
         <p:nvSpPr>
-          <p:cNvPr id="6" name="">
-            <a:extLst xmlns:a="http://schemas.openxmlformats.org/drawingml/2006/main">
-              <a:ext uri="{FF2B5EF4-FFF2-40B4-BE49-F238E27FC236}">
-                <a16:creationId xmlns:a16="http://schemas.microsoft.com/office/drawing/2014/main" id="{33525FAE-DAE2-4FF5-858B-F221244C2567}"/>
-              </a:ext>
-            </a:extLst>
-          </p:cNvPr>
-          <p:cNvSpPr>
-            <a:spLocks xmlns:a="http://schemas.openxmlformats.org/drawingml/2006/main" noGrp="1"/>
-          </p:cNvSpPr>
-          <p:nvPr/>
-        </p:nvSpPr>
-        <p:spPr>
-          <a:xfrm xmlns:a="http://schemas.openxmlformats.org/drawingml/2006/main">
-            <a:off x="952500" y="1428750"/>
-            <a:ext cx="9829800" cy="438150"/>
+          <p:cNvPr id="2" name="">
+            <a:extLst xmlns:a="http://schemas.openxmlformats.org/drawingml/2006/main">
+              <a:ext uri="{FF2B5EF4-FFF2-40B4-BE49-F238E27FC236}">
+                <a16:creationId xmlns:a16="http://schemas.microsoft.com/office/drawing/2014/main" id="{AC0D67BC-F774-49CA-9DA2-07A5E6A7F28C}"/>
+              </a:ext>
+            </a:extLst>
+          </p:cNvPr>
+          <p:cNvSpPr>
+            <a:spLocks xmlns:a="http://schemas.openxmlformats.org/drawingml/2006/main" noGrp="1"/>
+          </p:cNvSpPr>
+          <p:nvPr/>
+        </p:nvSpPr>
+        <p:spPr>
+          <a:xfrm xmlns:a="http://schemas.openxmlformats.org/drawingml/2006/main">
+            <a:off x="495300" y="476250"/>
+            <a:ext cx="8382000" cy="457200"/>
           </a:xfrm>
           <a:prstGeom xmlns:a="http://schemas.openxmlformats.org/drawingml/2006/main" prst="rect">
             <a:avLst/>
@@ -4876,49 +8076,1078 @@
           <a:lstStyle xmlns:a="http://schemas.openxmlformats.org/drawingml/2006/main"/>
           <a:p xmlns:a="http://schemas.openxmlformats.org/drawingml/2006/main">
             <a:pPr algn="l">
-              <a:defRPr sz="1275" b="0">
-                <a:solidFill>
-                  <a:srgbClr val="17202A"/>
-                </a:solidFill>
-                <a:latin typeface="Aptos"/>
-                <a:ea typeface="Aptos"/>
-                <a:cs typeface="Aptos"/>
-              </a:defRPr>
-            </a:pPr>
-            <a:r>
-              <a:rPr sz="1275" b="0">
-                <a:solidFill>
-                  <a:srgbClr val="17202A"/>
-                </a:solidFill>
-                <a:latin typeface="Aptos"/>
-                <a:ea typeface="Aptos"/>
-                <a:cs typeface="Aptos"/>
-              </a:rPr>
-              <a:t>Repo: docs/DEPENDENCIES.md, docs/LAUNCH_GATES.md, docs/DR_RUNBOOK.md, docs/OBSERVABILITY.md.</a:t>
-            </a:r>
-          </a:p>
-        </p:txBody>
-      </p:sp>
-      <p:sp>
-        <p:nvSpPr>
-          <p:cNvPr id="7" name="bullet-dot">
-            <a:extLst xmlns:a="http://schemas.openxmlformats.org/drawingml/2006/main">
-              <a:ext uri="{FF2B5EF4-FFF2-40B4-BE49-F238E27FC236}">
-                <a16:creationId xmlns:a16="http://schemas.microsoft.com/office/drawing/2014/main" id="{A839811B-0F8D-4A98-AC58-71BCB88B8124}"/>
-              </a:ext>
-            </a:extLst>
-          </p:cNvPr>
-          <p:cNvSpPr>
-            <a:spLocks xmlns:a="http://schemas.openxmlformats.org/drawingml/2006/main" noGrp="1"/>
-          </p:cNvSpPr>
-          <p:nvPr/>
-        </p:nvSpPr>
-        <p:spPr>
-          <a:xfrm xmlns:a="http://schemas.openxmlformats.org/drawingml/2006/main">
-            <a:off x="781050" y="1914525"/>
-            <a:ext cx="85725" cy="85725"/>
-          </a:xfrm>
-          <a:prstGeom xmlns:a="http://schemas.openxmlformats.org/drawingml/2006/main" prst="ellipse">
+              <a:defRPr sz="2700" b="1">
+                <a:solidFill>
+                  <a:srgbClr val="17202A"/>
+                </a:solidFill>
+                <a:latin typeface="Aptos Display"/>
+                <a:ea typeface="Aptos Display"/>
+                <a:cs typeface="Aptos Display"/>
+              </a:defRPr>
+            </a:pPr>
+            <a:r>
+              <a:rPr sz="2700" b="1">
+                <a:solidFill>
+                  <a:srgbClr val="17202A"/>
+                </a:solidFill>
+                <a:latin typeface="Aptos Display"/>
+                <a:ea typeface="Aptos Display"/>
+                <a:cs typeface="Aptos Display"/>
+              </a:rPr>
+              <a:t>Financial model stays authoritative</a:t>
+            </a:r>
+          </a:p>
+        </p:txBody>
+      </p:sp>
+      <p:sp>
+        <p:nvSpPr>
+          <p:cNvPr id="3" name="">
+            <a:extLst xmlns:a="http://schemas.openxmlformats.org/drawingml/2006/main">
+              <a:ext uri="{FF2B5EF4-FFF2-40B4-BE49-F238E27FC236}">
+                <a16:creationId xmlns:a16="http://schemas.microsoft.com/office/drawing/2014/main" id="{AE37E517-A79D-4940-BF4D-691DC3781BF4}"/>
+              </a:ext>
+            </a:extLst>
+          </p:cNvPr>
+          <p:cNvSpPr>
+            <a:spLocks xmlns:a="http://schemas.openxmlformats.org/drawingml/2006/main" noGrp="1"/>
+          </p:cNvSpPr>
+          <p:nvPr/>
+        </p:nvSpPr>
+        <p:spPr>
+          <a:xfrm xmlns:a="http://schemas.openxmlformats.org/drawingml/2006/main">
+            <a:off x="514350" y="933450"/>
+            <a:ext cx="7239000" cy="266700"/>
+          </a:xfrm>
+          <a:prstGeom xmlns:a="http://schemas.openxmlformats.org/drawingml/2006/main" prst="rect">
+            <a:avLst/>
+          </a:prstGeom>
+          <a:noFill xmlns:a="http://schemas.openxmlformats.org/drawingml/2006/main"/>
+          <a:ln xmlns:a="http://schemas.openxmlformats.org/drawingml/2006/main" w="0">
+            <a:noFill/>
+            <a:prstDash val="solid"/>
+          </a:ln>
+        </p:spPr>
+        <p:txBody>
+          <a:bodyPr xmlns:a="http://schemas.openxmlformats.org/drawingml/2006/main"/>
+          <a:lstStyle xmlns:a="http://schemas.openxmlformats.org/drawingml/2006/main"/>
+          <a:p xmlns:a="http://schemas.openxmlformats.org/drawingml/2006/main">
+            <a:pPr algn="l">
+              <a:defRPr sz="1200" b="1">
+                <a:solidFill>
+                  <a:srgbClr val="0D7377"/>
+                </a:solidFill>
+                <a:latin typeface="Aptos"/>
+                <a:ea typeface="Aptos"/>
+                <a:cs typeface="Aptos"/>
+              </a:defRPr>
+            </a:pPr>
+            <a:r>
+              <a:rPr sz="1200" b="1">
+                <a:solidFill>
+                  <a:srgbClr val="0D7377"/>
+                </a:solidFill>
+                <a:latin typeface="Aptos"/>
+                <a:ea typeface="Aptos"/>
+                <a:cs typeface="Aptos"/>
+              </a:rPr>
+              <a:t>Do not let this deck become a second business model.</a:t>
+            </a:r>
+          </a:p>
+        </p:txBody>
+      </p:sp>
+      <p:sp>
+        <p:nvSpPr>
+          <p:cNvPr id="4" name="">
+            <a:extLst xmlns:a="http://schemas.openxmlformats.org/drawingml/2006/main">
+              <a:ext uri="{FF2B5EF4-FFF2-40B4-BE49-F238E27FC236}">
+                <a16:creationId xmlns:a16="http://schemas.microsoft.com/office/drawing/2014/main" id="{CC8E9583-1A6B-4138-B602-2F4472FD2469}"/>
+              </a:ext>
+            </a:extLst>
+          </p:cNvPr>
+          <p:cNvSpPr>
+            <a:spLocks xmlns:a="http://schemas.openxmlformats.org/drawingml/2006/main" noGrp="1"/>
+          </p:cNvSpPr>
+          <p:nvPr/>
+        </p:nvSpPr>
+        <p:spPr>
+          <a:xfrm xmlns:a="http://schemas.openxmlformats.org/drawingml/2006/main">
+            <a:off x="9124950" y="476250"/>
+            <a:ext cx="2095500" cy="209550"/>
+          </a:xfrm>
+          <a:prstGeom xmlns:a="http://schemas.openxmlformats.org/drawingml/2006/main" prst="rect">
+            <a:avLst/>
+          </a:prstGeom>
+          <a:noFill xmlns:a="http://schemas.openxmlformats.org/drawingml/2006/main"/>
+          <a:ln xmlns:a="http://schemas.openxmlformats.org/drawingml/2006/main" w="0">
+            <a:noFill/>
+            <a:prstDash val="solid"/>
+          </a:ln>
+        </p:spPr>
+        <p:txBody>
+          <a:bodyPr xmlns:a="http://schemas.openxmlformats.org/drawingml/2006/main"/>
+          <a:lstStyle xmlns:a="http://schemas.openxmlformats.org/drawingml/2006/main"/>
+          <a:p xmlns:a="http://schemas.openxmlformats.org/drawingml/2006/main">
+            <a:pPr algn="r">
+              <a:defRPr sz="900" b="0">
+                <a:solidFill>
+                  <a:srgbClr val="617181"/>
+                </a:solidFill>
+                <a:latin typeface="Aptos"/>
+                <a:ea typeface="Aptos"/>
+                <a:cs typeface="Aptos"/>
+              </a:defRPr>
+            </a:pPr>
+            <a:r>
+              <a:rPr sz="900" b="0">
+                <a:solidFill>
+                  <a:srgbClr val="617181"/>
+                </a:solidFill>
+                <a:latin typeface="Aptos"/>
+                <a:ea typeface="Aptos"/>
+                <a:cs typeface="Aptos"/>
+              </a:rPr>
+              <a:t>Vamo dependency + scale map</a:t>
+            </a:r>
+          </a:p>
+        </p:txBody>
+      </p:sp>
+      <p:sp>
+        <p:nvSpPr>
+          <p:cNvPr id="5" name="">
+            <a:extLst xmlns:a="http://schemas.openxmlformats.org/drawingml/2006/main">
+              <a:ext uri="{FF2B5EF4-FFF2-40B4-BE49-F238E27FC236}">
+                <a16:creationId xmlns:a16="http://schemas.microsoft.com/office/drawing/2014/main" id="{8290E884-D80D-4320-9CB1-C6FE3EAB07B2}"/>
+              </a:ext>
+            </a:extLst>
+          </p:cNvPr>
+          <p:cNvSpPr>
+            <a:spLocks xmlns:a="http://schemas.openxmlformats.org/drawingml/2006/main" noGrp="1"/>
+          </p:cNvSpPr>
+          <p:nvPr/>
+        </p:nvSpPr>
+        <p:spPr>
+          <a:xfrm xmlns:a="http://schemas.openxmlformats.org/drawingml/2006/main">
+            <a:off x="762000" y="1428750"/>
+            <a:ext cx="3238500" cy="1828800"/>
+          </a:xfrm>
+          <a:prstGeom xmlns:a="http://schemas.openxmlformats.org/drawingml/2006/main" prst="roundRect">
+            <a:avLst>
+              <a:gd name="adj" fmla="val 4167"/>
+            </a:avLst>
+          </a:prstGeom>
+          <a:solidFill xmlns:a="http://schemas.openxmlformats.org/drawingml/2006/main">
+            <a:srgbClr val="E5F6F3"/>
+          </a:solidFill>
+          <a:ln xmlns:a="http://schemas.openxmlformats.org/drawingml/2006/main" w="9525">
+            <a:solidFill>
+              <a:srgbClr val="DDE5EA"/>
+            </a:solidFill>
+            <a:prstDash val="solid"/>
+          </a:ln>
+        </p:spPr>
+        <p:txBody>
+          <a:bodyPr xmlns:a="http://schemas.openxmlformats.org/drawingml/2006/main"/>
+          <a:lstStyle xmlns:a="http://schemas.openxmlformats.org/drawingml/2006/main"/>
+          <a:p xmlns:a="http://schemas.openxmlformats.org/drawingml/2006/main">
+            <a:r>
+              <a:t/>
+            </a:r>
+          </a:p>
+        </p:txBody>
+      </p:sp>
+      <p:sp>
+        <p:nvSpPr>
+          <p:cNvPr id="6" name="">
+            <a:extLst xmlns:a="http://schemas.openxmlformats.org/drawingml/2006/main">
+              <a:ext uri="{FF2B5EF4-FFF2-40B4-BE49-F238E27FC236}">
+                <a16:creationId xmlns:a16="http://schemas.microsoft.com/office/drawing/2014/main" id="{4B48F865-88D0-41C1-A68E-5E5403F3749E}"/>
+              </a:ext>
+            </a:extLst>
+          </p:cNvPr>
+          <p:cNvSpPr>
+            <a:spLocks xmlns:a="http://schemas.openxmlformats.org/drawingml/2006/main" noGrp="1"/>
+          </p:cNvSpPr>
+          <p:nvPr/>
+        </p:nvSpPr>
+        <p:spPr>
+          <a:xfrm xmlns:a="http://schemas.openxmlformats.org/drawingml/2006/main">
+            <a:off x="933450" y="1562100"/>
+            <a:ext cx="2895600" cy="247650"/>
+          </a:xfrm>
+          <a:prstGeom xmlns:a="http://schemas.openxmlformats.org/drawingml/2006/main" prst="rect">
+            <a:avLst/>
+          </a:prstGeom>
+          <a:noFill xmlns:a="http://schemas.openxmlformats.org/drawingml/2006/main"/>
+          <a:ln xmlns:a="http://schemas.openxmlformats.org/drawingml/2006/main" w="0">
+            <a:noFill/>
+            <a:prstDash val="solid"/>
+          </a:ln>
+        </p:spPr>
+        <p:txBody>
+          <a:bodyPr xmlns:a="http://schemas.openxmlformats.org/drawingml/2006/main"/>
+          <a:lstStyle xmlns:a="http://schemas.openxmlformats.org/drawingml/2006/main"/>
+          <a:p xmlns:a="http://schemas.openxmlformats.org/drawingml/2006/main">
+            <a:pPr algn="l">
+              <a:defRPr sz="1350" b="1">
+                <a:solidFill>
+                  <a:srgbClr val="17202A"/>
+                </a:solidFill>
+                <a:latin typeface="Aptos"/>
+                <a:ea typeface="Aptos"/>
+                <a:cs typeface="Aptos"/>
+              </a:defRPr>
+            </a:pPr>
+            <a:r>
+              <a:rPr sz="1350" b="1">
+                <a:solidFill>
+                  <a:srgbClr val="17202A"/>
+                </a:solidFill>
+                <a:latin typeface="Aptos"/>
+                <a:ea typeface="Aptos"/>
+                <a:cs typeface="Aptos"/>
+              </a:rPr>
+              <a:t>Where ratios live</a:t>
+            </a:r>
+          </a:p>
+        </p:txBody>
+      </p:sp>
+      <p:sp>
+        <p:nvSpPr>
+          <p:cNvPr id="7" name="">
+            <a:extLst xmlns:a="http://schemas.openxmlformats.org/drawingml/2006/main">
+              <a:ext uri="{FF2B5EF4-FFF2-40B4-BE49-F238E27FC236}">
+                <a16:creationId xmlns:a16="http://schemas.microsoft.com/office/drawing/2014/main" id="{A718BDB0-AB82-44D0-BA15-2089D78FA846}"/>
+              </a:ext>
+            </a:extLst>
+          </p:cNvPr>
+          <p:cNvSpPr>
+            <a:spLocks xmlns:a="http://schemas.openxmlformats.org/drawingml/2006/main" noGrp="1"/>
+          </p:cNvSpPr>
+          <p:nvPr/>
+        </p:nvSpPr>
+        <p:spPr>
+          <a:xfrm xmlns:a="http://schemas.openxmlformats.org/drawingml/2006/main">
+            <a:off x="933450" y="1857375"/>
+            <a:ext cx="2895600" cy="1295400"/>
+          </a:xfrm>
+          <a:prstGeom xmlns:a="http://schemas.openxmlformats.org/drawingml/2006/main" prst="rect">
+            <a:avLst/>
+          </a:prstGeom>
+          <a:noFill xmlns:a="http://schemas.openxmlformats.org/drawingml/2006/main"/>
+          <a:ln xmlns:a="http://schemas.openxmlformats.org/drawingml/2006/main" w="0">
+            <a:noFill/>
+            <a:prstDash val="solid"/>
+          </a:ln>
+        </p:spPr>
+        <p:txBody>
+          <a:bodyPr xmlns:a="http://schemas.openxmlformats.org/drawingml/2006/main"/>
+          <a:lstStyle xmlns:a="http://schemas.openxmlformats.org/drawingml/2006/main"/>
+          <a:p xmlns:a="http://schemas.openxmlformats.org/drawingml/2006/main">
+            <a:pPr algn="l">
+              <a:defRPr sz="1125" b="0">
+                <a:solidFill>
+                  <a:srgbClr val="617181"/>
+                </a:solidFill>
+                <a:latin typeface="Aptos"/>
+                <a:ea typeface="Aptos"/>
+                <a:cs typeface="Aptos"/>
+              </a:defRPr>
+            </a:pPr>
+            <a:r>
+              <a:rPr sz="1125" b="0">
+                <a:solidFill>
+                  <a:srgbClr val="617181"/>
+                </a:solidFill>
+                <a:latin typeface="Aptos"/>
+                <a:ea typeface="Aptos"/>
+                <a:cs typeface="Aptos"/>
+              </a:rPr>
+              <a:t>Costs vs income, LTV:CAC, payback, cash runway, and scenarios live in docs/business/Vamo_Financial_Model.xlsx. Update that workbook first.</a:t>
+            </a:r>
+          </a:p>
+        </p:txBody>
+      </p:sp>
+      <p:sp>
+        <p:nvSpPr>
+          <p:cNvPr id="8" name="">
+            <a:extLst xmlns:a="http://schemas.openxmlformats.org/drawingml/2006/main">
+              <a:ext uri="{FF2B5EF4-FFF2-40B4-BE49-F238E27FC236}">
+                <a16:creationId xmlns:a16="http://schemas.microsoft.com/office/drawing/2014/main" id="{3B9196EA-E4B3-4C5E-8C25-AB6223FB9B55}"/>
+              </a:ext>
+            </a:extLst>
+          </p:cNvPr>
+          <p:cNvSpPr>
+            <a:spLocks xmlns:a="http://schemas.openxmlformats.org/drawingml/2006/main" noGrp="1"/>
+          </p:cNvSpPr>
+          <p:nvPr/>
+        </p:nvSpPr>
+        <p:spPr>
+          <a:xfrm xmlns:a="http://schemas.openxmlformats.org/drawingml/2006/main">
+            <a:off x="4476750" y="1428750"/>
+            <a:ext cx="3238500" cy="1828800"/>
+          </a:xfrm>
+          <a:prstGeom xmlns:a="http://schemas.openxmlformats.org/drawingml/2006/main" prst="roundRect">
+            <a:avLst>
+              <a:gd name="adj" fmla="val 4167"/>
+            </a:avLst>
+          </a:prstGeom>
+          <a:solidFill xmlns:a="http://schemas.openxmlformats.org/drawingml/2006/main">
+            <a:srgbClr val="EAF2FF"/>
+          </a:solidFill>
+          <a:ln xmlns:a="http://schemas.openxmlformats.org/drawingml/2006/main" w="9525">
+            <a:solidFill>
+              <a:srgbClr val="DDE5EA"/>
+            </a:solidFill>
+            <a:prstDash val="solid"/>
+          </a:ln>
+        </p:spPr>
+        <p:txBody>
+          <a:bodyPr xmlns:a="http://schemas.openxmlformats.org/drawingml/2006/main"/>
+          <a:lstStyle xmlns:a="http://schemas.openxmlformats.org/drawingml/2006/main"/>
+          <a:p xmlns:a="http://schemas.openxmlformats.org/drawingml/2006/main">
+            <a:r>
+              <a:t/>
+            </a:r>
+          </a:p>
+        </p:txBody>
+      </p:sp>
+      <p:sp>
+        <p:nvSpPr>
+          <p:cNvPr id="9" name="">
+            <a:extLst xmlns:a="http://schemas.openxmlformats.org/drawingml/2006/main">
+              <a:ext uri="{FF2B5EF4-FFF2-40B4-BE49-F238E27FC236}">
+                <a16:creationId xmlns:a16="http://schemas.microsoft.com/office/drawing/2014/main" id="{A264427C-62B4-4D74-90A0-58764422D3B1}"/>
+              </a:ext>
+            </a:extLst>
+          </p:cNvPr>
+          <p:cNvSpPr>
+            <a:spLocks xmlns:a="http://schemas.openxmlformats.org/drawingml/2006/main" noGrp="1"/>
+          </p:cNvSpPr>
+          <p:nvPr/>
+        </p:nvSpPr>
+        <p:spPr>
+          <a:xfrm xmlns:a="http://schemas.openxmlformats.org/drawingml/2006/main">
+            <a:off x="4648200" y="1562100"/>
+            <a:ext cx="2895600" cy="247650"/>
+          </a:xfrm>
+          <a:prstGeom xmlns:a="http://schemas.openxmlformats.org/drawingml/2006/main" prst="rect">
+            <a:avLst/>
+          </a:prstGeom>
+          <a:noFill xmlns:a="http://schemas.openxmlformats.org/drawingml/2006/main"/>
+          <a:ln xmlns:a="http://schemas.openxmlformats.org/drawingml/2006/main" w="0">
+            <a:noFill/>
+            <a:prstDash val="solid"/>
+          </a:ln>
+        </p:spPr>
+        <p:txBody>
+          <a:bodyPr xmlns:a="http://schemas.openxmlformats.org/drawingml/2006/main"/>
+          <a:lstStyle xmlns:a="http://schemas.openxmlformats.org/drawingml/2006/main"/>
+          <a:p xmlns:a="http://schemas.openxmlformats.org/drawingml/2006/main">
+            <a:pPr algn="l">
+              <a:defRPr sz="1350" b="1">
+                <a:solidFill>
+                  <a:srgbClr val="17202A"/>
+                </a:solidFill>
+                <a:latin typeface="Aptos"/>
+                <a:ea typeface="Aptos"/>
+                <a:cs typeface="Aptos"/>
+              </a:defRPr>
+            </a:pPr>
+            <a:r>
+              <a:rPr sz="1350" b="1">
+                <a:solidFill>
+                  <a:srgbClr val="17202A"/>
+                </a:solidFill>
+                <a:latin typeface="Aptos"/>
+                <a:ea typeface="Aptos"/>
+                <a:cs typeface="Aptos"/>
+              </a:rPr>
+              <a:t>What this deck may say</a:t>
+            </a:r>
+          </a:p>
+        </p:txBody>
+      </p:sp>
+      <p:sp>
+        <p:nvSpPr>
+          <p:cNvPr id="10" name="">
+            <a:extLst xmlns:a="http://schemas.openxmlformats.org/drawingml/2006/main">
+              <a:ext uri="{FF2B5EF4-FFF2-40B4-BE49-F238E27FC236}">
+                <a16:creationId xmlns:a16="http://schemas.microsoft.com/office/drawing/2014/main" id="{991E18A7-07B2-4C0A-8E32-A63A347079DD}"/>
+              </a:ext>
+            </a:extLst>
+          </p:cNvPr>
+          <p:cNvSpPr>
+            <a:spLocks xmlns:a="http://schemas.openxmlformats.org/drawingml/2006/main" noGrp="1"/>
+          </p:cNvSpPr>
+          <p:nvPr/>
+        </p:nvSpPr>
+        <p:spPr>
+          <a:xfrm xmlns:a="http://schemas.openxmlformats.org/drawingml/2006/main">
+            <a:off x="4648200" y="1857375"/>
+            <a:ext cx="2895600" cy="1295400"/>
+          </a:xfrm>
+          <a:prstGeom xmlns:a="http://schemas.openxmlformats.org/drawingml/2006/main" prst="rect">
+            <a:avLst/>
+          </a:prstGeom>
+          <a:noFill xmlns:a="http://schemas.openxmlformats.org/drawingml/2006/main"/>
+          <a:ln xmlns:a="http://schemas.openxmlformats.org/drawingml/2006/main" w="0">
+            <a:noFill/>
+            <a:prstDash val="solid"/>
+          </a:ln>
+        </p:spPr>
+        <p:txBody>
+          <a:bodyPr xmlns:a="http://schemas.openxmlformats.org/drawingml/2006/main"/>
+          <a:lstStyle xmlns:a="http://schemas.openxmlformats.org/drawingml/2006/main"/>
+          <a:p xmlns:a="http://schemas.openxmlformats.org/drawingml/2006/main">
+            <a:pPr algn="l">
+              <a:defRPr sz="1125" b="0">
+                <a:solidFill>
+                  <a:srgbClr val="617181"/>
+                </a:solidFill>
+                <a:latin typeface="Aptos"/>
+                <a:ea typeface="Aptos"/>
+                <a:cs typeface="Aptos"/>
+              </a:defRPr>
+            </a:pPr>
+            <a:r>
+              <a:rPr sz="1125" b="0">
+                <a:solidFill>
+                  <a:srgbClr val="617181"/>
+                </a:solidFill>
+                <a:latin typeface="Aptos"/>
+                <a:ea typeface="Aptos"/>
+                <a:cs typeface="Aptos"/>
+              </a:rPr>
+              <a:t>This deck may explain dependency risk, scale breakpoints, and storage drivers. It should reference workbook assumptions, not duplicate them.</a:t>
+            </a:r>
+          </a:p>
+        </p:txBody>
+      </p:sp>
+      <p:sp>
+        <p:nvSpPr>
+          <p:cNvPr id="11" name="">
+            <a:extLst xmlns:a="http://schemas.openxmlformats.org/drawingml/2006/main">
+              <a:ext uri="{FF2B5EF4-FFF2-40B4-BE49-F238E27FC236}">
+                <a16:creationId xmlns:a16="http://schemas.microsoft.com/office/drawing/2014/main" id="{09180E23-9DAB-46BA-9F87-50EE2A383D4E}"/>
+              </a:ext>
+            </a:extLst>
+          </p:cNvPr>
+          <p:cNvSpPr>
+            <a:spLocks xmlns:a="http://schemas.openxmlformats.org/drawingml/2006/main" noGrp="1"/>
+          </p:cNvSpPr>
+          <p:nvPr/>
+        </p:nvSpPr>
+        <p:spPr>
+          <a:xfrm xmlns:a="http://schemas.openxmlformats.org/drawingml/2006/main">
+            <a:off x="8191500" y="1428750"/>
+            <a:ext cx="3238500" cy="1828800"/>
+          </a:xfrm>
+          <a:prstGeom xmlns:a="http://schemas.openxmlformats.org/drawingml/2006/main" prst="roundRect">
+            <a:avLst>
+              <a:gd name="adj" fmla="val 4167"/>
+            </a:avLst>
+          </a:prstGeom>
+          <a:solidFill xmlns:a="http://schemas.openxmlformats.org/drawingml/2006/main">
+            <a:srgbClr val="FFF5DF"/>
+          </a:solidFill>
+          <a:ln xmlns:a="http://schemas.openxmlformats.org/drawingml/2006/main" w="9525">
+            <a:solidFill>
+              <a:srgbClr val="DDE5EA"/>
+            </a:solidFill>
+            <a:prstDash val="solid"/>
+          </a:ln>
+        </p:spPr>
+        <p:txBody>
+          <a:bodyPr xmlns:a="http://schemas.openxmlformats.org/drawingml/2006/main"/>
+          <a:lstStyle xmlns:a="http://schemas.openxmlformats.org/drawingml/2006/main"/>
+          <a:p xmlns:a="http://schemas.openxmlformats.org/drawingml/2006/main">
+            <a:r>
+              <a:t/>
+            </a:r>
+          </a:p>
+        </p:txBody>
+      </p:sp>
+      <p:sp>
+        <p:nvSpPr>
+          <p:cNvPr id="12" name="">
+            <a:extLst xmlns:a="http://schemas.openxmlformats.org/drawingml/2006/main">
+              <a:ext uri="{FF2B5EF4-FFF2-40B4-BE49-F238E27FC236}">
+                <a16:creationId xmlns:a16="http://schemas.microsoft.com/office/drawing/2014/main" id="{7DE49CE5-70A0-48F6-BA40-268F8921393E}"/>
+              </a:ext>
+            </a:extLst>
+          </p:cNvPr>
+          <p:cNvSpPr>
+            <a:spLocks xmlns:a="http://schemas.openxmlformats.org/drawingml/2006/main" noGrp="1"/>
+          </p:cNvSpPr>
+          <p:nvPr/>
+        </p:nvSpPr>
+        <p:spPr>
+          <a:xfrm xmlns:a="http://schemas.openxmlformats.org/drawingml/2006/main">
+            <a:off x="8362950" y="1562100"/>
+            <a:ext cx="2895600" cy="247650"/>
+          </a:xfrm>
+          <a:prstGeom xmlns:a="http://schemas.openxmlformats.org/drawingml/2006/main" prst="rect">
+            <a:avLst/>
+          </a:prstGeom>
+          <a:noFill xmlns:a="http://schemas.openxmlformats.org/drawingml/2006/main"/>
+          <a:ln xmlns:a="http://schemas.openxmlformats.org/drawingml/2006/main" w="0">
+            <a:noFill/>
+            <a:prstDash val="solid"/>
+          </a:ln>
+        </p:spPr>
+        <p:txBody>
+          <a:bodyPr xmlns:a="http://schemas.openxmlformats.org/drawingml/2006/main"/>
+          <a:lstStyle xmlns:a="http://schemas.openxmlformats.org/drawingml/2006/main"/>
+          <a:p xmlns:a="http://schemas.openxmlformats.org/drawingml/2006/main">
+            <a:pPr algn="l">
+              <a:defRPr sz="1350" b="1">
+                <a:solidFill>
+                  <a:srgbClr val="17202A"/>
+                </a:solidFill>
+                <a:latin typeface="Aptos"/>
+                <a:ea typeface="Aptos"/>
+                <a:cs typeface="Aptos"/>
+              </a:defRPr>
+            </a:pPr>
+            <a:r>
+              <a:rPr sz="1350" b="1">
+                <a:solidFill>
+                  <a:srgbClr val="17202A"/>
+                </a:solidFill>
+                <a:latin typeface="Aptos"/>
+                <a:ea typeface="Aptos"/>
+                <a:cs typeface="Aptos"/>
+              </a:rPr>
+              <a:t>What storage changes imply</a:t>
+            </a:r>
+          </a:p>
+        </p:txBody>
+      </p:sp>
+      <p:sp>
+        <p:nvSpPr>
+          <p:cNvPr id="13" name="">
+            <a:extLst xmlns:a="http://schemas.openxmlformats.org/drawingml/2006/main">
+              <a:ext uri="{FF2B5EF4-FFF2-40B4-BE49-F238E27FC236}">
+                <a16:creationId xmlns:a16="http://schemas.microsoft.com/office/drawing/2014/main" id="{F7405F92-ADBC-4763-85C4-4A1CAC1A340E}"/>
+              </a:ext>
+            </a:extLst>
+          </p:cNvPr>
+          <p:cNvSpPr>
+            <a:spLocks xmlns:a="http://schemas.openxmlformats.org/drawingml/2006/main" noGrp="1"/>
+          </p:cNvSpPr>
+          <p:nvPr/>
+        </p:nvSpPr>
+        <p:spPr>
+          <a:xfrm xmlns:a="http://schemas.openxmlformats.org/drawingml/2006/main">
+            <a:off x="8362950" y="1857375"/>
+            <a:ext cx="2895600" cy="1295400"/>
+          </a:xfrm>
+          <a:prstGeom xmlns:a="http://schemas.openxmlformats.org/drawingml/2006/main" prst="rect">
+            <a:avLst/>
+          </a:prstGeom>
+          <a:noFill xmlns:a="http://schemas.openxmlformats.org/drawingml/2006/main"/>
+          <a:ln xmlns:a="http://schemas.openxmlformats.org/drawingml/2006/main" w="0">
+            <a:noFill/>
+            <a:prstDash val="solid"/>
+          </a:ln>
+        </p:spPr>
+        <p:txBody>
+          <a:bodyPr xmlns:a="http://schemas.openxmlformats.org/drawingml/2006/main"/>
+          <a:lstStyle xmlns:a="http://schemas.openxmlformats.org/drawingml/2006/main"/>
+          <a:p xmlns:a="http://schemas.openxmlformats.org/drawingml/2006/main">
+            <a:pPr algn="l">
+              <a:defRPr sz="1125" b="0">
+                <a:solidFill>
+                  <a:srgbClr val="617181"/>
+                </a:solidFill>
+                <a:latin typeface="Aptos"/>
+                <a:ea typeface="Aptos"/>
+                <a:cs typeface="Aptos"/>
+              </a:defRPr>
+            </a:pPr>
+            <a:r>
+              <a:rPr sz="1125" b="0">
+                <a:solidFill>
+                  <a:srgbClr val="617181"/>
+                </a:solidFill>
+                <a:latin typeface="Aptos"/>
+                <a:ea typeface="Aptos"/>
+                <a:cs typeface="Aptos"/>
+              </a:rPr>
+              <a:t>If media quotas, compression, CDN, retention, or provider choices change, update Voyager/Pioneer opex and infra assumptions in the workbook.</a:t>
+            </a:r>
+          </a:p>
+        </p:txBody>
+      </p:sp>
+      <p:sp>
+        <p:nvSpPr>
+          <p:cNvPr id="14" name="-0-90-mo-voyager-opex-assumption">
+            <a:extLst xmlns:a="http://schemas.openxmlformats.org/drawingml/2006/main">
+              <a:ext uri="{FF2B5EF4-FFF2-40B4-BE49-F238E27FC236}">
+                <a16:creationId xmlns:a16="http://schemas.microsoft.com/office/drawing/2014/main" id="{C98569B1-5977-440D-9126-CE86E1CB700B}"/>
+              </a:ext>
+            </a:extLst>
+          </p:cNvPr>
+          <p:cNvSpPr>
+            <a:spLocks xmlns:a="http://schemas.openxmlformats.org/drawingml/2006/main" noGrp="1"/>
+          </p:cNvSpPr>
+          <p:nvPr/>
+        </p:nvSpPr>
+        <p:spPr>
+          <a:xfrm xmlns:a="http://schemas.openxmlformats.org/drawingml/2006/main">
+            <a:off x="876300" y="3981450"/>
+            <a:ext cx="2000250" cy="1009650"/>
+          </a:xfrm>
+          <a:prstGeom xmlns:a="http://schemas.openxmlformats.org/drawingml/2006/main" prst="roundRect">
+            <a:avLst>
+              <a:gd name="adj" fmla="val 11321"/>
+            </a:avLst>
+          </a:prstGeom>
+          <a:solidFill xmlns:a="http://schemas.openxmlformats.org/drawingml/2006/main">
+            <a:srgbClr val="F2FFD1"/>
+          </a:solidFill>
+          <a:ln xmlns:a="http://schemas.openxmlformats.org/drawingml/2006/main" w="9525">
+            <a:solidFill>
+              <a:srgbClr val="C7D2DA"/>
+            </a:solidFill>
+            <a:prstDash val="solid"/>
+          </a:ln>
+        </p:spPr>
+        <p:style>
+          <a:lnRef xmlns:a="http://schemas.openxmlformats.org/drawingml/2006/main" idx="0"/>
+          <a:fillRef xmlns:a="http://schemas.openxmlformats.org/drawingml/2006/main" idx="0"/>
+          <a:effectRef xmlns:a="http://schemas.openxmlformats.org/drawingml/2006/main" idx="4"/>
+          <a:fontRef xmlns:a="http://schemas.openxmlformats.org/drawingml/2006/main" idx="major"/>
+        </p:style>
+        <p:txBody>
+          <a:bodyPr xmlns:a="http://schemas.openxmlformats.org/drawingml/2006/main"/>
+          <a:lstStyle xmlns:a="http://schemas.openxmlformats.org/drawingml/2006/main"/>
+          <a:p xmlns:a="http://schemas.openxmlformats.org/drawingml/2006/main">
+            <a:pPr algn="ctr">
+              <a:defRPr sz="1200" b="1">
+                <a:solidFill>
+                  <a:srgbClr val="17202A"/>
+                </a:solidFill>
+                <a:latin typeface="Aptos"/>
+                <a:ea typeface="Aptos"/>
+                <a:cs typeface="Aptos"/>
+              </a:defRPr>
+            </a:pPr>
+            <a:r>
+              <a:rPr sz="1200" b="1">
+                <a:solidFill>
+                  <a:srgbClr val="17202A"/>
+                </a:solidFill>
+                <a:latin typeface="Aptos"/>
+                <a:ea typeface="Aptos"/>
+                <a:cs typeface="Aptos"/>
+              </a:rPr>
+              <a:t>$0.90/mo</a:t>
+            </a:r>
+          </a:p>
+          <a:p xmlns:a="http://schemas.openxmlformats.org/drawingml/2006/main">
+            <a:pPr algn="ctr">
+              <a:defRPr sz="1200" b="1">
+                <a:solidFill>
+                  <a:srgbClr val="17202A"/>
+                </a:solidFill>
+                <a:latin typeface="Aptos"/>
+                <a:ea typeface="Aptos"/>
+                <a:cs typeface="Aptos"/>
+              </a:defRPr>
+            </a:pPr>
+            <a:r>
+              <a:rPr sz="1200" b="1">
+                <a:solidFill>
+                  <a:srgbClr val="17202A"/>
+                </a:solidFill>
+                <a:latin typeface="Aptos"/>
+                <a:ea typeface="Aptos"/>
+                <a:cs typeface="Aptos"/>
+              </a:rPr>
+              <a:t>Voyager opex assumption</a:t>
+            </a:r>
+          </a:p>
+        </p:txBody>
+      </p:sp>
+      <p:sp>
+        <p:nvSpPr>
+          <p:cNvPr id="15" name="-3-10-mo-pioneer-opex-assumption">
+            <a:extLst xmlns:a="http://schemas.openxmlformats.org/drawingml/2006/main">
+              <a:ext uri="{FF2B5EF4-FFF2-40B4-BE49-F238E27FC236}">
+                <a16:creationId xmlns:a16="http://schemas.microsoft.com/office/drawing/2014/main" id="{AA2CD81D-B7A4-4895-A7A9-A8BCE0A275F2}"/>
+              </a:ext>
+            </a:extLst>
+          </p:cNvPr>
+          <p:cNvSpPr>
+            <a:spLocks xmlns:a="http://schemas.openxmlformats.org/drawingml/2006/main" noGrp="1"/>
+          </p:cNvSpPr>
+          <p:nvPr/>
+        </p:nvSpPr>
+        <p:spPr>
+          <a:xfrm xmlns:a="http://schemas.openxmlformats.org/drawingml/2006/main">
+            <a:off x="3105150" y="3981450"/>
+            <a:ext cx="2095500" cy="1009650"/>
+          </a:xfrm>
+          <a:prstGeom xmlns:a="http://schemas.openxmlformats.org/drawingml/2006/main" prst="roundRect">
+            <a:avLst>
+              <a:gd name="adj" fmla="val 11321"/>
+            </a:avLst>
+          </a:prstGeom>
+          <a:solidFill xmlns:a="http://schemas.openxmlformats.org/drawingml/2006/main">
+            <a:srgbClr val="FFE9E6"/>
+          </a:solidFill>
+          <a:ln xmlns:a="http://schemas.openxmlformats.org/drawingml/2006/main" w="9525">
+            <a:solidFill>
+              <a:srgbClr val="C7D2DA"/>
+            </a:solidFill>
+            <a:prstDash val="solid"/>
+          </a:ln>
+        </p:spPr>
+        <p:style>
+          <a:lnRef xmlns:a="http://schemas.openxmlformats.org/drawingml/2006/main" idx="0"/>
+          <a:fillRef xmlns:a="http://schemas.openxmlformats.org/drawingml/2006/main" idx="0"/>
+          <a:effectRef xmlns:a="http://schemas.openxmlformats.org/drawingml/2006/main" idx="4"/>
+          <a:fontRef xmlns:a="http://schemas.openxmlformats.org/drawingml/2006/main" idx="major"/>
+        </p:style>
+        <p:txBody>
+          <a:bodyPr xmlns:a="http://schemas.openxmlformats.org/drawingml/2006/main"/>
+          <a:lstStyle xmlns:a="http://schemas.openxmlformats.org/drawingml/2006/main"/>
+          <a:p xmlns:a="http://schemas.openxmlformats.org/drawingml/2006/main">
+            <a:pPr algn="ctr">
+              <a:defRPr sz="1200" b="1">
+                <a:solidFill>
+                  <a:srgbClr val="17202A"/>
+                </a:solidFill>
+                <a:latin typeface="Aptos"/>
+                <a:ea typeface="Aptos"/>
+                <a:cs typeface="Aptos"/>
+              </a:defRPr>
+            </a:pPr>
+            <a:r>
+              <a:rPr sz="1200" b="1">
+                <a:solidFill>
+                  <a:srgbClr val="17202A"/>
+                </a:solidFill>
+                <a:latin typeface="Aptos"/>
+                <a:ea typeface="Aptos"/>
+                <a:cs typeface="Aptos"/>
+              </a:rPr>
+              <a:t>$3.10/mo</a:t>
+            </a:r>
+          </a:p>
+          <a:p xmlns:a="http://schemas.openxmlformats.org/drawingml/2006/main">
+            <a:pPr algn="ctr">
+              <a:defRPr sz="1200" b="1">
+                <a:solidFill>
+                  <a:srgbClr val="17202A"/>
+                </a:solidFill>
+                <a:latin typeface="Aptos"/>
+                <a:ea typeface="Aptos"/>
+                <a:cs typeface="Aptos"/>
+              </a:defRPr>
+            </a:pPr>
+            <a:r>
+              <a:rPr sz="1200" b="1">
+                <a:solidFill>
+                  <a:srgbClr val="17202A"/>
+                </a:solidFill>
+                <a:latin typeface="Aptos"/>
+                <a:ea typeface="Aptos"/>
+                <a:cs typeface="Aptos"/>
+              </a:rPr>
+              <a:t>Pioneer opex assumption</a:t>
+            </a:r>
+          </a:p>
+        </p:txBody>
+      </p:sp>
+      <p:sp>
+        <p:nvSpPr>
+          <p:cNvPr id="16" name="-0-03-mau-infra-assumption">
+            <a:extLst xmlns:a="http://schemas.openxmlformats.org/drawingml/2006/main">
+              <a:ext uri="{FF2B5EF4-FFF2-40B4-BE49-F238E27FC236}">
+                <a16:creationId xmlns:a16="http://schemas.microsoft.com/office/drawing/2014/main" id="{9EED9621-401A-4BF0-AEF6-1CAA3F5E4165}"/>
+              </a:ext>
+            </a:extLst>
+          </p:cNvPr>
+          <p:cNvSpPr>
+            <a:spLocks xmlns:a="http://schemas.openxmlformats.org/drawingml/2006/main" noGrp="1"/>
+          </p:cNvSpPr>
+          <p:nvPr/>
+        </p:nvSpPr>
+        <p:spPr>
+          <a:xfrm xmlns:a="http://schemas.openxmlformats.org/drawingml/2006/main">
+            <a:off x="5429250" y="3981450"/>
+            <a:ext cx="2000250" cy="1009650"/>
+          </a:xfrm>
+          <a:prstGeom xmlns:a="http://schemas.openxmlformats.org/drawingml/2006/main" prst="roundRect">
+            <a:avLst>
+              <a:gd name="adj" fmla="val 11321"/>
+            </a:avLst>
+          </a:prstGeom>
+          <a:solidFill xmlns:a="http://schemas.openxmlformats.org/drawingml/2006/main">
+            <a:srgbClr val="EAF2FF"/>
+          </a:solidFill>
+          <a:ln xmlns:a="http://schemas.openxmlformats.org/drawingml/2006/main" w="9525">
+            <a:solidFill>
+              <a:srgbClr val="C7D2DA"/>
+            </a:solidFill>
+            <a:prstDash val="solid"/>
+          </a:ln>
+        </p:spPr>
+        <p:style>
+          <a:lnRef xmlns:a="http://schemas.openxmlformats.org/drawingml/2006/main" idx="0"/>
+          <a:fillRef xmlns:a="http://schemas.openxmlformats.org/drawingml/2006/main" idx="0"/>
+          <a:effectRef xmlns:a="http://schemas.openxmlformats.org/drawingml/2006/main" idx="4"/>
+          <a:fontRef xmlns:a="http://schemas.openxmlformats.org/drawingml/2006/main" idx="major"/>
+        </p:style>
+        <p:txBody>
+          <a:bodyPr xmlns:a="http://schemas.openxmlformats.org/drawingml/2006/main"/>
+          <a:lstStyle xmlns:a="http://schemas.openxmlformats.org/drawingml/2006/main"/>
+          <a:p xmlns:a="http://schemas.openxmlformats.org/drawingml/2006/main">
+            <a:pPr algn="ctr">
+              <a:defRPr sz="1200" b="1">
+                <a:solidFill>
+                  <a:srgbClr val="17202A"/>
+                </a:solidFill>
+                <a:latin typeface="Aptos"/>
+                <a:ea typeface="Aptos"/>
+                <a:cs typeface="Aptos"/>
+              </a:defRPr>
+            </a:pPr>
+            <a:r>
+              <a:rPr sz="1200" b="1">
+                <a:solidFill>
+                  <a:srgbClr val="17202A"/>
+                </a:solidFill>
+                <a:latin typeface="Aptos"/>
+                <a:ea typeface="Aptos"/>
+                <a:cs typeface="Aptos"/>
+              </a:rPr>
+              <a:t>$0.03/MAU</a:t>
+            </a:r>
+          </a:p>
+          <a:p xmlns:a="http://schemas.openxmlformats.org/drawingml/2006/main">
+            <a:pPr algn="ctr">
+              <a:defRPr sz="1200" b="1">
+                <a:solidFill>
+                  <a:srgbClr val="17202A"/>
+                </a:solidFill>
+                <a:latin typeface="Aptos"/>
+                <a:ea typeface="Aptos"/>
+                <a:cs typeface="Aptos"/>
+              </a:defRPr>
+            </a:pPr>
+            <a:r>
+              <a:rPr sz="1200" b="1">
+                <a:solidFill>
+                  <a:srgbClr val="17202A"/>
+                </a:solidFill>
+                <a:latin typeface="Aptos"/>
+                <a:ea typeface="Aptos"/>
+                <a:cs typeface="Aptos"/>
+              </a:rPr>
+              <a:t>infra assumption</a:t>
+            </a:r>
+          </a:p>
+        </p:txBody>
+      </p:sp>
+      <p:sp>
+        <p:nvSpPr>
+          <p:cNvPr id="17" name="-520-mo-fixed-tools-ops-assumption">
+            <a:extLst xmlns:a="http://schemas.openxmlformats.org/drawingml/2006/main">
+              <a:ext uri="{FF2B5EF4-FFF2-40B4-BE49-F238E27FC236}">
+                <a16:creationId xmlns:a16="http://schemas.microsoft.com/office/drawing/2014/main" id="{9125B50D-1B9D-4D4C-B9E9-BEA60240A8ED}"/>
+              </a:ext>
+            </a:extLst>
+          </p:cNvPr>
+          <p:cNvSpPr>
+            <a:spLocks xmlns:a="http://schemas.openxmlformats.org/drawingml/2006/main" noGrp="1"/>
+          </p:cNvSpPr>
+          <p:nvPr/>
+        </p:nvSpPr>
+        <p:spPr>
+          <a:xfrm xmlns:a="http://schemas.openxmlformats.org/drawingml/2006/main">
+            <a:off x="7658100" y="3981450"/>
+            <a:ext cx="2286000" cy="1009650"/>
+          </a:xfrm>
+          <a:prstGeom xmlns:a="http://schemas.openxmlformats.org/drawingml/2006/main" prst="roundRect">
+            <a:avLst>
+              <a:gd name="adj" fmla="val 11321"/>
+            </a:avLst>
+          </a:prstGeom>
+          <a:solidFill xmlns:a="http://schemas.openxmlformats.org/drawingml/2006/main">
+            <a:srgbClr val="F1E8F8"/>
+          </a:solidFill>
+          <a:ln xmlns:a="http://schemas.openxmlformats.org/drawingml/2006/main" w="9525">
+            <a:solidFill>
+              <a:srgbClr val="C7D2DA"/>
+            </a:solidFill>
+            <a:prstDash val="solid"/>
+          </a:ln>
+        </p:spPr>
+        <p:style>
+          <a:lnRef xmlns:a="http://schemas.openxmlformats.org/drawingml/2006/main" idx="0"/>
+          <a:fillRef xmlns:a="http://schemas.openxmlformats.org/drawingml/2006/main" idx="0"/>
+          <a:effectRef xmlns:a="http://schemas.openxmlformats.org/drawingml/2006/main" idx="4"/>
+          <a:fontRef xmlns:a="http://schemas.openxmlformats.org/drawingml/2006/main" idx="major"/>
+        </p:style>
+        <p:txBody>
+          <a:bodyPr xmlns:a="http://schemas.openxmlformats.org/drawingml/2006/main"/>
+          <a:lstStyle xmlns:a="http://schemas.openxmlformats.org/drawingml/2006/main"/>
+          <a:p xmlns:a="http://schemas.openxmlformats.org/drawingml/2006/main">
+            <a:pPr algn="ctr">
+              <a:defRPr sz="1200" b="1">
+                <a:solidFill>
+                  <a:srgbClr val="17202A"/>
+                </a:solidFill>
+                <a:latin typeface="Aptos"/>
+                <a:ea typeface="Aptos"/>
+                <a:cs typeface="Aptos"/>
+              </a:defRPr>
+            </a:pPr>
+            <a:r>
+              <a:rPr sz="1200" b="1">
+                <a:solidFill>
+                  <a:srgbClr val="17202A"/>
+                </a:solidFill>
+                <a:latin typeface="Aptos"/>
+                <a:ea typeface="Aptos"/>
+                <a:cs typeface="Aptos"/>
+              </a:rPr>
+              <a:t>$520/mo</a:t>
+            </a:r>
+          </a:p>
+          <a:p xmlns:a="http://schemas.openxmlformats.org/drawingml/2006/main">
+            <a:pPr algn="ctr">
+              <a:defRPr sz="1200" b="1">
+                <a:solidFill>
+                  <a:srgbClr val="17202A"/>
+                </a:solidFill>
+                <a:latin typeface="Aptos"/>
+                <a:ea typeface="Aptos"/>
+                <a:cs typeface="Aptos"/>
+              </a:defRPr>
+            </a:pPr>
+            <a:r>
+              <a:rPr sz="1200" b="1">
+                <a:solidFill>
+                  <a:srgbClr val="17202A"/>
+                </a:solidFill>
+                <a:latin typeface="Aptos"/>
+                <a:ea typeface="Aptos"/>
+                <a:cs typeface="Aptos"/>
+              </a:rPr>
+              <a:t>fixed tools/ops assumption</a:t>
+            </a:r>
+          </a:p>
+        </p:txBody>
+      </p:sp>
+      <p:sp>
+        <p:nvSpPr>
+          <p:cNvPr id="18" name="">
+            <a:extLst xmlns:a="http://schemas.openxmlformats.org/drawingml/2006/main">
+              <a:ext uri="{FF2B5EF4-FFF2-40B4-BE49-F238E27FC236}">
+                <a16:creationId xmlns:a16="http://schemas.microsoft.com/office/drawing/2014/main" id="{831EA623-ADEC-4EBA-8AAD-9AEB6C753AEC}"/>
+              </a:ext>
+            </a:extLst>
+          </p:cNvPr>
+          <p:cNvSpPr>
+            <a:spLocks xmlns:a="http://schemas.openxmlformats.org/drawingml/2006/main" noGrp="1"/>
+          </p:cNvSpPr>
+          <p:nvPr/>
+        </p:nvSpPr>
+        <p:spPr>
+          <a:xfrm xmlns:a="http://schemas.openxmlformats.org/drawingml/2006/main">
+            <a:off x="781050" y="5886450"/>
+            <a:ext cx="9906000" cy="457200"/>
+          </a:xfrm>
+          <a:prstGeom xmlns:a="http://schemas.openxmlformats.org/drawingml/2006/main" prst="rect">
+            <a:avLst/>
+          </a:prstGeom>
+          <a:noFill xmlns:a="http://schemas.openxmlformats.org/drawingml/2006/main"/>
+          <a:ln xmlns:a="http://schemas.openxmlformats.org/drawingml/2006/main" w="0">
+            <a:noFill/>
+            <a:prstDash val="solid"/>
+          </a:ln>
+        </p:spPr>
+        <p:txBody>
+          <a:bodyPr xmlns:a="http://schemas.openxmlformats.org/drawingml/2006/main"/>
+          <a:lstStyle xmlns:a="http://schemas.openxmlformats.org/drawingml/2006/main"/>
+          <a:p xmlns:a="http://schemas.openxmlformats.org/drawingml/2006/main">
+            <a:pPr algn="l">
+              <a:defRPr sz="1425" b="1">
+                <a:solidFill>
+                  <a:srgbClr val="0D7377"/>
+                </a:solidFill>
+                <a:latin typeface="Aptos"/>
+                <a:ea typeface="Aptos"/>
+                <a:cs typeface="Aptos"/>
+              </a:defRPr>
+            </a:pPr>
+            <a:r>
+              <a:rPr sz="1425" b="1">
+                <a:solidFill>
+                  <a:srgbClr val="0D7377"/>
+                </a:solidFill>
+                <a:latin typeface="Aptos"/>
+                <a:ea typeface="Aptos"/>
+                <a:cs typeface="Aptos"/>
+              </a:rPr>
+              <a:t>Rule: product tier promises are financial commitments. Storage generosity is fine only when the workbook still supports margin at the expected media mix.</a:t>
+            </a:r>
+          </a:p>
+        </p:txBody>
+      </p:sp>
+    </p:spTree>
+    <p:extLst>
+      <p:ext uri="{BB962C8B-B14F-4D97-AF65-F5344CB8AC3E}">
+        <p14:creationId xmlns:p14="http://schemas.microsoft.com/office/powerpoint/2010/main" val="775732012"/>
+      </p:ext>
+    </p:extLst>
+  </p:cSld>
+</p:sld>
+</file>
+
+<file path=ppt/slides/slide14.xml><?xml version="1.0" encoding="utf-8"?>
+<p:sld xmlns:p="http://schemas.openxmlformats.org/presentationml/2006/main">
+  <p:cSld>
+    <p:bg>
+      <p:bgPr>
+        <a:solidFill xmlns:a="http://schemas.openxmlformats.org/drawingml/2006/main">
+          <a:srgbClr val="F7FAF9"/>
+        </a:solidFill>
+      </p:bgPr>
+    </p:bg>
+    <p:spTree>
+      <p:nvGrpSpPr>
+        <p:cNvPr id="1" name=""/>
+        <p:cNvGrpSpPr/>
+        <p:nvPr/>
+      </p:nvGrpSpPr>
+      <p:grpSpPr>
+        <a:xfrm xmlns:a="http://schemas.openxmlformats.org/drawingml/2006/main"/>
+      </p:grpSpPr>
+      <p:sp>
+        <p:nvSpPr>
+          <p:cNvPr id="1" name="brand-rail">
+            <a:extLst xmlns:a="http://schemas.openxmlformats.org/drawingml/2006/main">
+              <a:ext uri="{FF2B5EF4-FFF2-40B4-BE49-F238E27FC236}">
+                <a16:creationId xmlns:a16="http://schemas.microsoft.com/office/drawing/2014/main" id="{ECE8AFD3-FD83-4163-975F-FF7D4736DF9C}"/>
+              </a:ext>
+            </a:extLst>
+          </p:cNvPr>
+          <p:cNvSpPr>
+            <a:spLocks xmlns:a="http://schemas.openxmlformats.org/drawingml/2006/main" noGrp="1"/>
+          </p:cNvSpPr>
+          <p:nvPr/>
+        </p:nvSpPr>
+        <p:spPr>
+          <a:xfrm xmlns:a="http://schemas.openxmlformats.org/drawingml/2006/main">
+            <a:off x="0" y="0"/>
+            <a:ext cx="133350" cy="6858000"/>
+          </a:xfrm>
+          <a:prstGeom xmlns:a="http://schemas.openxmlformats.org/drawingml/2006/main" prst="rect">
             <a:avLst/>
           </a:prstGeom>
           <a:solidFill xmlns:a="http://schemas.openxmlformats.org/drawingml/2006/main">
@@ -4934,22 +9163,22 @@
       </p:sp>
       <p:sp>
         <p:nvSpPr>
-          <p:cNvPr id="8" name="">
-            <a:extLst xmlns:a="http://schemas.openxmlformats.org/drawingml/2006/main">
-              <a:ext uri="{FF2B5EF4-FFF2-40B4-BE49-F238E27FC236}">
-                <a16:creationId xmlns:a16="http://schemas.microsoft.com/office/drawing/2014/main" id="{EB1033CF-AE35-4482-A8EA-B099D919F1F0}"/>
-              </a:ext>
-            </a:extLst>
-          </p:cNvPr>
-          <p:cNvSpPr>
-            <a:spLocks xmlns:a="http://schemas.openxmlformats.org/drawingml/2006/main" noGrp="1"/>
-          </p:cNvSpPr>
-          <p:nvPr/>
-        </p:nvSpPr>
-        <p:spPr>
-          <a:xfrm xmlns:a="http://schemas.openxmlformats.org/drawingml/2006/main">
-            <a:off x="952500" y="1838325"/>
-            <a:ext cx="9829800" cy="438150"/>
+          <p:cNvPr id="2" name="">
+            <a:extLst xmlns:a="http://schemas.openxmlformats.org/drawingml/2006/main">
+              <a:ext uri="{FF2B5EF4-FFF2-40B4-BE49-F238E27FC236}">
+                <a16:creationId xmlns:a16="http://schemas.microsoft.com/office/drawing/2014/main" id="{71351063-7A03-4277-ADC0-3B2202D76696}"/>
+              </a:ext>
+            </a:extLst>
+          </p:cNvPr>
+          <p:cNvSpPr>
+            <a:spLocks xmlns:a="http://schemas.openxmlformats.org/drawingml/2006/main" noGrp="1"/>
+          </p:cNvSpPr>
+          <p:nvPr/>
+        </p:nvSpPr>
+        <p:spPr>
+          <a:xfrm xmlns:a="http://schemas.openxmlformats.org/drawingml/2006/main">
+            <a:off x="495300" y="476250"/>
+            <a:ext cx="8382000" cy="457200"/>
           </a:xfrm>
           <a:prstGeom xmlns:a="http://schemas.openxmlformats.org/drawingml/2006/main" prst="rect">
             <a:avLst/>
@@ -4965,25 +9194,315 @@
           <a:lstStyle xmlns:a="http://schemas.openxmlformats.org/drawingml/2006/main"/>
           <a:p xmlns:a="http://schemas.openxmlformats.org/drawingml/2006/main">
             <a:pPr algn="l">
-              <a:defRPr sz="1275" b="0">
-                <a:solidFill>
-                  <a:srgbClr val="17202A"/>
-                </a:solidFill>
-                <a:latin typeface="Aptos"/>
-                <a:ea typeface="Aptos"/>
-                <a:cs typeface="Aptos"/>
-              </a:defRPr>
-            </a:pPr>
-            <a:r>
-              <a:rPr sz="1275" b="0">
-                <a:solidFill>
-                  <a:srgbClr val="17202A"/>
-                </a:solidFill>
-                <a:latin typeface="Aptos"/>
-                <a:ea typeface="Aptos"/>
-                <a:cs typeface="Aptos"/>
-              </a:rPr>
-              <a:t>Business inputs: Vamo_Business_Plan.docx and Vamo_Financial_Model.xlsx.</a:t>
+              <a:defRPr sz="2700" b="1">
+                <a:solidFill>
+                  <a:srgbClr val="17202A"/>
+                </a:solidFill>
+                <a:latin typeface="Aptos Display"/>
+                <a:ea typeface="Aptos Display"/>
+                <a:cs typeface="Aptos Display"/>
+              </a:defRPr>
+            </a:pPr>
+            <a:r>
+              <a:rPr sz="2700" b="1">
+                <a:solidFill>
+                  <a:srgbClr val="17202A"/>
+                </a:solidFill>
+                <a:latin typeface="Aptos Display"/>
+                <a:ea typeface="Aptos Display"/>
+                <a:cs typeface="Aptos Display"/>
+              </a:rPr>
+              <a:t>Recommendations before widening beta</a:t>
+            </a:r>
+          </a:p>
+        </p:txBody>
+      </p:sp>
+      <p:sp>
+        <p:nvSpPr>
+          <p:cNvPr id="3" name="">
+            <a:extLst xmlns:a="http://schemas.openxmlformats.org/drawingml/2006/main">
+              <a:ext uri="{FF2B5EF4-FFF2-40B4-BE49-F238E27FC236}">
+                <a16:creationId xmlns:a16="http://schemas.microsoft.com/office/drawing/2014/main" id="{201CF271-C1F1-44D8-A7A0-AF0AC00FA704}"/>
+              </a:ext>
+            </a:extLst>
+          </p:cNvPr>
+          <p:cNvSpPr>
+            <a:spLocks xmlns:a="http://schemas.openxmlformats.org/drawingml/2006/main" noGrp="1"/>
+          </p:cNvSpPr>
+          <p:nvPr/>
+        </p:nvSpPr>
+        <p:spPr>
+          <a:xfrm xmlns:a="http://schemas.openxmlformats.org/drawingml/2006/main">
+            <a:off x="514350" y="933450"/>
+            <a:ext cx="7239000" cy="266700"/>
+          </a:xfrm>
+          <a:prstGeom xmlns:a="http://schemas.openxmlformats.org/drawingml/2006/main" prst="rect">
+            <a:avLst/>
+          </a:prstGeom>
+          <a:noFill xmlns:a="http://schemas.openxmlformats.org/drawingml/2006/main"/>
+          <a:ln xmlns:a="http://schemas.openxmlformats.org/drawingml/2006/main" w="0">
+            <a:noFill/>
+            <a:prstDash val="solid"/>
+          </a:ln>
+        </p:spPr>
+        <p:txBody>
+          <a:bodyPr xmlns:a="http://schemas.openxmlformats.org/drawingml/2006/main"/>
+          <a:lstStyle xmlns:a="http://schemas.openxmlformats.org/drawingml/2006/main"/>
+          <a:p xmlns:a="http://schemas.openxmlformats.org/drawingml/2006/main">
+            <a:pPr algn="l">
+              <a:defRPr sz="1200" b="1">
+                <a:solidFill>
+                  <a:srgbClr val="0D7377"/>
+                </a:solidFill>
+                <a:latin typeface="Aptos"/>
+                <a:ea typeface="Aptos"/>
+                <a:cs typeface="Aptos"/>
+              </a:defRPr>
+            </a:pPr>
+            <a:r>
+              <a:rPr sz="1200" b="1">
+                <a:solidFill>
+                  <a:srgbClr val="0D7377"/>
+                </a:solidFill>
+                <a:latin typeface="Aptos"/>
+                <a:ea typeface="Aptos"/>
+                <a:cs typeface="Aptos"/>
+              </a:rPr>
+              <a:t>Keep the stack managed, but put guardrails where success gets expensive.</a:t>
+            </a:r>
+          </a:p>
+        </p:txBody>
+      </p:sp>
+      <p:sp>
+        <p:nvSpPr>
+          <p:cNvPr id="4" name="">
+            <a:extLst xmlns:a="http://schemas.openxmlformats.org/drawingml/2006/main">
+              <a:ext uri="{FF2B5EF4-FFF2-40B4-BE49-F238E27FC236}">
+                <a16:creationId xmlns:a16="http://schemas.microsoft.com/office/drawing/2014/main" id="{A05415B6-6682-4F6C-8CCD-2838333ACD74}"/>
+              </a:ext>
+            </a:extLst>
+          </p:cNvPr>
+          <p:cNvSpPr>
+            <a:spLocks xmlns:a="http://schemas.openxmlformats.org/drawingml/2006/main" noGrp="1"/>
+          </p:cNvSpPr>
+          <p:nvPr/>
+        </p:nvSpPr>
+        <p:spPr>
+          <a:xfrm xmlns:a="http://schemas.openxmlformats.org/drawingml/2006/main">
+            <a:off x="9124950" y="476250"/>
+            <a:ext cx="2095500" cy="209550"/>
+          </a:xfrm>
+          <a:prstGeom xmlns:a="http://schemas.openxmlformats.org/drawingml/2006/main" prst="rect">
+            <a:avLst/>
+          </a:prstGeom>
+          <a:noFill xmlns:a="http://schemas.openxmlformats.org/drawingml/2006/main"/>
+          <a:ln xmlns:a="http://schemas.openxmlformats.org/drawingml/2006/main" w="0">
+            <a:noFill/>
+            <a:prstDash val="solid"/>
+          </a:ln>
+        </p:spPr>
+        <p:txBody>
+          <a:bodyPr xmlns:a="http://schemas.openxmlformats.org/drawingml/2006/main"/>
+          <a:lstStyle xmlns:a="http://schemas.openxmlformats.org/drawingml/2006/main"/>
+          <a:p xmlns:a="http://schemas.openxmlformats.org/drawingml/2006/main">
+            <a:pPr algn="r">
+              <a:defRPr sz="900" b="0">
+                <a:solidFill>
+                  <a:srgbClr val="617181"/>
+                </a:solidFill>
+                <a:latin typeface="Aptos"/>
+                <a:ea typeface="Aptos"/>
+                <a:cs typeface="Aptos"/>
+              </a:defRPr>
+            </a:pPr>
+            <a:r>
+              <a:rPr sz="900" b="0">
+                <a:solidFill>
+                  <a:srgbClr val="617181"/>
+                </a:solidFill>
+                <a:latin typeface="Aptos"/>
+                <a:ea typeface="Aptos"/>
+                <a:cs typeface="Aptos"/>
+              </a:rPr>
+              <a:t>Vamo dependency + scale map</a:t>
+            </a:r>
+          </a:p>
+        </p:txBody>
+      </p:sp>
+      <p:sp>
+        <p:nvSpPr>
+          <p:cNvPr id="5" name="bullet-dot">
+            <a:extLst xmlns:a="http://schemas.openxmlformats.org/drawingml/2006/main">
+              <a:ext uri="{FF2B5EF4-FFF2-40B4-BE49-F238E27FC236}">
+                <a16:creationId xmlns:a16="http://schemas.microsoft.com/office/drawing/2014/main" id="{0E33DFDB-5ECF-4B28-8956-B23379D9D8A3}"/>
+              </a:ext>
+            </a:extLst>
+          </p:cNvPr>
+          <p:cNvSpPr>
+            <a:spLocks xmlns:a="http://schemas.openxmlformats.org/drawingml/2006/main" noGrp="1"/>
+          </p:cNvSpPr>
+          <p:nvPr/>
+        </p:nvSpPr>
+        <p:spPr>
+          <a:xfrm xmlns:a="http://schemas.openxmlformats.org/drawingml/2006/main">
+            <a:off x="876300" y="1524000"/>
+            <a:ext cx="85725" cy="85725"/>
+          </a:xfrm>
+          <a:prstGeom xmlns:a="http://schemas.openxmlformats.org/drawingml/2006/main" prst="ellipse">
+            <a:avLst/>
+          </a:prstGeom>
+          <a:solidFill xmlns:a="http://schemas.openxmlformats.org/drawingml/2006/main">
+            <a:srgbClr val="FF5B4D"/>
+          </a:solidFill>
+          <a:ln xmlns:a="http://schemas.openxmlformats.org/drawingml/2006/main" w="0">
+            <a:solidFill>
+              <a:srgbClr val="FF5B4D"/>
+            </a:solidFill>
+            <a:prstDash val="solid"/>
+          </a:ln>
+        </p:spPr>
+      </p:sp>
+      <p:sp>
+        <p:nvSpPr>
+          <p:cNvPr id="6" name="">
+            <a:extLst xmlns:a="http://schemas.openxmlformats.org/drawingml/2006/main">
+              <a:ext uri="{FF2B5EF4-FFF2-40B4-BE49-F238E27FC236}">
+                <a16:creationId xmlns:a16="http://schemas.microsoft.com/office/drawing/2014/main" id="{903CA585-E15A-4BAD-8C51-7076CAECC224}"/>
+              </a:ext>
+            </a:extLst>
+          </p:cNvPr>
+          <p:cNvSpPr>
+            <a:spLocks xmlns:a="http://schemas.openxmlformats.org/drawingml/2006/main" noGrp="1"/>
+          </p:cNvSpPr>
+          <p:nvPr/>
+        </p:nvSpPr>
+        <p:spPr>
+          <a:xfrm xmlns:a="http://schemas.openxmlformats.org/drawingml/2006/main">
+            <a:off x="1047750" y="1447800"/>
+            <a:ext cx="9829800" cy="552450"/>
+          </a:xfrm>
+          <a:prstGeom xmlns:a="http://schemas.openxmlformats.org/drawingml/2006/main" prst="rect">
+            <a:avLst/>
+          </a:prstGeom>
+          <a:noFill xmlns:a="http://schemas.openxmlformats.org/drawingml/2006/main"/>
+          <a:ln xmlns:a="http://schemas.openxmlformats.org/drawingml/2006/main" w="0">
+            <a:noFill/>
+            <a:prstDash val="solid"/>
+          </a:ln>
+        </p:spPr>
+        <p:txBody>
+          <a:bodyPr xmlns:a="http://schemas.openxmlformats.org/drawingml/2006/main"/>
+          <a:lstStyle xmlns:a="http://schemas.openxmlformats.org/drawingml/2006/main"/>
+          <a:p xmlns:a="http://schemas.openxmlformats.org/drawingml/2006/main">
+            <a:pPr algn="l">
+              <a:defRPr sz="1500" b="0">
+                <a:solidFill>
+                  <a:srgbClr val="17202A"/>
+                </a:solidFill>
+                <a:latin typeface="Aptos"/>
+                <a:ea typeface="Aptos"/>
+                <a:cs typeface="Aptos"/>
+              </a:defRPr>
+            </a:pPr>
+            <a:r>
+              <a:rPr sz="1500" b="0">
+                <a:solidFill>
+                  <a:srgbClr val="17202A"/>
+                </a:solidFill>
+                <a:latin typeface="Aptos"/>
+                <a:ea typeface="Aptos"/>
+                <a:cs typeface="Aptos"/>
+              </a:rPr>
+              <a:t>Close the remaining launch gates: DR/PITR proof, Crashlytics device proof, App Links device proof, and prod Brevo secret cleanup.</a:t>
+            </a:r>
+          </a:p>
+        </p:txBody>
+      </p:sp>
+      <p:sp>
+        <p:nvSpPr>
+          <p:cNvPr id="7" name="bullet-dot">
+            <a:extLst xmlns:a="http://schemas.openxmlformats.org/drawingml/2006/main">
+              <a:ext uri="{FF2B5EF4-FFF2-40B4-BE49-F238E27FC236}">
+                <a16:creationId xmlns:a16="http://schemas.microsoft.com/office/drawing/2014/main" id="{4C87F246-E5B6-4C9A-BC16-1E8E8C8E4ECF}"/>
+              </a:ext>
+            </a:extLst>
+          </p:cNvPr>
+          <p:cNvSpPr>
+            <a:spLocks xmlns:a="http://schemas.openxmlformats.org/drawingml/2006/main" noGrp="1"/>
+          </p:cNvSpPr>
+          <p:nvPr/>
+        </p:nvSpPr>
+        <p:spPr>
+          <a:xfrm xmlns:a="http://schemas.openxmlformats.org/drawingml/2006/main">
+            <a:off x="876300" y="2047875"/>
+            <a:ext cx="85725" cy="85725"/>
+          </a:xfrm>
+          <a:prstGeom xmlns:a="http://schemas.openxmlformats.org/drawingml/2006/main" prst="ellipse">
+            <a:avLst/>
+          </a:prstGeom>
+          <a:solidFill xmlns:a="http://schemas.openxmlformats.org/drawingml/2006/main">
+            <a:srgbClr val="FF5B4D"/>
+          </a:solidFill>
+          <a:ln xmlns:a="http://schemas.openxmlformats.org/drawingml/2006/main" w="0">
+            <a:solidFill>
+              <a:srgbClr val="FF5B4D"/>
+            </a:solidFill>
+            <a:prstDash val="solid"/>
+          </a:ln>
+        </p:spPr>
+      </p:sp>
+      <p:sp>
+        <p:nvSpPr>
+          <p:cNvPr id="8" name="">
+            <a:extLst xmlns:a="http://schemas.openxmlformats.org/drawingml/2006/main">
+              <a:ext uri="{FF2B5EF4-FFF2-40B4-BE49-F238E27FC236}">
+                <a16:creationId xmlns:a16="http://schemas.microsoft.com/office/drawing/2014/main" id="{7A40D329-B3AF-423A-A25E-6816BB08C974}"/>
+              </a:ext>
+            </a:extLst>
+          </p:cNvPr>
+          <p:cNvSpPr>
+            <a:spLocks xmlns:a="http://schemas.openxmlformats.org/drawingml/2006/main" noGrp="1"/>
+          </p:cNvSpPr>
+          <p:nvPr/>
+        </p:nvSpPr>
+        <p:spPr>
+          <a:xfrm xmlns:a="http://schemas.openxmlformats.org/drawingml/2006/main">
+            <a:off x="1047750" y="1971675"/>
+            <a:ext cx="9829800" cy="552450"/>
+          </a:xfrm>
+          <a:prstGeom xmlns:a="http://schemas.openxmlformats.org/drawingml/2006/main" prst="rect">
+            <a:avLst/>
+          </a:prstGeom>
+          <a:noFill xmlns:a="http://schemas.openxmlformats.org/drawingml/2006/main"/>
+          <a:ln xmlns:a="http://schemas.openxmlformats.org/drawingml/2006/main" w="0">
+            <a:noFill/>
+            <a:prstDash val="solid"/>
+          </a:ln>
+        </p:spPr>
+        <p:txBody>
+          <a:bodyPr xmlns:a="http://schemas.openxmlformats.org/drawingml/2006/main"/>
+          <a:lstStyle xmlns:a="http://schemas.openxmlformats.org/drawingml/2006/main"/>
+          <a:p xmlns:a="http://schemas.openxmlformats.org/drawingml/2006/main">
+            <a:pPr algn="l">
+              <a:defRPr sz="1500" b="0">
+                <a:solidFill>
+                  <a:srgbClr val="17202A"/>
+                </a:solidFill>
+                <a:latin typeface="Aptos"/>
+                <a:ea typeface="Aptos"/>
+                <a:cs typeface="Aptos"/>
+              </a:defRPr>
+            </a:pPr>
+            <a:r>
+              <a:rPr sz="1500" b="0">
+                <a:solidFill>
+                  <a:srgbClr val="17202A"/>
+                </a:solidFill>
+                <a:latin typeface="Aptos"/>
+                <a:ea typeface="Aptos"/>
+                <a:cs typeface="Aptos"/>
+              </a:rPr>
+              <a:t>Add a weekly provider dashboard: Supabase MAU/storage/egress/CPU, OTP sends, fallback sends, PostHog events, crash-free users.</a:t>
             </a:r>
           </a:p>
         </p:txBody>
@@ -4993,21 +9512,406 @@
           <p:cNvPr id="9" name="bullet-dot">
             <a:extLst xmlns:a="http://schemas.openxmlformats.org/drawingml/2006/main">
               <a:ext uri="{FF2B5EF4-FFF2-40B4-BE49-F238E27FC236}">
-                <a16:creationId xmlns:a16="http://schemas.microsoft.com/office/drawing/2014/main" id="{AD8FA786-283B-4E57-A138-FEE557F42A86}"/>
-              </a:ext>
-            </a:extLst>
-          </p:cNvPr>
-          <p:cNvSpPr>
-            <a:spLocks xmlns:a="http://schemas.openxmlformats.org/drawingml/2006/main" noGrp="1"/>
-          </p:cNvSpPr>
-          <p:nvPr/>
-        </p:nvSpPr>
-        <p:spPr>
-          <a:xfrm xmlns:a="http://schemas.openxmlformats.org/drawingml/2006/main">
-            <a:off x="781050" y="2324100"/>
+                <a16:creationId xmlns:a16="http://schemas.microsoft.com/office/drawing/2014/main" id="{7D28C206-1D53-496D-8B54-C96B001AAE39}"/>
+              </a:ext>
+            </a:extLst>
+          </p:cNvPr>
+          <p:cNvSpPr>
+            <a:spLocks xmlns:a="http://schemas.openxmlformats.org/drawingml/2006/main" noGrp="1"/>
+          </p:cNvSpPr>
+          <p:nvPr/>
+        </p:nvSpPr>
+        <p:spPr>
+          <a:xfrm xmlns:a="http://schemas.openxmlformats.org/drawingml/2006/main">
+            <a:off x="876300" y="2571750"/>
             <a:ext cx="85725" cy="85725"/>
           </a:xfrm>
           <a:prstGeom xmlns:a="http://schemas.openxmlformats.org/drawingml/2006/main" prst="ellipse">
+            <a:avLst/>
+          </a:prstGeom>
+          <a:solidFill xmlns:a="http://schemas.openxmlformats.org/drawingml/2006/main">
+            <a:srgbClr val="FF5B4D"/>
+          </a:solidFill>
+          <a:ln xmlns:a="http://schemas.openxmlformats.org/drawingml/2006/main" w="0">
+            <a:solidFill>
+              <a:srgbClr val="FF5B4D"/>
+            </a:solidFill>
+            <a:prstDash val="solid"/>
+          </a:ln>
+        </p:spPr>
+      </p:sp>
+      <p:sp>
+        <p:nvSpPr>
+          <p:cNvPr id="10" name="">
+            <a:extLst xmlns:a="http://schemas.openxmlformats.org/drawingml/2006/main">
+              <a:ext uri="{FF2B5EF4-FFF2-40B4-BE49-F238E27FC236}">
+                <a16:creationId xmlns:a16="http://schemas.microsoft.com/office/drawing/2014/main" id="{40C90986-BF1D-4D27-BC18-7C6E1B913CCD}"/>
+              </a:ext>
+            </a:extLst>
+          </p:cNvPr>
+          <p:cNvSpPr>
+            <a:spLocks xmlns:a="http://schemas.openxmlformats.org/drawingml/2006/main" noGrp="1"/>
+          </p:cNvSpPr>
+          <p:nvPr/>
+        </p:nvSpPr>
+        <p:spPr>
+          <a:xfrm xmlns:a="http://schemas.openxmlformats.org/drawingml/2006/main">
+            <a:off x="1047750" y="2495550"/>
+            <a:ext cx="9829800" cy="552450"/>
+          </a:xfrm>
+          <a:prstGeom xmlns:a="http://schemas.openxmlformats.org/drawingml/2006/main" prst="rect">
+            <a:avLst/>
+          </a:prstGeom>
+          <a:noFill xmlns:a="http://schemas.openxmlformats.org/drawingml/2006/main"/>
+          <a:ln xmlns:a="http://schemas.openxmlformats.org/drawingml/2006/main" w="0">
+            <a:noFill/>
+            <a:prstDash val="solid"/>
+          </a:ln>
+        </p:spPr>
+        <p:txBody>
+          <a:bodyPr xmlns:a="http://schemas.openxmlformats.org/drawingml/2006/main"/>
+          <a:lstStyle xmlns:a="http://schemas.openxmlformats.org/drawingml/2006/main"/>
+          <a:p xmlns:a="http://schemas.openxmlformats.org/drawingml/2006/main">
+            <a:pPr algn="l">
+              <a:defRPr sz="1500" b="0">
+                <a:solidFill>
+                  <a:srgbClr val="17202A"/>
+                </a:solidFill>
+                <a:latin typeface="Aptos"/>
+                <a:ea typeface="Aptos"/>
+                <a:cs typeface="Aptos"/>
+              </a:defRPr>
+            </a:pPr>
+            <a:r>
+              <a:rPr sz="1500" b="0">
+                <a:solidFill>
+                  <a:srgbClr val="17202A"/>
+                </a:solidFill>
+                <a:latin typeface="Aptos"/>
+                <a:ea typeface="Aptos"/>
+                <a:cs typeface="Aptos"/>
+              </a:rPr>
+              <a:t>Define cost per active trip and cost per paying user before TripReel/action-cam; do not ship unlimited media without fair-use controls.</a:t>
+            </a:r>
+          </a:p>
+        </p:txBody>
+      </p:sp>
+      <p:sp>
+        <p:nvSpPr>
+          <p:cNvPr id="11" name="bullet-dot">
+            <a:extLst xmlns:a="http://schemas.openxmlformats.org/drawingml/2006/main">
+              <a:ext uri="{FF2B5EF4-FFF2-40B4-BE49-F238E27FC236}">
+                <a16:creationId xmlns:a16="http://schemas.microsoft.com/office/drawing/2014/main" id="{62D29C03-B881-4FC5-978D-40039DA0AF83}"/>
+              </a:ext>
+            </a:extLst>
+          </p:cNvPr>
+          <p:cNvSpPr>
+            <a:spLocks xmlns:a="http://schemas.openxmlformats.org/drawingml/2006/main" noGrp="1"/>
+          </p:cNvSpPr>
+          <p:nvPr/>
+        </p:nvSpPr>
+        <p:spPr>
+          <a:xfrm xmlns:a="http://schemas.openxmlformats.org/drawingml/2006/main">
+            <a:off x="876300" y="3095625"/>
+            <a:ext cx="85725" cy="85725"/>
+          </a:xfrm>
+          <a:prstGeom xmlns:a="http://schemas.openxmlformats.org/drawingml/2006/main" prst="ellipse">
+            <a:avLst/>
+          </a:prstGeom>
+          <a:solidFill xmlns:a="http://schemas.openxmlformats.org/drawingml/2006/main">
+            <a:srgbClr val="FF5B4D"/>
+          </a:solidFill>
+          <a:ln xmlns:a="http://schemas.openxmlformats.org/drawingml/2006/main" w="0">
+            <a:solidFill>
+              <a:srgbClr val="FF5B4D"/>
+            </a:solidFill>
+            <a:prstDash val="solid"/>
+          </a:ln>
+        </p:spPr>
+      </p:sp>
+      <p:sp>
+        <p:nvSpPr>
+          <p:cNvPr id="12" name="">
+            <a:extLst xmlns:a="http://schemas.openxmlformats.org/drawingml/2006/main">
+              <a:ext uri="{FF2B5EF4-FFF2-40B4-BE49-F238E27FC236}">
+                <a16:creationId xmlns:a16="http://schemas.microsoft.com/office/drawing/2014/main" id="{3AEA1C41-3F9B-43C4-806D-5DAC3BCFEEE8}"/>
+              </a:ext>
+            </a:extLst>
+          </p:cNvPr>
+          <p:cNvSpPr>
+            <a:spLocks xmlns:a="http://schemas.openxmlformats.org/drawingml/2006/main" noGrp="1"/>
+          </p:cNvSpPr>
+          <p:nvPr/>
+        </p:nvSpPr>
+        <p:spPr>
+          <a:xfrm xmlns:a="http://schemas.openxmlformats.org/drawingml/2006/main">
+            <a:off x="1047750" y="3019425"/>
+            <a:ext cx="9829800" cy="552450"/>
+          </a:xfrm>
+          <a:prstGeom xmlns:a="http://schemas.openxmlformats.org/drawingml/2006/main" prst="rect">
+            <a:avLst/>
+          </a:prstGeom>
+          <a:noFill xmlns:a="http://schemas.openxmlformats.org/drawingml/2006/main"/>
+          <a:ln xmlns:a="http://schemas.openxmlformats.org/drawingml/2006/main" w="0">
+            <a:noFill/>
+            <a:prstDash val="solid"/>
+          </a:ln>
+        </p:spPr>
+        <p:txBody>
+          <a:bodyPr xmlns:a="http://schemas.openxmlformats.org/drawingml/2006/main"/>
+          <a:lstStyle xmlns:a="http://schemas.openxmlformats.org/drawingml/2006/main"/>
+          <a:p xmlns:a="http://schemas.openxmlformats.org/drawingml/2006/main">
+            <a:pPr algn="l">
+              <a:defRPr sz="1500" b="0">
+                <a:solidFill>
+                  <a:srgbClr val="17202A"/>
+                </a:solidFill>
+                <a:latin typeface="Aptos"/>
+                <a:ea typeface="Aptos"/>
+                <a:cs typeface="Aptos"/>
+              </a:defRPr>
+            </a:pPr>
+            <a:r>
+              <a:rPr sz="1500" b="0">
+                <a:solidFill>
+                  <a:srgbClr val="17202A"/>
+                </a:solidFill>
+                <a:latin typeface="Aptos"/>
+                <a:ea typeface="Aptos"/>
+                <a:cs typeface="Aptos"/>
+              </a:rPr>
+              <a:t>Add Storage object-byte backup/replication; Supabase database backups do not cover object bytes.</a:t>
+            </a:r>
+          </a:p>
+        </p:txBody>
+      </p:sp>
+      <p:sp>
+        <p:nvSpPr>
+          <p:cNvPr id="13" name="bullet-dot">
+            <a:extLst xmlns:a="http://schemas.openxmlformats.org/drawingml/2006/main">
+              <a:ext uri="{FF2B5EF4-FFF2-40B4-BE49-F238E27FC236}">
+                <a16:creationId xmlns:a16="http://schemas.microsoft.com/office/drawing/2014/main" id="{CADDB819-37AF-4D7E-8837-B5D91F869CA9}"/>
+              </a:ext>
+            </a:extLst>
+          </p:cNvPr>
+          <p:cNvSpPr>
+            <a:spLocks xmlns:a="http://schemas.openxmlformats.org/drawingml/2006/main" noGrp="1"/>
+          </p:cNvSpPr>
+          <p:nvPr/>
+        </p:nvSpPr>
+        <p:spPr>
+          <a:xfrm xmlns:a="http://schemas.openxmlformats.org/drawingml/2006/main">
+            <a:off x="876300" y="3619500"/>
+            <a:ext cx="85725" cy="85725"/>
+          </a:xfrm>
+          <a:prstGeom xmlns:a="http://schemas.openxmlformats.org/drawingml/2006/main" prst="ellipse">
+            <a:avLst/>
+          </a:prstGeom>
+          <a:solidFill xmlns:a="http://schemas.openxmlformats.org/drawingml/2006/main">
+            <a:srgbClr val="FF5B4D"/>
+          </a:solidFill>
+          <a:ln xmlns:a="http://schemas.openxmlformats.org/drawingml/2006/main" w="0">
+            <a:solidFill>
+              <a:srgbClr val="FF5B4D"/>
+            </a:solidFill>
+            <a:prstDash val="solid"/>
+          </a:ln>
+        </p:spPr>
+      </p:sp>
+      <p:sp>
+        <p:nvSpPr>
+          <p:cNvPr id="14" name="">
+            <a:extLst xmlns:a="http://schemas.openxmlformats.org/drawingml/2006/main">
+              <a:ext uri="{FF2B5EF4-FFF2-40B4-BE49-F238E27FC236}">
+                <a16:creationId xmlns:a16="http://schemas.microsoft.com/office/drawing/2014/main" id="{44787294-147C-45CE-A401-8007691D895C}"/>
+              </a:ext>
+            </a:extLst>
+          </p:cNvPr>
+          <p:cNvSpPr>
+            <a:spLocks xmlns:a="http://schemas.openxmlformats.org/drawingml/2006/main" noGrp="1"/>
+          </p:cNvSpPr>
+          <p:nvPr/>
+        </p:nvSpPr>
+        <p:spPr>
+          <a:xfrm xmlns:a="http://schemas.openxmlformats.org/drawingml/2006/main">
+            <a:off x="1047750" y="3543300"/>
+            <a:ext cx="9829800" cy="552450"/>
+          </a:xfrm>
+          <a:prstGeom xmlns:a="http://schemas.openxmlformats.org/drawingml/2006/main" prst="rect">
+            <a:avLst/>
+          </a:prstGeom>
+          <a:noFill xmlns:a="http://schemas.openxmlformats.org/drawingml/2006/main"/>
+          <a:ln xmlns:a="http://schemas.openxmlformats.org/drawingml/2006/main" w="0">
+            <a:noFill/>
+            <a:prstDash val="solid"/>
+          </a:ln>
+        </p:spPr>
+        <p:txBody>
+          <a:bodyPr xmlns:a="http://schemas.openxmlformats.org/drawingml/2006/main"/>
+          <a:lstStyle xmlns:a="http://schemas.openxmlformats.org/drawingml/2006/main"/>
+          <a:p xmlns:a="http://schemas.openxmlformats.org/drawingml/2006/main">
+            <a:pPr algn="l">
+              <a:defRPr sz="1500" b="0">
+                <a:solidFill>
+                  <a:srgbClr val="17202A"/>
+                </a:solidFill>
+                <a:latin typeface="Aptos"/>
+                <a:ea typeface="Aptos"/>
+                <a:cs typeface="Aptos"/>
+              </a:defRPr>
+            </a:pPr>
+            <a:r>
+              <a:rPr sz="1500" b="0">
+                <a:solidFill>
+                  <a:srgbClr val="17202A"/>
+                </a:solidFill>
+                <a:latin typeface="Aptos"/>
+                <a:ea typeface="Aptos"/>
+                <a:cs typeface="Aptos"/>
+              </a:rPr>
+              <a:t>At 50k-100k MAU, review Supabase compute and read-replica need; at 250k+ MAU, negotiate support/SLO path.</a:t>
+            </a:r>
+          </a:p>
+        </p:txBody>
+      </p:sp>
+      <p:sp>
+        <p:nvSpPr>
+          <p:cNvPr id="15" name="bullet-dot">
+            <a:extLst xmlns:a="http://schemas.openxmlformats.org/drawingml/2006/main">
+              <a:ext uri="{FF2B5EF4-FFF2-40B4-BE49-F238E27FC236}">
+                <a16:creationId xmlns:a16="http://schemas.microsoft.com/office/drawing/2014/main" id="{3E8A0036-DB94-42D2-B596-CD674251AC88}"/>
+              </a:ext>
+            </a:extLst>
+          </p:cNvPr>
+          <p:cNvSpPr>
+            <a:spLocks xmlns:a="http://schemas.openxmlformats.org/drawingml/2006/main" noGrp="1"/>
+          </p:cNvSpPr>
+          <p:nvPr/>
+        </p:nvSpPr>
+        <p:spPr>
+          <a:xfrm xmlns:a="http://schemas.openxmlformats.org/drawingml/2006/main">
+            <a:off x="876300" y="4143375"/>
+            <a:ext cx="85725" cy="85725"/>
+          </a:xfrm>
+          <a:prstGeom xmlns:a="http://schemas.openxmlformats.org/drawingml/2006/main" prst="ellipse">
+            <a:avLst/>
+          </a:prstGeom>
+          <a:solidFill xmlns:a="http://schemas.openxmlformats.org/drawingml/2006/main">
+            <a:srgbClr val="FF5B4D"/>
+          </a:solidFill>
+          <a:ln xmlns:a="http://schemas.openxmlformats.org/drawingml/2006/main" w="0">
+            <a:solidFill>
+              <a:srgbClr val="FF5B4D"/>
+            </a:solidFill>
+            <a:prstDash val="solid"/>
+          </a:ln>
+        </p:spPr>
+      </p:sp>
+      <p:sp>
+        <p:nvSpPr>
+          <p:cNvPr id="16" name="">
+            <a:extLst xmlns:a="http://schemas.openxmlformats.org/drawingml/2006/main">
+              <a:ext uri="{FF2B5EF4-FFF2-40B4-BE49-F238E27FC236}">
+                <a16:creationId xmlns:a16="http://schemas.microsoft.com/office/drawing/2014/main" id="{16EAF146-A34A-4D9A-998B-882B03C2B174}"/>
+              </a:ext>
+            </a:extLst>
+          </p:cNvPr>
+          <p:cNvSpPr>
+            <a:spLocks xmlns:a="http://schemas.openxmlformats.org/drawingml/2006/main" noGrp="1"/>
+          </p:cNvSpPr>
+          <p:nvPr/>
+        </p:nvSpPr>
+        <p:spPr>
+          <a:xfrm xmlns:a="http://schemas.openxmlformats.org/drawingml/2006/main">
+            <a:off x="1047750" y="4067175"/>
+            <a:ext cx="9829800" cy="552450"/>
+          </a:xfrm>
+          <a:prstGeom xmlns:a="http://schemas.openxmlformats.org/drawingml/2006/main" prst="rect">
+            <a:avLst/>
+          </a:prstGeom>
+          <a:noFill xmlns:a="http://schemas.openxmlformats.org/drawingml/2006/main"/>
+          <a:ln xmlns:a="http://schemas.openxmlformats.org/drawingml/2006/main" w="0">
+            <a:noFill/>
+            <a:prstDash val="solid"/>
+          </a:ln>
+        </p:spPr>
+        <p:txBody>
+          <a:bodyPr xmlns:a="http://schemas.openxmlformats.org/drawingml/2006/main"/>
+          <a:lstStyle xmlns:a="http://schemas.openxmlformats.org/drawingml/2006/main"/>
+          <a:p xmlns:a="http://schemas.openxmlformats.org/drawingml/2006/main">
+            <a:pPr algn="l">
+              <a:defRPr sz="1500" b="0">
+                <a:solidFill>
+                  <a:srgbClr val="17202A"/>
+                </a:solidFill>
+                <a:latin typeface="Aptos"/>
+                <a:ea typeface="Aptos"/>
+                <a:cs typeface="Aptos"/>
+              </a:defRPr>
+            </a:pPr>
+            <a:r>
+              <a:rPr sz="1500" b="0">
+                <a:solidFill>
+                  <a:srgbClr val="17202A"/>
+                </a:solidFill>
+                <a:latin typeface="Aptos"/>
+                <a:ea typeface="Aptos"/>
+                <a:cs typeface="Aptos"/>
+              </a:rPr>
+              <a:t>Keep provider adapters thin: email, FX, analytics, push, media processing. Supabase remains the deliberate deep dependency.</a:t>
+            </a:r>
+          </a:p>
+        </p:txBody>
+      </p:sp>
+    </p:spTree>
+    <p:extLst>
+      <p:ext uri="{BB962C8B-B14F-4D97-AF65-F5344CB8AC3E}">
+        <p14:creationId xmlns:p14="http://schemas.microsoft.com/office/powerpoint/2010/main" val="186158645"/>
+      </p:ext>
+    </p:extLst>
+  </p:cSld>
+</p:sld>
+</file>
+
+<file path=ppt/slides/slide15.xml><?xml version="1.0" encoding="utf-8"?>
+<p:sld xmlns:p="http://schemas.openxmlformats.org/presentationml/2006/main">
+  <p:cSld>
+    <p:bg>
+      <p:bgPr>
+        <a:solidFill xmlns:a="http://schemas.openxmlformats.org/drawingml/2006/main">
+          <a:srgbClr val="F7FAF9"/>
+        </a:solidFill>
+      </p:bgPr>
+    </p:bg>
+    <p:spTree>
+      <p:nvGrpSpPr>
+        <p:cNvPr id="1" name=""/>
+        <p:cNvGrpSpPr/>
+        <p:nvPr/>
+      </p:nvGrpSpPr>
+      <p:grpSpPr>
+        <a:xfrm xmlns:a="http://schemas.openxmlformats.org/drawingml/2006/main"/>
+      </p:grpSpPr>
+      <p:sp>
+        <p:nvSpPr>
+          <p:cNvPr id="1" name="brand-rail">
+            <a:extLst xmlns:a="http://schemas.openxmlformats.org/drawingml/2006/main">
+              <a:ext uri="{FF2B5EF4-FFF2-40B4-BE49-F238E27FC236}">
+                <a16:creationId xmlns:a16="http://schemas.microsoft.com/office/drawing/2014/main" id="{528406F8-FDDB-4800-9C33-4E3F5785C0A8}"/>
+              </a:ext>
+            </a:extLst>
+          </p:cNvPr>
+          <p:cNvSpPr>
+            <a:spLocks xmlns:a="http://schemas.openxmlformats.org/drawingml/2006/main" noGrp="1"/>
+          </p:cNvSpPr>
+          <p:nvPr/>
+        </p:nvSpPr>
+        <p:spPr>
+          <a:xfrm xmlns:a="http://schemas.openxmlformats.org/drawingml/2006/main">
+            <a:off x="0" y="0"/>
+            <a:ext cx="133350" cy="6858000"/>
+          </a:xfrm>
+          <a:prstGeom xmlns:a="http://schemas.openxmlformats.org/drawingml/2006/main" prst="rect">
             <a:avLst/>
           </a:prstGeom>
           <a:solidFill xmlns:a="http://schemas.openxmlformats.org/drawingml/2006/main">
@@ -5023,22 +9927,22 @@
       </p:sp>
       <p:sp>
         <p:nvSpPr>
-          <p:cNvPr id="10" name="">
-            <a:extLst xmlns:a="http://schemas.openxmlformats.org/drawingml/2006/main">
-              <a:ext uri="{FF2B5EF4-FFF2-40B4-BE49-F238E27FC236}">
-                <a16:creationId xmlns:a16="http://schemas.microsoft.com/office/drawing/2014/main" id="{1BC16A9F-6D2F-480D-9419-328BF2583715}"/>
-              </a:ext>
-            </a:extLst>
-          </p:cNvPr>
-          <p:cNvSpPr>
-            <a:spLocks xmlns:a="http://schemas.openxmlformats.org/drawingml/2006/main" noGrp="1"/>
-          </p:cNvSpPr>
-          <p:nvPr/>
-        </p:nvSpPr>
-        <p:spPr>
-          <a:xfrm xmlns:a="http://schemas.openxmlformats.org/drawingml/2006/main">
-            <a:off x="952500" y="2247900"/>
-            <a:ext cx="9829800" cy="438150"/>
+          <p:cNvPr id="2" name="">
+            <a:extLst xmlns:a="http://schemas.openxmlformats.org/drawingml/2006/main">
+              <a:ext uri="{FF2B5EF4-FFF2-40B4-BE49-F238E27FC236}">
+                <a16:creationId xmlns:a16="http://schemas.microsoft.com/office/drawing/2014/main" id="{7877E66A-50BE-43C5-A58A-8054F6B815B3}"/>
+              </a:ext>
+            </a:extLst>
+          </p:cNvPr>
+          <p:cNvSpPr>
+            <a:spLocks xmlns:a="http://schemas.openxmlformats.org/drawingml/2006/main" noGrp="1"/>
+          </p:cNvSpPr>
+          <p:nvPr/>
+        </p:nvSpPr>
+        <p:spPr>
+          <a:xfrm xmlns:a="http://schemas.openxmlformats.org/drawingml/2006/main">
+            <a:off x="495300" y="476250"/>
+            <a:ext cx="8382000" cy="457200"/>
           </a:xfrm>
           <a:prstGeom xmlns:a="http://schemas.openxmlformats.org/drawingml/2006/main" prst="rect">
             <a:avLst/>
@@ -5054,46 +9958,158 @@
           <a:lstStyle xmlns:a="http://schemas.openxmlformats.org/drawingml/2006/main"/>
           <a:p xmlns:a="http://schemas.openxmlformats.org/drawingml/2006/main">
             <a:pPr algn="l">
-              <a:defRPr sz="1275" b="0">
-                <a:solidFill>
-                  <a:srgbClr val="17202A"/>
-                </a:solidFill>
-                <a:latin typeface="Aptos"/>
-                <a:ea typeface="Aptos"/>
-                <a:cs typeface="Aptos"/>
-              </a:defRPr>
-            </a:pPr>
-            <a:r>
-              <a:rPr sz="1275" b="0">
-                <a:solidFill>
-                  <a:srgbClr val="17202A"/>
-                </a:solidFill>
-                <a:latin typeface="Aptos"/>
-                <a:ea typeface="Aptos"/>
-                <a:cs typeface="Aptos"/>
-              </a:rPr>
-              <a:t>Supabase pricing: Pro $25/mo, 100k MAU included, compute tiers; read replicas and PITR docs.</a:t>
-            </a:r>
-          </a:p>
-        </p:txBody>
-      </p:sp>
-      <p:sp>
-        <p:nvSpPr>
-          <p:cNvPr id="11" name="bullet-dot">
-            <a:extLst xmlns:a="http://schemas.openxmlformats.org/drawingml/2006/main">
-              <a:ext uri="{FF2B5EF4-FFF2-40B4-BE49-F238E27FC236}">
-                <a16:creationId xmlns:a16="http://schemas.microsoft.com/office/drawing/2014/main" id="{01F09043-7080-4064-990C-46ACAA431087}"/>
-              </a:ext>
-            </a:extLst>
-          </p:cNvPr>
-          <p:cNvSpPr>
-            <a:spLocks xmlns:a="http://schemas.openxmlformats.org/drawingml/2006/main" noGrp="1"/>
-          </p:cNvSpPr>
-          <p:nvPr/>
-        </p:nvSpPr>
-        <p:spPr>
-          <a:xfrm xmlns:a="http://schemas.openxmlformats.org/drawingml/2006/main">
-            <a:off x="781050" y="2733675"/>
+              <a:defRPr sz="2700" b="1">
+                <a:solidFill>
+                  <a:srgbClr val="17202A"/>
+                </a:solidFill>
+                <a:latin typeface="Aptos Display"/>
+                <a:ea typeface="Aptos Display"/>
+                <a:cs typeface="Aptos Display"/>
+              </a:defRPr>
+            </a:pPr>
+            <a:r>
+              <a:rPr sz="2700" b="1">
+                <a:solidFill>
+                  <a:srgbClr val="17202A"/>
+                </a:solidFill>
+                <a:latin typeface="Aptos Display"/>
+                <a:ea typeface="Aptos Display"/>
+                <a:cs typeface="Aptos Display"/>
+              </a:rPr>
+              <a:t>Sources and assumptions</a:t>
+            </a:r>
+          </a:p>
+        </p:txBody>
+      </p:sp>
+      <p:sp>
+        <p:nvSpPr>
+          <p:cNvPr id="3" name="">
+            <a:extLst xmlns:a="http://schemas.openxmlformats.org/drawingml/2006/main">
+              <a:ext uri="{FF2B5EF4-FFF2-40B4-BE49-F238E27FC236}">
+                <a16:creationId xmlns:a16="http://schemas.microsoft.com/office/drawing/2014/main" id="{35786C1D-287C-4606-B56C-CAE1886A561E}"/>
+              </a:ext>
+            </a:extLst>
+          </p:cNvPr>
+          <p:cNvSpPr>
+            <a:spLocks xmlns:a="http://schemas.openxmlformats.org/drawingml/2006/main" noGrp="1"/>
+          </p:cNvSpPr>
+          <p:nvPr/>
+        </p:nvSpPr>
+        <p:spPr>
+          <a:xfrm xmlns:a="http://schemas.openxmlformats.org/drawingml/2006/main">
+            <a:off x="514350" y="933450"/>
+            <a:ext cx="7239000" cy="266700"/>
+          </a:xfrm>
+          <a:prstGeom xmlns:a="http://schemas.openxmlformats.org/drawingml/2006/main" prst="rect">
+            <a:avLst/>
+          </a:prstGeom>
+          <a:noFill xmlns:a="http://schemas.openxmlformats.org/drawingml/2006/main"/>
+          <a:ln xmlns:a="http://schemas.openxmlformats.org/drawingml/2006/main" w="0">
+            <a:noFill/>
+            <a:prstDash val="solid"/>
+          </a:ln>
+        </p:spPr>
+        <p:txBody>
+          <a:bodyPr xmlns:a="http://schemas.openxmlformats.org/drawingml/2006/main"/>
+          <a:lstStyle xmlns:a="http://schemas.openxmlformats.org/drawingml/2006/main"/>
+          <a:p xmlns:a="http://schemas.openxmlformats.org/drawingml/2006/main">
+            <a:pPr algn="l">
+              <a:defRPr sz="1200" b="1">
+                <a:solidFill>
+                  <a:srgbClr val="0D7377"/>
+                </a:solidFill>
+                <a:latin typeface="Aptos"/>
+                <a:ea typeface="Aptos"/>
+                <a:cs typeface="Aptos"/>
+              </a:defRPr>
+            </a:pPr>
+            <a:r>
+              <a:rPr sz="1200" b="1">
+                <a:solidFill>
+                  <a:srgbClr val="0D7377"/>
+                </a:solidFill>
+                <a:latin typeface="Aptos"/>
+                <a:ea typeface="Aptos"/>
+                <a:cs typeface="Aptos"/>
+              </a:rPr>
+              <a:t>Numbers are directional and should be refreshed before investor or budget decisions.</a:t>
+            </a:r>
+          </a:p>
+        </p:txBody>
+      </p:sp>
+      <p:sp>
+        <p:nvSpPr>
+          <p:cNvPr id="4" name="">
+            <a:extLst xmlns:a="http://schemas.openxmlformats.org/drawingml/2006/main">
+              <a:ext uri="{FF2B5EF4-FFF2-40B4-BE49-F238E27FC236}">
+                <a16:creationId xmlns:a16="http://schemas.microsoft.com/office/drawing/2014/main" id="{D09D2D89-9DC7-4472-ADFA-89627393AB83}"/>
+              </a:ext>
+            </a:extLst>
+          </p:cNvPr>
+          <p:cNvSpPr>
+            <a:spLocks xmlns:a="http://schemas.openxmlformats.org/drawingml/2006/main" noGrp="1"/>
+          </p:cNvSpPr>
+          <p:nvPr/>
+        </p:nvSpPr>
+        <p:spPr>
+          <a:xfrm xmlns:a="http://schemas.openxmlformats.org/drawingml/2006/main">
+            <a:off x="9124950" y="476250"/>
+            <a:ext cx="2095500" cy="209550"/>
+          </a:xfrm>
+          <a:prstGeom xmlns:a="http://schemas.openxmlformats.org/drawingml/2006/main" prst="rect">
+            <a:avLst/>
+          </a:prstGeom>
+          <a:noFill xmlns:a="http://schemas.openxmlformats.org/drawingml/2006/main"/>
+          <a:ln xmlns:a="http://schemas.openxmlformats.org/drawingml/2006/main" w="0">
+            <a:noFill/>
+            <a:prstDash val="solid"/>
+          </a:ln>
+        </p:spPr>
+        <p:txBody>
+          <a:bodyPr xmlns:a="http://schemas.openxmlformats.org/drawingml/2006/main"/>
+          <a:lstStyle xmlns:a="http://schemas.openxmlformats.org/drawingml/2006/main"/>
+          <a:p xmlns:a="http://schemas.openxmlformats.org/drawingml/2006/main">
+            <a:pPr algn="r">
+              <a:defRPr sz="900" b="0">
+                <a:solidFill>
+                  <a:srgbClr val="617181"/>
+                </a:solidFill>
+                <a:latin typeface="Aptos"/>
+                <a:ea typeface="Aptos"/>
+                <a:cs typeface="Aptos"/>
+              </a:defRPr>
+            </a:pPr>
+            <a:r>
+              <a:rPr sz="900" b="0">
+                <a:solidFill>
+                  <a:srgbClr val="617181"/>
+                </a:solidFill>
+                <a:latin typeface="Aptos"/>
+                <a:ea typeface="Aptos"/>
+                <a:cs typeface="Aptos"/>
+              </a:rPr>
+              <a:t>Vamo dependency + scale map</a:t>
+            </a:r>
+          </a:p>
+        </p:txBody>
+      </p:sp>
+      <p:sp>
+        <p:nvSpPr>
+          <p:cNvPr id="5" name="bullet-dot">
+            <a:extLst xmlns:a="http://schemas.openxmlformats.org/drawingml/2006/main">
+              <a:ext uri="{FF2B5EF4-FFF2-40B4-BE49-F238E27FC236}">
+                <a16:creationId xmlns:a16="http://schemas.microsoft.com/office/drawing/2014/main" id="{9C25252F-76D3-4F14-9354-79115DF80DB8}"/>
+              </a:ext>
+            </a:extLst>
+          </p:cNvPr>
+          <p:cNvSpPr>
+            <a:spLocks xmlns:a="http://schemas.openxmlformats.org/drawingml/2006/main" noGrp="1"/>
+          </p:cNvSpPr>
+          <p:nvPr/>
+        </p:nvSpPr>
+        <p:spPr>
+          <a:xfrm xmlns:a="http://schemas.openxmlformats.org/drawingml/2006/main">
+            <a:off x="781050" y="1504950"/>
             <a:ext cx="85725" cy="85725"/>
           </a:xfrm>
           <a:prstGeom xmlns:a="http://schemas.openxmlformats.org/drawingml/2006/main" prst="ellipse">
@@ -5112,21 +10128,21 @@
       </p:sp>
       <p:sp>
         <p:nvSpPr>
-          <p:cNvPr id="12" name="">
-            <a:extLst xmlns:a="http://schemas.openxmlformats.org/drawingml/2006/main">
-              <a:ext uri="{FF2B5EF4-FFF2-40B4-BE49-F238E27FC236}">
-                <a16:creationId xmlns:a16="http://schemas.microsoft.com/office/drawing/2014/main" id="{11D93C7B-9C60-4CE4-BFE8-3FEB82DDDA74}"/>
-              </a:ext>
-            </a:extLst>
-          </p:cNvPr>
-          <p:cNvSpPr>
-            <a:spLocks xmlns:a="http://schemas.openxmlformats.org/drawingml/2006/main" noGrp="1"/>
-          </p:cNvSpPr>
-          <p:nvPr/>
-        </p:nvSpPr>
-        <p:spPr>
-          <a:xfrm xmlns:a="http://schemas.openxmlformats.org/drawingml/2006/main">
-            <a:off x="952500" y="2657475"/>
+          <p:cNvPr id="6" name="">
+            <a:extLst xmlns:a="http://schemas.openxmlformats.org/drawingml/2006/main">
+              <a:ext uri="{FF2B5EF4-FFF2-40B4-BE49-F238E27FC236}">
+                <a16:creationId xmlns:a16="http://schemas.microsoft.com/office/drawing/2014/main" id="{50912438-6E00-4597-B55C-6AEBF66BBEA9}"/>
+              </a:ext>
+            </a:extLst>
+          </p:cNvPr>
+          <p:cNvSpPr>
+            <a:spLocks xmlns:a="http://schemas.openxmlformats.org/drawingml/2006/main" noGrp="1"/>
+          </p:cNvSpPr>
+          <p:nvPr/>
+        </p:nvSpPr>
+        <p:spPr>
+          <a:xfrm xmlns:a="http://schemas.openxmlformats.org/drawingml/2006/main">
+            <a:off x="952500" y="1428750"/>
             <a:ext cx="9829800" cy="438150"/>
           </a:xfrm>
           <a:prstGeom xmlns:a="http://schemas.openxmlformats.org/drawingml/2006/main" prst="rect">
@@ -5161,28 +10177,28 @@
                 <a:ea typeface="Aptos"/>
                 <a:cs typeface="Aptos"/>
               </a:rPr>
-              <a:t>Vercel Pro docs: $20/mo, monthly credit, 1 TB Fast Data Transfer, 10M Edge Requests included.</a:t>
-            </a:r>
-          </a:p>
-        </p:txBody>
-      </p:sp>
-      <p:sp>
-        <p:nvSpPr>
-          <p:cNvPr id="13" name="bullet-dot">
-            <a:extLst xmlns:a="http://schemas.openxmlformats.org/drawingml/2006/main">
-              <a:ext uri="{FF2B5EF4-FFF2-40B4-BE49-F238E27FC236}">
-                <a16:creationId xmlns:a16="http://schemas.microsoft.com/office/drawing/2014/main" id="{A0FF029D-8422-483C-BC21-3B8D75CE3422}"/>
-              </a:ext>
-            </a:extLst>
-          </p:cNvPr>
-          <p:cNvSpPr>
-            <a:spLocks xmlns:a="http://schemas.openxmlformats.org/drawingml/2006/main" noGrp="1"/>
-          </p:cNvSpPr>
-          <p:nvPr/>
-        </p:nvSpPr>
-        <p:spPr>
-          <a:xfrm xmlns:a="http://schemas.openxmlformats.org/drawingml/2006/main">
-            <a:off x="781050" y="3143250"/>
+              <a:t>Repo: docs/DEPENDENCIES.md, docs/LAUNCH_GATES.md, docs/DR_RUNBOOK.md, docs/OBSERVABILITY.md.</a:t>
+            </a:r>
+          </a:p>
+        </p:txBody>
+      </p:sp>
+      <p:sp>
+        <p:nvSpPr>
+          <p:cNvPr id="7" name="bullet-dot">
+            <a:extLst xmlns:a="http://schemas.openxmlformats.org/drawingml/2006/main">
+              <a:ext uri="{FF2B5EF4-FFF2-40B4-BE49-F238E27FC236}">
+                <a16:creationId xmlns:a16="http://schemas.microsoft.com/office/drawing/2014/main" id="{DFDFBC87-E16D-409E-AA0E-BDD4530058AF}"/>
+              </a:ext>
+            </a:extLst>
+          </p:cNvPr>
+          <p:cNvSpPr>
+            <a:spLocks xmlns:a="http://schemas.openxmlformats.org/drawingml/2006/main" noGrp="1"/>
+          </p:cNvSpPr>
+          <p:nvPr/>
+        </p:nvSpPr>
+        <p:spPr>
+          <a:xfrm xmlns:a="http://schemas.openxmlformats.org/drawingml/2006/main">
+            <a:off x="781050" y="1914525"/>
             <a:ext cx="85725" cy="85725"/>
           </a:xfrm>
           <a:prstGeom xmlns:a="http://schemas.openxmlformats.org/drawingml/2006/main" prst="ellipse">
@@ -5201,21 +10217,21 @@
       </p:sp>
       <p:sp>
         <p:nvSpPr>
-          <p:cNvPr id="14" name="">
-            <a:extLst xmlns:a="http://schemas.openxmlformats.org/drawingml/2006/main">
-              <a:ext uri="{FF2B5EF4-FFF2-40B4-BE49-F238E27FC236}">
-                <a16:creationId xmlns:a16="http://schemas.microsoft.com/office/drawing/2014/main" id="{2FF076F8-EEBA-4462-A31F-2DA1BB910E71}"/>
-              </a:ext>
-            </a:extLst>
-          </p:cNvPr>
-          <p:cNvSpPr>
-            <a:spLocks xmlns:a="http://schemas.openxmlformats.org/drawingml/2006/main" noGrp="1"/>
-          </p:cNvSpPr>
-          <p:nvPr/>
-        </p:nvSpPr>
-        <p:spPr>
-          <a:xfrm xmlns:a="http://schemas.openxmlformats.org/drawingml/2006/main">
-            <a:off x="952500" y="3067050"/>
+          <p:cNvPr id="8" name="">
+            <a:extLst xmlns:a="http://schemas.openxmlformats.org/drawingml/2006/main">
+              <a:ext uri="{FF2B5EF4-FFF2-40B4-BE49-F238E27FC236}">
+                <a16:creationId xmlns:a16="http://schemas.microsoft.com/office/drawing/2014/main" id="{B6D4005B-84B5-488C-9377-363D350B7151}"/>
+              </a:ext>
+            </a:extLst>
+          </p:cNvPr>
+          <p:cNvSpPr>
+            <a:spLocks xmlns:a="http://schemas.openxmlformats.org/drawingml/2006/main" noGrp="1"/>
+          </p:cNvSpPr>
+          <p:nvPr/>
+        </p:nvSpPr>
+        <p:spPr>
+          <a:xfrm xmlns:a="http://schemas.openxmlformats.org/drawingml/2006/main">
+            <a:off x="952500" y="1838325"/>
             <a:ext cx="9829800" cy="438150"/>
           </a:xfrm>
           <a:prstGeom xmlns:a="http://schemas.openxmlformats.org/drawingml/2006/main" prst="rect">
@@ -5250,28 +10266,28 @@
                 <a:ea typeface="Aptos"/>
                 <a:cs typeface="Aptos"/>
               </a:rPr>
-              <a:t>Resend pricing: Free 3k emails/mo, Pro $20/mo for 50k; Brevo free: 300 emails/day.</a:t>
-            </a:r>
-          </a:p>
-        </p:txBody>
-      </p:sp>
-      <p:sp>
-        <p:nvSpPr>
-          <p:cNvPr id="15" name="bullet-dot">
-            <a:extLst xmlns:a="http://schemas.openxmlformats.org/drawingml/2006/main">
-              <a:ext uri="{FF2B5EF4-FFF2-40B4-BE49-F238E27FC236}">
-                <a16:creationId xmlns:a16="http://schemas.microsoft.com/office/drawing/2014/main" id="{2478C3C2-4E5A-4C7E-B6DF-CC5EE144CBCE}"/>
-              </a:ext>
-            </a:extLst>
-          </p:cNvPr>
-          <p:cNvSpPr>
-            <a:spLocks xmlns:a="http://schemas.openxmlformats.org/drawingml/2006/main" noGrp="1"/>
-          </p:cNvSpPr>
-          <p:nvPr/>
-        </p:nvSpPr>
-        <p:spPr>
-          <a:xfrm xmlns:a="http://schemas.openxmlformats.org/drawingml/2006/main">
-            <a:off x="781050" y="3552825"/>
+              <a:t>Business inputs: Vamo_Business_Plan.docx and Vamo_Financial_Model.xlsx.</a:t>
+            </a:r>
+          </a:p>
+        </p:txBody>
+      </p:sp>
+      <p:sp>
+        <p:nvSpPr>
+          <p:cNvPr id="9" name="bullet-dot">
+            <a:extLst xmlns:a="http://schemas.openxmlformats.org/drawingml/2006/main">
+              <a:ext uri="{FF2B5EF4-FFF2-40B4-BE49-F238E27FC236}">
+                <a16:creationId xmlns:a16="http://schemas.microsoft.com/office/drawing/2014/main" id="{C17960CA-8522-4D5F-8834-5F7672BD9938}"/>
+              </a:ext>
+            </a:extLst>
+          </p:cNvPr>
+          <p:cNvSpPr>
+            <a:spLocks xmlns:a="http://schemas.openxmlformats.org/drawingml/2006/main" noGrp="1"/>
+          </p:cNvSpPr>
+          <p:nvPr/>
+        </p:nvSpPr>
+        <p:spPr>
+          <a:xfrm xmlns:a="http://schemas.openxmlformats.org/drawingml/2006/main">
+            <a:off x="781050" y="2324100"/>
             <a:ext cx="85725" cy="85725"/>
           </a:xfrm>
           <a:prstGeom xmlns:a="http://schemas.openxmlformats.org/drawingml/2006/main" prst="ellipse">
@@ -5290,21 +10306,21 @@
       </p:sp>
       <p:sp>
         <p:nvSpPr>
-          <p:cNvPr id="16" name="">
-            <a:extLst xmlns:a="http://schemas.openxmlformats.org/drawingml/2006/main">
-              <a:ext uri="{FF2B5EF4-FFF2-40B4-BE49-F238E27FC236}">
-                <a16:creationId xmlns:a16="http://schemas.microsoft.com/office/drawing/2014/main" id="{81D7803F-F445-4E0D-A99E-69B913479C60}"/>
-              </a:ext>
-            </a:extLst>
-          </p:cNvPr>
-          <p:cNvSpPr>
-            <a:spLocks xmlns:a="http://schemas.openxmlformats.org/drawingml/2006/main" noGrp="1"/>
-          </p:cNvSpPr>
-          <p:nvPr/>
-        </p:nvSpPr>
-        <p:spPr>
-          <a:xfrm xmlns:a="http://schemas.openxmlformats.org/drawingml/2006/main">
-            <a:off x="952500" y="3476625"/>
+          <p:cNvPr id="10" name="">
+            <a:extLst xmlns:a="http://schemas.openxmlformats.org/drawingml/2006/main">
+              <a:ext uri="{FF2B5EF4-FFF2-40B4-BE49-F238E27FC236}">
+                <a16:creationId xmlns:a16="http://schemas.microsoft.com/office/drawing/2014/main" id="{44208CFB-3EA3-4D1C-9179-A84BA745C0F5}"/>
+              </a:ext>
+            </a:extLst>
+          </p:cNvPr>
+          <p:cNvSpPr>
+            <a:spLocks xmlns:a="http://schemas.openxmlformats.org/drawingml/2006/main" noGrp="1"/>
+          </p:cNvSpPr>
+          <p:nvPr/>
+        </p:nvSpPr>
+        <p:spPr>
+          <a:xfrm xmlns:a="http://schemas.openxmlformats.org/drawingml/2006/main">
+            <a:off x="952500" y="2247900"/>
             <a:ext cx="9829800" cy="438150"/>
           </a:xfrm>
           <a:prstGeom xmlns:a="http://schemas.openxmlformats.org/drawingml/2006/main" prst="rect">
@@ -5339,28 +10355,28 @@
                 <a:ea typeface="Aptos"/>
                 <a:cs typeface="Aptos"/>
               </a:rPr>
-              <a:t>PostHog pricing: first 1M product analytics events/mo free, usage-based after.</a:t>
-            </a:r>
-          </a:p>
-        </p:txBody>
-      </p:sp>
-      <p:sp>
-        <p:nvSpPr>
-          <p:cNvPr id="17" name="bullet-dot">
-            <a:extLst xmlns:a="http://schemas.openxmlformats.org/drawingml/2006/main">
-              <a:ext uri="{FF2B5EF4-FFF2-40B4-BE49-F238E27FC236}">
-                <a16:creationId xmlns:a16="http://schemas.microsoft.com/office/drawing/2014/main" id="{507D94DB-9F9B-47FF-BA28-41011FEF34DB}"/>
-              </a:ext>
-            </a:extLst>
-          </p:cNvPr>
-          <p:cNvSpPr>
-            <a:spLocks xmlns:a="http://schemas.openxmlformats.org/drawingml/2006/main" noGrp="1"/>
-          </p:cNvSpPr>
-          <p:nvPr/>
-        </p:nvSpPr>
-        <p:spPr>
-          <a:xfrm xmlns:a="http://schemas.openxmlformats.org/drawingml/2006/main">
-            <a:off x="781050" y="3962400"/>
+              <a:t>Supabase pricing: Pro $25/mo, 100k MAU included, 100 GB storage, 250 GB egress, compute tiers; read replicas and PITR docs.</a:t>
+            </a:r>
+          </a:p>
+        </p:txBody>
+      </p:sp>
+      <p:sp>
+        <p:nvSpPr>
+          <p:cNvPr id="11" name="bullet-dot">
+            <a:extLst xmlns:a="http://schemas.openxmlformats.org/drawingml/2006/main">
+              <a:ext uri="{FF2B5EF4-FFF2-40B4-BE49-F238E27FC236}">
+                <a16:creationId xmlns:a16="http://schemas.microsoft.com/office/drawing/2014/main" id="{D6D0347A-0A01-453E-A699-D1D9413BA334}"/>
+              </a:ext>
+            </a:extLst>
+          </p:cNvPr>
+          <p:cNvSpPr>
+            <a:spLocks xmlns:a="http://schemas.openxmlformats.org/drawingml/2006/main" noGrp="1"/>
+          </p:cNvSpPr>
+          <p:nvPr/>
+        </p:nvSpPr>
+        <p:spPr>
+          <a:xfrm xmlns:a="http://schemas.openxmlformats.org/drawingml/2006/main">
+            <a:off x="781050" y="2733675"/>
             <a:ext cx="85725" cy="85725"/>
           </a:xfrm>
           <a:prstGeom xmlns:a="http://schemas.openxmlformats.org/drawingml/2006/main" prst="ellipse">
@@ -5379,21 +10395,21 @@
       </p:sp>
       <p:sp>
         <p:nvSpPr>
-          <p:cNvPr id="18" name="">
-            <a:extLst xmlns:a="http://schemas.openxmlformats.org/drawingml/2006/main">
-              <a:ext uri="{FF2B5EF4-FFF2-40B4-BE49-F238E27FC236}">
-                <a16:creationId xmlns:a16="http://schemas.microsoft.com/office/drawing/2014/main" id="{7E44287A-8C96-4B03-8C7F-43C113067E9C}"/>
-              </a:ext>
-            </a:extLst>
-          </p:cNvPr>
-          <p:cNvSpPr>
-            <a:spLocks xmlns:a="http://schemas.openxmlformats.org/drawingml/2006/main" noGrp="1"/>
-          </p:cNvSpPr>
-          <p:nvPr/>
-        </p:nvSpPr>
-        <p:spPr>
-          <a:xfrm xmlns:a="http://schemas.openxmlformats.org/drawingml/2006/main">
-            <a:off x="952500" y="3886200"/>
+          <p:cNvPr id="12" name="">
+            <a:extLst xmlns:a="http://schemas.openxmlformats.org/drawingml/2006/main">
+              <a:ext uri="{FF2B5EF4-FFF2-40B4-BE49-F238E27FC236}">
+                <a16:creationId xmlns:a16="http://schemas.microsoft.com/office/drawing/2014/main" id="{A78696D2-8311-4E0D-B46F-0A9EC07F4040}"/>
+              </a:ext>
+            </a:extLst>
+          </p:cNvPr>
+          <p:cNvSpPr>
+            <a:spLocks xmlns:a="http://schemas.openxmlformats.org/drawingml/2006/main" noGrp="1"/>
+          </p:cNvSpPr>
+          <p:nvPr/>
+        </p:nvSpPr>
+        <p:spPr>
+          <a:xfrm xmlns:a="http://schemas.openxmlformats.org/drawingml/2006/main">
+            <a:off x="952500" y="2657475"/>
             <a:ext cx="9829800" cy="438150"/>
           </a:xfrm>
           <a:prstGeom xmlns:a="http://schemas.openxmlformats.org/drawingml/2006/main" prst="rect">
@@ -5428,28 +10444,28 @@
                 <a:ea typeface="Aptos"/>
                 <a:cs typeface="Aptos"/>
               </a:rPr>
-              <a:t>Firebase Crashlytics: no cost; FCM/Firebase pricing page for Google Cloud-backed billing context.</a:t>
-            </a:r>
-          </a:p>
-        </p:txBody>
-      </p:sp>
-      <p:sp>
-        <p:nvSpPr>
-          <p:cNvPr id="19" name="bullet-dot">
-            <a:extLst xmlns:a="http://schemas.openxmlformats.org/drawingml/2006/main">
-              <a:ext uri="{FF2B5EF4-FFF2-40B4-BE49-F238E27FC236}">
-                <a16:creationId xmlns:a16="http://schemas.microsoft.com/office/drawing/2014/main" id="{9E1796BB-F7D2-4CF0-91A8-FE1A672DEC66}"/>
-              </a:ext>
-            </a:extLst>
-          </p:cNvPr>
-          <p:cNvSpPr>
-            <a:spLocks xmlns:a="http://schemas.openxmlformats.org/drawingml/2006/main" noGrp="1"/>
-          </p:cNvSpPr>
-          <p:nvPr/>
-        </p:nvSpPr>
-        <p:spPr>
-          <a:xfrm xmlns:a="http://schemas.openxmlformats.org/drawingml/2006/main">
-            <a:off x="781050" y="4371975"/>
+              <a:t>Repo code: CaptureStorage video cap and StoragePaths for captures, videos, receipts, backgrounds, and avatars.</a:t>
+            </a:r>
+          </a:p>
+        </p:txBody>
+      </p:sp>
+      <p:sp>
+        <p:nvSpPr>
+          <p:cNvPr id="13" name="bullet-dot">
+            <a:extLst xmlns:a="http://schemas.openxmlformats.org/drawingml/2006/main">
+              <a:ext uri="{FF2B5EF4-FFF2-40B4-BE49-F238E27FC236}">
+                <a16:creationId xmlns:a16="http://schemas.microsoft.com/office/drawing/2014/main" id="{F2DCA670-C656-4D26-A22B-8C147F002086}"/>
+              </a:ext>
+            </a:extLst>
+          </p:cNvPr>
+          <p:cNvSpPr>
+            <a:spLocks xmlns:a="http://schemas.openxmlformats.org/drawingml/2006/main" noGrp="1"/>
+          </p:cNvSpPr>
+          <p:nvPr/>
+        </p:nvSpPr>
+        <p:spPr>
+          <a:xfrm xmlns:a="http://schemas.openxmlformats.org/drawingml/2006/main">
+            <a:off x="781050" y="3143250"/>
             <a:ext cx="85725" cy="85725"/>
           </a:xfrm>
           <a:prstGeom xmlns:a="http://schemas.openxmlformats.org/drawingml/2006/main" prst="ellipse">
@@ -5468,21 +10484,21 @@
       </p:sp>
       <p:sp>
         <p:nvSpPr>
-          <p:cNvPr id="20" name="">
-            <a:extLst xmlns:a="http://schemas.openxmlformats.org/drawingml/2006/main">
-              <a:ext uri="{FF2B5EF4-FFF2-40B4-BE49-F238E27FC236}">
-                <a16:creationId xmlns:a16="http://schemas.microsoft.com/office/drawing/2014/main" id="{C1C654EC-13C7-4A77-B7C3-0B3641025FF0}"/>
-              </a:ext>
-            </a:extLst>
-          </p:cNvPr>
-          <p:cNvSpPr>
-            <a:spLocks xmlns:a="http://schemas.openxmlformats.org/drawingml/2006/main" noGrp="1"/>
-          </p:cNvSpPr>
-          <p:nvPr/>
-        </p:nvSpPr>
-        <p:spPr>
-          <a:xfrm xmlns:a="http://schemas.openxmlformats.org/drawingml/2006/main">
-            <a:off x="952500" y="4295775"/>
+          <p:cNvPr id="14" name="">
+            <a:extLst xmlns:a="http://schemas.openxmlformats.org/drawingml/2006/main">
+              <a:ext uri="{FF2B5EF4-FFF2-40B4-BE49-F238E27FC236}">
+                <a16:creationId xmlns:a16="http://schemas.microsoft.com/office/drawing/2014/main" id="{1C9E7566-A155-4DF4-95DB-ADC2D538D9AA}"/>
+              </a:ext>
+            </a:extLst>
+          </p:cNvPr>
+          <p:cNvSpPr>
+            <a:spLocks xmlns:a="http://schemas.openxmlformats.org/drawingml/2006/main" noGrp="1"/>
+          </p:cNvSpPr>
+          <p:nvPr/>
+        </p:nvSpPr>
+        <p:spPr>
+          <a:xfrm xmlns:a="http://schemas.openxmlformats.org/drawingml/2006/main">
+            <a:off x="952500" y="3067050"/>
             <a:ext cx="9829800" cy="438150"/>
           </a:xfrm>
           <a:prstGeom xmlns:a="http://schemas.openxmlformats.org/drawingml/2006/main" prst="rect">
@@ -5517,29 +10533,62 @@
                 <a:ea typeface="Aptos"/>
                 <a:cs typeface="Aptos"/>
               </a:rPr>
-              <a:t>exchangerate.host pricing: free 100 requests/mo; paid tiers from 10k requests/mo.</a:t>
-            </a:r>
-          </a:p>
-        </p:txBody>
-      </p:sp>
-      <p:sp>
-        <p:nvSpPr>
-          <p:cNvPr id="21" name="">
-            <a:extLst xmlns:a="http://schemas.openxmlformats.org/drawingml/2006/main">
-              <a:ext uri="{FF2B5EF4-FFF2-40B4-BE49-F238E27FC236}">
-                <a16:creationId xmlns:a16="http://schemas.microsoft.com/office/drawing/2014/main" id="{47347D34-AAE8-41B4-99D7-F968BA4C844A}"/>
-              </a:ext>
-            </a:extLst>
-          </p:cNvPr>
-          <p:cNvSpPr>
-            <a:spLocks xmlns:a="http://schemas.openxmlformats.org/drawingml/2006/main" noGrp="1"/>
-          </p:cNvSpPr>
-          <p:nvPr/>
-        </p:nvSpPr>
-        <p:spPr>
-          <a:xfrm xmlns:a="http://schemas.openxmlformats.org/drawingml/2006/main">
-            <a:off x="800100" y="5829300"/>
-            <a:ext cx="9715500" cy="476250"/>
+              <a:t>Vercel Pro docs: $20/mo, monthly credit, 1 TB Fast Data Transfer, 10M Edge Requests included.</a:t>
+            </a:r>
+          </a:p>
+        </p:txBody>
+      </p:sp>
+      <p:sp>
+        <p:nvSpPr>
+          <p:cNvPr id="15" name="bullet-dot">
+            <a:extLst xmlns:a="http://schemas.openxmlformats.org/drawingml/2006/main">
+              <a:ext uri="{FF2B5EF4-FFF2-40B4-BE49-F238E27FC236}">
+                <a16:creationId xmlns:a16="http://schemas.microsoft.com/office/drawing/2014/main" id="{14AD2FCB-097E-4AE0-98C4-E94A5B6F99FD}"/>
+              </a:ext>
+            </a:extLst>
+          </p:cNvPr>
+          <p:cNvSpPr>
+            <a:spLocks xmlns:a="http://schemas.openxmlformats.org/drawingml/2006/main" noGrp="1"/>
+          </p:cNvSpPr>
+          <p:nvPr/>
+        </p:nvSpPr>
+        <p:spPr>
+          <a:xfrm xmlns:a="http://schemas.openxmlformats.org/drawingml/2006/main">
+            <a:off x="781050" y="3552825"/>
+            <a:ext cx="85725" cy="85725"/>
+          </a:xfrm>
+          <a:prstGeom xmlns:a="http://schemas.openxmlformats.org/drawingml/2006/main" prst="ellipse">
+            <a:avLst/>
+          </a:prstGeom>
+          <a:solidFill xmlns:a="http://schemas.openxmlformats.org/drawingml/2006/main">
+            <a:srgbClr val="0D7377"/>
+          </a:solidFill>
+          <a:ln xmlns:a="http://schemas.openxmlformats.org/drawingml/2006/main" w="0">
+            <a:solidFill>
+              <a:srgbClr val="0D7377"/>
+            </a:solidFill>
+            <a:prstDash val="solid"/>
+          </a:ln>
+        </p:spPr>
+      </p:sp>
+      <p:sp>
+        <p:nvSpPr>
+          <p:cNvPr id="16" name="">
+            <a:extLst xmlns:a="http://schemas.openxmlformats.org/drawingml/2006/main">
+              <a:ext uri="{FF2B5EF4-FFF2-40B4-BE49-F238E27FC236}">
+                <a16:creationId xmlns:a16="http://schemas.microsoft.com/office/drawing/2014/main" id="{D2B4DCFC-3CEF-4F4A-8364-3587F087B3BE}"/>
+              </a:ext>
+            </a:extLst>
+          </p:cNvPr>
+          <p:cNvSpPr>
+            <a:spLocks xmlns:a="http://schemas.openxmlformats.org/drawingml/2006/main" noGrp="1"/>
+          </p:cNvSpPr>
+          <p:nvPr/>
+        </p:nvSpPr>
+        <p:spPr>
+          <a:xfrm xmlns:a="http://schemas.openxmlformats.org/drawingml/2006/main">
+            <a:off x="952500" y="3476625"/>
+            <a:ext cx="9829800" cy="438150"/>
           </a:xfrm>
           <a:prstGeom xmlns:a="http://schemas.openxmlformats.org/drawingml/2006/main" prst="rect">
             <a:avLst/>
@@ -5555,6 +10604,329 @@
           <a:lstStyle xmlns:a="http://schemas.openxmlformats.org/drawingml/2006/main"/>
           <a:p xmlns:a="http://schemas.openxmlformats.org/drawingml/2006/main">
             <a:pPr algn="l">
+              <a:defRPr sz="1275" b="0">
+                <a:solidFill>
+                  <a:srgbClr val="17202A"/>
+                </a:solidFill>
+                <a:latin typeface="Aptos"/>
+                <a:ea typeface="Aptos"/>
+                <a:cs typeface="Aptos"/>
+              </a:defRPr>
+            </a:pPr>
+            <a:r>
+              <a:rPr sz="1275" b="0">
+                <a:solidFill>
+                  <a:srgbClr val="17202A"/>
+                </a:solidFill>
+                <a:latin typeface="Aptos"/>
+                <a:ea typeface="Aptos"/>
+                <a:cs typeface="Aptos"/>
+              </a:rPr>
+              <a:t>Resend pricing: Free 3k emails/mo, Pro $20/mo for 50k; Brevo free: 300 emails/day.</a:t>
+            </a:r>
+          </a:p>
+        </p:txBody>
+      </p:sp>
+      <p:sp>
+        <p:nvSpPr>
+          <p:cNvPr id="17" name="bullet-dot">
+            <a:extLst xmlns:a="http://schemas.openxmlformats.org/drawingml/2006/main">
+              <a:ext uri="{FF2B5EF4-FFF2-40B4-BE49-F238E27FC236}">
+                <a16:creationId xmlns:a16="http://schemas.microsoft.com/office/drawing/2014/main" id="{323E328B-4FAE-4A1A-991A-94CE09394A9B}"/>
+              </a:ext>
+            </a:extLst>
+          </p:cNvPr>
+          <p:cNvSpPr>
+            <a:spLocks xmlns:a="http://schemas.openxmlformats.org/drawingml/2006/main" noGrp="1"/>
+          </p:cNvSpPr>
+          <p:nvPr/>
+        </p:nvSpPr>
+        <p:spPr>
+          <a:xfrm xmlns:a="http://schemas.openxmlformats.org/drawingml/2006/main">
+            <a:off x="781050" y="3962400"/>
+            <a:ext cx="85725" cy="85725"/>
+          </a:xfrm>
+          <a:prstGeom xmlns:a="http://schemas.openxmlformats.org/drawingml/2006/main" prst="ellipse">
+            <a:avLst/>
+          </a:prstGeom>
+          <a:solidFill xmlns:a="http://schemas.openxmlformats.org/drawingml/2006/main">
+            <a:srgbClr val="0D7377"/>
+          </a:solidFill>
+          <a:ln xmlns:a="http://schemas.openxmlformats.org/drawingml/2006/main" w="0">
+            <a:solidFill>
+              <a:srgbClr val="0D7377"/>
+            </a:solidFill>
+            <a:prstDash val="solid"/>
+          </a:ln>
+        </p:spPr>
+      </p:sp>
+      <p:sp>
+        <p:nvSpPr>
+          <p:cNvPr id="18" name="">
+            <a:extLst xmlns:a="http://schemas.openxmlformats.org/drawingml/2006/main">
+              <a:ext uri="{FF2B5EF4-FFF2-40B4-BE49-F238E27FC236}">
+                <a16:creationId xmlns:a16="http://schemas.microsoft.com/office/drawing/2014/main" id="{AA044366-1CA8-4713-BF92-B6C1FA232CD1}"/>
+              </a:ext>
+            </a:extLst>
+          </p:cNvPr>
+          <p:cNvSpPr>
+            <a:spLocks xmlns:a="http://schemas.openxmlformats.org/drawingml/2006/main" noGrp="1"/>
+          </p:cNvSpPr>
+          <p:nvPr/>
+        </p:nvSpPr>
+        <p:spPr>
+          <a:xfrm xmlns:a="http://schemas.openxmlformats.org/drawingml/2006/main">
+            <a:off x="952500" y="3886200"/>
+            <a:ext cx="9829800" cy="438150"/>
+          </a:xfrm>
+          <a:prstGeom xmlns:a="http://schemas.openxmlformats.org/drawingml/2006/main" prst="rect">
+            <a:avLst/>
+          </a:prstGeom>
+          <a:noFill xmlns:a="http://schemas.openxmlformats.org/drawingml/2006/main"/>
+          <a:ln xmlns:a="http://schemas.openxmlformats.org/drawingml/2006/main" w="0">
+            <a:noFill/>
+            <a:prstDash val="solid"/>
+          </a:ln>
+        </p:spPr>
+        <p:txBody>
+          <a:bodyPr xmlns:a="http://schemas.openxmlformats.org/drawingml/2006/main"/>
+          <a:lstStyle xmlns:a="http://schemas.openxmlformats.org/drawingml/2006/main"/>
+          <a:p xmlns:a="http://schemas.openxmlformats.org/drawingml/2006/main">
+            <a:pPr algn="l">
+              <a:defRPr sz="1275" b="0">
+                <a:solidFill>
+                  <a:srgbClr val="17202A"/>
+                </a:solidFill>
+                <a:latin typeface="Aptos"/>
+                <a:ea typeface="Aptos"/>
+                <a:cs typeface="Aptos"/>
+              </a:defRPr>
+            </a:pPr>
+            <a:r>
+              <a:rPr sz="1275" b="0">
+                <a:solidFill>
+                  <a:srgbClr val="17202A"/>
+                </a:solidFill>
+                <a:latin typeface="Aptos"/>
+                <a:ea typeface="Aptos"/>
+                <a:cs typeface="Aptos"/>
+              </a:rPr>
+              <a:t>PostHog pricing: first 1M product analytics events/mo free, usage-based after.</a:t>
+            </a:r>
+          </a:p>
+        </p:txBody>
+      </p:sp>
+      <p:sp>
+        <p:nvSpPr>
+          <p:cNvPr id="19" name="bullet-dot">
+            <a:extLst xmlns:a="http://schemas.openxmlformats.org/drawingml/2006/main">
+              <a:ext uri="{FF2B5EF4-FFF2-40B4-BE49-F238E27FC236}">
+                <a16:creationId xmlns:a16="http://schemas.microsoft.com/office/drawing/2014/main" id="{75768E00-3DD0-47C4-9347-594EFA2F52D0}"/>
+              </a:ext>
+            </a:extLst>
+          </p:cNvPr>
+          <p:cNvSpPr>
+            <a:spLocks xmlns:a="http://schemas.openxmlformats.org/drawingml/2006/main" noGrp="1"/>
+          </p:cNvSpPr>
+          <p:nvPr/>
+        </p:nvSpPr>
+        <p:spPr>
+          <a:xfrm xmlns:a="http://schemas.openxmlformats.org/drawingml/2006/main">
+            <a:off x="781050" y="4371975"/>
+            <a:ext cx="85725" cy="85725"/>
+          </a:xfrm>
+          <a:prstGeom xmlns:a="http://schemas.openxmlformats.org/drawingml/2006/main" prst="ellipse">
+            <a:avLst/>
+          </a:prstGeom>
+          <a:solidFill xmlns:a="http://schemas.openxmlformats.org/drawingml/2006/main">
+            <a:srgbClr val="0D7377"/>
+          </a:solidFill>
+          <a:ln xmlns:a="http://schemas.openxmlformats.org/drawingml/2006/main" w="0">
+            <a:solidFill>
+              <a:srgbClr val="0D7377"/>
+            </a:solidFill>
+            <a:prstDash val="solid"/>
+          </a:ln>
+        </p:spPr>
+      </p:sp>
+      <p:sp>
+        <p:nvSpPr>
+          <p:cNvPr id="20" name="">
+            <a:extLst xmlns:a="http://schemas.openxmlformats.org/drawingml/2006/main">
+              <a:ext uri="{FF2B5EF4-FFF2-40B4-BE49-F238E27FC236}">
+                <a16:creationId xmlns:a16="http://schemas.microsoft.com/office/drawing/2014/main" id="{3FD8FC02-FDF3-4592-8560-6D4B3B7CE3FA}"/>
+              </a:ext>
+            </a:extLst>
+          </p:cNvPr>
+          <p:cNvSpPr>
+            <a:spLocks xmlns:a="http://schemas.openxmlformats.org/drawingml/2006/main" noGrp="1"/>
+          </p:cNvSpPr>
+          <p:nvPr/>
+        </p:nvSpPr>
+        <p:spPr>
+          <a:xfrm xmlns:a="http://schemas.openxmlformats.org/drawingml/2006/main">
+            <a:off x="952500" y="4295775"/>
+            <a:ext cx="9829800" cy="438150"/>
+          </a:xfrm>
+          <a:prstGeom xmlns:a="http://schemas.openxmlformats.org/drawingml/2006/main" prst="rect">
+            <a:avLst/>
+          </a:prstGeom>
+          <a:noFill xmlns:a="http://schemas.openxmlformats.org/drawingml/2006/main"/>
+          <a:ln xmlns:a="http://schemas.openxmlformats.org/drawingml/2006/main" w="0">
+            <a:noFill/>
+            <a:prstDash val="solid"/>
+          </a:ln>
+        </p:spPr>
+        <p:txBody>
+          <a:bodyPr xmlns:a="http://schemas.openxmlformats.org/drawingml/2006/main"/>
+          <a:lstStyle xmlns:a="http://schemas.openxmlformats.org/drawingml/2006/main"/>
+          <a:p xmlns:a="http://schemas.openxmlformats.org/drawingml/2006/main">
+            <a:pPr algn="l">
+              <a:defRPr sz="1275" b="0">
+                <a:solidFill>
+                  <a:srgbClr val="17202A"/>
+                </a:solidFill>
+                <a:latin typeface="Aptos"/>
+                <a:ea typeface="Aptos"/>
+                <a:cs typeface="Aptos"/>
+              </a:defRPr>
+            </a:pPr>
+            <a:r>
+              <a:rPr sz="1275" b="0">
+                <a:solidFill>
+                  <a:srgbClr val="17202A"/>
+                </a:solidFill>
+                <a:latin typeface="Aptos"/>
+                <a:ea typeface="Aptos"/>
+                <a:cs typeface="Aptos"/>
+              </a:rPr>
+              <a:t>Firebase Crashlytics: no cost; FCM/Firebase pricing page for Google Cloud-backed billing context.</a:t>
+            </a:r>
+          </a:p>
+        </p:txBody>
+      </p:sp>
+      <p:sp>
+        <p:nvSpPr>
+          <p:cNvPr id="21" name="bullet-dot">
+            <a:extLst xmlns:a="http://schemas.openxmlformats.org/drawingml/2006/main">
+              <a:ext uri="{FF2B5EF4-FFF2-40B4-BE49-F238E27FC236}">
+                <a16:creationId xmlns:a16="http://schemas.microsoft.com/office/drawing/2014/main" id="{87E44E99-0982-44AE-9B2D-F7EE5B600834}"/>
+              </a:ext>
+            </a:extLst>
+          </p:cNvPr>
+          <p:cNvSpPr>
+            <a:spLocks xmlns:a="http://schemas.openxmlformats.org/drawingml/2006/main" noGrp="1"/>
+          </p:cNvSpPr>
+          <p:nvPr/>
+        </p:nvSpPr>
+        <p:spPr>
+          <a:xfrm xmlns:a="http://schemas.openxmlformats.org/drawingml/2006/main">
+            <a:off x="781050" y="4781550"/>
+            <a:ext cx="85725" cy="85725"/>
+          </a:xfrm>
+          <a:prstGeom xmlns:a="http://schemas.openxmlformats.org/drawingml/2006/main" prst="ellipse">
+            <a:avLst/>
+          </a:prstGeom>
+          <a:solidFill xmlns:a="http://schemas.openxmlformats.org/drawingml/2006/main">
+            <a:srgbClr val="0D7377"/>
+          </a:solidFill>
+          <a:ln xmlns:a="http://schemas.openxmlformats.org/drawingml/2006/main" w="0">
+            <a:solidFill>
+              <a:srgbClr val="0D7377"/>
+            </a:solidFill>
+            <a:prstDash val="solid"/>
+          </a:ln>
+        </p:spPr>
+      </p:sp>
+      <p:sp>
+        <p:nvSpPr>
+          <p:cNvPr id="22" name="">
+            <a:extLst xmlns:a="http://schemas.openxmlformats.org/drawingml/2006/main">
+              <a:ext uri="{FF2B5EF4-FFF2-40B4-BE49-F238E27FC236}">
+                <a16:creationId xmlns:a16="http://schemas.microsoft.com/office/drawing/2014/main" id="{85083791-14ED-4D10-BB8B-7CB279991788}"/>
+              </a:ext>
+            </a:extLst>
+          </p:cNvPr>
+          <p:cNvSpPr>
+            <a:spLocks xmlns:a="http://schemas.openxmlformats.org/drawingml/2006/main" noGrp="1"/>
+          </p:cNvSpPr>
+          <p:nvPr/>
+        </p:nvSpPr>
+        <p:spPr>
+          <a:xfrm xmlns:a="http://schemas.openxmlformats.org/drawingml/2006/main">
+            <a:off x="952500" y="4705350"/>
+            <a:ext cx="9829800" cy="438150"/>
+          </a:xfrm>
+          <a:prstGeom xmlns:a="http://schemas.openxmlformats.org/drawingml/2006/main" prst="rect">
+            <a:avLst/>
+          </a:prstGeom>
+          <a:noFill xmlns:a="http://schemas.openxmlformats.org/drawingml/2006/main"/>
+          <a:ln xmlns:a="http://schemas.openxmlformats.org/drawingml/2006/main" w="0">
+            <a:noFill/>
+            <a:prstDash val="solid"/>
+          </a:ln>
+        </p:spPr>
+        <p:txBody>
+          <a:bodyPr xmlns:a="http://schemas.openxmlformats.org/drawingml/2006/main"/>
+          <a:lstStyle xmlns:a="http://schemas.openxmlformats.org/drawingml/2006/main"/>
+          <a:p xmlns:a="http://schemas.openxmlformats.org/drawingml/2006/main">
+            <a:pPr algn="l">
+              <a:defRPr sz="1275" b="0">
+                <a:solidFill>
+                  <a:srgbClr val="17202A"/>
+                </a:solidFill>
+                <a:latin typeface="Aptos"/>
+                <a:ea typeface="Aptos"/>
+                <a:cs typeface="Aptos"/>
+              </a:defRPr>
+            </a:pPr>
+            <a:r>
+              <a:rPr sz="1275" b="0">
+                <a:solidFill>
+                  <a:srgbClr val="17202A"/>
+                </a:solidFill>
+                <a:latin typeface="Aptos"/>
+                <a:ea typeface="Aptos"/>
+                <a:cs typeface="Aptos"/>
+              </a:rPr>
+              <a:t>exchangerate.host pricing: free 100 requests/mo; paid tiers from 10k requests/mo.</a:t>
+            </a:r>
+          </a:p>
+        </p:txBody>
+      </p:sp>
+      <p:sp>
+        <p:nvSpPr>
+          <p:cNvPr id="23" name="">
+            <a:extLst xmlns:a="http://schemas.openxmlformats.org/drawingml/2006/main">
+              <a:ext uri="{FF2B5EF4-FFF2-40B4-BE49-F238E27FC236}">
+                <a16:creationId xmlns:a16="http://schemas.microsoft.com/office/drawing/2014/main" id="{3A4FA8EA-0B9F-475A-BE79-3EA87E57E0C5}"/>
+              </a:ext>
+            </a:extLst>
+          </p:cNvPr>
+          <p:cNvSpPr>
+            <a:spLocks xmlns:a="http://schemas.openxmlformats.org/drawingml/2006/main" noGrp="1"/>
+          </p:cNvSpPr>
+          <p:nvPr/>
+        </p:nvSpPr>
+        <p:spPr>
+          <a:xfrm xmlns:a="http://schemas.openxmlformats.org/drawingml/2006/main">
+            <a:off x="800100" y="5829300"/>
+            <a:ext cx="9715500" cy="476250"/>
+          </a:xfrm>
+          <a:prstGeom xmlns:a="http://schemas.openxmlformats.org/drawingml/2006/main" prst="rect">
+            <a:avLst/>
+          </a:prstGeom>
+          <a:noFill xmlns:a="http://schemas.openxmlformats.org/drawingml/2006/main"/>
+          <a:ln xmlns:a="http://schemas.openxmlformats.org/drawingml/2006/main" w="0">
+            <a:noFill/>
+            <a:prstDash val="solid"/>
+          </a:ln>
+        </p:spPr>
+        <p:txBody>
+          <a:bodyPr xmlns:a="http://schemas.openxmlformats.org/drawingml/2006/main"/>
+          <a:lstStyle xmlns:a="http://schemas.openxmlformats.org/drawingml/2006/main"/>
+          <a:p xmlns:a="http://schemas.openxmlformats.org/drawingml/2006/main">
+            <a:pPr algn="l">
               <a:defRPr sz="1275" b="1">
                 <a:solidFill>
                   <a:srgbClr val="FF5B4D"/>
@@ -5581,7 +10953,7 @@
     </p:spTree>
     <p:extLst>
       <p:ext uri="{BB962C8B-B14F-4D97-AF65-F5344CB8AC3E}">
-        <p14:creationId xmlns:p14="http://schemas.microsoft.com/office/powerpoint/2010/main" val="1560427686"/>
+        <p14:creationId xmlns:p14="http://schemas.microsoft.com/office/powerpoint/2010/main" val="1158652351"/>
       </p:ext>
     </p:extLst>
   </p:cSld>
@@ -5612,7 +10984,7 @@
           <p:cNvPr id="1" name="brand-rail">
             <a:extLst xmlns:a="http://schemas.openxmlformats.org/drawingml/2006/main">
               <a:ext uri="{FF2B5EF4-FFF2-40B4-BE49-F238E27FC236}">
-                <a16:creationId xmlns:a16="http://schemas.microsoft.com/office/drawing/2014/main" id="{712C45FA-0962-4C93-8B26-A5A75A3E060B}"/>
+                <a16:creationId xmlns:a16="http://schemas.microsoft.com/office/drawing/2014/main" id="{449ED627-6691-407F-84E1-C70FA13658DF}"/>
               </a:ext>
             </a:extLst>
           </p:cNvPr>
@@ -5645,7 +11017,7 @@
           <p:cNvPr id="2" name="">
             <a:extLst xmlns:a="http://schemas.openxmlformats.org/drawingml/2006/main">
               <a:ext uri="{FF2B5EF4-FFF2-40B4-BE49-F238E27FC236}">
-                <a16:creationId xmlns:a16="http://schemas.microsoft.com/office/drawing/2014/main" id="{437541F7-7243-4DB3-9010-AADDBFCCAD1D}"/>
+                <a16:creationId xmlns:a16="http://schemas.microsoft.com/office/drawing/2014/main" id="{E1B2A26F-9B1D-4691-B34D-528E0C8A2DD2}"/>
               </a:ext>
             </a:extLst>
           </p:cNvPr>
@@ -5701,7 +11073,7 @@
           <p:cNvPr id="3" name="">
             <a:extLst xmlns:a="http://schemas.openxmlformats.org/drawingml/2006/main">
               <a:ext uri="{FF2B5EF4-FFF2-40B4-BE49-F238E27FC236}">
-                <a16:creationId xmlns:a16="http://schemas.microsoft.com/office/drawing/2014/main" id="{96305518-059A-49C7-9690-14EF25FEC478}"/>
+                <a16:creationId xmlns:a16="http://schemas.microsoft.com/office/drawing/2014/main" id="{6EA00625-BB51-429F-A6E8-E75FBDE5BF2C}"/>
               </a:ext>
             </a:extLst>
           </p:cNvPr>
@@ -5757,7 +11129,7 @@
           <p:cNvPr id="4" name="">
             <a:extLst xmlns:a="http://schemas.openxmlformats.org/drawingml/2006/main">
               <a:ext uri="{FF2B5EF4-FFF2-40B4-BE49-F238E27FC236}">
-                <a16:creationId xmlns:a16="http://schemas.microsoft.com/office/drawing/2014/main" id="{1413BA37-5372-4408-A961-890A959B0533}"/>
+                <a16:creationId xmlns:a16="http://schemas.microsoft.com/office/drawing/2014/main" id="{153BD588-544C-4BD5-9BE1-4E571CB79CC5}"/>
               </a:ext>
             </a:extLst>
           </p:cNvPr>
@@ -5813,7 +11185,7 @@
           <p:cNvPr id="5" name="10k-100k-mau-comfort-zone-with-current-architecture-plus-pro-basics">
             <a:extLst xmlns:a="http://schemas.openxmlformats.org/drawingml/2006/main">
               <a:ext uri="{FF2B5EF4-FFF2-40B4-BE49-F238E27FC236}">
-                <a16:creationId xmlns:a16="http://schemas.microsoft.com/office/drawing/2014/main" id="{969954B8-CDA7-406F-A5A9-CE28D7A5D352}"/>
+                <a16:creationId xmlns:a16="http://schemas.microsoft.com/office/drawing/2014/main" id="{96A1964F-19FC-4A8B-BEC6-76CDE65E9D32}"/>
               </a:ext>
             </a:extLst>
           </p:cNvPr>
@@ -5904,7 +11276,7 @@
           <p:cNvPr id="6" name="100k-1m-mau-needs-compute-storage-email-analytics-read-scaling">
             <a:extLst xmlns:a="http://schemas.openxmlformats.org/drawingml/2006/main">
               <a:ext uri="{FF2B5EF4-FFF2-40B4-BE49-F238E27FC236}">
-                <a16:creationId xmlns:a16="http://schemas.microsoft.com/office/drawing/2014/main" id="{55881654-8538-4085-AAB0-15D1D470647A}"/>
+                <a16:creationId xmlns:a16="http://schemas.microsoft.com/office/drawing/2014/main" id="{4A3F9509-460B-43AE-AA89-71537F516E93}"/>
               </a:ext>
             </a:extLst>
           </p:cNvPr>
@@ -5995,7 +11367,7 @@
           <p:cNvPr id="7" name="1m-mau-enterprise-plan-replicas-media-pipeline-dr-support-spend-ops">
             <a:extLst xmlns:a="http://schemas.openxmlformats.org/drawingml/2006/main">
               <a:ext uri="{FF2B5EF4-FFF2-40B4-BE49-F238E27FC236}">
-                <a16:creationId xmlns:a16="http://schemas.microsoft.com/office/drawing/2014/main" id="{76C81197-493A-4FA8-BAD8-DCBD6C4798FC}"/>
+                <a16:creationId xmlns:a16="http://schemas.microsoft.com/office/drawing/2014/main" id="{C2FE2E2E-20E4-47A7-ABD2-D3908CEC544B}"/>
               </a:ext>
             </a:extLst>
           </p:cNvPr>
@@ -6086,7 +11458,7 @@
           <p:cNvPr id="8" name="bullet-dot">
             <a:extLst xmlns:a="http://schemas.openxmlformats.org/drawingml/2006/main">
               <a:ext uri="{FF2B5EF4-FFF2-40B4-BE49-F238E27FC236}">
-                <a16:creationId xmlns:a16="http://schemas.microsoft.com/office/drawing/2014/main" id="{91EFEF5D-19F5-4C6A-936A-8623D99F1A4A}"/>
+                <a16:creationId xmlns:a16="http://schemas.microsoft.com/office/drawing/2014/main" id="{2720F5D0-C3F8-4B0E-8EE0-E2577404AA91}"/>
               </a:ext>
             </a:extLst>
           </p:cNvPr>
@@ -6119,7 +11491,7 @@
           <p:cNvPr id="9" name="">
             <a:extLst xmlns:a="http://schemas.openxmlformats.org/drawingml/2006/main">
               <a:ext uri="{FF2B5EF4-FFF2-40B4-BE49-F238E27FC236}">
-                <a16:creationId xmlns:a16="http://schemas.microsoft.com/office/drawing/2014/main" id="{F48162A6-EC85-43F4-B261-64A941A05B12}"/>
+                <a16:creationId xmlns:a16="http://schemas.microsoft.com/office/drawing/2014/main" id="{CA5EAE80-4140-4F87-9E58-FC4D7B8DFFFE}"/>
               </a:ext>
             </a:extLst>
           </p:cNvPr>
@@ -6175,7 +11547,7 @@
           <p:cNvPr id="10" name="bullet-dot">
             <a:extLst xmlns:a="http://schemas.openxmlformats.org/drawingml/2006/main">
               <a:ext uri="{FF2B5EF4-FFF2-40B4-BE49-F238E27FC236}">
-                <a16:creationId xmlns:a16="http://schemas.microsoft.com/office/drawing/2014/main" id="{03525BC5-7B5C-482D-9A7B-083769E70A46}"/>
+                <a16:creationId xmlns:a16="http://schemas.microsoft.com/office/drawing/2014/main" id="{E3133196-2333-4268-B4E1-290990D24D14}"/>
               </a:ext>
             </a:extLst>
           </p:cNvPr>
@@ -6208,7 +11580,7 @@
           <p:cNvPr id="11" name="">
             <a:extLst xmlns:a="http://schemas.openxmlformats.org/drawingml/2006/main">
               <a:ext uri="{FF2B5EF4-FFF2-40B4-BE49-F238E27FC236}">
-                <a16:creationId xmlns:a16="http://schemas.microsoft.com/office/drawing/2014/main" id="{9D718A83-7F2C-4F71-8B93-8D65510C3A8F}"/>
+                <a16:creationId xmlns:a16="http://schemas.microsoft.com/office/drawing/2014/main" id="{9407D2AE-26E7-4468-958D-01940D086F45}"/>
               </a:ext>
             </a:extLst>
           </p:cNvPr>
@@ -6264,7 +11636,7 @@
           <p:cNvPr id="12" name="bullet-dot">
             <a:extLst xmlns:a="http://schemas.openxmlformats.org/drawingml/2006/main">
               <a:ext uri="{FF2B5EF4-FFF2-40B4-BE49-F238E27FC236}">
-                <a16:creationId xmlns:a16="http://schemas.microsoft.com/office/drawing/2014/main" id="{63890889-148B-4AC0-83E3-AAD70A5A5006}"/>
+                <a16:creationId xmlns:a16="http://schemas.microsoft.com/office/drawing/2014/main" id="{FCBF1087-338C-408D-A28C-8014523961C9}"/>
               </a:ext>
             </a:extLst>
           </p:cNvPr>
@@ -6297,7 +11669,7 @@
           <p:cNvPr id="13" name="">
             <a:extLst xmlns:a="http://schemas.openxmlformats.org/drawingml/2006/main">
               <a:ext uri="{FF2B5EF4-FFF2-40B4-BE49-F238E27FC236}">
-                <a16:creationId xmlns:a16="http://schemas.microsoft.com/office/drawing/2014/main" id="{B56E6BCE-0A17-425D-AECA-913B5A5B3BFC}"/>
+                <a16:creationId xmlns:a16="http://schemas.microsoft.com/office/drawing/2014/main" id="{58B6881C-A055-4D7F-BFA2-988B5536F341}"/>
               </a:ext>
             </a:extLst>
           </p:cNvPr>
@@ -6353,7 +11725,7 @@
           <p:cNvPr id="14" name="bullet-dot">
             <a:extLst xmlns:a="http://schemas.openxmlformats.org/drawingml/2006/main">
               <a:ext uri="{FF2B5EF4-FFF2-40B4-BE49-F238E27FC236}">
-                <a16:creationId xmlns:a16="http://schemas.microsoft.com/office/drawing/2014/main" id="{A11496EF-61BF-41B1-9D58-341B90DCDA65}"/>
+                <a16:creationId xmlns:a16="http://schemas.microsoft.com/office/drawing/2014/main" id="{1732A98B-5733-4F66-81C5-D8E18BECE67C}"/>
               </a:ext>
             </a:extLst>
           </p:cNvPr>
@@ -6386,7 +11758,7 @@
           <p:cNvPr id="15" name="">
             <a:extLst xmlns:a="http://schemas.openxmlformats.org/drawingml/2006/main">
               <a:ext uri="{FF2B5EF4-FFF2-40B4-BE49-F238E27FC236}">
-                <a16:creationId xmlns:a16="http://schemas.microsoft.com/office/drawing/2014/main" id="{C464BCFD-4F0D-4F2C-B261-E4987C7455A6}"/>
+                <a16:creationId xmlns:a16="http://schemas.microsoft.com/office/drawing/2014/main" id="{8D3148D3-F0FF-4B99-A9EF-18140FA916E4}"/>
               </a:ext>
             </a:extLst>
           </p:cNvPr>
@@ -6442,7 +11814,7 @@
           <p:cNvPr id="16" name="bullet-dot">
             <a:extLst xmlns:a="http://schemas.openxmlformats.org/drawingml/2006/main">
               <a:ext uri="{FF2B5EF4-FFF2-40B4-BE49-F238E27FC236}">
-                <a16:creationId xmlns:a16="http://schemas.microsoft.com/office/drawing/2014/main" id="{8FEAF99A-E0D3-4E5E-A8AF-576F7FCF05E0}"/>
+                <a16:creationId xmlns:a16="http://schemas.microsoft.com/office/drawing/2014/main" id="{F7530993-487C-43FE-8609-1188E2C40DF0}"/>
               </a:ext>
             </a:extLst>
           </p:cNvPr>
@@ -6475,7 +11847,7 @@
           <p:cNvPr id="17" name="">
             <a:extLst xmlns:a="http://schemas.openxmlformats.org/drawingml/2006/main">
               <a:ext uri="{FF2B5EF4-FFF2-40B4-BE49-F238E27FC236}">
-                <a16:creationId xmlns:a16="http://schemas.microsoft.com/office/drawing/2014/main" id="{1F7A4151-5A69-4709-B37A-51AB2A7B4626}"/>
+                <a16:creationId xmlns:a16="http://schemas.microsoft.com/office/drawing/2014/main" id="{1DBC1BDE-74D7-40B7-8DF7-2D171B42DC81}"/>
               </a:ext>
             </a:extLst>
           </p:cNvPr>
@@ -6529,7 +11901,7 @@
     </p:spTree>
     <p:extLst>
       <p:ext uri="{BB962C8B-B14F-4D97-AF65-F5344CB8AC3E}">
-        <p14:creationId xmlns:p14="http://schemas.microsoft.com/office/powerpoint/2010/main" val="2000161266"/>
+        <p14:creationId xmlns:p14="http://schemas.microsoft.com/office/powerpoint/2010/main" val="31778260"/>
       </p:ext>
     </p:extLst>
   </p:cSld>
@@ -6560,7 +11932,7 @@
           <p:cNvPr id="1" name="brand-rail">
             <a:extLst xmlns:a="http://schemas.openxmlformats.org/drawingml/2006/main">
               <a:ext uri="{FF2B5EF4-FFF2-40B4-BE49-F238E27FC236}">
-                <a16:creationId xmlns:a16="http://schemas.microsoft.com/office/drawing/2014/main" id="{6F0962D2-1812-479A-9E69-E3676DBDAE75}"/>
+                <a16:creationId xmlns:a16="http://schemas.microsoft.com/office/drawing/2014/main" id="{4B9BCE66-AE9D-4B57-96EC-BA1BF1E49659}"/>
               </a:ext>
             </a:extLst>
           </p:cNvPr>
@@ -6593,7 +11965,7 @@
           <p:cNvPr id="2" name="">
             <a:extLst xmlns:a="http://schemas.openxmlformats.org/drawingml/2006/main">
               <a:ext uri="{FF2B5EF4-FFF2-40B4-BE49-F238E27FC236}">
-                <a16:creationId xmlns:a16="http://schemas.microsoft.com/office/drawing/2014/main" id="{D6652310-98FE-45F0-AE62-D7DD7CA65FCB}"/>
+                <a16:creationId xmlns:a16="http://schemas.microsoft.com/office/drawing/2014/main" id="{25BF8A32-FFAC-4155-8F5D-0E1CAB450713}"/>
               </a:ext>
             </a:extLst>
           </p:cNvPr>
@@ -6649,7 +12021,7 @@
           <p:cNvPr id="3" name="">
             <a:extLst xmlns:a="http://schemas.openxmlformats.org/drawingml/2006/main">
               <a:ext uri="{FF2B5EF4-FFF2-40B4-BE49-F238E27FC236}">
-                <a16:creationId xmlns:a16="http://schemas.microsoft.com/office/drawing/2014/main" id="{10DCAE56-89FF-422B-B5AE-EF8799925B30}"/>
+                <a16:creationId xmlns:a16="http://schemas.microsoft.com/office/drawing/2014/main" id="{C48255A9-CBA5-4E89-8432-C86D761814E8}"/>
               </a:ext>
             </a:extLst>
           </p:cNvPr>
@@ -6705,7 +12077,7 @@
           <p:cNvPr id="4" name="">
             <a:extLst xmlns:a="http://schemas.openxmlformats.org/drawingml/2006/main">
               <a:ext uri="{FF2B5EF4-FFF2-40B4-BE49-F238E27FC236}">
-                <a16:creationId xmlns:a16="http://schemas.microsoft.com/office/drawing/2014/main" id="{D1684758-97C0-4599-BB7F-E68FF1A678A3}"/>
+                <a16:creationId xmlns:a16="http://schemas.microsoft.com/office/drawing/2014/main" id="{3A383BF2-EC4D-4F1D-A9F5-B07F9BFC0F83}"/>
               </a:ext>
             </a:extLst>
           </p:cNvPr>
@@ -6761,7 +12133,7 @@
           <p:cNvPr id="5" name="users-android-testers">
             <a:extLst xmlns:a="http://schemas.openxmlformats.org/drawingml/2006/main">
               <a:ext uri="{FF2B5EF4-FFF2-40B4-BE49-F238E27FC236}">
-                <a16:creationId xmlns:a16="http://schemas.microsoft.com/office/drawing/2014/main" id="{ECFC71B5-C823-44CF-8E0A-7DAEF67DBD10}"/>
+                <a16:creationId xmlns:a16="http://schemas.microsoft.com/office/drawing/2014/main" id="{2C147CDF-7BDE-4FD1-8E24-641254E33A6E}"/>
               </a:ext>
             </a:extLst>
           </p:cNvPr>
@@ -6852,7 +12224,7 @@
           <p:cNvPr id="6" name="flutter-app-vamo-android">
             <a:extLst xmlns:a="http://schemas.openxmlformats.org/drawingml/2006/main">
               <a:ext uri="{FF2B5EF4-FFF2-40B4-BE49-F238E27FC236}">
-                <a16:creationId xmlns:a16="http://schemas.microsoft.com/office/drawing/2014/main" id="{D6D0FF68-4649-401E-A7CE-6907E41017D7}"/>
+                <a16:creationId xmlns:a16="http://schemas.microsoft.com/office/drawing/2014/main" id="{42ACF1BA-F6A8-4746-9510-C432DA1EE9A0}"/>
               </a:ext>
             </a:extLst>
           </p:cNvPr>
@@ -6943,7 +12315,7 @@
           <p:cNvPr id="7" name="local-drift-db-offline-cache-outbox">
             <a:extLst xmlns:a="http://schemas.openxmlformats.org/drawingml/2006/main">
               <a:ext uri="{FF2B5EF4-FFF2-40B4-BE49-F238E27FC236}">
-                <a16:creationId xmlns:a16="http://schemas.microsoft.com/office/drawing/2014/main" id="{BEB9C522-8DFF-48EC-9B89-ADE8D2E35E50}"/>
+                <a16:creationId xmlns:a16="http://schemas.microsoft.com/office/drawing/2014/main" id="{B59E518D-AB15-4450-8730-6B0088711520}"/>
               </a:ext>
             </a:extLst>
           </p:cNvPr>
@@ -7034,7 +12406,7 @@
           <p:cNvPr id="8" name="supabase-auth-postgres-rls-storage-realtime-edge-functions">
             <a:extLst xmlns:a="http://schemas.openxmlformats.org/drawingml/2006/main">
               <a:ext uri="{FF2B5EF4-FFF2-40B4-BE49-F238E27FC236}">
-                <a16:creationId xmlns:a16="http://schemas.microsoft.com/office/drawing/2014/main" id="{8B080F82-97FC-4516-BF08-CDDAD92F4E38}"/>
+                <a16:creationId xmlns:a16="http://schemas.microsoft.com/office/drawing/2014/main" id="{3A6C15A0-2CBF-4D9D-B70A-64116B7E27C0}"/>
               </a:ext>
             </a:extLst>
           </p:cNvPr>
@@ -7125,7 +12497,7 @@
           <p:cNvPr id="9" name="vercel-vamo-world-j-preview-assetlinks-dns">
             <a:extLst xmlns:a="http://schemas.openxmlformats.org/drawingml/2006/main">
               <a:ext uri="{FF2B5EF4-FFF2-40B4-BE49-F238E27FC236}">
-                <a16:creationId xmlns:a16="http://schemas.microsoft.com/office/drawing/2014/main" id="{F0C34455-37C8-42A8-98B2-1157D396D510}"/>
+                <a16:creationId xmlns:a16="http://schemas.microsoft.com/office/drawing/2014/main" id="{4D9C14DD-B44C-4ADA-9718-EFF3D99A7698}"/>
               </a:ext>
             </a:extLst>
           </p:cNvPr>
@@ -7216,7 +12588,7 @@
           <p:cNvPr id="10" name="firebase-fcm-push-crashlytics">
             <a:extLst xmlns:a="http://schemas.openxmlformats.org/drawingml/2006/main">
               <a:ext uri="{FF2B5EF4-FFF2-40B4-BE49-F238E27FC236}">
-                <a16:creationId xmlns:a16="http://schemas.microsoft.com/office/drawing/2014/main" id="{A0F179CF-11F7-4F7A-BC07-7A3E8DDAED13}"/>
+                <a16:creationId xmlns:a16="http://schemas.microsoft.com/office/drawing/2014/main" id="{6ECE4ED1-7DAB-448C-968E-DC807270EAFE}"/>
               </a:ext>
             </a:extLst>
           </p:cNvPr>
@@ -7307,7 +12679,7 @@
           <p:cNvPr id="11" name="brevo-resend-otp-email-primary-fallback">
             <a:extLst xmlns:a="http://schemas.openxmlformats.org/drawingml/2006/main">
               <a:ext uri="{FF2B5EF4-FFF2-40B4-BE49-F238E27FC236}">
-                <a16:creationId xmlns:a16="http://schemas.microsoft.com/office/drawing/2014/main" id="{7B8E61EB-B977-478C-870F-4A67D8AC9940}"/>
+                <a16:creationId xmlns:a16="http://schemas.microsoft.com/office/drawing/2014/main" id="{E57CC27E-09FE-4270-8F69-5BCD1D85D0B7}"/>
               </a:ext>
             </a:extLst>
           </p:cNvPr>
@@ -7398,7 +12770,7 @@
           <p:cNvPr id="12" name="exchangerate-host-market-fx-rates">
             <a:extLst xmlns:a="http://schemas.openxmlformats.org/drawingml/2006/main">
               <a:ext uri="{FF2B5EF4-FFF2-40B4-BE49-F238E27FC236}">
-                <a16:creationId xmlns:a16="http://schemas.microsoft.com/office/drawing/2014/main" id="{53C15FB5-0747-4286-AD62-895A5D7FCE90}"/>
+                <a16:creationId xmlns:a16="http://schemas.microsoft.com/office/drawing/2014/main" id="{247DDA8F-B04A-46E2-96FA-5A603B5ED40B}"/>
               </a:ext>
             </a:extLst>
           </p:cNvPr>
@@ -7489,7 +12861,7 @@
           <p:cNvPr id="13" name="posthog-eu-product-analytics">
             <a:extLst xmlns:a="http://schemas.openxmlformats.org/drawingml/2006/main">
               <a:ext uri="{FF2B5EF4-FFF2-40B4-BE49-F238E27FC236}">
-                <a16:creationId xmlns:a16="http://schemas.microsoft.com/office/drawing/2014/main" id="{6FDAA653-B670-4207-AE5F-752776AE200D}"/>
+                <a16:creationId xmlns:a16="http://schemas.microsoft.com/office/drawing/2014/main" id="{C5B2D2B1-5D05-4273-AA08-B457662317D2}"/>
               </a:ext>
             </a:extLst>
           </p:cNvPr>
@@ -7796,7 +13168,7 @@
           <p:cNvPr id="22" name="">
             <a:extLst xmlns:a="http://schemas.openxmlformats.org/drawingml/2006/main">
               <a:ext uri="{FF2B5EF4-FFF2-40B4-BE49-F238E27FC236}">
-                <a16:creationId xmlns:a16="http://schemas.microsoft.com/office/drawing/2014/main" id="{BC7E6FE6-9ABA-4347-B720-4CE1775E9FA7}"/>
+                <a16:creationId xmlns:a16="http://schemas.microsoft.com/office/drawing/2014/main" id="{0D45A27E-6104-40C3-A39E-62E312261443}"/>
               </a:ext>
             </a:extLst>
           </p:cNvPr>
@@ -7850,7 +13222,7 @@
     </p:spTree>
     <p:extLst>
       <p:ext uri="{BB962C8B-B14F-4D97-AF65-F5344CB8AC3E}">
-        <p14:creationId xmlns:p14="http://schemas.microsoft.com/office/powerpoint/2010/main" val="651492144"/>
+        <p14:creationId xmlns:p14="http://schemas.microsoft.com/office/powerpoint/2010/main" val="1663580363"/>
       </p:ext>
     </p:extLst>
   </p:cSld>
@@ -7881,7 +13253,7 @@
           <p:cNvPr id="1" name="brand-rail">
             <a:extLst xmlns:a="http://schemas.openxmlformats.org/drawingml/2006/main">
               <a:ext uri="{FF2B5EF4-FFF2-40B4-BE49-F238E27FC236}">
-                <a16:creationId xmlns:a16="http://schemas.microsoft.com/office/drawing/2014/main" id="{E4927FDA-DCCE-4C1F-9174-E209C6838DCD}"/>
+                <a16:creationId xmlns:a16="http://schemas.microsoft.com/office/drawing/2014/main" id="{B450FED1-75BD-4A41-AC2B-910BB4FC666A}"/>
               </a:ext>
             </a:extLst>
           </p:cNvPr>
@@ -7914,7 +13286,7 @@
           <p:cNvPr id="2" name="">
             <a:extLst xmlns:a="http://schemas.openxmlformats.org/drawingml/2006/main">
               <a:ext uri="{FF2B5EF4-FFF2-40B4-BE49-F238E27FC236}">
-                <a16:creationId xmlns:a16="http://schemas.microsoft.com/office/drawing/2014/main" id="{0B662F92-AAFD-4A5C-88F5-AD84D1EF2B07}"/>
+                <a16:creationId xmlns:a16="http://schemas.microsoft.com/office/drawing/2014/main" id="{D97AC4B1-1252-4573-89DD-45045469482F}"/>
               </a:ext>
             </a:extLst>
           </p:cNvPr>
@@ -7970,7 +13342,7 @@
           <p:cNvPr id="3" name="">
             <a:extLst xmlns:a="http://schemas.openxmlformats.org/drawingml/2006/main">
               <a:ext uri="{FF2B5EF4-FFF2-40B4-BE49-F238E27FC236}">
-                <a16:creationId xmlns:a16="http://schemas.microsoft.com/office/drawing/2014/main" id="{9D702AD2-44E2-436D-B7DD-0954A484456A}"/>
+                <a16:creationId xmlns:a16="http://schemas.microsoft.com/office/drawing/2014/main" id="{40F55490-2669-495F-B3E4-E7359985A963}"/>
               </a:ext>
             </a:extLst>
           </p:cNvPr>
@@ -8026,7 +13398,7 @@
           <p:cNvPr id="4" name="">
             <a:extLst xmlns:a="http://schemas.openxmlformats.org/drawingml/2006/main">
               <a:ext uri="{FF2B5EF4-FFF2-40B4-BE49-F238E27FC236}">
-                <a16:creationId xmlns:a16="http://schemas.microsoft.com/office/drawing/2014/main" id="{DD3F7FDE-1C16-40F5-B3B4-ED917EF6C07D}"/>
+                <a16:creationId xmlns:a16="http://schemas.microsoft.com/office/drawing/2014/main" id="{0C2D2A13-27D5-4E1B-B09F-61CBF0FA0A3F}"/>
               </a:ext>
             </a:extLst>
           </p:cNvPr>
@@ -8082,7 +13454,7 @@
           <p:cNvPr id="5" name="provider">
             <a:extLst xmlns:a="http://schemas.openxmlformats.org/drawingml/2006/main">
               <a:ext uri="{FF2B5EF4-FFF2-40B4-BE49-F238E27FC236}">
-                <a16:creationId xmlns:a16="http://schemas.microsoft.com/office/drawing/2014/main" id="{F24525D5-A7F9-460F-BE1A-DBE487890B61}"/>
+                <a16:creationId xmlns:a16="http://schemas.microsoft.com/office/drawing/2014/main" id="{F5FD8C69-9B2F-4E95-BFA0-48079CCEB675}"/>
               </a:ext>
             </a:extLst>
           </p:cNvPr>
@@ -8144,7 +13516,7 @@
           <p:cNvPr id="6" name="tier">
             <a:extLst xmlns:a="http://schemas.openxmlformats.org/drawingml/2006/main">
               <a:ext uri="{FF2B5EF4-FFF2-40B4-BE49-F238E27FC236}">
-                <a16:creationId xmlns:a16="http://schemas.microsoft.com/office/drawing/2014/main" id="{8E6CD64E-909A-4C54-B39D-104194013A9C}"/>
+                <a16:creationId xmlns:a16="http://schemas.microsoft.com/office/drawing/2014/main" id="{335DCCE1-A9D9-4E51-AB53-667A6791AEBE}"/>
               </a:ext>
             </a:extLst>
           </p:cNvPr>
@@ -8206,7 +13578,7 @@
           <p:cNvPr id="7" name="purpose">
             <a:extLst xmlns:a="http://schemas.openxmlformats.org/drawingml/2006/main">
               <a:ext uri="{FF2B5EF4-FFF2-40B4-BE49-F238E27FC236}">
-                <a16:creationId xmlns:a16="http://schemas.microsoft.com/office/drawing/2014/main" id="{5369BFF0-8C1B-4CD6-9AF4-8187F7DCB720}"/>
+                <a16:creationId xmlns:a16="http://schemas.microsoft.com/office/drawing/2014/main" id="{36019EA7-41DE-4600-A15B-F19EF0637D72}"/>
               </a:ext>
             </a:extLst>
           </p:cNvPr>
@@ -8268,7 +13640,7 @@
           <p:cNvPr id="8" name="if-it-fails">
             <a:extLst xmlns:a="http://schemas.openxmlformats.org/drawingml/2006/main">
               <a:ext uri="{FF2B5EF4-FFF2-40B4-BE49-F238E27FC236}">
-                <a16:creationId xmlns:a16="http://schemas.microsoft.com/office/drawing/2014/main" id="{D2FC5617-BFC5-4186-8689-E4644D704205}"/>
+                <a16:creationId xmlns:a16="http://schemas.microsoft.com/office/drawing/2014/main" id="{31152D4D-257D-4998-978C-8DB52C31E64A}"/>
               </a:ext>
             </a:extLst>
           </p:cNvPr>
@@ -8330,7 +13702,7 @@
           <p:cNvPr id="9" name="current-mitigation">
             <a:extLst xmlns:a="http://schemas.openxmlformats.org/drawingml/2006/main">
               <a:ext uri="{FF2B5EF4-FFF2-40B4-BE49-F238E27FC236}">
-                <a16:creationId xmlns:a16="http://schemas.microsoft.com/office/drawing/2014/main" id="{BD28ECBA-6E2F-4BB9-A906-F428DA8EE7BF}"/>
+                <a16:creationId xmlns:a16="http://schemas.microsoft.com/office/drawing/2014/main" id="{144EC16C-9962-4BD6-A1E4-D84D4A7F00BA}"/>
               </a:ext>
             </a:extLst>
           </p:cNvPr>
@@ -8392,7 +13764,7 @@
           <p:cNvPr id="10" name="supabase">
             <a:extLst xmlns:a="http://schemas.openxmlformats.org/drawingml/2006/main">
               <a:ext uri="{FF2B5EF4-FFF2-40B4-BE49-F238E27FC236}">
-                <a16:creationId xmlns:a16="http://schemas.microsoft.com/office/drawing/2014/main" id="{4C2F709A-A681-4BB6-943C-E9B736541CB7}"/>
+                <a16:creationId xmlns:a16="http://schemas.microsoft.com/office/drawing/2014/main" id="{CC047CF7-45DA-4680-945A-6E2120ED7F84}"/>
               </a:ext>
             </a:extLst>
           </p:cNvPr>
@@ -8454,7 +13826,7 @@
           <p:cNvPr id="11" name="t0">
             <a:extLst xmlns:a="http://schemas.openxmlformats.org/drawingml/2006/main">
               <a:ext uri="{FF2B5EF4-FFF2-40B4-BE49-F238E27FC236}">
-                <a16:creationId xmlns:a16="http://schemas.microsoft.com/office/drawing/2014/main" id="{C5BB28C2-13AF-4ACB-9199-A106D0F9F03F}"/>
+                <a16:creationId xmlns:a16="http://schemas.microsoft.com/office/drawing/2014/main" id="{A1798DC5-3B56-4818-8457-B7901B0298CD}"/>
               </a:ext>
             </a:extLst>
           </p:cNvPr>
@@ -8516,7 +13888,7 @@
           <p:cNvPr id="12" name="db-auth-storage-realtime-edge-functions">
             <a:extLst xmlns:a="http://schemas.openxmlformats.org/drawingml/2006/main">
               <a:ext uri="{FF2B5EF4-FFF2-40B4-BE49-F238E27FC236}">
-                <a16:creationId xmlns:a16="http://schemas.microsoft.com/office/drawing/2014/main" id="{507F72C2-1E9F-450D-A1F1-4467117A8A2D}"/>
+                <a16:creationId xmlns:a16="http://schemas.microsoft.com/office/drawing/2014/main" id="{E977E677-9BBD-432B-979A-BEDFD4CB89F5}"/>
               </a:ext>
             </a:extLst>
           </p:cNvPr>
@@ -8578,7 +13950,7 @@
           <p:cNvPr id="13" name="no-sign-in-sync-cloud-reads-">
             <a:extLst xmlns:a="http://schemas.openxmlformats.org/drawingml/2006/main">
               <a:ext uri="{FF2B5EF4-FFF2-40B4-BE49-F238E27FC236}">
-                <a16:creationId xmlns:a16="http://schemas.microsoft.com/office/drawing/2014/main" id="{0B0BB6F0-4A79-4257-BDF6-393B80D27C1C}"/>
+                <a16:creationId xmlns:a16="http://schemas.microsoft.com/office/drawing/2014/main" id="{AD1D0235-25EC-4C66-B564-FEA595E178D3}"/>
               </a:ext>
             </a:extLst>
           </p:cNvPr>
@@ -8640,7 +14012,7 @@
           <p:cNvPr id="14" name="offline-drift-cache-outbox-for-transient-outage-dr-pitr-for-sustained-incidents-">
             <a:extLst xmlns:a="http://schemas.openxmlformats.org/drawingml/2006/main">
               <a:ext uri="{FF2B5EF4-FFF2-40B4-BE49-F238E27FC236}">
-                <a16:creationId xmlns:a16="http://schemas.microsoft.com/office/drawing/2014/main" id="{4F8AB80F-66A9-4610-B281-EB9C61D9E60E}"/>
+                <a16:creationId xmlns:a16="http://schemas.microsoft.com/office/drawing/2014/main" id="{BDC8D706-3BC7-4231-9FC7-DB67279B4274}"/>
               </a:ext>
             </a:extLst>
           </p:cNvPr>
@@ -8702,7 +14074,7 @@
           <p:cNvPr id="15" name="brevo-resend">
             <a:extLst xmlns:a="http://schemas.openxmlformats.org/drawingml/2006/main">
               <a:ext uri="{FF2B5EF4-FFF2-40B4-BE49-F238E27FC236}">
-                <a16:creationId xmlns:a16="http://schemas.microsoft.com/office/drawing/2014/main" id="{482AAD93-05BC-48A1-91FA-905A1D51E6BB}"/>
+                <a16:creationId xmlns:a16="http://schemas.microsoft.com/office/drawing/2014/main" id="{7D3B83D7-72DC-4F9B-8EC4-A3C4D872634C}"/>
               </a:ext>
             </a:extLst>
           </p:cNvPr>
@@ -8764,7 +14136,7 @@
           <p:cNvPr id="16" name="t0">
             <a:extLst xmlns:a="http://schemas.openxmlformats.org/drawingml/2006/main">
               <a:ext uri="{FF2B5EF4-FFF2-40B4-BE49-F238E27FC236}">
-                <a16:creationId xmlns:a16="http://schemas.microsoft.com/office/drawing/2014/main" id="{F1CCA221-6436-4750-B45E-5CF00149305F}"/>
+                <a16:creationId xmlns:a16="http://schemas.microsoft.com/office/drawing/2014/main" id="{5BE23273-C858-4853-A32C-4426652CFDAD}"/>
               </a:ext>
             </a:extLst>
           </p:cNvPr>
@@ -8826,7 +14198,7 @@
           <p:cNvPr id="17" name="otp-sign-in-email">
             <a:extLst xmlns:a="http://schemas.openxmlformats.org/drawingml/2006/main">
               <a:ext uri="{FF2B5EF4-FFF2-40B4-BE49-F238E27FC236}">
-                <a16:creationId xmlns:a16="http://schemas.microsoft.com/office/drawing/2014/main" id="{DE6649F0-E871-4600-B2AB-5F3E442833C2}"/>
+                <a16:creationId xmlns:a16="http://schemas.microsoft.com/office/drawing/2014/main" id="{0137AE25-6529-4C20-A14C-70B2995615A6}"/>
               </a:ext>
             </a:extLst>
           </p:cNvPr>
@@ -8888,7 +14260,7 @@
           <p:cNvPr id="18" name="new-sign-ins-stall-if-both-fail-">
             <a:extLst xmlns:a="http://schemas.openxmlformats.org/drawingml/2006/main">
               <a:ext uri="{FF2B5EF4-FFF2-40B4-BE49-F238E27FC236}">
-                <a16:creationId xmlns:a16="http://schemas.microsoft.com/office/drawing/2014/main" id="{7ECF9E8B-D248-4838-BD07-3C4D7EEBD909}"/>
+                <a16:creationId xmlns:a16="http://schemas.microsoft.com/office/drawing/2014/main" id="{E1782478-8B41-4CFF-8BE5-D21562052814}"/>
               </a:ext>
             </a:extLst>
           </p:cNvPr>
@@ -8950,7 +14322,7 @@
           <p:cNvPr id="19" name="primary-fallback-path-proven-on-staging-keep-both-domains-keys-healthy-">
             <a:extLst xmlns:a="http://schemas.openxmlformats.org/drawingml/2006/main">
               <a:ext uri="{FF2B5EF4-FFF2-40B4-BE49-F238E27FC236}">
-                <a16:creationId xmlns:a16="http://schemas.microsoft.com/office/drawing/2014/main" id="{D124D10B-538D-4FC6-AC24-779EFB1194F9}"/>
+                <a16:creationId xmlns:a16="http://schemas.microsoft.com/office/drawing/2014/main" id="{ECF2EBF1-AA2E-4554-85C5-FFCDFA6825D5}"/>
               </a:ext>
             </a:extLst>
           </p:cNvPr>
@@ -9012,7 +14384,7 @@
           <p:cNvPr id="20" name="firebase">
             <a:extLst xmlns:a="http://schemas.openxmlformats.org/drawingml/2006/main">
               <a:ext uri="{FF2B5EF4-FFF2-40B4-BE49-F238E27FC236}">
-                <a16:creationId xmlns:a16="http://schemas.microsoft.com/office/drawing/2014/main" id="{194BE7DB-3319-4EF3-8206-92D92674303E}"/>
+                <a16:creationId xmlns:a16="http://schemas.microsoft.com/office/drawing/2014/main" id="{D7293418-4B69-4026-8645-ADBDCAC7A7CA}"/>
               </a:ext>
             </a:extLst>
           </p:cNvPr>
@@ -9074,7 +14446,7 @@
           <p:cNvPr id="21" name="t1">
             <a:extLst xmlns:a="http://schemas.openxmlformats.org/drawingml/2006/main">
               <a:ext uri="{FF2B5EF4-FFF2-40B4-BE49-F238E27FC236}">
-                <a16:creationId xmlns:a16="http://schemas.microsoft.com/office/drawing/2014/main" id="{4C7F032C-C4EC-4F34-92F8-B41EAE5289E2}"/>
+                <a16:creationId xmlns:a16="http://schemas.microsoft.com/office/drawing/2014/main" id="{458D8A57-9E99-4E07-B3D6-D10D4442DF1F}"/>
               </a:ext>
             </a:extLst>
           </p:cNvPr>
@@ -9136,7 +14508,7 @@
           <p:cNvPr id="22" name="push-crash-diagnostics">
             <a:extLst xmlns:a="http://schemas.openxmlformats.org/drawingml/2006/main">
               <a:ext uri="{FF2B5EF4-FFF2-40B4-BE49-F238E27FC236}">
-                <a16:creationId xmlns:a16="http://schemas.microsoft.com/office/drawing/2014/main" id="{F677F130-6F81-4D01-885D-3D35C0BA1E39}"/>
+                <a16:creationId xmlns:a16="http://schemas.microsoft.com/office/drawing/2014/main" id="{CE2E0990-3A9C-4A16-A9E1-BABB7C341342}"/>
               </a:ext>
             </a:extLst>
           </p:cNvPr>
@@ -9198,7 +14570,7 @@
           <p:cNvPr id="23" name="push-crash-visibility-degrade-">
             <a:extLst xmlns:a="http://schemas.openxmlformats.org/drawingml/2006/main">
               <a:ext uri="{FF2B5EF4-FFF2-40B4-BE49-F238E27FC236}">
-                <a16:creationId xmlns:a16="http://schemas.microsoft.com/office/drawing/2014/main" id="{BB1FF67A-4B40-44C7-BEAF-1B65E4A6D666}"/>
+                <a16:creationId xmlns:a16="http://schemas.microsoft.com/office/drawing/2014/main" id="{C0F98856-DD87-4EA8-AE55-E0D40FFECE0E}"/>
               </a:ext>
             </a:extLst>
           </p:cNvPr>
@@ -9260,7 +14632,7 @@
           <p:cNvPr id="24" name="app-remains-usable-in-app-inbox-is-durable-">
             <a:extLst xmlns:a="http://schemas.openxmlformats.org/drawingml/2006/main">
               <a:ext uri="{FF2B5EF4-FFF2-40B4-BE49-F238E27FC236}">
-                <a16:creationId xmlns:a16="http://schemas.microsoft.com/office/drawing/2014/main" id="{AFEDC257-1102-404D-91BC-C20F8ED08988}"/>
+                <a16:creationId xmlns:a16="http://schemas.microsoft.com/office/drawing/2014/main" id="{5AC1DD0B-ABAD-48BC-9BB4-F2A1EE4DB3CE}"/>
               </a:ext>
             </a:extLst>
           </p:cNvPr>
@@ -9322,7 +14694,7 @@
           <p:cNvPr id="25" name="vercel">
             <a:extLst xmlns:a="http://schemas.openxmlformats.org/drawingml/2006/main">
               <a:ext uri="{FF2B5EF4-FFF2-40B4-BE49-F238E27FC236}">
-                <a16:creationId xmlns:a16="http://schemas.microsoft.com/office/drawing/2014/main" id="{2A05F088-D93E-4B74-AF4E-4F255E804FF1}"/>
+                <a16:creationId xmlns:a16="http://schemas.microsoft.com/office/drawing/2014/main" id="{F0A90690-E1BC-4964-AF1A-1DE03CBED183}"/>
               </a:ext>
             </a:extLst>
           </p:cNvPr>
@@ -9384,7 +14756,7 @@
           <p:cNvPr id="26" name="t1">
             <a:extLst xmlns:a="http://schemas.openxmlformats.org/drawingml/2006/main">
               <a:ext uri="{FF2B5EF4-FFF2-40B4-BE49-F238E27FC236}">
-                <a16:creationId xmlns:a16="http://schemas.microsoft.com/office/drawing/2014/main" id="{D4F39CDA-68C9-4848-99C8-E6D2A91C6239}"/>
+                <a16:creationId xmlns:a16="http://schemas.microsoft.com/office/drawing/2014/main" id="{8E93191A-E1D3-4D73-8597-74C4852FED72}"/>
               </a:ext>
             </a:extLst>
           </p:cNvPr>
@@ -9446,7 +14818,7 @@
           <p:cNvPr id="27" name="public-web-invite-previews-assetlinks-dns">
             <a:extLst xmlns:a="http://schemas.openxmlformats.org/drawingml/2006/main">
               <a:ext uri="{FF2B5EF4-FFF2-40B4-BE49-F238E27FC236}">
-                <a16:creationId xmlns:a16="http://schemas.microsoft.com/office/drawing/2014/main" id="{C9EA31DB-0EDC-4B86-B0D7-394DD0E2A366}"/>
+                <a16:creationId xmlns:a16="http://schemas.microsoft.com/office/drawing/2014/main" id="{EE5D15F8-2E00-474D-9005-215944E1749A}"/>
               </a:ext>
             </a:extLst>
           </p:cNvPr>
@@ -9508,7 +14880,7 @@
           <p:cNvPr id="28" name="web-previews-app-links-degrade-">
             <a:extLst xmlns:a="http://schemas.openxmlformats.org/drawingml/2006/main">
               <a:ext uri="{FF2B5EF4-FFF2-40B4-BE49-F238E27FC236}">
-                <a16:creationId xmlns:a16="http://schemas.microsoft.com/office/drawing/2014/main" id="{3DE76F0D-F7BF-4D09-BFFD-B56D27E84272}"/>
+                <a16:creationId xmlns:a16="http://schemas.microsoft.com/office/drawing/2014/main" id="{D0460D3B-29F9-49CD-B157-A4704D77F94B}"/>
               </a:ext>
             </a:extLst>
           </p:cNvPr>
@@ -9570,7 +14942,7 @@
           <p:cNvPr id="29" name="core-app-works-can-re-point-dns-or-serve-fallback-pages-">
             <a:extLst xmlns:a="http://schemas.openxmlformats.org/drawingml/2006/main">
               <a:ext uri="{FF2B5EF4-FFF2-40B4-BE49-F238E27FC236}">
-                <a16:creationId xmlns:a16="http://schemas.microsoft.com/office/drawing/2014/main" id="{2FA03B11-5959-4FA3-B30B-B9E7F6551C0F}"/>
+                <a16:creationId xmlns:a16="http://schemas.microsoft.com/office/drawing/2014/main" id="{6D6366E4-4C98-4CF6-8905-C7C8A3E838C4}"/>
               </a:ext>
             </a:extLst>
           </p:cNvPr>
@@ -9632,7 +15004,7 @@
           <p:cNvPr id="30" name="posthog-eu">
             <a:extLst xmlns:a="http://schemas.openxmlformats.org/drawingml/2006/main">
               <a:ext uri="{FF2B5EF4-FFF2-40B4-BE49-F238E27FC236}">
-                <a16:creationId xmlns:a16="http://schemas.microsoft.com/office/drawing/2014/main" id="{A8217A90-16E7-4282-9062-FB05D0251297}"/>
+                <a16:creationId xmlns:a16="http://schemas.microsoft.com/office/drawing/2014/main" id="{05593A88-4C8E-4E33-8B58-AFCCBD38646D}"/>
               </a:ext>
             </a:extLst>
           </p:cNvPr>
@@ -9694,7 +15066,7 @@
           <p:cNvPr id="31" name="t1">
             <a:extLst xmlns:a="http://schemas.openxmlformats.org/drawingml/2006/main">
               <a:ext uri="{FF2B5EF4-FFF2-40B4-BE49-F238E27FC236}">
-                <a16:creationId xmlns:a16="http://schemas.microsoft.com/office/drawing/2014/main" id="{3EB15D05-7A5D-4A0A-B7BF-27F204AAB417}"/>
+                <a16:creationId xmlns:a16="http://schemas.microsoft.com/office/drawing/2014/main" id="{F2DF3285-AA10-4CE8-B8C6-9DAE0FA9F18E}"/>
               </a:ext>
             </a:extLst>
           </p:cNvPr>
@@ -9756,7 +15128,7 @@
           <p:cNvPr id="32" name="product-analytics">
             <a:extLst xmlns:a="http://schemas.openxmlformats.org/drawingml/2006/main">
               <a:ext uri="{FF2B5EF4-FFF2-40B4-BE49-F238E27FC236}">
-                <a16:creationId xmlns:a16="http://schemas.microsoft.com/office/drawing/2014/main" id="{F5CE12C9-3A97-4A71-BA0D-9C07D69A7FF3}"/>
+                <a16:creationId xmlns:a16="http://schemas.microsoft.com/office/drawing/2014/main" id="{DC339B09-D5A3-451D-B466-5D4B76B9814A}"/>
               </a:ext>
             </a:extLst>
           </p:cNvPr>
@@ -9818,7 +15190,7 @@
           <p:cNvPr id="33" name="growth-retention-decisions-go-blind-">
             <a:extLst xmlns:a="http://schemas.openxmlformats.org/drawingml/2006/main">
               <a:ext uri="{FF2B5EF4-FFF2-40B4-BE49-F238E27FC236}">
-                <a16:creationId xmlns:a16="http://schemas.microsoft.com/office/drawing/2014/main" id="{5F23AC16-384B-4C26-9B7E-3C630665D3E7}"/>
+                <a16:creationId xmlns:a16="http://schemas.microsoft.com/office/drawing/2014/main" id="{4ECDFAF1-E74E-4803-BE2D-F36AD63F1EB8}"/>
               </a:ext>
             </a:extLst>
           </p:cNvPr>
@@ -9880,7 +15252,7 @@
           <p:cNvPr id="34" name="no-runtime-dependency-keep-event-budget-and-export-plan-">
             <a:extLst xmlns:a="http://schemas.openxmlformats.org/drawingml/2006/main">
               <a:ext uri="{FF2B5EF4-FFF2-40B4-BE49-F238E27FC236}">
-                <a16:creationId xmlns:a16="http://schemas.microsoft.com/office/drawing/2014/main" id="{24EE287B-6335-415A-A490-5F3678637C4E}"/>
+                <a16:creationId xmlns:a16="http://schemas.microsoft.com/office/drawing/2014/main" id="{A5022173-8CDC-4B6A-81BF-3CCBBC05AD69}"/>
               </a:ext>
             </a:extLst>
           </p:cNvPr>
@@ -9942,7 +15314,7 @@
           <p:cNvPr id="35" name="exchangerate-host">
             <a:extLst xmlns:a="http://schemas.openxmlformats.org/drawingml/2006/main">
               <a:ext uri="{FF2B5EF4-FFF2-40B4-BE49-F238E27FC236}">
-                <a16:creationId xmlns:a16="http://schemas.microsoft.com/office/drawing/2014/main" id="{FB199DB1-74B2-42D6-A234-F3C770DBAEA6}"/>
+                <a16:creationId xmlns:a16="http://schemas.microsoft.com/office/drawing/2014/main" id="{5C4A0391-0020-4BBB-97AE-95F5643E32EB}"/>
               </a:ext>
             </a:extLst>
           </p:cNvPr>
@@ -10004,7 +15376,7 @@
           <p:cNvPr id="36" name="t1">
             <a:extLst xmlns:a="http://schemas.openxmlformats.org/drawingml/2006/main">
               <a:ext uri="{FF2B5EF4-FFF2-40B4-BE49-F238E27FC236}">
-                <a16:creationId xmlns:a16="http://schemas.microsoft.com/office/drawing/2014/main" id="{ED6902EE-966F-4D8A-ABE9-F7911557A6A2}"/>
+                <a16:creationId xmlns:a16="http://schemas.microsoft.com/office/drawing/2014/main" id="{14377860-6DC9-47F7-B013-30034657CB82}"/>
               </a:ext>
             </a:extLst>
           </p:cNvPr>
@@ -10066,7 +15438,7 @@
           <p:cNvPr id="37" name="market-fx-snapshots">
             <a:extLst xmlns:a="http://schemas.openxmlformats.org/drawingml/2006/main">
               <a:ext uri="{FF2B5EF4-FFF2-40B4-BE49-F238E27FC236}">
-                <a16:creationId xmlns:a16="http://schemas.microsoft.com/office/drawing/2014/main" id="{37983E29-1980-4692-B462-93E682BD7094}"/>
+                <a16:creationId xmlns:a16="http://schemas.microsoft.com/office/drawing/2014/main" id="{50A375D3-D9FD-4DB4-875F-3B27CFEF4B84}"/>
               </a:ext>
             </a:extLst>
           </p:cNvPr>
@@ -10128,7 +15500,7 @@
           <p:cNvPr id="38" name="new-refresh-fx-fails-">
             <a:extLst xmlns:a="http://schemas.openxmlformats.org/drawingml/2006/main">
               <a:ext uri="{FF2B5EF4-FFF2-40B4-BE49-F238E27FC236}">
-                <a16:creationId xmlns:a16="http://schemas.microsoft.com/office/drawing/2014/main" id="{8AC1DD87-50A6-4524-A1CB-9F8937F6CB1D}"/>
+                <a16:creationId xmlns:a16="http://schemas.microsoft.com/office/drawing/2014/main" id="{750C4F8C-8869-443B-B33C-351A2FE963DC}"/>
               </a:ext>
             </a:extLst>
           </p:cNvPr>
@@ -10190,7 +15562,7 @@
           <p:cNvPr id="39" name="existing-expenses-safe-fail-loud-no-silent-money-drift-">
             <a:extLst xmlns:a="http://schemas.openxmlformats.org/drawingml/2006/main">
               <a:ext uri="{FF2B5EF4-FFF2-40B4-BE49-F238E27FC236}">
-                <a16:creationId xmlns:a16="http://schemas.microsoft.com/office/drawing/2014/main" id="{66B107BF-853E-4EBF-B84D-22F60C25E892}"/>
+                <a16:creationId xmlns:a16="http://schemas.microsoft.com/office/drawing/2014/main" id="{CEAF7BB7-7B45-4206-B574-D7D09541F68F}"/>
               </a:ext>
             </a:extLst>
           </p:cNvPr>
@@ -10252,7 +15624,7 @@
           <p:cNvPr id="40" name="google-play">
             <a:extLst xmlns:a="http://schemas.openxmlformats.org/drawingml/2006/main">
               <a:ext uri="{FF2B5EF4-FFF2-40B4-BE49-F238E27FC236}">
-                <a16:creationId xmlns:a16="http://schemas.microsoft.com/office/drawing/2014/main" id="{1532949D-9458-439A-969F-705A19E7E9D4}"/>
+                <a16:creationId xmlns:a16="http://schemas.microsoft.com/office/drawing/2014/main" id="{31ABEA40-FB15-437B-A81B-2638114F6D92}"/>
               </a:ext>
             </a:extLst>
           </p:cNvPr>
@@ -10314,7 +15686,7 @@
           <p:cNvPr id="41" name="t2">
             <a:extLst xmlns:a="http://schemas.openxmlformats.org/drawingml/2006/main">
               <a:ext uri="{FF2B5EF4-FFF2-40B4-BE49-F238E27FC236}">
-                <a16:creationId xmlns:a16="http://schemas.microsoft.com/office/drawing/2014/main" id="{A5E112D8-BD6E-4F82-A251-21F14D765935}"/>
+                <a16:creationId xmlns:a16="http://schemas.microsoft.com/office/drawing/2014/main" id="{FC00AC45-60DC-44C9-B9D3-9335D2A38A98}"/>
               </a:ext>
             </a:extLst>
           </p:cNvPr>
@@ -10376,7 +15748,7 @@
           <p:cNvPr id="42" name="android-distribution">
             <a:extLst xmlns:a="http://schemas.openxmlformats.org/drawingml/2006/main">
               <a:ext uri="{FF2B5EF4-FFF2-40B4-BE49-F238E27FC236}">
-                <a16:creationId xmlns:a16="http://schemas.microsoft.com/office/drawing/2014/main" id="{360E2683-9A52-46BA-8053-49F942399FE3}"/>
+                <a16:creationId xmlns:a16="http://schemas.microsoft.com/office/drawing/2014/main" id="{7A38F8F3-C1B4-4D7D-94BC-4756BFCCADE8}"/>
               </a:ext>
             </a:extLst>
           </p:cNvPr>
@@ -10438,7 +15810,7 @@
           <p:cNvPr id="43" name="store-update-channel-affected-">
             <a:extLst xmlns:a="http://schemas.openxmlformats.org/drawingml/2006/main">
               <a:ext uri="{FF2B5EF4-FFF2-40B4-BE49-F238E27FC236}">
-                <a16:creationId xmlns:a16="http://schemas.microsoft.com/office/drawing/2014/main" id="{13878E83-B3E5-45F2-98D8-D87D29913EF7}"/>
+                <a16:creationId xmlns:a16="http://schemas.microsoft.com/office/drawing/2014/main" id="{5ACBC674-79B4-410B-8813-536BE8B2DB3C}"/>
               </a:ext>
             </a:extLst>
           </p:cNvPr>
@@ -10500,7 +15872,7 @@
           <p:cNvPr id="44" name="running-installs-unaffected-">
             <a:extLst xmlns:a="http://schemas.openxmlformats.org/drawingml/2006/main">
               <a:ext uri="{FF2B5EF4-FFF2-40B4-BE49-F238E27FC236}">
-                <a16:creationId xmlns:a16="http://schemas.microsoft.com/office/drawing/2014/main" id="{AF9429D7-7FF1-4927-81E6-F1F18EDE8AFB}"/>
+                <a16:creationId xmlns:a16="http://schemas.microsoft.com/office/drawing/2014/main" id="{9A1FC444-8D14-4773-8166-8330D99605E2}"/>
               </a:ext>
             </a:extLst>
           </p:cNvPr>
@@ -10560,7 +15932,7 @@
     </p:spTree>
     <p:extLst>
       <p:ext uri="{BB962C8B-B14F-4D97-AF65-F5344CB8AC3E}">
-        <p14:creationId xmlns:p14="http://schemas.microsoft.com/office/powerpoint/2010/main" val="547401186"/>
+        <p14:creationId xmlns:p14="http://schemas.microsoft.com/office/powerpoint/2010/main" val="777846680"/>
       </p:ext>
     </p:extLst>
   </p:cSld>
@@ -10591,7 +15963,7 @@
           <p:cNvPr id="1" name="brand-rail">
             <a:extLst xmlns:a="http://schemas.openxmlformats.org/drawingml/2006/main">
               <a:ext uri="{FF2B5EF4-FFF2-40B4-BE49-F238E27FC236}">
-                <a16:creationId xmlns:a16="http://schemas.microsoft.com/office/drawing/2014/main" id="{75A71F08-1196-437F-AB04-5E3B2D0E7270}"/>
+                <a16:creationId xmlns:a16="http://schemas.microsoft.com/office/drawing/2014/main" id="{323C3E49-5ABC-4E86-95A1-3B582724B351}"/>
               </a:ext>
             </a:extLst>
           </p:cNvPr>
@@ -10624,7 +15996,7 @@
           <p:cNvPr id="2" name="">
             <a:extLst xmlns:a="http://schemas.openxmlformats.org/drawingml/2006/main">
               <a:ext uri="{FF2B5EF4-FFF2-40B4-BE49-F238E27FC236}">
-                <a16:creationId xmlns:a16="http://schemas.microsoft.com/office/drawing/2014/main" id="{3459B40E-46A8-4DCC-B87D-9218CE641F7E}"/>
+                <a16:creationId xmlns:a16="http://schemas.microsoft.com/office/drawing/2014/main" id="{BE83541F-3893-4F86-BE74-4AE8B5161631}"/>
               </a:ext>
             </a:extLst>
           </p:cNvPr>
@@ -10680,7 +16052,7 @@
           <p:cNvPr id="3" name="">
             <a:extLst xmlns:a="http://schemas.openxmlformats.org/drawingml/2006/main">
               <a:ext uri="{FF2B5EF4-FFF2-40B4-BE49-F238E27FC236}">
-                <a16:creationId xmlns:a16="http://schemas.microsoft.com/office/drawing/2014/main" id="{AA932B55-C4E5-49C7-B071-40B876755166}"/>
+                <a16:creationId xmlns:a16="http://schemas.microsoft.com/office/drawing/2014/main" id="{BB5B45FC-BFB8-426B-974E-DEA3748EAB78}"/>
               </a:ext>
             </a:extLst>
           </p:cNvPr>
@@ -10736,7 +16108,7 @@
           <p:cNvPr id="4" name="">
             <a:extLst xmlns:a="http://schemas.openxmlformats.org/drawingml/2006/main">
               <a:ext uri="{FF2B5EF4-FFF2-40B4-BE49-F238E27FC236}">
-                <a16:creationId xmlns:a16="http://schemas.microsoft.com/office/drawing/2014/main" id="{EEF6A0BD-C185-4FCF-92D8-0599136EBEE1}"/>
+                <a16:creationId xmlns:a16="http://schemas.microsoft.com/office/drawing/2014/main" id="{950EAAEA-633F-41D1-9EB9-C91B7FB62266}"/>
               </a:ext>
             </a:extLst>
           </p:cNvPr>
@@ -10792,7 +16164,7 @@
           <p:cNvPr id="5" name="">
             <a:extLst xmlns:a="http://schemas.openxmlformats.org/drawingml/2006/main">
               <a:ext uri="{FF2B5EF4-FFF2-40B4-BE49-F238E27FC236}">
-                <a16:creationId xmlns:a16="http://schemas.microsoft.com/office/drawing/2014/main" id="{0C3CCFAE-013F-42C6-A265-10799711474F}"/>
+                <a16:creationId xmlns:a16="http://schemas.microsoft.com/office/drawing/2014/main" id="{DD66A620-6EFA-4960-A70E-7DAFA53CD233}"/>
               </a:ext>
             </a:extLst>
           </p:cNvPr>
@@ -10836,7 +16208,7 @@
           <p:cNvPr id="6" name="">
             <a:extLst xmlns:a="http://schemas.openxmlformats.org/drawingml/2006/main">
               <a:ext uri="{FF2B5EF4-FFF2-40B4-BE49-F238E27FC236}">
-                <a16:creationId xmlns:a16="http://schemas.microsoft.com/office/drawing/2014/main" id="{DC5DA34D-71D3-4577-99C5-0D15D71A9012}"/>
+                <a16:creationId xmlns:a16="http://schemas.microsoft.com/office/drawing/2014/main" id="{E14F4C61-9699-4420-8934-80E5A1DFCCD3}"/>
               </a:ext>
             </a:extLst>
           </p:cNvPr>
@@ -10892,7 +16264,7 @@
           <p:cNvPr id="7" name="">
             <a:extLst xmlns:a="http://schemas.openxmlformats.org/drawingml/2006/main">
               <a:ext uri="{FF2B5EF4-FFF2-40B4-BE49-F238E27FC236}">
-                <a16:creationId xmlns:a16="http://schemas.microsoft.com/office/drawing/2014/main" id="{F1B09462-EF8A-4FBC-8A05-7A511752EE2C}"/>
+                <a16:creationId xmlns:a16="http://schemas.microsoft.com/office/drawing/2014/main" id="{6BFC5BE9-6DE4-4F54-BDD1-A2EADD6C640B}"/>
               </a:ext>
             </a:extLst>
           </p:cNvPr>
@@ -10948,7 +16320,7 @@
           <p:cNvPr id="8" name="">
             <a:extLst xmlns:a="http://schemas.openxmlformats.org/drawingml/2006/main">
               <a:ext uri="{FF2B5EF4-FFF2-40B4-BE49-F238E27FC236}">
-                <a16:creationId xmlns:a16="http://schemas.microsoft.com/office/drawing/2014/main" id="{65B25A20-53D6-4547-B008-35A075B37F88}"/>
+                <a16:creationId xmlns:a16="http://schemas.microsoft.com/office/drawing/2014/main" id="{9397B429-8BE6-4CE6-A9A8-03BAF0F57CFB}"/>
               </a:ext>
             </a:extLst>
           </p:cNvPr>
@@ -10992,7 +16364,7 @@
           <p:cNvPr id="9" name="">
             <a:extLst xmlns:a="http://schemas.openxmlformats.org/drawingml/2006/main">
               <a:ext uri="{FF2B5EF4-FFF2-40B4-BE49-F238E27FC236}">
-                <a16:creationId xmlns:a16="http://schemas.microsoft.com/office/drawing/2014/main" id="{E8F22817-73C2-4F24-A6A3-8740DA94454D}"/>
+                <a16:creationId xmlns:a16="http://schemas.microsoft.com/office/drawing/2014/main" id="{16D00E46-F913-4FBB-B42D-7BCE3F9F736D}"/>
               </a:ext>
             </a:extLst>
           </p:cNvPr>
@@ -11048,7 +16420,7 @@
           <p:cNvPr id="10" name="">
             <a:extLst xmlns:a="http://schemas.openxmlformats.org/drawingml/2006/main">
               <a:ext uri="{FF2B5EF4-FFF2-40B4-BE49-F238E27FC236}">
-                <a16:creationId xmlns:a16="http://schemas.microsoft.com/office/drawing/2014/main" id="{40DC6521-4B89-4151-97CF-765CB7FA5D4B}"/>
+                <a16:creationId xmlns:a16="http://schemas.microsoft.com/office/drawing/2014/main" id="{360514AB-3C04-45CA-B273-121E1E64BD45}"/>
               </a:ext>
             </a:extLst>
           </p:cNvPr>
@@ -11104,7 +16476,7 @@
           <p:cNvPr id="11" name="">
             <a:extLst xmlns:a="http://schemas.openxmlformats.org/drawingml/2006/main">
               <a:ext uri="{FF2B5EF4-FFF2-40B4-BE49-F238E27FC236}">
-                <a16:creationId xmlns:a16="http://schemas.microsoft.com/office/drawing/2014/main" id="{FB9F9B09-2B5A-4E1B-93F2-83EFAC74E629}"/>
+                <a16:creationId xmlns:a16="http://schemas.microsoft.com/office/drawing/2014/main" id="{D59B13A4-F201-4B44-8A32-6127041811F7}"/>
               </a:ext>
             </a:extLst>
           </p:cNvPr>
@@ -11148,7 +16520,7 @@
           <p:cNvPr id="12" name="">
             <a:extLst xmlns:a="http://schemas.openxmlformats.org/drawingml/2006/main">
               <a:ext uri="{FF2B5EF4-FFF2-40B4-BE49-F238E27FC236}">
-                <a16:creationId xmlns:a16="http://schemas.microsoft.com/office/drawing/2014/main" id="{6788825A-76B2-4929-A8DA-12842A48CD03}"/>
+                <a16:creationId xmlns:a16="http://schemas.microsoft.com/office/drawing/2014/main" id="{F9F88AE7-6679-4A9C-A463-5FC756ACA6ED}"/>
               </a:ext>
             </a:extLst>
           </p:cNvPr>
@@ -11204,7 +16576,7 @@
           <p:cNvPr id="13" name="">
             <a:extLst xmlns:a="http://schemas.openxmlformats.org/drawingml/2006/main">
               <a:ext uri="{FF2B5EF4-FFF2-40B4-BE49-F238E27FC236}">
-                <a16:creationId xmlns:a16="http://schemas.microsoft.com/office/drawing/2014/main" id="{474A4606-1DCE-4F9D-87D4-2428FC47FA51}"/>
+                <a16:creationId xmlns:a16="http://schemas.microsoft.com/office/drawing/2014/main" id="{34F592BF-985B-4A25-B5E1-F955CD347996}"/>
               </a:ext>
             </a:extLst>
           </p:cNvPr>
@@ -11260,7 +16632,7 @@
           <p:cNvPr id="14" name="">
             <a:extLst xmlns:a="http://schemas.openxmlformats.org/drawingml/2006/main">
               <a:ext uri="{FF2B5EF4-FFF2-40B4-BE49-F238E27FC236}">
-                <a16:creationId xmlns:a16="http://schemas.microsoft.com/office/drawing/2014/main" id="{DE0BBADE-1F22-401C-8B6F-BD7B6F855BAE}"/>
+                <a16:creationId xmlns:a16="http://schemas.microsoft.com/office/drawing/2014/main" id="{BCFE55F4-A6A4-4307-81CC-0CDBAFAE3158}"/>
               </a:ext>
             </a:extLst>
           </p:cNvPr>
@@ -11304,7 +16676,7 @@
           <p:cNvPr id="15" name="">
             <a:extLst xmlns:a="http://schemas.openxmlformats.org/drawingml/2006/main">
               <a:ext uri="{FF2B5EF4-FFF2-40B4-BE49-F238E27FC236}">
-                <a16:creationId xmlns:a16="http://schemas.microsoft.com/office/drawing/2014/main" id="{F7B36D1B-E89E-49CC-97A3-84ED291F007D}"/>
+                <a16:creationId xmlns:a16="http://schemas.microsoft.com/office/drawing/2014/main" id="{13D2F412-7AD7-4A4B-A6A1-D79A9550F08A}"/>
               </a:ext>
             </a:extLst>
           </p:cNvPr>
@@ -11360,7 +16732,7 @@
           <p:cNvPr id="16" name="">
             <a:extLst xmlns:a="http://schemas.openxmlformats.org/drawingml/2006/main">
               <a:ext uri="{FF2B5EF4-FFF2-40B4-BE49-F238E27FC236}">
-                <a16:creationId xmlns:a16="http://schemas.microsoft.com/office/drawing/2014/main" id="{40A738D0-7648-4F6A-97B0-AC44DEDE5499}"/>
+                <a16:creationId xmlns:a16="http://schemas.microsoft.com/office/drawing/2014/main" id="{E458ADFB-20A9-42C8-A7D2-620FEA72CFE9}"/>
               </a:ext>
             </a:extLst>
           </p:cNvPr>
@@ -11416,7 +16788,7 @@
           <p:cNvPr id="17" name="">
             <a:extLst xmlns:a="http://schemas.openxmlformats.org/drawingml/2006/main">
               <a:ext uri="{FF2B5EF4-FFF2-40B4-BE49-F238E27FC236}">
-                <a16:creationId xmlns:a16="http://schemas.microsoft.com/office/drawing/2014/main" id="{4A8DBCA3-47A4-439F-BFF0-38279F8B74D1}"/>
+                <a16:creationId xmlns:a16="http://schemas.microsoft.com/office/drawing/2014/main" id="{CEE8D41D-00F3-49E0-9342-E0C036D814AE}"/>
               </a:ext>
             </a:extLst>
           </p:cNvPr>
@@ -11460,7 +16832,7 @@
           <p:cNvPr id="18" name="">
             <a:extLst xmlns:a="http://schemas.openxmlformats.org/drawingml/2006/main">
               <a:ext uri="{FF2B5EF4-FFF2-40B4-BE49-F238E27FC236}">
-                <a16:creationId xmlns:a16="http://schemas.microsoft.com/office/drawing/2014/main" id="{573C365A-F6DE-4C22-9B25-C0A564381616}"/>
+                <a16:creationId xmlns:a16="http://schemas.microsoft.com/office/drawing/2014/main" id="{81A634DE-1B93-4425-A878-67B96F02B071}"/>
               </a:ext>
             </a:extLst>
           </p:cNvPr>
@@ -11516,7 +16888,7 @@
           <p:cNvPr id="19" name="">
             <a:extLst xmlns:a="http://schemas.openxmlformats.org/drawingml/2006/main">
               <a:ext uri="{FF2B5EF4-FFF2-40B4-BE49-F238E27FC236}">
-                <a16:creationId xmlns:a16="http://schemas.microsoft.com/office/drawing/2014/main" id="{C163785D-9899-45AD-AFA5-CAA918D2D074}"/>
+                <a16:creationId xmlns:a16="http://schemas.microsoft.com/office/drawing/2014/main" id="{236A5D69-842C-4F7B-998D-562FE385D9D8}"/>
               </a:ext>
             </a:extLst>
           </p:cNvPr>
@@ -11572,7 +16944,7 @@
           <p:cNvPr id="20" name="">
             <a:extLst xmlns:a="http://schemas.openxmlformats.org/drawingml/2006/main">
               <a:ext uri="{FF2B5EF4-FFF2-40B4-BE49-F238E27FC236}">
-                <a16:creationId xmlns:a16="http://schemas.microsoft.com/office/drawing/2014/main" id="{113E45BC-D163-457A-B999-84ECC142A69F}"/>
+                <a16:creationId xmlns:a16="http://schemas.microsoft.com/office/drawing/2014/main" id="{D6EB2943-AB17-42CC-85DD-E50CE673B4D1}"/>
               </a:ext>
             </a:extLst>
           </p:cNvPr>
@@ -11616,7 +16988,7 @@
           <p:cNvPr id="21" name="">
             <a:extLst xmlns:a="http://schemas.openxmlformats.org/drawingml/2006/main">
               <a:ext uri="{FF2B5EF4-FFF2-40B4-BE49-F238E27FC236}">
-                <a16:creationId xmlns:a16="http://schemas.microsoft.com/office/drawing/2014/main" id="{439C58B7-AB67-49D7-A0C4-2A53F7301BBB}"/>
+                <a16:creationId xmlns:a16="http://schemas.microsoft.com/office/drawing/2014/main" id="{EC3A91B9-B9DF-4B79-ABA5-E84F64F030C8}"/>
               </a:ext>
             </a:extLst>
           </p:cNvPr>
@@ -11672,7 +17044,7 @@
           <p:cNvPr id="22" name="">
             <a:extLst xmlns:a="http://schemas.openxmlformats.org/drawingml/2006/main">
               <a:ext uri="{FF2B5EF4-FFF2-40B4-BE49-F238E27FC236}">
-                <a16:creationId xmlns:a16="http://schemas.microsoft.com/office/drawing/2014/main" id="{A72F2593-4E4F-453D-AE36-13022B35CA37}"/>
+                <a16:creationId xmlns:a16="http://schemas.microsoft.com/office/drawing/2014/main" id="{49558EA3-1F5B-4929-A386-FCD3668371C3}"/>
               </a:ext>
             </a:extLst>
           </p:cNvPr>
@@ -11728,7 +17100,7 @@
           <p:cNvPr id="23" name="">
             <a:extLst xmlns:a="http://schemas.openxmlformats.org/drawingml/2006/main">
               <a:ext uri="{FF2B5EF4-FFF2-40B4-BE49-F238E27FC236}">
-                <a16:creationId xmlns:a16="http://schemas.microsoft.com/office/drawing/2014/main" id="{9FED35FB-4503-43F1-936D-4FEAE3F16B13}"/>
+                <a16:creationId xmlns:a16="http://schemas.microsoft.com/office/drawing/2014/main" id="{A3BE4554-2BD3-42F0-826A-579D4615C7CD}"/>
               </a:ext>
             </a:extLst>
           </p:cNvPr>
@@ -11782,7 +17154,7 @@
     </p:spTree>
     <p:extLst>
       <p:ext uri="{BB962C8B-B14F-4D97-AF65-F5344CB8AC3E}">
-        <p14:creationId xmlns:p14="http://schemas.microsoft.com/office/powerpoint/2010/main" val="574257992"/>
+        <p14:creationId xmlns:p14="http://schemas.microsoft.com/office/powerpoint/2010/main" val="256124036"/>
       </p:ext>
     </p:extLst>
   </p:cSld>
@@ -11813,7 +17185,7 @@
           <p:cNvPr id="1" name="brand-rail">
             <a:extLst xmlns:a="http://schemas.openxmlformats.org/drawingml/2006/main">
               <a:ext uri="{FF2B5EF4-FFF2-40B4-BE49-F238E27FC236}">
-                <a16:creationId xmlns:a16="http://schemas.microsoft.com/office/drawing/2014/main" id="{B6326A0E-7C5B-4D44-8905-BE1FFD1D76A7}"/>
+                <a16:creationId xmlns:a16="http://schemas.microsoft.com/office/drawing/2014/main" id="{670DB832-C2A6-40C8-8155-B8C84753B457}"/>
               </a:ext>
             </a:extLst>
           </p:cNvPr>
@@ -11846,7 +17218,7 @@
           <p:cNvPr id="2" name="">
             <a:extLst xmlns:a="http://schemas.openxmlformats.org/drawingml/2006/main">
               <a:ext uri="{FF2B5EF4-FFF2-40B4-BE49-F238E27FC236}">
-                <a16:creationId xmlns:a16="http://schemas.microsoft.com/office/drawing/2014/main" id="{25D98EE2-DB28-4355-AC16-67D7541A136A}"/>
+                <a16:creationId xmlns:a16="http://schemas.microsoft.com/office/drawing/2014/main" id="{9E8D734A-F0BF-45FA-98FF-2CC7576E67B5}"/>
               </a:ext>
             </a:extLst>
           </p:cNvPr>
@@ -11902,7 +17274,7 @@
           <p:cNvPr id="3" name="">
             <a:extLst xmlns:a="http://schemas.openxmlformats.org/drawingml/2006/main">
               <a:ext uri="{FF2B5EF4-FFF2-40B4-BE49-F238E27FC236}">
-                <a16:creationId xmlns:a16="http://schemas.microsoft.com/office/drawing/2014/main" id="{0B577E59-0812-4380-8720-F79F50590A96}"/>
+                <a16:creationId xmlns:a16="http://schemas.microsoft.com/office/drawing/2014/main" id="{478B2238-4737-42EA-96AA-A04856C192E4}"/>
               </a:ext>
             </a:extLst>
           </p:cNvPr>
@@ -11958,7 +17330,7 @@
           <p:cNvPr id="4" name="">
             <a:extLst xmlns:a="http://schemas.openxmlformats.org/drawingml/2006/main">
               <a:ext uri="{FF2B5EF4-FFF2-40B4-BE49-F238E27FC236}">
-                <a16:creationId xmlns:a16="http://schemas.microsoft.com/office/drawing/2014/main" id="{54A2CAE2-C0F8-46ED-983C-400D1410D869}"/>
+                <a16:creationId xmlns:a16="http://schemas.microsoft.com/office/drawing/2014/main" id="{4BF67EAF-D8F6-40E1-86B9-A98E19FBFA06}"/>
               </a:ext>
             </a:extLst>
           </p:cNvPr>
@@ -12014,7 +17386,7 @@
           <p:cNvPr id="5" name="106k-base-case-mau-at-m36">
             <a:extLst xmlns:a="http://schemas.openxmlformats.org/drawingml/2006/main">
               <a:ext uri="{FF2B5EF4-FFF2-40B4-BE49-F238E27FC236}">
-                <a16:creationId xmlns:a16="http://schemas.microsoft.com/office/drawing/2014/main" id="{49F7954F-B610-4E9F-BF8E-7CC491AD68F7}"/>
+                <a16:creationId xmlns:a16="http://schemas.microsoft.com/office/drawing/2014/main" id="{4FD2A2EE-FAC1-4FF7-B1B4-528EE1A7E12A}"/>
               </a:ext>
             </a:extLst>
           </p:cNvPr>
@@ -12105,7 +17477,7 @@
           <p:cNvPr id="6" name="4-4k-base-case-paying-users-at-m36">
             <a:extLst xmlns:a="http://schemas.openxmlformats.org/drawingml/2006/main">
               <a:ext uri="{FF2B5EF4-FFF2-40B4-BE49-F238E27FC236}">
-                <a16:creationId xmlns:a16="http://schemas.microsoft.com/office/drawing/2014/main" id="{C9CC54ED-10F5-4954-837E-D7C54595951C}"/>
+                <a16:creationId xmlns:a16="http://schemas.microsoft.com/office/drawing/2014/main" id="{E32133CC-05BC-4B45-B750-B68B7856643B}"/>
               </a:ext>
             </a:extLst>
           </p:cNvPr>
@@ -12196,7 +17568,7 @@
           <p:cNvPr id="7" name="-183k-y3-net-revenue-base-case">
             <a:extLst xmlns:a="http://schemas.openxmlformats.org/drawingml/2006/main">
               <a:ext uri="{FF2B5EF4-FFF2-40B4-BE49-F238E27FC236}">
-                <a16:creationId xmlns:a16="http://schemas.microsoft.com/office/drawing/2014/main" id="{FCFD5C47-4A2F-4FA9-BDE2-CA7A3BF6BC83}"/>
+                <a16:creationId xmlns:a16="http://schemas.microsoft.com/office/drawing/2014/main" id="{1D8422C7-3A9C-482E-BCDA-EE886F4E83D4}"/>
               </a:ext>
             </a:extLst>
           </p:cNvPr>
@@ -12287,7 +17659,7 @@
           <p:cNvPr id="8" name="-520-mo-planned-fixed-tooling-infra-floor">
             <a:extLst xmlns:a="http://schemas.openxmlformats.org/drawingml/2006/main">
               <a:ext uri="{FF2B5EF4-FFF2-40B4-BE49-F238E27FC236}">
-                <a16:creationId xmlns:a16="http://schemas.microsoft.com/office/drawing/2014/main" id="{BA720BB6-6583-4923-A67E-86B5824BE378}"/>
+                <a16:creationId xmlns:a16="http://schemas.microsoft.com/office/drawing/2014/main" id="{9C670205-DFDF-45BD-8B97-545633941A93}"/>
               </a:ext>
             </a:extLst>
           </p:cNvPr>
@@ -12378,7 +17750,7 @@
           <p:cNvPr id="9" name="bullet-dot">
             <a:extLst xmlns:a="http://schemas.openxmlformats.org/drawingml/2006/main">
               <a:ext uri="{FF2B5EF4-FFF2-40B4-BE49-F238E27FC236}">
-                <a16:creationId xmlns:a16="http://schemas.microsoft.com/office/drawing/2014/main" id="{9E2B9724-1282-4193-879E-9AECC4A5048A}"/>
+                <a16:creationId xmlns:a16="http://schemas.microsoft.com/office/drawing/2014/main" id="{3FE4C168-6414-46FF-8AE3-255B74F9004F}"/>
               </a:ext>
             </a:extLst>
           </p:cNvPr>
@@ -12411,7 +17783,7 @@
           <p:cNvPr id="10" name="">
             <a:extLst xmlns:a="http://schemas.openxmlformats.org/drawingml/2006/main">
               <a:ext uri="{FF2B5EF4-FFF2-40B4-BE49-F238E27FC236}">
-                <a16:creationId xmlns:a16="http://schemas.microsoft.com/office/drawing/2014/main" id="{B0FC4C74-390A-48F5-AC88-B5CB04987103}"/>
+                <a16:creationId xmlns:a16="http://schemas.microsoft.com/office/drawing/2014/main" id="{33325EA2-CCC6-468A-8F37-7984532294C1}"/>
               </a:ext>
             </a:extLst>
           </p:cNvPr>
@@ -12467,7 +17839,7 @@
           <p:cNvPr id="11" name="bullet-dot">
             <a:extLst xmlns:a="http://schemas.openxmlformats.org/drawingml/2006/main">
               <a:ext uri="{FF2B5EF4-FFF2-40B4-BE49-F238E27FC236}">
-                <a16:creationId xmlns:a16="http://schemas.microsoft.com/office/drawing/2014/main" id="{C8EDC525-D408-47E5-88E3-0DE40A10ABCB}"/>
+                <a16:creationId xmlns:a16="http://schemas.microsoft.com/office/drawing/2014/main" id="{3BFDE19A-7427-488A-90AA-54737461D134}"/>
               </a:ext>
             </a:extLst>
           </p:cNvPr>
@@ -12500,7 +17872,7 @@
           <p:cNvPr id="12" name="">
             <a:extLst xmlns:a="http://schemas.openxmlformats.org/drawingml/2006/main">
               <a:ext uri="{FF2B5EF4-FFF2-40B4-BE49-F238E27FC236}">
-                <a16:creationId xmlns:a16="http://schemas.microsoft.com/office/drawing/2014/main" id="{9AB50B95-B4FE-4B6C-9525-14A1B9D55233}"/>
+                <a16:creationId xmlns:a16="http://schemas.microsoft.com/office/drawing/2014/main" id="{4938290D-C5AD-4DD0-8D1D-2A47905551DE}"/>
               </a:ext>
             </a:extLst>
           </p:cNvPr>
@@ -12556,7 +17928,7 @@
           <p:cNvPr id="13" name="bullet-dot">
             <a:extLst xmlns:a="http://schemas.openxmlformats.org/drawingml/2006/main">
               <a:ext uri="{FF2B5EF4-FFF2-40B4-BE49-F238E27FC236}">
-                <a16:creationId xmlns:a16="http://schemas.microsoft.com/office/drawing/2014/main" id="{BA3E1484-4C31-4DB1-9372-B7776ACD9A41}"/>
+                <a16:creationId xmlns:a16="http://schemas.microsoft.com/office/drawing/2014/main" id="{29B7C467-DDC1-4DED-8648-366D8F656E93}"/>
               </a:ext>
             </a:extLst>
           </p:cNvPr>
@@ -12589,7 +17961,7 @@
           <p:cNvPr id="14" name="">
             <a:extLst xmlns:a="http://schemas.openxmlformats.org/drawingml/2006/main">
               <a:ext uri="{FF2B5EF4-FFF2-40B4-BE49-F238E27FC236}">
-                <a16:creationId xmlns:a16="http://schemas.microsoft.com/office/drawing/2014/main" id="{D2F714C6-D58F-4CBC-8036-E074F33046C2}"/>
+                <a16:creationId xmlns:a16="http://schemas.microsoft.com/office/drawing/2014/main" id="{CF4D19F9-93CE-4D3E-BB69-26A6DD3F11E9}"/>
               </a:ext>
             </a:extLst>
           </p:cNvPr>
@@ -12645,7 +18017,7 @@
           <p:cNvPr id="15" name="bullet-dot">
             <a:extLst xmlns:a="http://schemas.openxmlformats.org/drawingml/2006/main">
               <a:ext uri="{FF2B5EF4-FFF2-40B4-BE49-F238E27FC236}">
-                <a16:creationId xmlns:a16="http://schemas.microsoft.com/office/drawing/2014/main" id="{1F21A27D-2F9E-45E0-B101-6BE4E177A5DB}"/>
+                <a16:creationId xmlns:a16="http://schemas.microsoft.com/office/drawing/2014/main" id="{B297656C-CDF6-41CF-9C23-EE1AC2FF37FF}"/>
               </a:ext>
             </a:extLst>
           </p:cNvPr>
@@ -12678,7 +18050,7 @@
           <p:cNvPr id="16" name="">
             <a:extLst xmlns:a="http://schemas.openxmlformats.org/drawingml/2006/main">
               <a:ext uri="{FF2B5EF4-FFF2-40B4-BE49-F238E27FC236}">
-                <a16:creationId xmlns:a16="http://schemas.microsoft.com/office/drawing/2014/main" id="{5E94A686-4570-415F-9EF0-6829D759A355}"/>
+                <a16:creationId xmlns:a16="http://schemas.microsoft.com/office/drawing/2014/main" id="{960F6A22-272A-4B48-8CBA-C5CE0CF89FA5}"/>
               </a:ext>
             </a:extLst>
           </p:cNvPr>
@@ -12734,7 +18106,7 @@
           <p:cNvPr id="17" name="bullet-dot">
             <a:extLst xmlns:a="http://schemas.openxmlformats.org/drawingml/2006/main">
               <a:ext uri="{FF2B5EF4-FFF2-40B4-BE49-F238E27FC236}">
-                <a16:creationId xmlns:a16="http://schemas.microsoft.com/office/drawing/2014/main" id="{DD0A80DE-D809-4368-99EB-1602B872246F}"/>
+                <a16:creationId xmlns:a16="http://schemas.microsoft.com/office/drawing/2014/main" id="{7EF8CA5C-AF5C-4D64-8C66-DC9BFE5B30A4}"/>
               </a:ext>
             </a:extLst>
           </p:cNvPr>
@@ -12767,7 +18139,7 @@
           <p:cNvPr id="18" name="">
             <a:extLst xmlns:a="http://schemas.openxmlformats.org/drawingml/2006/main">
               <a:ext uri="{FF2B5EF4-FFF2-40B4-BE49-F238E27FC236}">
-                <a16:creationId xmlns:a16="http://schemas.microsoft.com/office/drawing/2014/main" id="{900B7B58-15A6-4FF5-A9A3-8DBAB69674F7}"/>
+                <a16:creationId xmlns:a16="http://schemas.microsoft.com/office/drawing/2014/main" id="{C6255FE4-6DD4-47E0-A9B2-A19F7C40FF74}"/>
               </a:ext>
             </a:extLst>
           </p:cNvPr>
@@ -12821,7 +18193,7 @@
     </p:spTree>
     <p:extLst>
       <p:ext uri="{BB962C8B-B14F-4D97-AF65-F5344CB8AC3E}">
-        <p14:creationId xmlns:p14="http://schemas.microsoft.com/office/powerpoint/2010/main" val="113572360"/>
+        <p14:creationId xmlns:p14="http://schemas.microsoft.com/office/powerpoint/2010/main" val="826719520"/>
       </p:ext>
     </p:extLst>
   </p:cSld>
@@ -12852,7 +18224,7 @@
           <p:cNvPr id="1" name="brand-rail">
             <a:extLst xmlns:a="http://schemas.openxmlformats.org/drawingml/2006/main">
               <a:ext uri="{FF2B5EF4-FFF2-40B4-BE49-F238E27FC236}">
-                <a16:creationId xmlns:a16="http://schemas.microsoft.com/office/drawing/2014/main" id="{1B3354A1-BA07-4EB0-A297-57AF3B2AB75D}"/>
+                <a16:creationId xmlns:a16="http://schemas.microsoft.com/office/drawing/2014/main" id="{D81995B6-E0B0-4C9E-9993-EF4DEBE45223}"/>
               </a:ext>
             </a:extLst>
           </p:cNvPr>
@@ -12885,7 +18257,7 @@
           <p:cNvPr id="2" name="">
             <a:extLst xmlns:a="http://schemas.openxmlformats.org/drawingml/2006/main">
               <a:ext uri="{FF2B5EF4-FFF2-40B4-BE49-F238E27FC236}">
-                <a16:creationId xmlns:a16="http://schemas.microsoft.com/office/drawing/2014/main" id="{7298E660-D427-410F-954C-0D5D4A1DD9DF}"/>
+                <a16:creationId xmlns:a16="http://schemas.microsoft.com/office/drawing/2014/main" id="{9AE2E718-3E66-461B-AD6F-EE4661D273FB}"/>
               </a:ext>
             </a:extLst>
           </p:cNvPr>
@@ -12941,7 +18313,7 @@
           <p:cNvPr id="3" name="">
             <a:extLst xmlns:a="http://schemas.openxmlformats.org/drawingml/2006/main">
               <a:ext uri="{FF2B5EF4-FFF2-40B4-BE49-F238E27FC236}">
-                <a16:creationId xmlns:a16="http://schemas.microsoft.com/office/drawing/2014/main" id="{5AF55A0E-B924-4AA4-AB96-F73CBEFD3BB7}"/>
+                <a16:creationId xmlns:a16="http://schemas.microsoft.com/office/drawing/2014/main" id="{9F8D558B-4D2E-4041-A44F-6CBA6EA54496}"/>
               </a:ext>
             </a:extLst>
           </p:cNvPr>
@@ -12997,7 +18369,7 @@
           <p:cNvPr id="4" name="">
             <a:extLst xmlns:a="http://schemas.openxmlformats.org/drawingml/2006/main">
               <a:ext uri="{FF2B5EF4-FFF2-40B4-BE49-F238E27FC236}">
-                <a16:creationId xmlns:a16="http://schemas.microsoft.com/office/drawing/2014/main" id="{177FD48B-093E-4D72-93EA-E4206431815C}"/>
+                <a16:creationId xmlns:a16="http://schemas.microsoft.com/office/drawing/2014/main" id="{A716B079-E8DF-404F-982B-007DC7CDDAFB}"/>
               </a:ext>
             </a:extLst>
           </p:cNvPr>
@@ -13053,7 +18425,7 @@
           <p:cNvPr id="5" name="">
             <a:extLst xmlns:a="http://schemas.openxmlformats.org/drawingml/2006/main">
               <a:ext uri="{FF2B5EF4-FFF2-40B4-BE49-F238E27FC236}">
-                <a16:creationId xmlns:a16="http://schemas.microsoft.com/office/drawing/2014/main" id="{AD31EE4C-8F45-4579-8074-FC70FC1AD709}"/>
+                <a16:creationId xmlns:a16="http://schemas.microsoft.com/office/drawing/2014/main" id="{D2C1A8E7-63E6-47FD-9664-44214F38F2DB}"/>
               </a:ext>
             </a:extLst>
           </p:cNvPr>
@@ -13097,7 +18469,7 @@
           <p:cNvPr id="6" name="">
             <a:extLst xmlns:a="http://schemas.openxmlformats.org/drawingml/2006/main">
               <a:ext uri="{FF2B5EF4-FFF2-40B4-BE49-F238E27FC236}">
-                <a16:creationId xmlns:a16="http://schemas.microsoft.com/office/drawing/2014/main" id="{53775107-1E5C-4558-A9BA-F6C4D43500B9}"/>
+                <a16:creationId xmlns:a16="http://schemas.microsoft.com/office/drawing/2014/main" id="{20D1F31E-6C27-454A-B945-A05B203AD6D8}"/>
               </a:ext>
             </a:extLst>
           </p:cNvPr>
@@ -13153,7 +18525,7 @@
           <p:cNvPr id="7" name="">
             <a:extLst xmlns:a="http://schemas.openxmlformats.org/drawingml/2006/main">
               <a:ext uri="{FF2B5EF4-FFF2-40B4-BE49-F238E27FC236}">
-                <a16:creationId xmlns:a16="http://schemas.microsoft.com/office/drawing/2014/main" id="{33AF3186-1F63-4238-8E4F-33F6927FE6F5}"/>
+                <a16:creationId xmlns:a16="http://schemas.microsoft.com/office/drawing/2014/main" id="{6AAED3B5-6B03-434B-8FF5-4EF9FFB18507}"/>
               </a:ext>
             </a:extLst>
           </p:cNvPr>
@@ -13209,7 +18581,7 @@
           <p:cNvPr id="8" name="">
             <a:extLst xmlns:a="http://schemas.openxmlformats.org/drawingml/2006/main">
               <a:ext uri="{FF2B5EF4-FFF2-40B4-BE49-F238E27FC236}">
-                <a16:creationId xmlns:a16="http://schemas.microsoft.com/office/drawing/2014/main" id="{E726A1F1-3025-405D-9959-C8AC2F7D70AB}"/>
+                <a16:creationId xmlns:a16="http://schemas.microsoft.com/office/drawing/2014/main" id="{9AC665A8-01D0-417F-8A8C-9360FA38508D}"/>
               </a:ext>
             </a:extLst>
           </p:cNvPr>
@@ -13253,7 +18625,7 @@
           <p:cNvPr id="9" name="">
             <a:extLst xmlns:a="http://schemas.openxmlformats.org/drawingml/2006/main">
               <a:ext uri="{FF2B5EF4-FFF2-40B4-BE49-F238E27FC236}">
-                <a16:creationId xmlns:a16="http://schemas.microsoft.com/office/drawing/2014/main" id="{D4DE2C8E-F4E8-479A-95C5-9C76D16765B0}"/>
+                <a16:creationId xmlns:a16="http://schemas.microsoft.com/office/drawing/2014/main" id="{14A87F45-63EC-4475-94B8-ADABD84C694D}"/>
               </a:ext>
             </a:extLst>
           </p:cNvPr>
@@ -13309,7 +18681,7 @@
           <p:cNvPr id="10" name="">
             <a:extLst xmlns:a="http://schemas.openxmlformats.org/drawingml/2006/main">
               <a:ext uri="{FF2B5EF4-FFF2-40B4-BE49-F238E27FC236}">
-                <a16:creationId xmlns:a16="http://schemas.microsoft.com/office/drawing/2014/main" id="{B98CFCB2-95ED-40E0-A81B-DD911FA56F47}"/>
+                <a16:creationId xmlns:a16="http://schemas.microsoft.com/office/drawing/2014/main" id="{B1ADA70A-B699-4AD1-8CAC-392C995CB703}"/>
               </a:ext>
             </a:extLst>
           </p:cNvPr>
@@ -13365,7 +18737,7 @@
           <p:cNvPr id="11" name="">
             <a:extLst xmlns:a="http://schemas.openxmlformats.org/drawingml/2006/main">
               <a:ext uri="{FF2B5EF4-FFF2-40B4-BE49-F238E27FC236}">
-                <a16:creationId xmlns:a16="http://schemas.microsoft.com/office/drawing/2014/main" id="{6B4FFAB0-DDCB-469E-9DE3-7F2CEBC0343F}"/>
+                <a16:creationId xmlns:a16="http://schemas.microsoft.com/office/drawing/2014/main" id="{1F1B1B3A-1B5C-44F5-9283-5DFA1530AD49}"/>
               </a:ext>
             </a:extLst>
           </p:cNvPr>
@@ -13409,7 +18781,7 @@
           <p:cNvPr id="12" name="">
             <a:extLst xmlns:a="http://schemas.openxmlformats.org/drawingml/2006/main">
               <a:ext uri="{FF2B5EF4-FFF2-40B4-BE49-F238E27FC236}">
-                <a16:creationId xmlns:a16="http://schemas.microsoft.com/office/drawing/2014/main" id="{ABCEE362-DE30-4CEA-A9D9-EBC31E11CF16}"/>
+                <a16:creationId xmlns:a16="http://schemas.microsoft.com/office/drawing/2014/main" id="{B10CA882-53A0-44EC-A36D-CAAA1C6D907A}"/>
               </a:ext>
             </a:extLst>
           </p:cNvPr>
@@ -13465,7 +18837,7 @@
           <p:cNvPr id="13" name="">
             <a:extLst xmlns:a="http://schemas.openxmlformats.org/drawingml/2006/main">
               <a:ext uri="{FF2B5EF4-FFF2-40B4-BE49-F238E27FC236}">
-                <a16:creationId xmlns:a16="http://schemas.microsoft.com/office/drawing/2014/main" id="{0A5663E4-65B5-455E-B6D4-4A311F151620}"/>
+                <a16:creationId xmlns:a16="http://schemas.microsoft.com/office/drawing/2014/main" id="{43D8F47C-A045-45C9-90B2-E5023C77D1D5}"/>
               </a:ext>
             </a:extLst>
           </p:cNvPr>
@@ -13521,7 +18893,7 @@
           <p:cNvPr id="14" name="">
             <a:extLst xmlns:a="http://schemas.openxmlformats.org/drawingml/2006/main">
               <a:ext uri="{FF2B5EF4-FFF2-40B4-BE49-F238E27FC236}">
-                <a16:creationId xmlns:a16="http://schemas.microsoft.com/office/drawing/2014/main" id="{99B127D6-8D7F-487A-ABD1-1A874F823D6E}"/>
+                <a16:creationId xmlns:a16="http://schemas.microsoft.com/office/drawing/2014/main" id="{A6B2A511-4315-462E-B578-FADF2CA6CD3C}"/>
               </a:ext>
             </a:extLst>
           </p:cNvPr>
@@ -13565,7 +18937,7 @@
           <p:cNvPr id="15" name="">
             <a:extLst xmlns:a="http://schemas.openxmlformats.org/drawingml/2006/main">
               <a:ext uri="{FF2B5EF4-FFF2-40B4-BE49-F238E27FC236}">
-                <a16:creationId xmlns:a16="http://schemas.microsoft.com/office/drawing/2014/main" id="{A7EBBB6F-A97F-4741-8EBF-96E0C288FBBF}"/>
+                <a16:creationId xmlns:a16="http://schemas.microsoft.com/office/drawing/2014/main" id="{8AEFDF60-006E-4FCC-8A79-DAD7780ECC6D}"/>
               </a:ext>
             </a:extLst>
           </p:cNvPr>
@@ -13621,7 +18993,7 @@
           <p:cNvPr id="16" name="">
             <a:extLst xmlns:a="http://schemas.openxmlformats.org/drawingml/2006/main">
               <a:ext uri="{FF2B5EF4-FFF2-40B4-BE49-F238E27FC236}">
-                <a16:creationId xmlns:a16="http://schemas.microsoft.com/office/drawing/2014/main" id="{6F8B2C05-C57F-4DDD-B538-5C57B281D5E4}"/>
+                <a16:creationId xmlns:a16="http://schemas.microsoft.com/office/drawing/2014/main" id="{6FCCEE63-9E7D-4EA1-BBCA-9102088A79B2}"/>
               </a:ext>
             </a:extLst>
           </p:cNvPr>
@@ -13677,7 +19049,7 @@
           <p:cNvPr id="17" name="">
             <a:extLst xmlns:a="http://schemas.openxmlformats.org/drawingml/2006/main">
               <a:ext uri="{FF2B5EF4-FFF2-40B4-BE49-F238E27FC236}">
-                <a16:creationId xmlns:a16="http://schemas.microsoft.com/office/drawing/2014/main" id="{592780FA-D705-49DC-B697-BF809ADC6BE3}"/>
+                <a16:creationId xmlns:a16="http://schemas.microsoft.com/office/drawing/2014/main" id="{8D671745-8055-455C-91F4-7270B3C47ACA}"/>
               </a:ext>
             </a:extLst>
           </p:cNvPr>
@@ -13721,7 +19093,7 @@
           <p:cNvPr id="18" name="">
             <a:extLst xmlns:a="http://schemas.openxmlformats.org/drawingml/2006/main">
               <a:ext uri="{FF2B5EF4-FFF2-40B4-BE49-F238E27FC236}">
-                <a16:creationId xmlns:a16="http://schemas.microsoft.com/office/drawing/2014/main" id="{215B356E-F4BA-4EDF-B842-0AB625FA7844}"/>
+                <a16:creationId xmlns:a16="http://schemas.microsoft.com/office/drawing/2014/main" id="{1D53F4ED-F5BA-4B0A-AC86-CD2572C33351}"/>
               </a:ext>
             </a:extLst>
           </p:cNvPr>
@@ -13777,7 +19149,7 @@
           <p:cNvPr id="19" name="">
             <a:extLst xmlns:a="http://schemas.openxmlformats.org/drawingml/2006/main">
               <a:ext uri="{FF2B5EF4-FFF2-40B4-BE49-F238E27FC236}">
-                <a16:creationId xmlns:a16="http://schemas.microsoft.com/office/drawing/2014/main" id="{F71DACDB-FD98-4636-860E-F1B76C6F77E1}"/>
+                <a16:creationId xmlns:a16="http://schemas.microsoft.com/office/drawing/2014/main" id="{F63B8BC8-4872-41E3-ACE6-78AC1A9F4ED4}"/>
               </a:ext>
             </a:extLst>
           </p:cNvPr>
@@ -13831,7 +19203,7 @@
     </p:spTree>
     <p:extLst>
       <p:ext uri="{BB962C8B-B14F-4D97-AF65-F5344CB8AC3E}">
-        <p14:creationId xmlns:p14="http://schemas.microsoft.com/office/powerpoint/2010/main" val="1731862662"/>
+        <p14:creationId xmlns:p14="http://schemas.microsoft.com/office/powerpoint/2010/main" val="1805445290"/>
       </p:ext>
     </p:extLst>
   </p:cSld>
@@ -13862,7 +19234,7 @@
           <p:cNvPr id="1" name="brand-rail">
             <a:extLst xmlns:a="http://schemas.openxmlformats.org/drawingml/2006/main">
               <a:ext uri="{FF2B5EF4-FFF2-40B4-BE49-F238E27FC236}">
-                <a16:creationId xmlns:a16="http://schemas.microsoft.com/office/drawing/2014/main" id="{BA5E5E44-FBDD-4F55-86B4-37E42DCF806F}"/>
+                <a16:creationId xmlns:a16="http://schemas.microsoft.com/office/drawing/2014/main" id="{706386A6-3032-4D9A-AD34-EE094B1821B4}"/>
               </a:ext>
             </a:extLst>
           </p:cNvPr>
@@ -13895,7 +19267,7 @@
           <p:cNvPr id="2" name="">
             <a:extLst xmlns:a="http://schemas.openxmlformats.org/drawingml/2006/main">
               <a:ext uri="{FF2B5EF4-FFF2-40B4-BE49-F238E27FC236}">
-                <a16:creationId xmlns:a16="http://schemas.microsoft.com/office/drawing/2014/main" id="{B6389A78-AFD8-4B8E-8AAF-CC1D4F4BFA34}"/>
+                <a16:creationId xmlns:a16="http://schemas.microsoft.com/office/drawing/2014/main" id="{4EDAC5D6-8F4B-4B51-A1DE-4E269BBB9A19}"/>
               </a:ext>
             </a:extLst>
           </p:cNvPr>
@@ -13951,7 +19323,7 @@
           <p:cNvPr id="3" name="">
             <a:extLst xmlns:a="http://schemas.openxmlformats.org/drawingml/2006/main">
               <a:ext uri="{FF2B5EF4-FFF2-40B4-BE49-F238E27FC236}">
-                <a16:creationId xmlns:a16="http://schemas.microsoft.com/office/drawing/2014/main" id="{0EAEAD66-D55B-4F85-80F4-428F8042488F}"/>
+                <a16:creationId xmlns:a16="http://schemas.microsoft.com/office/drawing/2014/main" id="{F244C998-3A72-48D7-BBF8-86C041887889}"/>
               </a:ext>
             </a:extLst>
           </p:cNvPr>
@@ -14007,7 +19379,7 @@
           <p:cNvPr id="4" name="">
             <a:extLst xmlns:a="http://schemas.openxmlformats.org/drawingml/2006/main">
               <a:ext uri="{FF2B5EF4-FFF2-40B4-BE49-F238E27FC236}">
-                <a16:creationId xmlns:a16="http://schemas.microsoft.com/office/drawing/2014/main" id="{46AE5D1D-AD20-428B-BFE6-83D6218154F0}"/>
+                <a16:creationId xmlns:a16="http://schemas.microsoft.com/office/drawing/2014/main" id="{7A54F150-2601-47E0-BD1D-810878558F7A}"/>
               </a:ext>
             </a:extLst>
           </p:cNvPr>
@@ -14063,7 +19435,7 @@
           <p:cNvPr id="5" name="closed-beta-0-5k-mau">
             <a:extLst xmlns:a="http://schemas.openxmlformats.org/drawingml/2006/main">
               <a:ext uri="{FF2B5EF4-FFF2-40B4-BE49-F238E27FC236}">
-                <a16:creationId xmlns:a16="http://schemas.microsoft.com/office/drawing/2014/main" id="{E40C0BB3-B02C-4C88-9FFC-394479C94E9E}"/>
+                <a16:creationId xmlns:a16="http://schemas.microsoft.com/office/drawing/2014/main" id="{F1D751B7-22AF-4988-ABBA-7A4B738CD887}"/>
               </a:ext>
             </a:extLst>
           </p:cNvPr>
@@ -14154,7 +19526,7 @@
           <p:cNvPr id="6" name="">
             <a:extLst xmlns:a="http://schemas.openxmlformats.org/drawingml/2006/main">
               <a:ext uri="{FF2B5EF4-FFF2-40B4-BE49-F238E27FC236}">
-                <a16:creationId xmlns:a16="http://schemas.microsoft.com/office/drawing/2014/main" id="{F52EBF34-086F-40CD-98DB-EDE15B5126C3}"/>
+                <a16:creationId xmlns:a16="http://schemas.microsoft.com/office/drawing/2014/main" id="{43BD9741-91DB-4201-84A1-D3EA196CF755}"/>
               </a:ext>
             </a:extLst>
           </p:cNvPr>
@@ -14210,7 +19582,7 @@
           <p:cNvPr id="7" name="public-v1-5k-100k-mau">
             <a:extLst xmlns:a="http://schemas.openxmlformats.org/drawingml/2006/main">
               <a:ext uri="{FF2B5EF4-FFF2-40B4-BE49-F238E27FC236}">
-                <a16:creationId xmlns:a16="http://schemas.microsoft.com/office/drawing/2014/main" id="{ADB55AA2-3937-4961-993C-66F876A0AA5D}"/>
+                <a16:creationId xmlns:a16="http://schemas.microsoft.com/office/drawing/2014/main" id="{B4AE43A1-2A6E-48D3-BC28-D43B10A467B8}"/>
               </a:ext>
             </a:extLst>
           </p:cNvPr>
@@ -14301,7 +19673,7 @@
           <p:cNvPr id="8" name="">
             <a:extLst xmlns:a="http://schemas.openxmlformats.org/drawingml/2006/main">
               <a:ext uri="{FF2B5EF4-FFF2-40B4-BE49-F238E27FC236}">
-                <a16:creationId xmlns:a16="http://schemas.microsoft.com/office/drawing/2014/main" id="{0169F647-A44C-43F3-A995-A5F6D973F4FA}"/>
+                <a16:creationId xmlns:a16="http://schemas.microsoft.com/office/drawing/2014/main" id="{E3AD2885-2C61-4302-91B1-FA72D0AAF0A3}"/>
               </a:ext>
             </a:extLst>
           </p:cNvPr>
@@ -14357,7 +19729,7 @@
           <p:cNvPr id="9" name="traction-100k-500k-mau">
             <a:extLst xmlns:a="http://schemas.openxmlformats.org/drawingml/2006/main">
               <a:ext uri="{FF2B5EF4-FFF2-40B4-BE49-F238E27FC236}">
-                <a16:creationId xmlns:a16="http://schemas.microsoft.com/office/drawing/2014/main" id="{B7F2D1C3-1909-49AE-889E-B8D56CE1E76C}"/>
+                <a16:creationId xmlns:a16="http://schemas.microsoft.com/office/drawing/2014/main" id="{77678881-BFC8-4CDC-9FE7-6AEBD558A080}"/>
               </a:ext>
             </a:extLst>
           </p:cNvPr>
@@ -14448,7 +19820,7 @@
           <p:cNvPr id="10" name="">
             <a:extLst xmlns:a="http://schemas.openxmlformats.org/drawingml/2006/main">
               <a:ext uri="{FF2B5EF4-FFF2-40B4-BE49-F238E27FC236}">
-                <a16:creationId xmlns:a16="http://schemas.microsoft.com/office/drawing/2014/main" id="{BAD7966F-041B-45BD-BDEB-22885622C38B}"/>
+                <a16:creationId xmlns:a16="http://schemas.microsoft.com/office/drawing/2014/main" id="{05B24979-675E-4EA0-B77A-0D904C0A1B76}"/>
               </a:ext>
             </a:extLst>
           </p:cNvPr>
@@ -14504,7 +19876,7 @@
           <p:cNvPr id="11" name="breakout-500k-1m-mau">
             <a:extLst xmlns:a="http://schemas.openxmlformats.org/drawingml/2006/main">
               <a:ext uri="{FF2B5EF4-FFF2-40B4-BE49-F238E27FC236}">
-                <a16:creationId xmlns:a16="http://schemas.microsoft.com/office/drawing/2014/main" id="{D5BE4FAF-1007-4B9B-99AC-ED1AA2D29815}"/>
+                <a16:creationId xmlns:a16="http://schemas.microsoft.com/office/drawing/2014/main" id="{81024A9E-C0C7-4E0E-AE7A-14EC9327D08F}"/>
               </a:ext>
             </a:extLst>
           </p:cNvPr>
@@ -14595,7 +19967,7 @@
           <p:cNvPr id="12" name="">
             <a:extLst xmlns:a="http://schemas.openxmlformats.org/drawingml/2006/main">
               <a:ext uri="{FF2B5EF4-FFF2-40B4-BE49-F238E27FC236}">
-                <a16:creationId xmlns:a16="http://schemas.microsoft.com/office/drawing/2014/main" id="{8E577F67-4788-483B-AC4B-2C029F9B48BE}"/>
+                <a16:creationId xmlns:a16="http://schemas.microsoft.com/office/drawing/2014/main" id="{488E9198-B182-4584-852F-EA822D8FCCBF}"/>
               </a:ext>
             </a:extLst>
           </p:cNvPr>
@@ -14651,7 +20023,7 @@
           <p:cNvPr id="13" name="enterprise-multi-mau-global">
             <a:extLst xmlns:a="http://schemas.openxmlformats.org/drawingml/2006/main">
               <a:ext uri="{FF2B5EF4-FFF2-40B4-BE49-F238E27FC236}">
-                <a16:creationId xmlns:a16="http://schemas.microsoft.com/office/drawing/2014/main" id="{14B5099A-0C9D-4B62-BEF3-A18FEB99E7FB}"/>
+                <a16:creationId xmlns:a16="http://schemas.microsoft.com/office/drawing/2014/main" id="{2DE3E9F7-DCBD-4473-B6BE-0D08EF427AD9}"/>
               </a:ext>
             </a:extLst>
           </p:cNvPr>
@@ -14742,7 +20114,7 @@
           <p:cNvPr id="14" name="">
             <a:extLst xmlns:a="http://schemas.openxmlformats.org/drawingml/2006/main">
               <a:ext uri="{FF2B5EF4-FFF2-40B4-BE49-F238E27FC236}">
-                <a16:creationId xmlns:a16="http://schemas.microsoft.com/office/drawing/2014/main" id="{56E2D413-AA9B-4661-B08D-231A158B3201}"/>
+                <a16:creationId xmlns:a16="http://schemas.microsoft.com/office/drawing/2014/main" id="{82C54E2F-FB03-4C60-8155-F290063EF662}"/>
               </a:ext>
             </a:extLst>
           </p:cNvPr>
@@ -14798,7 +20170,7 @@
           <p:cNvPr id="15" name="">
             <a:extLst xmlns:a="http://schemas.openxmlformats.org/drawingml/2006/main">
               <a:ext uri="{FF2B5EF4-FFF2-40B4-BE49-F238E27FC236}">
-                <a16:creationId xmlns:a16="http://schemas.microsoft.com/office/drawing/2014/main" id="{CB03FB78-227E-42FA-8DEF-12D071D1801A}"/>
+                <a16:creationId xmlns:a16="http://schemas.microsoft.com/office/drawing/2014/main" id="{8A147B14-33D6-48C7-A876-8B8FAC300CE9}"/>
               </a:ext>
             </a:extLst>
           </p:cNvPr>
@@ -14854,7 +20226,7 @@
           <p:cNvPr id="16" name="bullet-dot">
             <a:extLst xmlns:a="http://schemas.openxmlformats.org/drawingml/2006/main">
               <a:ext uri="{FF2B5EF4-FFF2-40B4-BE49-F238E27FC236}">
-                <a16:creationId xmlns:a16="http://schemas.microsoft.com/office/drawing/2014/main" id="{EA970122-0814-48CC-A00C-720F0437FF79}"/>
+                <a16:creationId xmlns:a16="http://schemas.microsoft.com/office/drawing/2014/main" id="{E142EB15-E22E-4285-A9F7-BE67C4D1C6C5}"/>
               </a:ext>
             </a:extLst>
           </p:cNvPr>
@@ -14887,7 +20259,7 @@
           <p:cNvPr id="17" name="">
             <a:extLst xmlns:a="http://schemas.openxmlformats.org/drawingml/2006/main">
               <a:ext uri="{FF2B5EF4-FFF2-40B4-BE49-F238E27FC236}">
-                <a16:creationId xmlns:a16="http://schemas.microsoft.com/office/drawing/2014/main" id="{781B1508-CE86-47ED-883A-F80CC652F519}"/>
+                <a16:creationId xmlns:a16="http://schemas.microsoft.com/office/drawing/2014/main" id="{085A557E-F17E-467E-8C8A-EABD63BA3A6B}"/>
               </a:ext>
             </a:extLst>
           </p:cNvPr>
@@ -14943,7 +20315,7 @@
           <p:cNvPr id="18" name="bullet-dot">
             <a:extLst xmlns:a="http://schemas.openxmlformats.org/drawingml/2006/main">
               <a:ext uri="{FF2B5EF4-FFF2-40B4-BE49-F238E27FC236}">
-                <a16:creationId xmlns:a16="http://schemas.microsoft.com/office/drawing/2014/main" id="{215B511C-72F7-48C6-90E4-7AB8FED68474}"/>
+                <a16:creationId xmlns:a16="http://schemas.microsoft.com/office/drawing/2014/main" id="{E443D9D1-335B-4486-86AD-7E0B42D2C454}"/>
               </a:ext>
             </a:extLst>
           </p:cNvPr>
@@ -14976,7 +20348,7 @@
           <p:cNvPr id="19" name="">
             <a:extLst xmlns:a="http://schemas.openxmlformats.org/drawingml/2006/main">
               <a:ext uri="{FF2B5EF4-FFF2-40B4-BE49-F238E27FC236}">
-                <a16:creationId xmlns:a16="http://schemas.microsoft.com/office/drawing/2014/main" id="{9FDDC6EE-72DB-45CF-BFF7-1DDA4095B512}"/>
+                <a16:creationId xmlns:a16="http://schemas.microsoft.com/office/drawing/2014/main" id="{70C6376B-E5FB-4B86-AB7D-A0D099C22570}"/>
               </a:ext>
             </a:extLst>
           </p:cNvPr>
@@ -15032,7 +20404,7 @@
           <p:cNvPr id="20" name="bullet-dot">
             <a:extLst xmlns:a="http://schemas.openxmlformats.org/drawingml/2006/main">
               <a:ext uri="{FF2B5EF4-FFF2-40B4-BE49-F238E27FC236}">
-                <a16:creationId xmlns:a16="http://schemas.microsoft.com/office/drawing/2014/main" id="{7C9EB871-1A21-4BD9-91FD-5BBA5B20A8DD}"/>
+                <a16:creationId xmlns:a16="http://schemas.microsoft.com/office/drawing/2014/main" id="{0C4796D4-7619-4B4A-8652-5B238A3EB86E}"/>
               </a:ext>
             </a:extLst>
           </p:cNvPr>
@@ -15065,7 +20437,7 @@
           <p:cNvPr id="21" name="">
             <a:extLst xmlns:a="http://schemas.openxmlformats.org/drawingml/2006/main">
               <a:ext uri="{FF2B5EF4-FFF2-40B4-BE49-F238E27FC236}">
-                <a16:creationId xmlns:a16="http://schemas.microsoft.com/office/drawing/2014/main" id="{F0C9BC66-ECFA-4480-A9FD-17D4D51789C6}"/>
+                <a16:creationId xmlns:a16="http://schemas.microsoft.com/office/drawing/2014/main" id="{581DE94D-B33B-4C1D-8F60-D7F69BF7F752}"/>
               </a:ext>
             </a:extLst>
           </p:cNvPr>
@@ -15121,7 +20493,7 @@
           <p:cNvPr id="22" name="bullet-dot">
             <a:extLst xmlns:a="http://schemas.openxmlformats.org/drawingml/2006/main">
               <a:ext uri="{FF2B5EF4-FFF2-40B4-BE49-F238E27FC236}">
-                <a16:creationId xmlns:a16="http://schemas.microsoft.com/office/drawing/2014/main" id="{A5043B07-9B46-4BB3-93A1-D4025A961394}"/>
+                <a16:creationId xmlns:a16="http://schemas.microsoft.com/office/drawing/2014/main" id="{4C6F13E6-0CC6-4F1C-A030-B000801F9FD9}"/>
               </a:ext>
             </a:extLst>
           </p:cNvPr>
@@ -15154,7 +20526,7 @@
           <p:cNvPr id="23" name="">
             <a:extLst xmlns:a="http://schemas.openxmlformats.org/drawingml/2006/main">
               <a:ext uri="{FF2B5EF4-FFF2-40B4-BE49-F238E27FC236}">
-                <a16:creationId xmlns:a16="http://schemas.microsoft.com/office/drawing/2014/main" id="{5A9958E4-FFAF-43E4-85AA-1412DF4A1388}"/>
+                <a16:creationId xmlns:a16="http://schemas.microsoft.com/office/drawing/2014/main" id="{4AEDEE22-5718-4E90-824F-A9A73D7FF707}"/>
               </a:ext>
             </a:extLst>
           </p:cNvPr>
@@ -15210,7 +20582,7 @@
           <p:cNvPr id="24" name="bullet-dot">
             <a:extLst xmlns:a="http://schemas.openxmlformats.org/drawingml/2006/main">
               <a:ext uri="{FF2B5EF4-FFF2-40B4-BE49-F238E27FC236}">
-                <a16:creationId xmlns:a16="http://schemas.microsoft.com/office/drawing/2014/main" id="{82D12D36-A1F0-4F68-A457-1D83A4A9960D}"/>
+                <a16:creationId xmlns:a16="http://schemas.microsoft.com/office/drawing/2014/main" id="{98CD0B99-CF9C-4933-9CA6-DD48061549BF}"/>
               </a:ext>
             </a:extLst>
           </p:cNvPr>
@@ -15243,7 +20615,7 @@
           <p:cNvPr id="25" name="">
             <a:extLst xmlns:a="http://schemas.openxmlformats.org/drawingml/2006/main">
               <a:ext uri="{FF2B5EF4-FFF2-40B4-BE49-F238E27FC236}">
-                <a16:creationId xmlns:a16="http://schemas.microsoft.com/office/drawing/2014/main" id="{E930BD3E-A1EC-40F8-ADDE-D3B45EC49F36}"/>
+                <a16:creationId xmlns:a16="http://schemas.microsoft.com/office/drawing/2014/main" id="{766EB83C-C916-43D4-8D15-651359DEE654}"/>
               </a:ext>
             </a:extLst>
           </p:cNvPr>
@@ -15297,7 +20669,7 @@
     </p:spTree>
     <p:extLst>
       <p:ext uri="{BB962C8B-B14F-4D97-AF65-F5344CB8AC3E}">
-        <p14:creationId xmlns:p14="http://schemas.microsoft.com/office/powerpoint/2010/main" val="1133972036"/>
+        <p14:creationId xmlns:p14="http://schemas.microsoft.com/office/powerpoint/2010/main" val="2105000526"/>
       </p:ext>
     </p:extLst>
   </p:cSld>
@@ -15328,7 +20700,7 @@
           <p:cNvPr id="1" name="brand-rail">
             <a:extLst xmlns:a="http://schemas.openxmlformats.org/drawingml/2006/main">
               <a:ext uri="{FF2B5EF4-FFF2-40B4-BE49-F238E27FC236}">
-                <a16:creationId xmlns:a16="http://schemas.microsoft.com/office/drawing/2014/main" id="{AE222193-B409-431F-8633-1657AF43A0B6}"/>
+                <a16:creationId xmlns:a16="http://schemas.microsoft.com/office/drawing/2014/main" id="{4E2FAD6C-41ED-49FA-AFD3-CBD06D531F91}"/>
               </a:ext>
             </a:extLst>
           </p:cNvPr>
@@ -15361,7 +20733,7 @@
           <p:cNvPr id="2" name="">
             <a:extLst xmlns:a="http://schemas.openxmlformats.org/drawingml/2006/main">
               <a:ext uri="{FF2B5EF4-FFF2-40B4-BE49-F238E27FC236}">
-                <a16:creationId xmlns:a16="http://schemas.microsoft.com/office/drawing/2014/main" id="{384465A8-14C7-43BA-89C9-6B9B8C538C3D}"/>
+                <a16:creationId xmlns:a16="http://schemas.microsoft.com/office/drawing/2014/main" id="{BA4BED50-C746-4983-B93E-DEC22AA47491}"/>
               </a:ext>
             </a:extLst>
           </p:cNvPr>
@@ -15417,7 +20789,7 @@
           <p:cNvPr id="3" name="">
             <a:extLst xmlns:a="http://schemas.openxmlformats.org/drawingml/2006/main">
               <a:ext uri="{FF2B5EF4-FFF2-40B4-BE49-F238E27FC236}">
-                <a16:creationId xmlns:a16="http://schemas.microsoft.com/office/drawing/2014/main" id="{5E3C8725-8D3B-4689-83CC-7CEF0F92E32E}"/>
+                <a16:creationId xmlns:a16="http://schemas.microsoft.com/office/drawing/2014/main" id="{F6C5088E-14B8-480C-934B-598F4E6EFBEF}"/>
               </a:ext>
             </a:extLst>
           </p:cNvPr>
@@ -15473,7 +20845,7 @@
           <p:cNvPr id="4" name="">
             <a:extLst xmlns:a="http://schemas.openxmlformats.org/drawingml/2006/main">
               <a:ext uri="{FF2B5EF4-FFF2-40B4-BE49-F238E27FC236}">
-                <a16:creationId xmlns:a16="http://schemas.microsoft.com/office/drawing/2014/main" id="{2D45648B-C0B9-4861-A3FC-8148411B9E41}"/>
+                <a16:creationId xmlns:a16="http://schemas.microsoft.com/office/drawing/2014/main" id="{9E9ABE20-FA23-4531-B620-EF78B7EFC747}"/>
               </a:ext>
             </a:extLst>
           </p:cNvPr>
@@ -15529,7 +20901,7 @@
           <p:cNvPr id="5" name="eu-primary-supabase-postgres-storage-auth-vercel-eu-edge-resend-eu">
             <a:extLst xmlns:a="http://schemas.openxmlformats.org/drawingml/2006/main">
               <a:ext uri="{FF2B5EF4-FFF2-40B4-BE49-F238E27FC236}">
-                <a16:creationId xmlns:a16="http://schemas.microsoft.com/office/drawing/2014/main" id="{78CA9800-5504-41A6-AD02-0E7420872E90}"/>
+                <a16:creationId xmlns:a16="http://schemas.microsoft.com/office/drawing/2014/main" id="{2FAC780A-0FEE-4EA9-AAA7-4A6D1FDC93E1}"/>
               </a:ext>
             </a:extLst>
           </p:cNvPr>
@@ -15643,7 +21015,7 @@
           <p:cNvPr id="6" name="americas-read-path-read-replica-cdn-media-edge-support-english-first-growth">
             <a:extLst xmlns:a="http://schemas.openxmlformats.org/drawingml/2006/main">
               <a:ext uri="{FF2B5EF4-FFF2-40B4-BE49-F238E27FC236}">
-                <a16:creationId xmlns:a16="http://schemas.microsoft.com/office/drawing/2014/main" id="{4798EDED-1BC9-4EE2-9441-9ED51CEE87E8}"/>
+                <a16:creationId xmlns:a16="http://schemas.microsoft.com/office/drawing/2014/main" id="{095E8BA4-15C8-420D-868F-CF8B70B845FA}"/>
               </a:ext>
             </a:extLst>
           </p:cNvPr>
@@ -15757,7 +21129,7 @@
           <p:cNvPr id="7" name="apac-read-path-add-when-latency-or-traction-demands-avoid-premature-region-cost">
             <a:extLst xmlns:a="http://schemas.openxmlformats.org/drawingml/2006/main">
               <a:ext uri="{FF2B5EF4-FFF2-40B4-BE49-F238E27FC236}">
-                <a16:creationId xmlns:a16="http://schemas.microsoft.com/office/drawing/2014/main" id="{1F5C873C-9112-4F9C-9AB8-C4FE8D061B84}"/>
+                <a16:creationId xmlns:a16="http://schemas.microsoft.com/office/drawing/2014/main" id="{5C8624D9-5F4F-4599-BFFB-D51B246EC483}"/>
               </a:ext>
             </a:extLst>
           </p:cNvPr>
@@ -15871,7 +21243,7 @@
           <p:cNvPr id="8" name="global-control-plane-observability-spend-limits-incident-process-provider-runbooks">
             <a:extLst xmlns:a="http://schemas.openxmlformats.org/drawingml/2006/main">
               <a:ext uri="{FF2B5EF4-FFF2-40B4-BE49-F238E27FC236}">
-                <a16:creationId xmlns:a16="http://schemas.microsoft.com/office/drawing/2014/main" id="{4D502B30-0EB5-447E-8143-AB1699E8A751}"/>
+                <a16:creationId xmlns:a16="http://schemas.microsoft.com/office/drawing/2014/main" id="{4B2A43C4-E19B-4240-8C9E-3CA64B4E1FC1}"/>
               </a:ext>
             </a:extLst>
           </p:cNvPr>
@@ -16070,7 +21442,7 @@
           <p:cNvPr id="13" name="bullet-dot">
             <a:extLst xmlns:a="http://schemas.openxmlformats.org/drawingml/2006/main">
               <a:ext uri="{FF2B5EF4-FFF2-40B4-BE49-F238E27FC236}">
-                <a16:creationId xmlns:a16="http://schemas.microsoft.com/office/drawing/2014/main" id="{27690117-496C-4384-8623-6247B93B850C}"/>
+                <a16:creationId xmlns:a16="http://schemas.microsoft.com/office/drawing/2014/main" id="{6DEBE4B1-E85E-46A5-B20F-591654CAF973}"/>
               </a:ext>
             </a:extLst>
           </p:cNvPr>
@@ -16103,7 +21475,7 @@
           <p:cNvPr id="14" name="">
             <a:extLst xmlns:a="http://schemas.openxmlformats.org/drawingml/2006/main">
               <a:ext uri="{FF2B5EF4-FFF2-40B4-BE49-F238E27FC236}">
-                <a16:creationId xmlns:a16="http://schemas.microsoft.com/office/drawing/2014/main" id="{C838FD5C-581F-47B6-95E1-5368D65AB8B5}"/>
+                <a16:creationId xmlns:a16="http://schemas.microsoft.com/office/drawing/2014/main" id="{5124C255-F7CF-4183-AAAC-ADA27FC2CF39}"/>
               </a:ext>
             </a:extLst>
           </p:cNvPr>
@@ -16159,7 +21531,7 @@
           <p:cNvPr id="15" name="bullet-dot">
             <a:extLst xmlns:a="http://schemas.openxmlformats.org/drawingml/2006/main">
               <a:ext uri="{FF2B5EF4-FFF2-40B4-BE49-F238E27FC236}">
-                <a16:creationId xmlns:a16="http://schemas.microsoft.com/office/drawing/2014/main" id="{BBEFA324-02F5-493D-B31E-45EC1A368924}"/>
+                <a16:creationId xmlns:a16="http://schemas.microsoft.com/office/drawing/2014/main" id="{D1FA6716-A5A4-4544-964E-BA3921327687}"/>
               </a:ext>
             </a:extLst>
           </p:cNvPr>
@@ -16192,7 +21564,7 @@
           <p:cNvPr id="16" name="">
             <a:extLst xmlns:a="http://schemas.openxmlformats.org/drawingml/2006/main">
               <a:ext uri="{FF2B5EF4-FFF2-40B4-BE49-F238E27FC236}">
-                <a16:creationId xmlns:a16="http://schemas.microsoft.com/office/drawing/2014/main" id="{AC481F64-5C6A-468A-BB32-428DF1813B22}"/>
+                <a16:creationId xmlns:a16="http://schemas.microsoft.com/office/drawing/2014/main" id="{049E6485-C502-4572-8B72-C4B14B1E36C3}"/>
               </a:ext>
             </a:extLst>
           </p:cNvPr>
@@ -16248,7 +21620,7 @@
           <p:cNvPr id="17" name="bullet-dot">
             <a:extLst xmlns:a="http://schemas.openxmlformats.org/drawingml/2006/main">
               <a:ext uri="{FF2B5EF4-FFF2-40B4-BE49-F238E27FC236}">
-                <a16:creationId xmlns:a16="http://schemas.microsoft.com/office/drawing/2014/main" id="{7C8FDF24-21C7-48A0-B4D8-09753C34F0B5}"/>
+                <a16:creationId xmlns:a16="http://schemas.microsoft.com/office/drawing/2014/main" id="{AD90F0C3-F2DA-42EF-ACC3-2CD2020368C0}"/>
               </a:ext>
             </a:extLst>
           </p:cNvPr>
@@ -16281,7 +21653,7 @@
           <p:cNvPr id="18" name="">
             <a:extLst xmlns:a="http://schemas.openxmlformats.org/drawingml/2006/main">
               <a:ext uri="{FF2B5EF4-FFF2-40B4-BE49-F238E27FC236}">
-                <a16:creationId xmlns:a16="http://schemas.microsoft.com/office/drawing/2014/main" id="{CEEC8272-D382-4049-ABE5-5171E699F136}"/>
+                <a16:creationId xmlns:a16="http://schemas.microsoft.com/office/drawing/2014/main" id="{F6C69864-A1D0-494D-873D-3F15B9F112BC}"/>
               </a:ext>
             </a:extLst>
           </p:cNvPr>
@@ -16337,7 +21709,7 @@
           <p:cNvPr id="19" name="bullet-dot">
             <a:extLst xmlns:a="http://schemas.openxmlformats.org/drawingml/2006/main">
               <a:ext uri="{FF2B5EF4-FFF2-40B4-BE49-F238E27FC236}">
-                <a16:creationId xmlns:a16="http://schemas.microsoft.com/office/drawing/2014/main" id="{2776F42F-D7F2-44A7-BB4B-80B2D80E466F}"/>
+                <a16:creationId xmlns:a16="http://schemas.microsoft.com/office/drawing/2014/main" id="{25FE36AD-E727-43C4-8102-BF8F5A91B02D}"/>
               </a:ext>
             </a:extLst>
           </p:cNvPr>
@@ -16370,7 +21742,7 @@
           <p:cNvPr id="20" name="">
             <a:extLst xmlns:a="http://schemas.openxmlformats.org/drawingml/2006/main">
               <a:ext uri="{FF2B5EF4-FFF2-40B4-BE49-F238E27FC236}">
-                <a16:creationId xmlns:a16="http://schemas.microsoft.com/office/drawing/2014/main" id="{CDFA3A38-DE10-46FB-8B8B-1F0BAD2EAD35}"/>
+                <a16:creationId xmlns:a16="http://schemas.microsoft.com/office/drawing/2014/main" id="{4E0F6614-9803-4C7F-B6D6-56109045AF1F}"/>
               </a:ext>
             </a:extLst>
           </p:cNvPr>
@@ -16424,7 +21796,7 @@
     </p:spTree>
     <p:extLst>
       <p:ext uri="{BB962C8B-B14F-4D97-AF65-F5344CB8AC3E}">
-        <p14:creationId xmlns:p14="http://schemas.microsoft.com/office/powerpoint/2010/main" val="739453713"/>
+        <p14:creationId xmlns:p14="http://schemas.microsoft.com/office/powerpoint/2010/main" val="2028056283"/>
       </p:ext>
     </p:extLst>
   </p:cSld>
